--- a/presentation/defense.pptx
+++ b/presentation/defense.pptx
@@ -694,7 +694,7 @@
           <a:p>
             <a:r>
               <a:rPr lang="en-US" dirty="0"/>
-              <a:t>10:00-11:15. The distinctive finding. SVC-06's 2024 debt was concentrated (worst patch recency and unsupported components), so the compensatory, absolutely anchored variant read it as mid-ranking while sample-relative methods flagged it first. By 2025 the deterioration had broadened and everything converged.</a:t>
+              <a:t>10:00-11:15. The distinctive finding. SVC-06's 2024 debt was concentrated (worst-in-portfolio patch recency and unsupported components in 2024; by 2025 patch recency and change failure rate), so the compensatory, absolutely anchored variant read it as mid-ranking in 2024 while sample-relative methods flagged it first. By 2025 the deterioration had broadened and everything converged.</a:t>
             </a:r>
             <a:endParaRPr lang="en-US" dirty="0"/>
           </a:p>
@@ -3625,7 +3625,7 @@
                 <a:ea typeface="Arial" pitchFamily="34" charset="-122"/>
                 <a:cs typeface="Arial" pitchFamily="34" charset="-120"/>
               </a:rPr>
-              <a:t>Infrastructure lifecycle debt (1,221 unsupported component months, lowest patch recency) is invisible to an incident count. This is precisely the signal the framework was built to surface.</a:t>
+              <a:t>Infrastructure lifecycle debt (1,221 unsupported component months, patch recency of 59.93, second lowest) is invisible to an incident count. This is precisely the signal the framework was built to surface.</a:t>
             </a:r>
             <a:endParaRPr lang="en-US" sz="1300" dirty="0"/>
           </a:p>
@@ -9551,7 +9551,7 @@
                           <a:ea typeface="Arial" pitchFamily="34" charset="-122"/>
                           <a:cs typeface="Arial" pitchFamily="34" charset="-120"/>
                         </a:rPr>
-                        <a:t>Architectural (recovery capability)</a:t>
+                        <a:t>Infrastructure / platform</a:t>
                       </a:r>
                       <a:endParaRPr lang="en-US" sz="1400" dirty="0">
                         <a:latin typeface="Arial" charset="0"/>
@@ -12362,7 +12362,7 @@
                 <a:ea typeface="Arial" pitchFamily="34" charset="-122"/>
                 <a:cs typeface="Arial" pitchFamily="34" charset="-120"/>
               </a:rPr>
-              <a:t>574 incidents/yr, MTTR 41.9 h, CFR 3.38, yet clean infrastructure → architectural &amp; process debt</a:t>
+              <a:t>574 incidents/yr, MTTR 41.9 h, CFR 3.38, yet a clean lifecycle record → architectural, platform &amp; process debt</a:t>
             </a:r>
             <a:endParaRPr lang="en-US" sz="1100" dirty="0"/>
           </a:p>

--- a/presentation/defense.pptx
+++ b/presentation/defense.pptx
@@ -4,6 +4,9 @@
   <p:sldMasterIdLst>
     <p:sldMasterId id="2147483648" r:id="rId1"/>
   </p:sldMasterIdLst>
+  <p:notesMasterIdLst>
+    <p:notesMasterId r:id="rId19"/>
+  </p:notesMasterIdLst>
   <p:sldIdLst>
     <p:sldId id="256" r:id="rId2"/>
     <p:sldId id="257" r:id="rId3"/>
@@ -23,9 +26,6 @@
     <p:sldId id="271" r:id="rId17"/>
     <p:sldId id="272" r:id="rId18"/>
   </p:sldIdLst>
-  <p:notesMasterIdLst>
-    <p:notesMasterId r:id="rId19"/>
-  </p:notesMasterIdLst>
   <p:sldSz cx="12192000" cy="6858000"/>
   <p:notesSz cx="6858000" cy="12192000"/>
   <p:defaultTextStyle>
@@ -120,6 +120,11 @@
       </a:defRPr>
     </a:lvl9pPr>
   </p:defaultTextStyle>
+  <p:extLst>
+    <p:ext uri="{EFAFB233-063F-42B5-8137-9DF3F51BA10A}">
+      <p15:sldGuideLst xmlns:p15="http://schemas.microsoft.com/office/powerpoint/2012/main"/>
+    </p:ext>
+  </p:extLst>
 </p:presentation>
 </file>
 
@@ -145,234 +150,10 @@
           <a:chExt cx="0" cy="0"/>
         </a:xfrm>
       </p:grpSpPr>
-      <p:sp>
-        <p:nvSpPr>
-          <p:cNvPr id="2" name="Header Placeholder 1"/>
-          <p:cNvSpPr>
-            <a:spLocks noGrp="1"/>
-          </p:cNvSpPr>
-          <p:nvPr>
-            <p:ph type="hdr" sz="quarter"/>
-          </p:nvPr>
-        </p:nvSpPr>
-        <p:spPr>
-          <a:xfrm>
-            <a:off x="0" y="0"/>
-            <a:ext cx="2971800" cy="458788"/>
-          </a:xfrm>
-          <a:prstGeom prst="rect">
-            <a:avLst/>
-          </a:prstGeom>
-        </p:spPr>
-        <p:txBody>
-          <a:bodyPr vert="horz" lIns="91440" tIns="45720" rIns="91440" bIns="45720" rtlCol="0"/>
-          <a:lstStyle>
-            <a:lvl1pPr algn="l">
-              <a:defRPr sz="1200"/>
-            </a:lvl1pPr>
-          </a:lstStyle>
-          <a:p>
-            <a:endParaRPr lang="en-US"/>
-          </a:p>
-        </p:txBody>
-      </p:sp>
-      <p:sp>
-        <p:nvSpPr>
-          <p:cNvPr id="3" name="Date Placeholder 2"/>
-          <p:cNvSpPr>
-            <a:spLocks noGrp="1"/>
-          </p:cNvSpPr>
-          <p:nvPr>
-            <p:ph type="dt" idx="1"/>
-          </p:nvPr>
-        </p:nvSpPr>
-        <p:spPr>
-          <a:xfrm>
-            <a:off x="3884613" y="0"/>
-            <a:ext cx="2971800" cy="458788"/>
-          </a:xfrm>
-          <a:prstGeom prst="rect">
-            <a:avLst/>
-          </a:prstGeom>
-        </p:spPr>
-        <p:txBody>
-          <a:bodyPr vert="horz" lIns="91440" tIns="45720" rIns="91440" bIns="45720" rtlCol="0"/>
-          <a:lstStyle>
-            <a:lvl1pPr algn="r">
-              <a:defRPr sz="1200"/>
-            </a:lvl1pPr>
-          </a:lstStyle>
-          <a:p>
-            <a:fld id="{5282F153-3F37-0F45-9E97-73ACFA13230C}" type="datetimeFigureOut">
-              <a:rPr lang="en-US"/>
-              <a:t>7/23/19</a:t>
-            </a:fld>
-            <a:endParaRPr lang="en-US"/>
-          </a:p>
-        </p:txBody>
-      </p:sp>
-      <p:sp>
-        <p:nvSpPr>
-          <p:cNvPr id="4" name="Slide Image Placeholder 3"/>
-          <p:cNvSpPr>
-            <a:spLocks noGrp="1" noRot="1" noChangeAspect="1"/>
-          </p:cNvSpPr>
-          <p:nvPr>
-            <p:ph type="sldImg" idx="2"/>
-          </p:nvPr>
-        </p:nvSpPr>
-        <p:spPr>
-          <a:xfrm>
-            <a:off x="685800" y="1143000"/>
-            <a:ext cx="5486400" cy="3086100"/>
-          </a:xfrm>
-          <a:prstGeom prst="rect">
-            <a:avLst/>
-          </a:prstGeom>
-          <a:noFill/>
-          <a:ln w="12700">
-            <a:solidFill>
-              <a:prstClr val="black"/>
-            </a:solidFill>
-          </a:ln>
-        </p:spPr>
-        <p:txBody>
-          <a:bodyPr vert="horz" lIns="91440" tIns="45720" rIns="91440" bIns="45720" rtlCol="0" anchor="ctr"/>
-          <a:lstStyle/>
-          <a:p>
-            <a:endParaRPr lang="en-US"/>
-          </a:p>
-        </p:txBody>
-      </p:sp>
-      <p:sp>
-        <p:nvSpPr>
-          <p:cNvPr id="5" name="Notes Placeholder 4"/>
-          <p:cNvSpPr>
-            <a:spLocks noGrp="1"/>
-          </p:cNvSpPr>
-          <p:nvPr>
-            <p:ph type="body" sz="quarter" idx="3"/>
-          </p:nvPr>
-        </p:nvSpPr>
-        <p:spPr>
-          <a:xfrm>
-            <a:off x="685800" y="4400550"/>
-            <a:ext cx="5486400" cy="3600450"/>
-          </a:xfrm>
-          <a:prstGeom prst="rect">
-            <a:avLst/>
-          </a:prstGeom>
-        </p:spPr>
-        <p:txBody>
-          <a:bodyPr vert="horz" lIns="91440" tIns="45720" rIns="91440" bIns="45720" rtlCol="0"/>
-          <a:lstStyle/>
-          <a:p>
-            <a:pPr lvl="0"/>
-            <a:r>
-              <a:rPr lang="en-US"/>
-              <a:t>Click to edit Master text styles</a:t>
-            </a:r>
-          </a:p>
-          <a:p>
-            <a:pPr lvl="1"/>
-            <a:r>
-              <a:rPr lang="en-US"/>
-              <a:t>Second level</a:t>
-            </a:r>
-          </a:p>
-          <a:p>
-            <a:pPr lvl="2"/>
-            <a:r>
-              <a:rPr lang="en-US"/>
-              <a:t>Third level</a:t>
-            </a:r>
-          </a:p>
-          <a:p>
-            <a:pPr lvl="3"/>
-            <a:r>
-              <a:rPr lang="en-US"/>
-              <a:t>Fourth level</a:t>
-            </a:r>
-          </a:p>
-          <a:p>
-            <a:pPr lvl="4"/>
-            <a:r>
-              <a:rPr lang="en-US"/>
-              <a:t>Fifth level</a:t>
-            </a:r>
-          </a:p>
-        </p:txBody>
-      </p:sp>
-      <p:sp>
-        <p:nvSpPr>
-          <p:cNvPr id="6" name="Footer Placeholder 5"/>
-          <p:cNvSpPr>
-            <a:spLocks noGrp="1"/>
-          </p:cNvSpPr>
-          <p:nvPr>
-            <p:ph type="ftr" sz="quarter" idx="4"/>
-          </p:nvPr>
-        </p:nvSpPr>
-        <p:spPr>
-          <a:xfrm>
-            <a:off x="0" y="8685213"/>
-            <a:ext cx="2971800" cy="458787"/>
-          </a:xfrm>
-          <a:prstGeom prst="rect">
-            <a:avLst/>
-          </a:prstGeom>
-        </p:spPr>
-        <p:txBody>
-          <a:bodyPr vert="horz" lIns="91440" tIns="45720" rIns="91440" bIns="45720" rtlCol="0" anchor="b"/>
-          <a:lstStyle>
-            <a:lvl1pPr algn="l">
-              <a:defRPr sz="1200"/>
-            </a:lvl1pPr>
-          </a:lstStyle>
-          <a:p>
-            <a:endParaRPr lang="en-US"/>
-          </a:p>
-        </p:txBody>
-      </p:sp>
-      <p:sp>
-        <p:nvSpPr>
-          <p:cNvPr id="7" name="Slide Number Placeholder 6"/>
-          <p:cNvSpPr>
-            <a:spLocks noGrp="1"/>
-          </p:cNvSpPr>
-          <p:nvPr>
-            <p:ph type="sldNum" sz="quarter" idx="5"/>
-          </p:nvPr>
-        </p:nvSpPr>
-        <p:spPr>
-          <a:xfrm>
-            <a:off x="3884613" y="8685213"/>
-            <a:ext cx="2971800" cy="458787"/>
-          </a:xfrm>
-          <a:prstGeom prst="rect">
-            <a:avLst/>
-          </a:prstGeom>
-        </p:spPr>
-        <p:txBody>
-          <a:bodyPr vert="horz" lIns="91440" tIns="45720" rIns="91440" bIns="45720" rtlCol="0" anchor="b"/>
-          <a:lstStyle>
-            <a:lvl1pPr algn="r">
-              <a:defRPr sz="1200"/>
-            </a:lvl1pPr>
-          </a:lstStyle>
-          <a:p>
-            <a:fld id="{CE5E9CC1-C706-0F49-92D6-E571CC5EEA8F}" type="slidenum">
-              <a:rPr lang="en-US"/>
-              <a:t>‹#›</a:t>
-            </a:fld>
-            <a:endParaRPr lang="en-US"/>
-          </a:p>
-        </p:txBody>
-      </p:sp>
     </p:spTree>
     <p:extLst>
       <p:ext uri="{BB962C8B-B14F-4D97-AF65-F5344CB8AC3E}">
-        <p14:creationId xmlns:p14="http://schemas.microsoft.com/office/powerpoint/2010/main" val="1024086991"/>
+        <p14:creationId xmlns:p14="http://schemas.microsoft.com/office/powerpoint/2010/main" val="3608353361"/>
       </p:ext>
     </p:extLst>
   </p:cSld>
@@ -520,7 +301,6 @@
               <a:rPr lang="en-US" dirty="0"/>
               <a:t>0:00-0:45. This chart is the thesis in one image: six production trading services, ranked by technical debt priority, computed entirely from operational records. No source code was read to produce it. The next 15 minutes explain why that matters, how it was built, and why you can trust it.</a:t>
             </a:r>
-            <a:endParaRPr lang="en-US" dirty="0"/>
           </a:p>
         </p:txBody>
       </p:sp>
@@ -608,7 +388,6 @@
               <a:rPr lang="en-US" dirty="0"/>
               <a:t>9:15-10:00. One idea: if the framework merely reproduced the incident count, it would be redundant. It does not, and the two services that move are the ones that should move.</a:t>
             </a:r>
-            <a:endParaRPr lang="en-US" dirty="0"/>
           </a:p>
         </p:txBody>
       </p:sp>
@@ -694,9 +473,8 @@
           <a:p>
             <a:r>
               <a:rPr lang="en-US" dirty="0"/>
-              <a:t>10:00-11:15. The distinctive finding. SVC-06's 2024 debt was concentrated (worst-in-portfolio patch recency and unsupported components in 2024; by 2025 patch recency and change failure rate), so the compensatory, absolutely anchored variant read it as mid-ranking in 2024 while sample-relative methods flagged it first. By 2025 the deterioration had broadened and everything converged.</a:t>
-            </a:r>
-            <a:endParaRPr lang="en-US" dirty="0"/>
+              <a:t>10:00-11:15. The distinctive finding. The 2024 equal-weight top rank is a photo-finish: classic TOPSIS puts SVC-04 first by 0.004; SAW, VIKOR and the absolute variant put SVC-01 first, because regret capping and fixed anchors register SVC-01's worst patch recency and 4,054 unsupported months at full strength while vector normalisation is dominated by SVC-04's incident mass. In 2025 and under 2024 adjusted weights everything agrees on SVC-01.</a:t>
+            </a:r>
           </a:p>
         </p:txBody>
       </p:sp>
@@ -784,7 +562,6 @@
               <a:rPr lang="en-US" dirty="0"/>
               <a:t>11:15-12:00. Disagreement as diagnostic rather than failure is the transferable design lesson beyond the case. The takeaway doubles as the answer to 'so which service is actually first?'.</a:t>
             </a:r>
-            <a:endParaRPr lang="en-US" dirty="0"/>
           </a:p>
         </p:txBody>
       </p:sp>
@@ -872,7 +649,6 @@
               <a:rPr lang="en-US" dirty="0"/>
               <a:t>12:00-13:15. Deliver these deadpan; each answer is one breath. The move: every hard question already has a stated, chapter-referenced answer in the thesis, so the defence is consistent with the document.</a:t>
             </a:r>
-            <a:endParaRPr lang="en-US" dirty="0"/>
           </a:p>
         </p:txBody>
       </p:sp>
@@ -960,7 +736,6 @@
               <a:rPr lang="en-US" dirty="0"/>
               <a:t>13:15-14:00. The takeaway restates the scope sentence from Chapter 1: 'measuring' means a quantitative, reproducible ordering, not a claim to have quantified the debt itself. Ending the pre-emption block on it shows claim discipline from first page to last.</a:t>
             </a:r>
-            <a:endParaRPr lang="en-US" dirty="0"/>
           </a:p>
         </p:txBody>
       </p:sp>
@@ -1048,7 +823,6 @@
               <a:rPr lang="en-US" dirty="0"/>
               <a:t>14:00-14:40. Three academic contributions, one practical. If pressed on novelty, the four-element combination from the gap table in Chapter 2 is the defensible claim: each element exists separately, no study combines them.</a:t>
             </a:r>
-            <a:endParaRPr lang="en-US" dirty="0"/>
           </a:p>
         </p:txBody>
       </p:sp>
@@ -1136,7 +910,6 @@
               <a:rPr lang="en-US" dirty="0"/>
               <a:t>14:40-15:00. The closing sentence is the final sentence of Chapter 6, so the defence ends exactly where the thesis does. Then stop talking.</a:t>
             </a:r>
-            <a:endParaRPr lang="en-US" dirty="0"/>
           </a:p>
         </p:txBody>
       </p:sp>
@@ -1224,7 +997,6 @@
               <a:rPr lang="en-US" dirty="0"/>
               <a:t>Backup slide; not part of the 15 minutes. Full reference list formatted in Cite Them Right Harvard with all authors listed. If asked for a source mid-defence, jump here, answer, and return.</a:t>
             </a:r>
-            <a:endParaRPr lang="en-US" dirty="0"/>
           </a:p>
         </p:txBody>
       </p:sp>
@@ -1312,7 +1084,6 @@
               <a:rPr lang="en-US" dirty="0"/>
               <a:t>0:45-2:00. Frame the environment: continuous availability, FINMA oversight, vendor platforms that cannot be refactored. Then the three anchor numbers, delivered slowly. The last line sets up the whole design: the symptoms are already recorded, we just need an instrument that reads them.</a:t>
             </a:r>
-            <a:endParaRPr lang="en-US" dirty="0"/>
           </a:p>
         </p:txBody>
       </p:sp>
@@ -1400,7 +1171,6 @@
               <a:rPr lang="en-US" dirty="0"/>
               <a:t>2:00-3:00. Emphasise the four-way combination: each pairwise element exists in the literature, the combination does not. RQ2 is deliberately worded 'to what extent': the proxy link is treated as a testable hypothesis throughout, not a premise.</a:t>
             </a:r>
-            <a:endParaRPr lang="en-US" dirty="0"/>
           </a:p>
         </p:txBody>
       </p:sp>
@@ -1488,7 +1258,6 @@
               <a:rPr lang="en-US" dirty="0"/>
               <a:t>3:00-4:15. Walk one row fully (MTTR: Forsgren et al. validate the metric, Nord et al. ground its diagnostic reading as debt impeding recovery from change). State the exclusions and why: honesty about what could not be measured is part of the audit trail. Pre-empts 'why these five?'.</a:t>
             </a:r>
-            <a:endParaRPr lang="en-US" dirty="0"/>
           </a:p>
         </p:txBody>
       </p:sp>
@@ -1576,7 +1345,6 @@
               <a:rPr lang="en-US" dirty="0"/>
               <a:t>4:15-5:15. Keep this brisk; examiners know TOPSIS. Two points to land: differential weights are a declared practitioner assumption, not literature-derived, and are themselves stress-tested; and method choice is defended empirically, not a priori.</a:t>
             </a:r>
-            <a:endParaRPr lang="en-US" dirty="0"/>
           </a:p>
         </p:txBody>
       </p:sp>
@@ -1664,7 +1432,6 @@
               <a:rPr lang="en-US" dirty="0"/>
               <a:t>5:15-6:15. Say the right column unprompted; every point is a question the examiner would otherwise ask. Framing: n=6 was a completeness criterion, and the consequence is handled with exact permutation p-values read as effect sizes.</a:t>
             </a:r>
-            <a:endParaRPr lang="en-US" dirty="0"/>
           </a:p>
         </p:txBody>
       </p:sp>
@@ -1750,9 +1517,8 @@
           <a:p>
             <a:r>
               <a:rPr lang="en-US" dirty="0"/>
-              <a:t>6:15-7:15. Read the ranking through the three profiles; each maps onto a distinct debt dimension, which is the practical-validity argument for RQ2. SVC-02 is the money case: stable in isolation, largest structural exposure in the portfolio.</a:t>
-            </a:r>
-            <a:endParaRPr lang="en-US" dirty="0"/>
+              <a:t>6:15-7:15. Read the ranking through the three profiles; each maps onto a distinct debt dimension, which is the practical-validity argument for RQ2. SVC-01 is the money case: quiet on incidents, dominant structural exposure, and it tops the ranking.</a:t>
+            </a:r>
           </a:p>
         </p:txBody>
       </p:sp>
@@ -1840,7 +1606,6 @@
               <a:rPr lang="en-US" dirty="0"/>
               <a:t>7:15-8:15. The evaluation architecture. Say the takeaway line verbatim: it answers the biggest examiner question (circularity, no ground truth) before it is asked. The next slides unpack the three most interesting strands.</a:t>
             </a:r>
-            <a:endParaRPr lang="en-US" dirty="0"/>
           </a:p>
         </p:txBody>
       </p:sp>
@@ -1928,7 +1693,6 @@
               <a:rPr lang="en-US" dirty="0"/>
               <a:t>8:15-9:15. RQ3 answered: stable at the extremes, sensitive in the middle, and the middle sensitivity is a property of the 2024 data (grouped profiles), not the method, as the flatter 2024 Monte Carlo confirms. The takeaway pre-empts 'isn't temporal instability a flaw?'.</a:t>
             </a:r>
-            <a:endParaRPr lang="en-US" dirty="0"/>
           </a:p>
         </p:txBody>
       </p:sp>
@@ -2001,6 +1765,11 @@
 <file path=ppt/slideMasters/slideMaster1.xml><?xml version="1.0" encoding="utf-8"?>
 <p:sldMaster xmlns:a="http://schemas.openxmlformats.org/drawingml/2006/main" xmlns:r="http://schemas.openxmlformats.org/officeDocument/2006/relationships" xmlns:p="http://schemas.openxmlformats.org/presentationml/2006/main">
   <p:cSld>
+    <p:bg>
+      <p:bgRef idx="1001">
+        <a:schemeClr val="bg1"/>
+      </p:bgRef>
+    </p:bg>
     <p:spTree>
       <p:nvGrpSpPr>
         <p:cNvPr id="1" name=""/>
@@ -2283,6 +2052,7 @@
         <a:solidFill>
           <a:srgbClr val="14283C"/>
         </a:solidFill>
+        <a:effectLst/>
       </p:bgPr>
     </p:bg>
     <p:spTree>
@@ -2301,14 +2071,14 @@
       </p:grpSpPr>
       <p:pic>
         <p:nvPicPr>
-          <p:cNvPr id="2" name="Image 0" descr="logo_white.png">    </p:cNvPr>
+          <p:cNvPr id="2" name="Image 0" descr="logo_white.png"/>
           <p:cNvPicPr>
             <a:picLocks noChangeAspect="1"/>
           </p:cNvPicPr>
           <p:nvPr/>
         </p:nvPicPr>
         <p:blipFill>
-          <a:blip r:embed="rId1"/>
+          <a:blip r:embed="rId3"/>
           <a:stretch>
             <a:fillRect/>
           </a:stretch>
@@ -2344,11 +2114,11 @@
           <a:bodyPr wrap="square" lIns="0" tIns="0" rIns="0" bIns="0" rtlCol="0" anchor="ctr"/>
           <a:lstStyle/>
           <a:p>
-            <a:pPr indent="0" marL="0">
-              <a:buNone/>
-            </a:pPr>
-            <a:r>
-              <a:rPr lang="en-US" sz="1200" b="1" spc="300" kern="0" dirty="0">
+            <a:pPr marL="0" indent="0">
+              <a:buNone/>
+            </a:pPr>
+            <a:r>
+              <a:rPr lang="en-US" sz="1200" b="1" kern="0" spc="300" dirty="0">
                 <a:solidFill>
                   <a:srgbClr val="D98E1F"/>
                 </a:solidFill>
@@ -2383,7 +2153,7 @@
           <a:bodyPr wrap="square" lIns="0" tIns="0" rIns="0" bIns="0" rtlCol="0" anchor="ctr"/>
           <a:lstStyle/>
           <a:p>
-            <a:pPr indent="0" marL="0">
+            <a:pPr marL="0" indent="0">
               <a:buNone/>
             </a:pPr>
             <a:r>
@@ -2422,7 +2192,7 @@
           <a:bodyPr wrap="square" lIns="0" tIns="0" rIns="0" bIns="0" rtlCol="0" anchor="ctr"/>
           <a:lstStyle/>
           <a:p>
-            <a:pPr indent="0" marL="0">
+            <a:pPr marL="0" indent="0">
               <a:buNone/>
             </a:pPr>
             <a:r>
@@ -2461,7 +2231,7 @@
           <a:bodyPr wrap="square" lIns="0" tIns="0" rIns="0" bIns="0" rtlCol="0" anchor="ctr"/>
           <a:lstStyle/>
           <a:p>
-            <a:pPr indent="0" marL="0">
+            <a:pPr marL="0" indent="0">
               <a:buNone/>
             </a:pPr>
             <a:r>
@@ -2475,9 +2245,6 @@
               </a:rPr>
               <a:t>Tobias Zeier</a:t>
             </a:r>
-            <a:pPr indent="0" marL="0">
-              <a:buNone/>
-            </a:pPr>
             <a:r>
               <a:rPr lang="en-US" sz="1500" dirty="0">
                 <a:solidFill>
@@ -2515,6 +2282,13 @@
             <a:prstDash val="solid"/>
           </a:ln>
         </p:spPr>
+        <p:txBody>
+          <a:bodyPr/>
+          <a:lstStyle/>
+          <a:p>
+            <a:endParaRPr lang="en-CH"/>
+          </a:p>
+        </p:txBody>
       </p:sp>
       <p:sp>
         <p:nvSpPr>
@@ -2537,11 +2311,11 @@
           <a:bodyPr wrap="square" lIns="0" tIns="0" rIns="0" bIns="0" rtlCol="0" anchor="ctr"/>
           <a:lstStyle/>
           <a:p>
-            <a:pPr indent="0" marL="0">
-              <a:buNone/>
-            </a:pPr>
-            <a:r>
-              <a:rPr lang="en-US" sz="1000" spc="200" kern="0" dirty="0">
+            <a:pPr marL="0" indent="0">
+              <a:buNone/>
+            </a:pPr>
+            <a:r>
+              <a:rPr lang="en-US" sz="1000" kern="0" spc="200" dirty="0">
                 <a:solidFill>
                   <a:srgbClr val="8FA6BC"/>
                 </a:solidFill>
@@ -2571,6 +2345,7 @@
         <a:solidFill>
           <a:srgbClr val="FFFFFF"/>
         </a:solidFill>
+        <a:effectLst/>
       </p:bgPr>
     </p:bg>
     <p:spTree>
@@ -2608,11 +2383,11 @@
           <a:bodyPr wrap="square" lIns="0" tIns="0" rIns="0" bIns="0" rtlCol="0" anchor="ctr"/>
           <a:lstStyle/>
           <a:p>
-            <a:pPr algn="l" indent="0" marL="0">
-              <a:buNone/>
-            </a:pPr>
-            <a:r>
-              <a:rPr lang="en-US" sz="1100" b="1" spc="300" kern="0" dirty="0">
+            <a:pPr marL="0" indent="0" algn="l">
+              <a:buNone/>
+            </a:pPr>
+            <a:r>
+              <a:rPr lang="en-US" sz="1100" b="1" kern="0" spc="300" dirty="0">
                 <a:solidFill>
                   <a:srgbClr val="5C7186"/>
                 </a:solidFill>
@@ -2647,7 +2422,7 @@
           <a:bodyPr wrap="square" lIns="0" tIns="0" rIns="0" bIns="0" rtlCol="0" anchor="ctr"/>
           <a:lstStyle/>
           <a:p>
-            <a:pPr algn="l" indent="0" marL="0">
+            <a:pPr marL="0" indent="0" algn="l">
               <a:buNone/>
             </a:pPr>
             <a:r>
@@ -2686,7 +2461,7 @@
           <a:bodyPr wrap="square" lIns="0" tIns="0" rIns="0" bIns="0" rtlCol="0" anchor="ctr"/>
           <a:lstStyle/>
           <a:p>
-            <a:pPr indent="0" marL="0">
+            <a:pPr marL="0" indent="0">
               <a:buNone/>
             </a:pPr>
             <a:r>
@@ -2700,9 +2475,6 @@
               </a:rPr>
               <a:t>Against a ranking by incident frequency alone:  </a:t>
             </a:r>
-            <a:pPr indent="0" marL="0">
-              <a:buNone/>
-            </a:pPr>
             <a:r>
               <a:rPr lang="en-US" sz="1500" b="1" dirty="0">
                 <a:solidFill>
@@ -2712,11 +2484,8 @@
                 <a:ea typeface="Courier New" pitchFamily="34" charset="-122"/>
                 <a:cs typeface="Courier New" pitchFamily="34" charset="-120"/>
               </a:rPr>
-              <a:t>τ = 0.600</a:t>
-            </a:r>
-            <a:pPr indent="0" marL="0">
-              <a:buNone/>
-            </a:pPr>
+              <a:t>τ = 0.467</a:t>
+            </a:r>
             <a:r>
               <a:rPr lang="en-US" sz="1500" dirty="0">
                 <a:solidFill>
@@ -2728,9 +2497,6 @@
               </a:rPr>
               <a:t> (2025),  </a:t>
             </a:r>
-            <a:pPr indent="0" marL="0">
-              <a:buNone/>
-            </a:pPr>
             <a:r>
               <a:rPr lang="en-US" sz="1500" b="1" dirty="0">
                 <a:solidFill>
@@ -2740,11 +2506,8 @@
                 <a:ea typeface="Courier New" pitchFamily="34" charset="-122"/>
                 <a:cs typeface="Courier New" pitchFamily="34" charset="-120"/>
               </a:rPr>
-              <a:t>τ = 0.200</a:t>
-            </a:r>
-            <a:pPr indent="0" marL="0">
-              <a:buNone/>
-            </a:pPr>
+              <a:t>τ = 0.333</a:t>
+            </a:r>
             <a:r>
               <a:rPr lang="en-US" sz="1500" dirty="0">
                 <a:solidFill>
@@ -2779,13 +2542,20 @@
           </a:solidFill>
           <a:ln/>
           <a:effectLst>
-            <a:outerShdw sx="100000" sy="100000" kx="0" ky="0" algn="bl" rotWithShape="0" blurRad="63500" dist="25400" dir="5400000">
+            <a:outerShdw blurRad="63500" dist="25400" dir="5400000" algn="bl" rotWithShape="0">
               <a:srgbClr val="9AA7B2">
                 <a:alpha val="22000"/>
               </a:srgbClr>
             </a:outerShdw>
           </a:effectLst>
         </p:spPr>
+        <p:txBody>
+          <a:bodyPr/>
+          <a:lstStyle/>
+          <a:p>
+            <a:endParaRPr lang="en-CH"/>
+          </a:p>
+        </p:txBody>
       </p:sp>
       <p:sp>
         <p:nvSpPr>
@@ -2808,7 +2578,7 @@
           <a:bodyPr wrap="square" lIns="0" tIns="0" rIns="0" bIns="0" rtlCol="0" anchor="ctr"/>
           <a:lstStyle/>
           <a:p>
-            <a:pPr indent="0" marL="0">
+            <a:pPr marL="0" indent="0">
               <a:buNone/>
             </a:pPr>
             <a:r>
@@ -2820,7 +2590,7 @@
                 <a:ea typeface="Arial" pitchFamily="34" charset="-122"/>
                 <a:cs typeface="Arial" pitchFamily="34" charset="-120"/>
               </a:rPr>
-              <a:t>SVC-02 rises</a:t>
+              <a:t>SVC-01 rises, fourth to first</a:t>
             </a:r>
             <a:endParaRPr lang="en-US" sz="1700" dirty="0"/>
           </a:p>
@@ -2847,7 +2617,7 @@
           <a:bodyPr wrap="square" lIns="0" tIns="0" rIns="0" bIns="0" rtlCol="0" anchor="t"/>
           <a:lstStyle/>
           <a:p>
-            <a:pPr indent="0" marL="0">
+            <a:pPr marL="0" indent="0">
               <a:lnSpc>
                 <a:spcPct val="115000"/>
               </a:lnSpc>
@@ -2862,7 +2632,7 @@
                 <a:ea typeface="Arial" pitchFamily="34" charset="-122"/>
                 <a:cs typeface="Arial" pitchFamily="34" charset="-120"/>
               </a:rPr>
-              <a:t>Infrastructure lifecycle debt (1,221 unsupported component months, patch recency of 59.93, second lowest) is invisible to an incident count. This is precisely the signal the framework was built to surface.</a:t>
+              <a:t>Infrastructure lifecycle debt (4,210 unsupported component months, patch recency 63.18) is invisible to an incident count. This is precisely the signal the framework was built to surface.</a:t>
             </a:r>
             <a:endParaRPr lang="en-US" sz="1300" dirty="0"/>
           </a:p>
@@ -2887,13 +2657,20 @@
           </a:solidFill>
           <a:ln/>
           <a:effectLst>
-            <a:outerShdw sx="100000" sy="100000" kx="0" ky="0" algn="bl" rotWithShape="0" blurRad="63500" dist="25400" dir="5400000">
+            <a:outerShdw blurRad="63500" dist="25400" dir="5400000" algn="bl" rotWithShape="0">
               <a:srgbClr val="9AA7B2">
                 <a:alpha val="22000"/>
               </a:srgbClr>
             </a:outerShdw>
           </a:effectLst>
         </p:spPr>
+        <p:txBody>
+          <a:bodyPr/>
+          <a:lstStyle/>
+          <a:p>
+            <a:endParaRPr lang="en-CH"/>
+          </a:p>
+        </p:txBody>
       </p:sp>
       <p:sp>
         <p:nvSpPr>
@@ -2916,7 +2693,7 @@
           <a:bodyPr wrap="square" lIns="0" tIns="0" rIns="0" bIns="0" rtlCol="0" anchor="ctr"/>
           <a:lstStyle/>
           <a:p>
-            <a:pPr indent="0" marL="0">
+            <a:pPr marL="0" indent="0">
               <a:buNone/>
             </a:pPr>
             <a:r>
@@ -2928,7 +2705,7 @@
                 <a:ea typeface="Arial" pitchFamily="34" charset="-122"/>
                 <a:cs typeface="Arial" pitchFamily="34" charset="-120"/>
               </a:rPr>
-              <a:t>SVC-05 falls</a:t>
+              <a:t>SVC-05 falls, third to fifth</a:t>
             </a:r>
             <a:endParaRPr lang="en-US" sz="1700" dirty="0"/>
           </a:p>
@@ -2955,7 +2732,7 @@
           <a:bodyPr wrap="square" lIns="0" tIns="0" rIns="0" bIns="0" rtlCol="0" anchor="t"/>
           <a:lstStyle/>
           <a:p>
-            <a:pPr indent="0" marL="0">
+            <a:pPr marL="0" indent="0">
               <a:lnSpc>
                 <a:spcPct val="115000"/>
               </a:lnSpc>
@@ -2995,6 +2772,13 @@
           </a:solidFill>
           <a:ln/>
         </p:spPr>
+        <p:txBody>
+          <a:bodyPr/>
+          <a:lstStyle/>
+          <a:p>
+            <a:endParaRPr lang="en-CH"/>
+          </a:p>
+        </p:txBody>
       </p:sp>
       <p:sp>
         <p:nvSpPr>
@@ -3017,11 +2801,11 @@
           <a:bodyPr wrap="square" lIns="0" tIns="0" rIns="0" bIns="0" rtlCol="0" anchor="ctr"/>
           <a:lstStyle/>
           <a:p>
-            <a:pPr indent="0" marL="0">
-              <a:buNone/>
-            </a:pPr>
-            <a:r>
-              <a:rPr lang="en-US" sz="950" b="1" spc="300" kern="0" dirty="0">
+            <a:pPr marL="0" indent="0">
+              <a:buNone/>
+            </a:pPr>
+            <a:r>
+              <a:rPr lang="en-US" sz="950" b="1" kern="0" spc="300" dirty="0">
                 <a:solidFill>
                   <a:srgbClr val="1E7F82"/>
                 </a:solidFill>
@@ -3056,7 +2840,7 @@
           <a:bodyPr wrap="square" lIns="0" tIns="0" rIns="0" bIns="0" rtlCol="0" anchor="t"/>
           <a:lstStyle/>
           <a:p>
-            <a:pPr indent="0" marL="0">
+            <a:pPr marL="0" indent="0">
               <a:buNone/>
             </a:pPr>
             <a:r>
@@ -3090,6 +2874,7 @@
         <a:solidFill>
           <a:srgbClr val="FFFFFF"/>
         </a:solidFill>
+        <a:effectLst/>
       </p:bgPr>
     </p:bg>
     <p:spTree>
@@ -3127,11 +2912,11 @@
           <a:bodyPr wrap="square" lIns="0" tIns="0" rIns="0" bIns="0" rtlCol="0" anchor="ctr"/>
           <a:lstStyle/>
           <a:p>
-            <a:pPr algn="l" indent="0" marL="0">
-              <a:buNone/>
-            </a:pPr>
-            <a:r>
-              <a:rPr lang="en-US" sz="1100" b="1" spc="300" kern="0" dirty="0">
+            <a:pPr marL="0" indent="0" algn="l">
+              <a:buNone/>
+            </a:pPr>
+            <a:r>
+              <a:rPr lang="en-US" sz="1100" b="1" kern="0" spc="300" dirty="0">
                 <a:solidFill>
                   <a:srgbClr val="5C7186"/>
                 </a:solidFill>
@@ -3166,7 +2951,7 @@
           <a:bodyPr wrap="square" lIns="0" tIns="0" rIns="0" bIns="0" rtlCol="0" anchor="ctr"/>
           <a:lstStyle/>
           <a:p>
-            <a:pPr algn="l" indent="0" marL="0">
+            <a:pPr marL="0" indent="0" algn="l">
               <a:buNone/>
             </a:pPr>
             <a:r>
@@ -3205,7 +2990,7 @@
           <a:bodyPr wrap="square" lIns="0" tIns="0" rIns="0" bIns="0" rtlCol="0" anchor="ctr"/>
           <a:lstStyle/>
           <a:p>
-            <a:pPr indent="0" marL="0">
+            <a:pPr marL="0" indent="0">
               <a:buNone/>
             </a:pPr>
             <a:r>
@@ -3217,11 +3002,8 @@
                 <a:ea typeface="Arial" pitchFamily="34" charset="-122"/>
                 <a:cs typeface="Arial" pitchFamily="34" charset="-120"/>
               </a:rPr>
-              <a:t>All methods agree on the portfolio halves and on SVC-03 last, in every year and configuration. They disagree on one thing: </a:t>
-            </a:r>
-            <a:pPr indent="0" marL="0">
-              <a:buNone/>
-            </a:pPr>
+              <a:t>In 2025 all methods agree exactly under equal weights, with SVC-01 first. The one disagreement is the 2024 equal-weights top rank, and it is a </a:t>
+            </a:r>
             <a:r>
               <a:rPr lang="en-US" sz="1450" b="1" dirty="0">
                 <a:solidFill>
@@ -3231,7 +3013,7 @@
                 <a:ea typeface="Arial" pitchFamily="34" charset="-122"/>
                 <a:cs typeface="Arial" pitchFamily="34" charset="-120"/>
               </a:rPr>
-              <a:t>SVC-06.</a:t>
+              <a:t>photo-finish.</a:t>
             </a:r>
             <a:endParaRPr lang="en-US" sz="1450" dirty="0"/>
           </a:p>
@@ -3253,16 +3035,34 @@
         </p:nvGraphicFramePr>
         <p:xfrm>
           <a:off x="685800" y="2377440"/>
-          <a:ext cx="7589520" cy="914400"/>
+          <a:ext cx="7589520" cy="1920240"/>
         </p:xfrm>
         <a:graphic>
           <a:graphicData uri="http://schemas.openxmlformats.org/drawingml/2006/table">
             <a:tbl>
               <a:tblPr/>
               <a:tblGrid>
-                <a:gridCol w="2286000"/>
-                <a:gridCol w="2651760"/>
-                <a:gridCol w="2651760"/>
+                <a:gridCol w="2286000">
+                  <a:extLst>
+                    <a:ext uri="{9D8B030D-6E8A-4147-A177-3AD203B41FA5}">
+                      <a16:colId xmlns:a16="http://schemas.microsoft.com/office/drawing/2014/main" val="20000"/>
+                    </a:ext>
+                  </a:extLst>
+                </a:gridCol>
+                <a:gridCol w="2651760">
+                  <a:extLst>
+                    <a:ext uri="{9D8B030D-6E8A-4147-A177-3AD203B41FA5}">
+                      <a16:colId xmlns:a16="http://schemas.microsoft.com/office/drawing/2014/main" val="20001"/>
+                    </a:ext>
+                  </a:extLst>
+                </a:gridCol>
+                <a:gridCol w="2651760">
+                  <a:extLst>
+                    <a:ext uri="{9D8B030D-6E8A-4147-A177-3AD203B41FA5}">
+                      <a16:colId xmlns:a16="http://schemas.microsoft.com/office/drawing/2014/main" val="20002"/>
+                    </a:ext>
+                  </a:extLst>
+                </a:gridCol>
               </a:tblGrid>
               <a:tr h="384048">
                 <a:tc>
@@ -3270,9 +3070,20 @@
                     <a:bodyPr/>
                     <a:lstStyle/>
                     <a:p>
-                      <a:pPr indent="0" marL="0">
+                      <a:pPr marL="0" indent="0">
                         <a:buNone/>
                       </a:pPr>
+                      <a:r>
+                        <a:rPr lang="en-US" sz="1250" b="1" dirty="0">
+                          <a:solidFill>
+                            <a:srgbClr val="14283C"/>
+                          </a:solidFill>
+                          <a:latin typeface="Arial" pitchFamily="34" charset="0"/>
+                          <a:ea typeface="Arial" pitchFamily="34" charset="-122"/>
+                          <a:cs typeface="Arial" pitchFamily="34" charset="-120"/>
+                        </a:rPr>
+                        <a:t>2024, equal weights</a:t>
+                      </a:r>
                       <a:endParaRPr lang="en-US" sz="1250" dirty="0">
                         <a:latin typeface="Arial" charset="0"/>
                         <a:ea typeface="Arial" charset="0"/>
@@ -3280,7 +3091,7 @@
                       </a:endParaRPr>
                     </a:p>
                   </a:txBody>
-                  <a:tcPr marL="45720" marR="45720" marT="45720" marB="45720" anchor="ctr">
+                  <a:tcPr marL="45720" marR="45720" anchor="ctr">
                     <a:lnL w="0" cap="flat" cmpd="sng" algn="ctr">
                       <a:noFill/>
                     </a:lnL>
@@ -3306,7 +3117,7 @@
                     <a:bodyPr/>
                     <a:lstStyle/>
                     <a:p>
-                      <a:pPr indent="0" marL="0">
+                      <a:pPr marL="0" indent="0">
                         <a:buNone/>
                       </a:pPr>
                       <a:r>
@@ -3318,7 +3129,7 @@
                           <a:ea typeface="Arial" pitchFamily="34" charset="-122"/>
                           <a:cs typeface="Arial" pitchFamily="34" charset="-120"/>
                         </a:rPr>
-                        <a:t>SAW / VIKOR</a:t>
+                        <a:t>TOPSIS classic</a:t>
                       </a:r>
                       <a:endParaRPr lang="en-US" sz="1250" dirty="0">
                         <a:latin typeface="Arial" charset="0"/>
@@ -3327,7 +3138,7 @@
                       </a:endParaRPr>
                     </a:p>
                   </a:txBody>
-                  <a:tcPr marL="45720" marR="45720" marT="45720" marB="45720" anchor="ctr">
+                  <a:tcPr marL="45720" marR="45720" anchor="ctr">
                     <a:lnL w="0" cap="flat" cmpd="sng" algn="ctr">
                       <a:noFill/>
                     </a:lnL>
@@ -3353,7 +3164,7 @@
                     <a:bodyPr/>
                     <a:lstStyle/>
                     <a:p>
-                      <a:pPr indent="0" marL="0">
+                      <a:pPr marL="0" indent="0">
                         <a:buNone/>
                       </a:pPr>
                       <a:r>
@@ -3365,7 +3176,7 @@
                           <a:ea typeface="Arial" pitchFamily="34" charset="-122"/>
                           <a:cs typeface="Arial" pitchFamily="34" charset="-120"/>
                         </a:rPr>
-                        <a:t>TOPSIS ABSOLUTE MODE</a:t>
+                        <a:t>SAW · VIKOR · TOPSIS absolute</a:t>
                       </a:r>
                       <a:endParaRPr lang="en-US" sz="1250" dirty="0">
                         <a:latin typeface="Arial" charset="0"/>
@@ -3374,7 +3185,7 @@
                       </a:endParaRPr>
                     </a:p>
                   </a:txBody>
-                  <a:tcPr marL="45720" marR="45720" marT="45720" marB="45720" anchor="ctr">
+                  <a:tcPr marL="45720" marR="45720" anchor="ctr">
                     <a:lnL w="0" cap="flat" cmpd="sng" algn="ctr">
                       <a:noFill/>
                     </a:lnL>
@@ -3395,6 +3206,11 @@
                     </a:lnB>
                   </a:tcPr>
                 </a:tc>
+                <a:extLst>
+                  <a:ext uri="{0D108BD9-81ED-4DB2-BD59-A6C34878D82A}">
+                    <a16:rowId xmlns:a16="http://schemas.microsoft.com/office/drawing/2014/main" val="10000"/>
+                  </a:ext>
+                </a:extLst>
               </a:tr>
               <a:tr h="384048">
                 <a:tc>
@@ -3402,7 +3218,7 @@
                     <a:bodyPr/>
                     <a:lstStyle/>
                     <a:p>
-                      <a:pPr indent="0" marL="0">
+                      <a:pPr marL="0" indent="0">
                         <a:buNone/>
                       </a:pPr>
                       <a:r>
@@ -3414,7 +3230,7 @@
                           <a:ea typeface="Arial" pitchFamily="34" charset="-122"/>
                           <a:cs typeface="Arial" pitchFamily="34" charset="-120"/>
                         </a:rPr>
-                        <a:t>2024 rank of SVC-06</a:t>
+                        <a:t>Top-ranked service</a:t>
                       </a:r>
                       <a:endParaRPr lang="en-US" sz="1250" dirty="0">
                         <a:latin typeface="Arial" charset="0"/>
@@ -3423,15 +3239,21 @@
                       </a:endParaRPr>
                     </a:p>
                   </a:txBody>
-                  <a:tcPr marL="45720" marR="45720" marT="45720" marB="45720" anchor="ctr">
+                  <a:tcPr marL="45720" marR="45720" anchor="ctr">
                     <a:lnL w="0" cap="flat" cmpd="sng" algn="ctr">
                       <a:noFill/>
                     </a:lnL>
                     <a:lnR w="0" cap="flat" cmpd="sng" algn="ctr">
                       <a:noFill/>
                     </a:lnR>
-                    <a:lnT w="0" cap="flat" cmpd="sng" algn="ctr">
-                      <a:noFill/>
+                    <a:lnT w="9525" cap="flat" cmpd="sng" algn="ctr">
+                      <a:solidFill>
+                        <a:srgbClr val="D8DFE5"/>
+                      </a:solidFill>
+                      <a:prstDash val="solid"/>
+                      <a:round/>
+                      <a:headEnd type="none" w="med" len="med"/>
+                      <a:tailEnd type="none" w="med" len="med"/>
                     </a:lnT>
                     <a:lnB w="9525" cap="flat" cmpd="sng" algn="ctr">
                       <a:solidFill>
@@ -3449,7 +3271,7 @@
                     <a:bodyPr/>
                     <a:lstStyle/>
                     <a:p>
-                      <a:pPr indent="0" marL="0">
+                      <a:pPr marL="0" indent="0">
                         <a:buNone/>
                       </a:pPr>
                       <a:r>
@@ -3461,7 +3283,7 @@
                           <a:ea typeface="Arial" pitchFamily="34" charset="-122"/>
                           <a:cs typeface="Arial" pitchFamily="34" charset="-120"/>
                         </a:rPr>
-                        <a:t>1st (VIKOR regret at maximum)</a:t>
+                        <a:t>SVC-04 (C* = 0.4847)</a:t>
                       </a:r>
                       <a:endParaRPr lang="en-US" sz="1250" dirty="0">
                         <a:latin typeface="Arial" charset="0"/>
@@ -3470,15 +3292,21 @@
                       </a:endParaRPr>
                     </a:p>
                   </a:txBody>
-                  <a:tcPr marL="45720" marR="45720" marT="45720" marB="45720" anchor="ctr">
+                  <a:tcPr marL="45720" marR="45720" anchor="ctr">
                     <a:lnL w="0" cap="flat" cmpd="sng" algn="ctr">
                       <a:noFill/>
                     </a:lnL>
                     <a:lnR w="0" cap="flat" cmpd="sng" algn="ctr">
                       <a:noFill/>
                     </a:lnR>
-                    <a:lnT w="0" cap="flat" cmpd="sng" algn="ctr">
-                      <a:noFill/>
+                    <a:lnT w="9525" cap="flat" cmpd="sng" algn="ctr">
+                      <a:solidFill>
+                        <a:srgbClr val="D8DFE5"/>
+                      </a:solidFill>
+                      <a:prstDash val="solid"/>
+                      <a:round/>
+                      <a:headEnd type="none" w="med" len="med"/>
+                      <a:tailEnd type="none" w="med" len="med"/>
                     </a:lnT>
                     <a:lnB w="9525" cap="flat" cmpd="sng" algn="ctr">
                       <a:solidFill>
@@ -3496,7 +3324,7 @@
                     <a:bodyPr/>
                     <a:lstStyle/>
                     <a:p>
-                      <a:pPr indent="0" marL="0">
+                      <a:pPr marL="0" indent="0">
                         <a:buNone/>
                       </a:pPr>
                       <a:r>
@@ -3508,7 +3336,7 @@
                           <a:ea typeface="Arial" pitchFamily="34" charset="-122"/>
                           <a:cs typeface="Arial" pitchFamily="34" charset="-120"/>
                         </a:rPr>
-                        <a:t>5th (C* = 0.853)</a:t>
+                        <a:t>SVC-01</a:t>
                       </a:r>
                       <a:endParaRPr lang="en-US" sz="1250" dirty="0">
                         <a:latin typeface="Arial" charset="0"/>
@@ -3517,15 +3345,21 @@
                       </a:endParaRPr>
                     </a:p>
                   </a:txBody>
-                  <a:tcPr marL="45720" marR="45720" marT="45720" marB="45720" anchor="ctr">
+                  <a:tcPr marL="45720" marR="45720" anchor="ctr">
                     <a:lnL w="0" cap="flat" cmpd="sng" algn="ctr">
                       <a:noFill/>
                     </a:lnL>
                     <a:lnR w="0" cap="flat" cmpd="sng" algn="ctr">
                       <a:noFill/>
                     </a:lnR>
-                    <a:lnT w="0" cap="flat" cmpd="sng" algn="ctr">
-                      <a:noFill/>
+                    <a:lnT w="9525" cap="flat" cmpd="sng" algn="ctr">
+                      <a:solidFill>
+                        <a:srgbClr val="D8DFE5"/>
+                      </a:solidFill>
+                      <a:prstDash val="solid"/>
+                      <a:round/>
+                      <a:headEnd type="none" w="med" len="med"/>
+                      <a:tailEnd type="none" w="med" len="med"/>
                     </a:lnT>
                     <a:lnB w="9525" cap="flat" cmpd="sng" algn="ctr">
                       <a:solidFill>
@@ -3538,6 +3372,11 @@
                     </a:lnB>
                   </a:tcPr>
                 </a:tc>
+                <a:extLst>
+                  <a:ext uri="{0D108BD9-81ED-4DB2-BD59-A6C34878D82A}">
+                    <a16:rowId xmlns:a16="http://schemas.microsoft.com/office/drawing/2014/main" val="10001"/>
+                  </a:ext>
+                </a:extLst>
               </a:tr>
               <a:tr h="384048">
                 <a:tc>
@@ -3545,7 +3384,7 @@
                     <a:bodyPr/>
                     <a:lstStyle/>
                     <a:p>
-                      <a:pPr indent="0" marL="0">
+                      <a:pPr marL="0" indent="0">
                         <a:buNone/>
                       </a:pPr>
                       <a:r>
@@ -3557,7 +3396,7 @@
                           <a:ea typeface="Arial" pitchFamily="34" charset="-122"/>
                           <a:cs typeface="Arial" pitchFamily="34" charset="-120"/>
                         </a:rPr>
-                        <a:t>2025 rank of SVC-06</a:t>
+                        <a:t>Margin</a:t>
                       </a:r>
                       <a:endParaRPr lang="en-US" sz="1250" dirty="0">
                         <a:latin typeface="Arial" charset="0"/>
@@ -3566,15 +3405,21 @@
                       </a:endParaRPr>
                     </a:p>
                   </a:txBody>
-                  <a:tcPr marL="45720" marR="45720" marT="45720" marB="45720" anchor="ctr">
+                  <a:tcPr marL="45720" marR="45720" anchor="ctr">
                     <a:lnL w="0" cap="flat" cmpd="sng" algn="ctr">
                       <a:noFill/>
                     </a:lnL>
                     <a:lnR w="0" cap="flat" cmpd="sng" algn="ctr">
                       <a:noFill/>
                     </a:lnR>
-                    <a:lnT w="0" cap="flat" cmpd="sng" algn="ctr">
-                      <a:noFill/>
+                    <a:lnT w="9525" cap="flat" cmpd="sng" algn="ctr">
+                      <a:solidFill>
+                        <a:srgbClr val="D8DFE5"/>
+                      </a:solidFill>
+                      <a:prstDash val="solid"/>
+                      <a:round/>
+                      <a:headEnd type="none" w="med" len="med"/>
+                      <a:tailEnd type="none" w="med" len="med"/>
                     </a:lnT>
                     <a:lnB w="9525" cap="flat" cmpd="sng" algn="ctr">
                       <a:solidFill>
@@ -3592,7 +3437,7 @@
                     <a:bodyPr/>
                     <a:lstStyle/>
                     <a:p>
-                      <a:pPr indent="0" marL="0">
+                      <a:pPr marL="0" indent="0">
                         <a:buNone/>
                       </a:pPr>
                       <a:r>
@@ -3604,7 +3449,7 @@
                           <a:ea typeface="Arial" pitchFamily="34" charset="-122"/>
                           <a:cs typeface="Arial" pitchFamily="34" charset="-120"/>
                         </a:rPr>
-                        <a:t>1st</a:t>
+                        <a:t>ΔC* = 0.004 to SVC-01 (0.4886)</a:t>
                       </a:r>
                       <a:endParaRPr lang="en-US" sz="1250" dirty="0">
                         <a:latin typeface="Arial" charset="0"/>
@@ -3613,15 +3458,21 @@
                       </a:endParaRPr>
                     </a:p>
                   </a:txBody>
-                  <a:tcPr marL="45720" marR="45720" marT="45720" marB="45720" anchor="ctr">
+                  <a:tcPr marL="45720" marR="45720" anchor="ctr">
                     <a:lnL w="0" cap="flat" cmpd="sng" algn="ctr">
                       <a:noFill/>
                     </a:lnL>
                     <a:lnR w="0" cap="flat" cmpd="sng" algn="ctr">
                       <a:noFill/>
                     </a:lnR>
-                    <a:lnT w="0" cap="flat" cmpd="sng" algn="ctr">
-                      <a:noFill/>
+                    <a:lnT w="9525" cap="flat" cmpd="sng" algn="ctr">
+                      <a:solidFill>
+                        <a:srgbClr val="D8DFE5"/>
+                      </a:solidFill>
+                      <a:prstDash val="solid"/>
+                      <a:round/>
+                      <a:headEnd type="none" w="med" len="med"/>
+                      <a:tailEnd type="none" w="med" len="med"/>
                     </a:lnT>
                     <a:lnB w="9525" cap="flat" cmpd="sng" algn="ctr">
                       <a:solidFill>
@@ -3639,7 +3490,7 @@
                     <a:bodyPr/>
                     <a:lstStyle/>
                     <a:p>
-                      <a:pPr indent="0" marL="0">
+                      <a:pPr marL="0" indent="0">
                         <a:buNone/>
                       </a:pPr>
                       <a:r>
@@ -3651,7 +3502,7 @@
                           <a:ea typeface="Arial" pitchFamily="34" charset="-122"/>
                           <a:cs typeface="Arial" pitchFamily="34" charset="-120"/>
                         </a:rPr>
-                        <a:t>1st (C* = 0.609)</a:t>
+                        <a:t>VIKOR regret capped on SVC-01</a:t>
                       </a:r>
                       <a:endParaRPr lang="en-US" sz="1250" dirty="0">
                         <a:latin typeface="Arial" charset="0"/>
@@ -3660,15 +3511,21 @@
                       </a:endParaRPr>
                     </a:p>
                   </a:txBody>
-                  <a:tcPr marL="45720" marR="45720" marT="45720" marB="45720" anchor="ctr">
+                  <a:tcPr marL="45720" marR="45720" anchor="ctr">
                     <a:lnL w="0" cap="flat" cmpd="sng" algn="ctr">
                       <a:noFill/>
                     </a:lnL>
                     <a:lnR w="0" cap="flat" cmpd="sng" algn="ctr">
                       <a:noFill/>
                     </a:lnR>
-                    <a:lnT w="0" cap="flat" cmpd="sng" algn="ctr">
-                      <a:noFill/>
+                    <a:lnT w="9525" cap="flat" cmpd="sng" algn="ctr">
+                      <a:solidFill>
+                        <a:srgbClr val="D8DFE5"/>
+                      </a:solidFill>
+                      <a:prstDash val="solid"/>
+                      <a:round/>
+                      <a:headEnd type="none" w="med" len="med"/>
+                      <a:tailEnd type="none" w="med" len="med"/>
                     </a:lnT>
                     <a:lnB w="9525" cap="flat" cmpd="sng" algn="ctr">
                       <a:solidFill>
@@ -3681,6 +3538,11 @@
                     </a:lnB>
                   </a:tcPr>
                 </a:tc>
+                <a:extLst>
+                  <a:ext uri="{0D108BD9-81ED-4DB2-BD59-A6C34878D82A}">
+                    <a16:rowId xmlns:a16="http://schemas.microsoft.com/office/drawing/2014/main" val="10002"/>
+                  </a:ext>
+                </a:extLst>
               </a:tr>
               <a:tr h="384048">
                 <a:tc>
@@ -3688,7 +3550,7 @@
                     <a:bodyPr/>
                     <a:lstStyle/>
                     <a:p>
-                      <a:pPr indent="0" marL="0">
+                      <a:pPr marL="0" indent="0">
                         <a:buNone/>
                       </a:pPr>
                       <a:r>
@@ -3700,7 +3562,7 @@
                           <a:ea typeface="Arial" pitchFamily="34" charset="-122"/>
                           <a:cs typeface="Arial" pitchFamily="34" charset="-120"/>
                         </a:rPr>
-                        <a:t>Agreement, 2024</a:t>
+                        <a:t>Agreement</a:t>
                       </a:r>
                       <a:endParaRPr lang="en-US" sz="1250" dirty="0">
                         <a:latin typeface="Arial" charset="0"/>
@@ -3709,15 +3571,21 @@
                       </a:endParaRPr>
                     </a:p>
                   </a:txBody>
-                  <a:tcPr marL="45720" marR="45720" marT="45720" marB="45720" anchor="ctr">
+                  <a:tcPr marL="45720" marR="45720" anchor="ctr">
                     <a:lnL w="0" cap="flat" cmpd="sng" algn="ctr">
                       <a:noFill/>
                     </a:lnL>
                     <a:lnR w="0" cap="flat" cmpd="sng" algn="ctr">
                       <a:noFill/>
                     </a:lnR>
-                    <a:lnT w="0" cap="flat" cmpd="sng" algn="ctr">
-                      <a:noFill/>
+                    <a:lnT w="9525" cap="flat" cmpd="sng" algn="ctr">
+                      <a:solidFill>
+                        <a:srgbClr val="D8DFE5"/>
+                      </a:solidFill>
+                      <a:prstDash val="solid"/>
+                      <a:round/>
+                      <a:headEnd type="none" w="med" len="med"/>
+                      <a:tailEnd type="none" w="med" len="med"/>
                     </a:lnT>
                     <a:lnB w="9525" cap="flat" cmpd="sng" algn="ctr">
                       <a:solidFill>
@@ -3735,7 +3603,7 @@
                     <a:bodyPr/>
                     <a:lstStyle/>
                     <a:p>
-                      <a:pPr indent="0" marL="0">
+                      <a:pPr marL="0" indent="0">
                         <a:buNone/>
                       </a:pPr>
                       <a:r>
@@ -3747,7 +3615,7 @@
                           <a:ea typeface="Arial" pitchFamily="34" charset="-122"/>
                           <a:cs typeface="Arial" pitchFamily="34" charset="-120"/>
                         </a:rPr>
-                        <a:t>—</a:t>
+                        <a:t>vs SAW τ = 0.600</a:t>
                       </a:r>
                       <a:endParaRPr lang="en-US" sz="1250" dirty="0">
                         <a:latin typeface="Arial" charset="0"/>
@@ -3756,15 +3624,21 @@
                       </a:endParaRPr>
                     </a:p>
                   </a:txBody>
-                  <a:tcPr marL="45720" marR="45720" marT="45720" marB="45720" anchor="ctr">
+                  <a:tcPr marL="45720" marR="45720" anchor="ctr">
                     <a:lnL w="0" cap="flat" cmpd="sng" algn="ctr">
                       <a:noFill/>
                     </a:lnL>
                     <a:lnR w="0" cap="flat" cmpd="sng" algn="ctr">
                       <a:noFill/>
                     </a:lnR>
-                    <a:lnT w="0" cap="flat" cmpd="sng" algn="ctr">
-                      <a:noFill/>
+                    <a:lnT w="9525" cap="flat" cmpd="sng" algn="ctr">
+                      <a:solidFill>
+                        <a:srgbClr val="D8DFE5"/>
+                      </a:solidFill>
+                      <a:prstDash val="solid"/>
+                      <a:round/>
+                      <a:headEnd type="none" w="med" len="med"/>
+                      <a:tailEnd type="none" w="med" len="med"/>
                     </a:lnT>
                     <a:lnB w="9525" cap="flat" cmpd="sng" algn="ctr">
                       <a:solidFill>
@@ -3782,7 +3656,7 @@
                     <a:bodyPr/>
                     <a:lstStyle/>
                     <a:p>
-                      <a:pPr indent="0" marL="0">
+                      <a:pPr marL="0" indent="0">
                         <a:buNone/>
                       </a:pPr>
                       <a:r>
@@ -3794,7 +3668,7 @@
                           <a:ea typeface="Arial" pitchFamily="34" charset="-122"/>
                           <a:cs typeface="Arial" pitchFamily="34" charset="-120"/>
                         </a:rPr>
-                        <a:t>τ = 0.20 / 0.33</a:t>
+                        <a:t>absolute vs VIKOR τ = 1.000</a:t>
                       </a:r>
                       <a:endParaRPr lang="en-US" sz="1250" dirty="0">
                         <a:latin typeface="Arial" charset="0"/>
@@ -3803,15 +3677,21 @@
                       </a:endParaRPr>
                     </a:p>
                   </a:txBody>
-                  <a:tcPr marL="45720" marR="45720" marT="45720" marB="45720" anchor="ctr">
+                  <a:tcPr marL="45720" marR="45720" anchor="ctr">
                     <a:lnL w="0" cap="flat" cmpd="sng" algn="ctr">
                       <a:noFill/>
                     </a:lnL>
                     <a:lnR w="0" cap="flat" cmpd="sng" algn="ctr">
                       <a:noFill/>
                     </a:lnR>
-                    <a:lnT w="0" cap="flat" cmpd="sng" algn="ctr">
-                      <a:noFill/>
+                    <a:lnT w="9525" cap="flat" cmpd="sng" algn="ctr">
+                      <a:solidFill>
+                        <a:srgbClr val="D8DFE5"/>
+                      </a:solidFill>
+                      <a:prstDash val="solid"/>
+                      <a:round/>
+                      <a:headEnd type="none" w="med" len="med"/>
+                      <a:tailEnd type="none" w="med" len="med"/>
                     </a:lnT>
                     <a:lnB w="9525" cap="flat" cmpd="sng" algn="ctr">
                       <a:solidFill>
@@ -3824,6 +3704,11 @@
                     </a:lnB>
                   </a:tcPr>
                 </a:tc>
+                <a:extLst>
+                  <a:ext uri="{0D108BD9-81ED-4DB2-BD59-A6C34878D82A}">
+                    <a16:rowId xmlns:a16="http://schemas.microsoft.com/office/drawing/2014/main" val="10003"/>
+                  </a:ext>
+                </a:extLst>
               </a:tr>
               <a:tr h="384048">
                 <a:tc>
@@ -3831,7 +3716,7 @@
                     <a:bodyPr/>
                     <a:lstStyle/>
                     <a:p>
-                      <a:pPr indent="0" marL="0">
+                      <a:pPr marL="0" indent="0">
                         <a:buNone/>
                       </a:pPr>
                       <a:r>
@@ -3843,7 +3728,7 @@
                           <a:ea typeface="Arial" pitchFamily="34" charset="-122"/>
                           <a:cs typeface="Arial" pitchFamily="34" charset="-120"/>
                         </a:rPr>
-                        <a:t>Agreement, 2025</a:t>
+                        <a:t>2025 and 2024 adjusted</a:t>
                       </a:r>
                       <a:endParaRPr lang="en-US" sz="1250" dirty="0">
                         <a:latin typeface="Arial" charset="0"/>
@@ -3852,15 +3737,21 @@
                       </a:endParaRPr>
                     </a:p>
                   </a:txBody>
-                  <a:tcPr marL="45720" marR="45720" marT="45720" marB="45720" anchor="ctr">
+                  <a:tcPr marL="45720" marR="45720" anchor="ctr">
                     <a:lnL w="0" cap="flat" cmpd="sng" algn="ctr">
                       <a:noFill/>
                     </a:lnL>
                     <a:lnR w="0" cap="flat" cmpd="sng" algn="ctr">
                       <a:noFill/>
                     </a:lnR>
-                    <a:lnT w="0" cap="flat" cmpd="sng" algn="ctr">
-                      <a:noFill/>
+                    <a:lnT w="9525" cap="flat" cmpd="sng" algn="ctr">
+                      <a:solidFill>
+                        <a:srgbClr val="D8DFE5"/>
+                      </a:solidFill>
+                      <a:prstDash val="solid"/>
+                      <a:round/>
+                      <a:headEnd type="none" w="med" len="med"/>
+                      <a:tailEnd type="none" w="med" len="med"/>
                     </a:lnT>
                     <a:lnB w="9525" cap="flat" cmpd="sng" algn="ctr">
                       <a:solidFill>
@@ -3878,7 +3769,7 @@
                     <a:bodyPr/>
                     <a:lstStyle/>
                     <a:p>
-                      <a:pPr indent="0" marL="0">
+                      <a:pPr marL="0" indent="0">
                         <a:buNone/>
                       </a:pPr>
                       <a:r>
@@ -3890,7 +3781,7 @@
                           <a:ea typeface="Arial" pitchFamily="34" charset="-122"/>
                           <a:cs typeface="Arial" pitchFamily="34" charset="-120"/>
                         </a:rPr>
-                        <a:t>—</a:t>
+                        <a:t>SVC-01 first under every method</a:t>
                       </a:r>
                       <a:endParaRPr lang="en-US" sz="1250" dirty="0">
                         <a:latin typeface="Arial" charset="0"/>
@@ -3899,15 +3790,21 @@
                       </a:endParaRPr>
                     </a:p>
                   </a:txBody>
-                  <a:tcPr marL="45720" marR="45720" marT="45720" marB="45720" anchor="ctr">
+                  <a:tcPr marL="45720" marR="45720" anchor="ctr">
                     <a:lnL w="0" cap="flat" cmpd="sng" algn="ctr">
                       <a:noFill/>
                     </a:lnL>
                     <a:lnR w="0" cap="flat" cmpd="sng" algn="ctr">
                       <a:noFill/>
                     </a:lnR>
-                    <a:lnT w="0" cap="flat" cmpd="sng" algn="ctr">
-                      <a:noFill/>
+                    <a:lnT w="9525" cap="flat" cmpd="sng" algn="ctr">
+                      <a:solidFill>
+                        <a:srgbClr val="D8DFE5"/>
+                      </a:solidFill>
+                      <a:prstDash val="solid"/>
+                      <a:round/>
+                      <a:headEnd type="none" w="med" len="med"/>
+                      <a:tailEnd type="none" w="med" len="med"/>
                     </a:lnT>
                     <a:lnB w="9525" cap="flat" cmpd="sng" algn="ctr">
                       <a:solidFill>
@@ -3925,20 +3822,9 @@
                     <a:bodyPr/>
                     <a:lstStyle/>
                     <a:p>
-                      <a:pPr indent="0" marL="0">
+                      <a:pPr marL="0" indent="0">
                         <a:buNone/>
                       </a:pPr>
-                      <a:r>
-                        <a:rPr lang="en-US" sz="1250" dirty="0">
-                          <a:solidFill>
-                            <a:srgbClr val="14283C"/>
-                          </a:solidFill>
-                          <a:latin typeface="Arial" pitchFamily="34" charset="0"/>
-                          <a:ea typeface="Arial" pitchFamily="34" charset="-122"/>
-                          <a:cs typeface="Arial" pitchFamily="34" charset="-120"/>
-                        </a:rPr>
-                        <a:t>τ = 1.00</a:t>
-                      </a:r>
                       <a:endParaRPr lang="en-US" sz="1250" dirty="0">
                         <a:latin typeface="Arial" charset="0"/>
                         <a:ea typeface="Arial" charset="0"/>
@@ -3946,15 +3832,21 @@
                       </a:endParaRPr>
                     </a:p>
                   </a:txBody>
-                  <a:tcPr marL="45720" marR="45720" marT="45720" marB="45720" anchor="ctr">
+                  <a:tcPr marL="45720" marR="45720" anchor="ctr">
                     <a:lnL w="0" cap="flat" cmpd="sng" algn="ctr">
                       <a:noFill/>
                     </a:lnL>
                     <a:lnR w="0" cap="flat" cmpd="sng" algn="ctr">
                       <a:noFill/>
                     </a:lnR>
-                    <a:lnT w="0" cap="flat" cmpd="sng" algn="ctr">
-                      <a:noFill/>
+                    <a:lnT w="9525" cap="flat" cmpd="sng" algn="ctr">
+                      <a:solidFill>
+                        <a:srgbClr val="D8DFE5"/>
+                      </a:solidFill>
+                      <a:prstDash val="solid"/>
+                      <a:round/>
+                      <a:headEnd type="none" w="med" len="med"/>
+                      <a:tailEnd type="none" w="med" len="med"/>
                     </a:lnT>
                     <a:lnB w="9525" cap="flat" cmpd="sng" algn="ctr">
                       <a:solidFill>
@@ -3967,6 +3859,11 @@
                     </a:lnB>
                   </a:tcPr>
                 </a:tc>
+                <a:extLst>
+                  <a:ext uri="{0D108BD9-81ED-4DB2-BD59-A6C34878D82A}">
+                    <a16:rowId xmlns:a16="http://schemas.microsoft.com/office/drawing/2014/main" val="10004"/>
+                  </a:ext>
+                </a:extLst>
               </a:tr>
             </a:tbl>
           </a:graphicData>
@@ -3991,6 +3888,13 @@
           </a:solidFill>
           <a:ln/>
         </p:spPr>
+        <p:txBody>
+          <a:bodyPr/>
+          <a:lstStyle/>
+          <a:p>
+            <a:endParaRPr lang="en-CH"/>
+          </a:p>
+        </p:txBody>
       </p:sp>
       <p:sp>
         <p:nvSpPr>
@@ -4013,11 +3917,11 @@
           <a:bodyPr wrap="square" lIns="0" tIns="0" rIns="0" bIns="0" rtlCol="0" anchor="ctr"/>
           <a:lstStyle/>
           <a:p>
-            <a:pPr indent="0" marL="0">
-              <a:buNone/>
-            </a:pPr>
-            <a:r>
-              <a:rPr lang="en-US" sz="1000" b="1" spc="200" kern="0" dirty="0">
+            <a:pPr marL="0" indent="0">
+              <a:buNone/>
+            </a:pPr>
+            <a:r>
+              <a:rPr lang="en-US" sz="1000" b="1" kern="0" spc="200" dirty="0">
                 <a:solidFill>
                   <a:srgbClr val="D98E1F"/>
                 </a:solidFill>
@@ -4052,7 +3956,7 @@
           <a:bodyPr wrap="square" lIns="0" tIns="0" rIns="0" bIns="0" rtlCol="0" anchor="t"/>
           <a:lstStyle/>
           <a:p>
-            <a:pPr indent="0" marL="0">
+            <a:pPr marL="0" indent="0">
               <a:lnSpc>
                 <a:spcPct val="112000"/>
               </a:lnSpc>
@@ -4067,7 +3971,7 @@
                 <a:ea typeface="Arial" pitchFamily="34" charset="-122"/>
                 <a:cs typeface="Arial" pitchFamily="34" charset="-120"/>
               </a:rPr>
-              <a:t>Sample-relative methods punish a worst-in-portfolio value however moderate it is absolutely. Absolute-mode TOPSIS measures distance to fixed anchors, so squared aggregation lets strong criteria dilute one concentrated weakness.</a:t>
+              <a:t>Vector normalisation lets SVC-04’s 410-incident load dominate the incident axis. Fixed anchors and VIKOR’s regret register SVC-01’s concentrated structural exposure, the worst patch recency (65.83) and 4,054 unsupported months, at full strength.</a:t>
             </a:r>
             <a:endParaRPr lang="en-US" sz="1050" dirty="0"/>
           </a:p>
@@ -4092,6 +3996,13 @@
           </a:solidFill>
           <a:ln/>
         </p:spPr>
+        <p:txBody>
+          <a:bodyPr/>
+          <a:lstStyle/>
+          <a:p>
+            <a:endParaRPr lang="en-CH"/>
+          </a:p>
+        </p:txBody>
       </p:sp>
       <p:sp>
         <p:nvSpPr>
@@ -4114,11 +4025,11 @@
           <a:bodyPr wrap="square" lIns="0" tIns="0" rIns="0" bIns="0" rtlCol="0" anchor="ctr"/>
           <a:lstStyle/>
           <a:p>
-            <a:pPr indent="0" marL="0">
-              <a:buNone/>
-            </a:pPr>
-            <a:r>
-              <a:rPr lang="en-US" sz="950" b="1" spc="300" kern="0" dirty="0">
+            <a:pPr marL="0" indent="0">
+              <a:buNone/>
+            </a:pPr>
+            <a:r>
+              <a:rPr lang="en-US" sz="950" b="1" kern="0" spc="300" dirty="0">
                 <a:solidFill>
                   <a:srgbClr val="1E7F82"/>
                 </a:solidFill>
@@ -4153,7 +4064,7 @@
           <a:bodyPr wrap="square" lIns="0" tIns="0" rIns="0" bIns="0" rtlCol="0" anchor="t"/>
           <a:lstStyle/>
           <a:p>
-            <a:pPr indent="0" marL="0">
+            <a:pPr marL="0" indent="0">
               <a:buNone/>
             </a:pPr>
             <a:r>
@@ -4165,7 +4076,7 @@
                 <a:ea typeface="Arial" pitchFamily="34" charset="-122"/>
                 <a:cs typeface="Arial" pitchFamily="34" charset="-120"/>
               </a:rPr>
-              <a:t>SVC-06's 2024 debt was concentrated; by 2025 it had broadened in absolute magnitude (VIKOR utility 0.491 → 0.559, regret still capped) and every method converged. Two lenses, one coherent story.</a:t>
+              <a:t>Concentrated structural exposure versus diffuse operational load, separated by 0.004: the framework reports the photo-finish rather than hiding it. By 2025 every method places SVC-01 first.</a:t>
             </a:r>
             <a:endParaRPr lang="en-US" sz="1250" dirty="0"/>
           </a:p>
@@ -4187,6 +4098,7 @@
         <a:solidFill>
           <a:srgbClr val="FFFFFF"/>
         </a:solidFill>
+        <a:effectLst/>
       </p:bgPr>
     </p:bg>
     <p:spTree>
@@ -4224,11 +4136,11 @@
           <a:bodyPr wrap="square" lIns="0" tIns="0" rIns="0" bIns="0" rtlCol="0" anchor="ctr"/>
           <a:lstStyle/>
           <a:p>
-            <a:pPr algn="l" indent="0" marL="0">
-              <a:buNone/>
-            </a:pPr>
-            <a:r>
-              <a:rPr lang="en-US" sz="1100" b="1" spc="300" kern="0" dirty="0">
+            <a:pPr marL="0" indent="0" algn="l">
+              <a:buNone/>
+            </a:pPr>
+            <a:r>
+              <a:rPr lang="en-US" sz="1100" b="1" kern="0" spc="300" dirty="0">
                 <a:solidFill>
                   <a:srgbClr val="5C7186"/>
                 </a:solidFill>
@@ -4263,7 +4175,7 @@
           <a:bodyPr wrap="square" lIns="0" tIns="0" rIns="0" bIns="0" rtlCol="0" anchor="ctr"/>
           <a:lstStyle/>
           <a:p>
-            <a:pPr algn="l" indent="0" marL="0">
+            <a:pPr marL="0" indent="0" algn="l">
               <a:buNone/>
             </a:pPr>
             <a:r>
@@ -4302,7 +4214,7 @@
           <a:bodyPr wrap="square" lIns="0" tIns="0" rIns="0" bIns="0" rtlCol="0" anchor="ctr"/>
           <a:lstStyle/>
           <a:p>
-            <a:pPr indent="0" marL="0">
+            <a:pPr marL="0" indent="0">
               <a:buNone/>
             </a:pPr>
             <a:r>
@@ -4384,7 +4296,7 @@
                 <a:ea typeface="Arial" pitchFamily="34" charset="-122"/>
                 <a:cs typeface="Arial" pitchFamily="34" charset="-120"/>
               </a:rPr>
-              <a:t>Non-compensatory regret catches concentrated deficiencies, often the signal that matters most in debt work</a:t>
+              <a:t>VIKOR's regret and the absolute anchor both flag SVC-01's concentrated structural exposure, which distance aggregation alone underweights</a:t>
             </a:r>
             <a:endParaRPr lang="en-US" sz="1350" dirty="0"/>
           </a:p>
@@ -4411,7 +4323,7 @@
           <a:bodyPr wrap="square" lIns="0" tIns="0" rIns="0" bIns="0" rtlCol="0" anchor="ctr"/>
           <a:lstStyle/>
           <a:p>
-            <a:pPr indent="0" marL="0">
+            <a:pPr marL="0" indent="0">
               <a:buNone/>
             </a:pPr>
             <a:r>
@@ -4469,7 +4381,7 @@
                 <a:ea typeface="Arial" pitchFamily="34" charset="-122"/>
                 <a:cs typeface="Arial" pitchFamily="34" charset="-120"/>
               </a:rPr>
-              <a:t>Rank-reversal free by construction: fixed bounds and anchors (García-Cascales &amp; Lamata 2012; Yang 2020)</a:t>
+              <a:t>Rank-reversal free by construction: every leave-one-out removal preserved, where the classic top rank flips (García-Cascales &amp; Lamata 2012; Yang 2020)</a:t>
             </a:r>
             <a:endParaRPr lang="en-US" sz="1350" dirty="0"/>
           </a:p>
@@ -4542,6 +4454,13 @@
           </a:solidFill>
           <a:ln/>
         </p:spPr>
+        <p:txBody>
+          <a:bodyPr/>
+          <a:lstStyle/>
+          <a:p>
+            <a:endParaRPr lang="en-CH"/>
+          </a:p>
+        </p:txBody>
       </p:sp>
       <p:sp>
         <p:nvSpPr>
@@ -4564,11 +4483,11 @@
           <a:bodyPr wrap="square" lIns="0" tIns="0" rIns="0" bIns="0" rtlCol="0" anchor="ctr"/>
           <a:lstStyle/>
           <a:p>
-            <a:pPr indent="0" marL="0">
-              <a:buNone/>
-            </a:pPr>
-            <a:r>
-              <a:rPr lang="en-US" sz="950" b="1" spc="300" kern="0" dirty="0">
+            <a:pPr marL="0" indent="0">
+              <a:buNone/>
+            </a:pPr>
+            <a:r>
+              <a:rPr lang="en-US" sz="950" b="1" kern="0" spc="300" dirty="0">
                 <a:solidFill>
                   <a:srgbClr val="1E7F82"/>
                 </a:solidFill>
@@ -4603,7 +4522,7 @@
           <a:bodyPr wrap="square" lIns="0" tIns="0" rIns="0" bIns="0" rtlCol="0" anchor="t"/>
           <a:lstStyle/>
           <a:p>
-            <a:pPr indent="0" marL="0">
+            <a:pPr marL="0" indent="0">
               <a:buNone/>
             </a:pPr>
             <a:r>
@@ -4615,7 +4534,7 @@
                 <a:ea typeface="Arial" pitchFamily="34" charset="-122"/>
                 <a:cs typeface="Arial" pitchFamily="34" charset="-120"/>
               </a:rPr>
-              <a:t>Whether SVC-04 or SVC-06 deserves the first remediation slot is a judgement about whether debt dimensions are compensatory. The framework informs that judgement; it does not settle it, and saying so is a feature.</a:t>
+              <a:t>The single top rank is contested within the SVC-01, SVC-04, SVC-06 cluster across the weight space: a compensability judgement the framework informs but does not settle, and saying so is a feature.</a:t>
             </a:r>
             <a:endParaRPr lang="en-US" sz="1250" dirty="0"/>
           </a:p>
@@ -4637,6 +4556,7 @@
         <a:solidFill>
           <a:srgbClr val="FFFFFF"/>
         </a:solidFill>
+        <a:effectLst/>
       </p:bgPr>
     </p:bg>
     <p:spTree>
@@ -4674,11 +4594,11 @@
           <a:bodyPr wrap="square" lIns="0" tIns="0" rIns="0" bIns="0" rtlCol="0" anchor="ctr"/>
           <a:lstStyle/>
           <a:p>
-            <a:pPr algn="l" indent="0" marL="0">
-              <a:buNone/>
-            </a:pPr>
-            <a:r>
-              <a:rPr lang="en-US" sz="1100" b="1" spc="300" kern="0" dirty="0">
+            <a:pPr marL="0" indent="0" algn="l">
+              <a:buNone/>
+            </a:pPr>
+            <a:r>
+              <a:rPr lang="en-US" sz="1100" b="1" kern="0" spc="300" dirty="0">
                 <a:solidFill>
                   <a:srgbClr val="5C7186"/>
                 </a:solidFill>
@@ -4713,7 +4633,7 @@
           <a:bodyPr wrap="square" lIns="0" tIns="0" rIns="0" bIns="0" rtlCol="0" anchor="ctr"/>
           <a:lstStyle/>
           <a:p>
-            <a:pPr algn="l" indent="0" marL="0">
+            <a:pPr marL="0" indent="0" algn="l">
               <a:buNone/>
             </a:pPr>
             <a:r>
@@ -4752,7 +4672,7 @@
           <a:bodyPr wrap="square" lIns="0" tIns="0" rIns="0" bIns="0" rtlCol="0" anchor="ctr"/>
           <a:lstStyle/>
           <a:p>
-            <a:pPr indent="0" marL="0">
+            <a:pPr marL="0" indent="0">
               <a:buNone/>
             </a:pPr>
             <a:r>
@@ -4766,9 +4686,6 @@
               </a:rPr>
               <a:t>Q  </a:t>
             </a:r>
-            <a:pPr indent="0" marL="0">
-              <a:buNone/>
-            </a:pPr>
             <a:r>
               <a:rPr lang="en-US" sz="1500" b="1" dirty="0">
                 <a:solidFill>
@@ -4805,7 +4722,7 @@
           <a:bodyPr wrap="square" lIns="0" tIns="0" rIns="0" bIns="0" rtlCol="0" anchor="t"/>
           <a:lstStyle/>
           <a:p>
-            <a:pPr indent="0" marL="0">
+            <a:pPr marL="0" indent="0">
               <a:lnSpc>
                 <a:spcPct val="112000"/>
               </a:lnSpc>
@@ -4847,7 +4764,7 @@
           <a:bodyPr wrap="square" lIns="0" tIns="0" rIns="0" bIns="0" rtlCol="0" anchor="ctr"/>
           <a:lstStyle/>
           <a:p>
-            <a:pPr indent="0" marL="0">
+            <a:pPr marL="0" indent="0">
               <a:buNone/>
             </a:pPr>
             <a:r>
@@ -4861,9 +4778,6 @@
               </a:rPr>
               <a:t>Q  </a:t>
             </a:r>
-            <a:pPr indent="0" marL="0">
-              <a:buNone/>
-            </a:pPr>
             <a:r>
               <a:rPr lang="en-US" sz="1500" b="1" dirty="0">
                 <a:solidFill>
@@ -4900,7 +4814,7 @@
           <a:bodyPr wrap="square" lIns="0" tIns="0" rIns="0" bIns="0" rtlCol="0" anchor="t"/>
           <a:lstStyle/>
           <a:p>
-            <a:pPr indent="0" marL="0">
+            <a:pPr marL="0" indent="0">
               <a:lnSpc>
                 <a:spcPct val="112000"/>
               </a:lnSpc>
@@ -4942,7 +4856,7 @@
           <a:bodyPr wrap="square" lIns="0" tIns="0" rIns="0" bIns="0" rtlCol="0" anchor="ctr"/>
           <a:lstStyle/>
           <a:p>
-            <a:pPr indent="0" marL="0">
+            <a:pPr marL="0" indent="0">
               <a:buNone/>
             </a:pPr>
             <a:r>
@@ -4956,9 +4870,6 @@
               </a:rPr>
               <a:t>Q  </a:t>
             </a:r>
-            <a:pPr indent="0" marL="0">
-              <a:buNone/>
-            </a:pPr>
             <a:r>
               <a:rPr lang="en-US" sz="1500" b="1" dirty="0">
                 <a:solidFill>
@@ -4995,7 +4906,7 @@
           <a:bodyPr wrap="square" lIns="0" tIns="0" rIns="0" bIns="0" rtlCol="0" anchor="t"/>
           <a:lstStyle/>
           <a:p>
-            <a:pPr indent="0" marL="0">
+            <a:pPr marL="0" indent="0">
               <a:lnSpc>
                 <a:spcPct val="112000"/>
               </a:lnSpc>
@@ -5032,6 +4943,7 @@
         <a:solidFill>
           <a:srgbClr val="FFFFFF"/>
         </a:solidFill>
+        <a:effectLst/>
       </p:bgPr>
     </p:bg>
     <p:spTree>
@@ -5069,11 +4981,11 @@
           <a:bodyPr wrap="square" lIns="0" tIns="0" rIns="0" bIns="0" rtlCol="0" anchor="ctr"/>
           <a:lstStyle/>
           <a:p>
-            <a:pPr algn="l" indent="0" marL="0">
-              <a:buNone/>
-            </a:pPr>
-            <a:r>
-              <a:rPr lang="en-US" sz="1100" b="1" spc="300" kern="0" dirty="0">
+            <a:pPr marL="0" indent="0" algn="l">
+              <a:buNone/>
+            </a:pPr>
+            <a:r>
+              <a:rPr lang="en-US" sz="1100" b="1" kern="0" spc="300" dirty="0">
                 <a:solidFill>
                   <a:srgbClr val="5C7186"/>
                 </a:solidFill>
@@ -5108,7 +5020,7 @@
           <a:bodyPr wrap="square" lIns="0" tIns="0" rIns="0" bIns="0" rtlCol="0" anchor="ctr"/>
           <a:lstStyle/>
           <a:p>
-            <a:pPr algn="l" indent="0" marL="0">
+            <a:pPr marL="0" indent="0" algn="l">
               <a:buNone/>
             </a:pPr>
             <a:r>
@@ -5147,7 +5059,7 @@
           <a:bodyPr wrap="square" lIns="0" tIns="0" rIns="0" bIns="0" rtlCol="0" anchor="ctr"/>
           <a:lstStyle/>
           <a:p>
-            <a:pPr indent="0" marL="0">
+            <a:pPr marL="0" indent="0">
               <a:buNone/>
             </a:pPr>
             <a:r>
@@ -5161,9 +5073,6 @@
               </a:rPr>
               <a:t>Q  </a:t>
             </a:r>
-            <a:pPr indent="0" marL="0">
-              <a:buNone/>
-            </a:pPr>
             <a:r>
               <a:rPr lang="en-US" sz="1500" b="1" dirty="0">
                 <a:solidFill>
@@ -5200,7 +5109,7 @@
           <a:bodyPr wrap="square" lIns="0" tIns="0" rIns="0" bIns="0" rtlCol="0" anchor="t"/>
           <a:lstStyle/>
           <a:p>
-            <a:pPr indent="0" marL="0">
+            <a:pPr marL="0" indent="0">
               <a:lnSpc>
                 <a:spcPct val="112000"/>
               </a:lnSpc>
@@ -5215,7 +5124,7 @@
                 <a:ea typeface="Arial" pitchFamily="34" charset="-122"/>
                 <a:cs typeface="Arial" pitchFamily="34" charset="-120"/>
               </a:rPr>
-              <a:t>Yes, and they are declared as a practitioner assumption. That is why the evaluation does not depend on them: 20,000 Dirichlet-sampled weightings show the extreme priorities hold under any admissible weighting.</a:t>
+              <a:t>Yes, and they are declared as a practitioner assumption. That is why the evaluation does not depend on them: across 20,000 Dirichlet-sampled weightings the lowest priority holds in 98.3% of draws and rank 1 stays inside the same three-service cluster in all of them.</a:t>
             </a:r>
             <a:endParaRPr lang="en-US" sz="1250" dirty="0"/>
           </a:p>
@@ -5242,7 +5151,7 @@
           <a:bodyPr wrap="square" lIns="0" tIns="0" rIns="0" bIns="0" rtlCol="0" anchor="ctr"/>
           <a:lstStyle/>
           <a:p>
-            <a:pPr indent="0" marL="0">
+            <a:pPr marL="0" indent="0">
               <a:buNone/>
             </a:pPr>
             <a:r>
@@ -5256,9 +5165,6 @@
               </a:rPr>
               <a:t>Q  </a:t>
             </a:r>
-            <a:pPr indent="0" marL="0">
-              <a:buNone/>
-            </a:pPr>
             <a:r>
               <a:rPr lang="en-US" sz="1500" b="1" dirty="0">
                 <a:solidFill>
@@ -5295,7 +5201,7 @@
           <a:bodyPr wrap="square" lIns="0" tIns="0" rIns="0" bIns="0" rtlCol="0" anchor="t"/>
           <a:lstStyle/>
           <a:p>
-            <a:pPr indent="0" marL="0">
+            <a:pPr marL="0" indent="0">
               <a:lnSpc>
                 <a:spcPct val="112000"/>
               </a:lnSpc>
@@ -5335,6 +5241,13 @@
           </a:solidFill>
           <a:ln/>
         </p:spPr>
+        <p:txBody>
+          <a:bodyPr/>
+          <a:lstStyle/>
+          <a:p>
+            <a:endParaRPr lang="en-CH"/>
+          </a:p>
+        </p:txBody>
       </p:sp>
       <p:sp>
         <p:nvSpPr>
@@ -5357,11 +5270,11 @@
           <a:bodyPr wrap="square" lIns="0" tIns="0" rIns="0" bIns="0" rtlCol="0" anchor="ctr"/>
           <a:lstStyle/>
           <a:p>
-            <a:pPr indent="0" marL="0">
-              <a:buNone/>
-            </a:pPr>
-            <a:r>
-              <a:rPr lang="en-US" sz="950" b="1" spc="300" kern="0" dirty="0">
+            <a:pPr marL="0" indent="0">
+              <a:buNone/>
+            </a:pPr>
+            <a:r>
+              <a:rPr lang="en-US" sz="950" b="1" kern="0" spc="300" dirty="0">
                 <a:solidFill>
                   <a:srgbClr val="1E7F82"/>
                 </a:solidFill>
@@ -5396,7 +5309,7 @@
           <a:bodyPr wrap="square" lIns="0" tIns="0" rIns="0" bIns="0" rtlCol="0" anchor="t"/>
           <a:lstStyle/>
           <a:p>
-            <a:pPr indent="0" marL="0">
+            <a:pPr marL="0" indent="0">
               <a:buNone/>
             </a:pPr>
             <a:r>
@@ -5430,6 +5343,7 @@
         <a:solidFill>
           <a:srgbClr val="FFFFFF"/>
         </a:solidFill>
+        <a:effectLst/>
       </p:bgPr>
     </p:bg>
     <p:spTree>
@@ -5467,11 +5381,11 @@
           <a:bodyPr wrap="square" lIns="0" tIns="0" rIns="0" bIns="0" rtlCol="0" anchor="ctr"/>
           <a:lstStyle/>
           <a:p>
-            <a:pPr algn="l" indent="0" marL="0">
-              <a:buNone/>
-            </a:pPr>
-            <a:r>
-              <a:rPr lang="en-US" sz="1100" b="1" spc="300" kern="0" dirty="0">
+            <a:pPr marL="0" indent="0" algn="l">
+              <a:buNone/>
+            </a:pPr>
+            <a:r>
+              <a:rPr lang="en-US" sz="1100" b="1" kern="0" spc="300" dirty="0">
                 <a:solidFill>
                   <a:srgbClr val="5C7186"/>
                 </a:solidFill>
@@ -5506,7 +5420,7 @@
           <a:bodyPr wrap="square" lIns="0" tIns="0" rIns="0" bIns="0" rtlCol="0" anchor="ctr"/>
           <a:lstStyle/>
           <a:p>
-            <a:pPr algn="l" indent="0" marL="0">
+            <a:pPr marL="0" indent="0" algn="l">
               <a:buNone/>
             </a:pPr>
             <a:r>
@@ -5543,6 +5457,13 @@
           </a:solidFill>
           <a:ln/>
         </p:spPr>
+        <p:txBody>
+          <a:bodyPr/>
+          <a:lstStyle/>
+          <a:p>
+            <a:endParaRPr lang="en-CH"/>
+          </a:p>
+        </p:txBody>
       </p:sp>
       <p:sp>
         <p:nvSpPr>
@@ -5565,7 +5486,7 @@
           <a:bodyPr wrap="square" lIns="0" tIns="0" rIns="0" bIns="0" rtlCol="0" anchor="ctr"/>
           <a:lstStyle/>
           <a:p>
-            <a:pPr algn="ctr" indent="0" marL="0">
+            <a:pPr marL="0" indent="0" algn="ctr">
               <a:buNone/>
             </a:pPr>
             <a:r>
@@ -5604,7 +5525,7 @@
           <a:bodyPr wrap="square" lIns="0" tIns="0" rIns="0" bIns="0" rtlCol="0" anchor="t"/>
           <a:lstStyle/>
           <a:p>
-            <a:pPr indent="0" marL="0">
+            <a:pPr marL="0" indent="0">
               <a:lnSpc>
                 <a:spcPct val="112000"/>
               </a:lnSpc>
@@ -5621,14 +5542,116 @@
               </a:rPr>
               <a:t>First application: </a:t>
             </a:r>
-            <a:pPr indent="0" marL="0">
+            <a:r>
+              <a:rPr lang="en-US" sz="1400" dirty="0">
+                <a:solidFill>
+                  <a:srgbClr val="14283C"/>
+                </a:solidFill>
+                <a:latin typeface="Arial" pitchFamily="34" charset="0"/>
+                <a:ea typeface="Arial" pitchFamily="34" charset="-122"/>
+                <a:cs typeface="Arial" pitchFamily="34" charset="-120"/>
+              </a:rPr>
+              <a:t>(to the best of current knowledge) of TOPSIS to live ITSM/CMDB records for TD prioritisation in financial trading IT, closing the gap Lenarduzzi et al. identify field-wide</a:t>
+            </a:r>
+            <a:endParaRPr lang="en-US" sz="1400" dirty="0"/>
+          </a:p>
+        </p:txBody>
+      </p:sp>
+      <p:sp>
+        <p:nvSpPr>
+          <p:cNvPr id="7" name="Shape 5"/>
+          <p:cNvSpPr/>
+          <p:nvPr/>
+        </p:nvSpPr>
+        <p:spPr>
+          <a:xfrm>
+            <a:off x="685800" y="3099816"/>
+            <a:ext cx="457200" cy="457200"/>
+          </a:xfrm>
+          <a:prstGeom prst="ellipse">
+            <a:avLst/>
+          </a:prstGeom>
+          <a:solidFill>
+            <a:srgbClr val="14283C"/>
+          </a:solidFill>
+          <a:ln/>
+        </p:spPr>
+        <p:txBody>
+          <a:bodyPr/>
+          <a:lstStyle/>
+          <a:p>
+            <a:endParaRPr lang="en-CH"/>
+          </a:p>
+        </p:txBody>
+      </p:sp>
+      <p:sp>
+        <p:nvSpPr>
+          <p:cNvPr id="8" name="Text 6"/>
+          <p:cNvSpPr/>
+          <p:nvPr/>
+        </p:nvSpPr>
+        <p:spPr>
+          <a:xfrm>
+            <a:off x="685800" y="3099816"/>
+            <a:ext cx="457200" cy="457200"/>
+          </a:xfrm>
+          <a:prstGeom prst="rect">
+            <a:avLst/>
+          </a:prstGeom>
+          <a:noFill/>
+          <a:ln/>
+        </p:spPr>
+        <p:txBody>
+          <a:bodyPr wrap="square" lIns="0" tIns="0" rIns="0" bIns="0" rtlCol="0" anchor="ctr"/>
+          <a:lstStyle/>
+          <a:p>
+            <a:pPr marL="0" indent="0" algn="ctr">
+              <a:buNone/>
+            </a:pPr>
+            <a:r>
+              <a:rPr lang="en-US" sz="1700" b="1" dirty="0">
+                <a:solidFill>
+                  <a:srgbClr val="FFFFFF"/>
+                </a:solidFill>
+                <a:latin typeface="Courier New" pitchFamily="34" charset="0"/>
+                <a:ea typeface="Courier New" pitchFamily="34" charset="-122"/>
+                <a:cs typeface="Courier New" pitchFamily="34" charset="-120"/>
+              </a:rPr>
+              <a:t>2</a:t>
+            </a:r>
+            <a:endParaRPr lang="en-US" sz="1700" dirty="0"/>
+          </a:p>
+        </p:txBody>
+      </p:sp>
+      <p:sp>
+        <p:nvSpPr>
+          <p:cNvPr id="9" name="Text 7"/>
+          <p:cNvSpPr/>
+          <p:nvPr/>
+        </p:nvSpPr>
+        <p:spPr>
+          <a:xfrm>
+            <a:off x="1371600" y="3044952"/>
+            <a:ext cx="9966960" cy="1005840"/>
+          </a:xfrm>
+          <a:prstGeom prst="rect">
+            <a:avLst/>
+          </a:prstGeom>
+          <a:noFill/>
+          <a:ln/>
+        </p:spPr>
+        <p:txBody>
+          <a:bodyPr wrap="square" lIns="0" tIns="0" rIns="0" bIns="0" rtlCol="0" anchor="t"/>
+          <a:lstStyle/>
+          <a:p>
+            <a:pPr marL="0" indent="0">
               <a:lnSpc>
                 <a:spcPct val="112000"/>
               </a:lnSpc>
               <a:buNone/>
             </a:pPr>
             <a:r>
-              <a:rPr lang="en-US" sz="1400" dirty="0">
+              <a:rPr lang="en-US" sz="1400" b="1" dirty="0">
                 <a:solidFill>
                   <a:srgbClr val="14283C"/>
                 </a:solidFill>
@@ -5636,7 +5659,18 @@
                 <a:ea typeface="Arial" pitchFamily="34" charset="-122"/>
                 <a:cs typeface="Arial" pitchFamily="34" charset="-120"/>
               </a:rPr>
-              <a:t>(to the best of current knowledge) of TOPSIS to live ITSM/CMDB records for TD prioritisation in financial trading IT, closing the gap Lenarduzzi et al. identify field-wide</a:t>
+              <a:t>An operationally defined indicator set: </a:t>
+            </a:r>
+            <a:r>
+              <a:rPr lang="en-US" sz="1400" dirty="0">
+                <a:solidFill>
+                  <a:srgbClr val="14283C"/>
+                </a:solidFill>
+                <a:latin typeface="Arial" pitchFamily="34" charset="0"/>
+                <a:ea typeface="Arial" pitchFamily="34" charset="-122"/>
+                <a:cs typeface="Arial" pitchFamily="34" charset="-120"/>
+              </a:rPr>
+              <a:t>with explicit literature mapping to debt dimensions, plus evidence of its behaviour under a four-strand evaluation</a:t>
             </a:r>
             <a:endParaRPr lang="en-US" sz="1400" dirty="0"/>
           </a:p>
@@ -5644,33 +5678,40 @@
       </p:sp>
       <p:sp>
         <p:nvSpPr>
-          <p:cNvPr id="7" name="Shape 5"/>
-          <p:cNvSpPr/>
-          <p:nvPr/>
-        </p:nvSpPr>
-        <p:spPr>
-          <a:xfrm>
-            <a:off x="685800" y="3099816"/>
+          <p:cNvPr id="10" name="Shape 8"/>
+          <p:cNvSpPr/>
+          <p:nvPr/>
+        </p:nvSpPr>
+        <p:spPr>
+          <a:xfrm>
+            <a:off x="685800" y="4270248"/>
             <a:ext cx="457200" cy="457200"/>
           </a:xfrm>
           <a:prstGeom prst="ellipse">
             <a:avLst/>
           </a:prstGeom>
           <a:solidFill>
-            <a:srgbClr val="14283C"/>
+            <a:srgbClr val="D98E1F"/>
           </a:solidFill>
           <a:ln/>
         </p:spPr>
-      </p:sp>
-      <p:sp>
-        <p:nvSpPr>
-          <p:cNvPr id="8" name="Text 6"/>
-          <p:cNvSpPr/>
-          <p:nvPr/>
-        </p:nvSpPr>
-        <p:spPr>
-          <a:xfrm>
-            <a:off x="685800" y="3099816"/>
+        <p:txBody>
+          <a:bodyPr/>
+          <a:lstStyle/>
+          <a:p>
+            <a:endParaRPr lang="en-CH"/>
+          </a:p>
+        </p:txBody>
+      </p:sp>
+      <p:sp>
+        <p:nvSpPr>
+          <p:cNvPr id="11" name="Text 9"/>
+          <p:cNvSpPr/>
+          <p:nvPr/>
+        </p:nvSpPr>
+        <p:spPr>
+          <a:xfrm>
+            <a:off x="685800" y="4270248"/>
             <a:ext cx="457200" cy="457200"/>
           </a:xfrm>
           <a:prstGeom prst="rect">
@@ -5683,7 +5724,7 @@
           <a:bodyPr wrap="square" lIns="0" tIns="0" rIns="0" bIns="0" rtlCol="0" anchor="ctr"/>
           <a:lstStyle/>
           <a:p>
-            <a:pPr algn="ctr" indent="0" marL="0">
+            <a:pPr marL="0" indent="0" algn="ctr">
               <a:buNone/>
             </a:pPr>
             <a:r>
@@ -5695,7 +5736,7 @@
                 <a:ea typeface="Courier New" pitchFamily="34" charset="-122"/>
                 <a:cs typeface="Courier New" pitchFamily="34" charset="-120"/>
               </a:rPr>
-              <a:t>2</a:t>
+              <a:t>3</a:t>
             </a:r>
             <a:endParaRPr lang="en-US" sz="1700" dirty="0"/>
           </a:p>
@@ -5703,13 +5744,13 @@
       </p:sp>
       <p:sp>
         <p:nvSpPr>
-          <p:cNvPr id="9" name="Text 7"/>
-          <p:cNvSpPr/>
-          <p:nvPr/>
-        </p:nvSpPr>
-        <p:spPr>
-          <a:xfrm>
-            <a:off x="1371600" y="3044952"/>
+          <p:cNvPr id="12" name="Text 10"/>
+          <p:cNvSpPr/>
+          <p:nvPr/>
+        </p:nvSpPr>
+        <p:spPr>
+          <a:xfrm>
+            <a:off x="1371600" y="4215384"/>
             <a:ext cx="9966960" cy="1005840"/>
           </a:xfrm>
           <a:prstGeom prst="rect">
@@ -5722,7 +5763,7 @@
           <a:bodyPr wrap="square" lIns="0" tIns="0" rIns="0" bIns="0" rtlCol="0" anchor="t"/>
           <a:lstStyle/>
           <a:p>
-            <a:pPr indent="0" marL="0">
+            <a:pPr marL="0" indent="0">
               <a:lnSpc>
                 <a:spcPct val="112000"/>
               </a:lnSpc>
@@ -5737,14 +5778,8 @@
                 <a:ea typeface="Arial" pitchFamily="34" charset="-122"/>
                 <a:cs typeface="Arial" pitchFamily="34" charset="-120"/>
               </a:rPr>
-              <a:t>An operationally defined indicator set: </a:t>
-            </a:r>
-            <a:pPr indent="0" marL="0">
-              <a:lnSpc>
-                <a:spcPct val="112000"/>
-              </a:lnSpc>
-              <a:buNone/>
-            </a:pPr>
+              <a:t>A methodological finding of independent interest: </a:t>
+            </a:r>
             <a:r>
               <a:rPr lang="en-US" sz="1400" dirty="0">
                 <a:solidFill>
@@ -5754,7 +5789,7 @@
                 <a:ea typeface="Arial" pitchFamily="34" charset="-122"/>
                 <a:cs typeface="Arial" pitchFamily="34" charset="-120"/>
               </a:rPr>
-              <a:t>with explicit literature mapping to debt dimensions, plus evidence of its behaviour under a four-strand evaluation</a:t>
+              <a:t>sample-relative and absolutely anchored methods respond differently to concentrated debt profiles, consequential for the top of a ranking</a:t>
             </a:r>
             <a:endParaRPr lang="en-US" sz="1400" dirty="0"/>
           </a:p>
@@ -5762,34 +5797,41 @@
       </p:sp>
       <p:sp>
         <p:nvSpPr>
-          <p:cNvPr id="10" name="Shape 8"/>
-          <p:cNvSpPr/>
-          <p:nvPr/>
-        </p:nvSpPr>
-        <p:spPr>
-          <a:xfrm>
-            <a:off x="685800" y="4270248"/>
-            <a:ext cx="457200" cy="457200"/>
-          </a:xfrm>
-          <a:prstGeom prst="ellipse">
+          <p:cNvPr id="13" name="Shape 11"/>
+          <p:cNvSpPr/>
+          <p:nvPr/>
+        </p:nvSpPr>
+        <p:spPr>
+          <a:xfrm>
+            <a:off x="685800" y="5577840"/>
+            <a:ext cx="10789920" cy="713232"/>
+          </a:xfrm>
+          <a:prstGeom prst="rect">
             <a:avLst/>
           </a:prstGeom>
           <a:solidFill>
-            <a:srgbClr val="D98E1F"/>
+            <a:srgbClr val="F2F7F6"/>
           </a:solidFill>
           <a:ln/>
         </p:spPr>
-      </p:sp>
-      <p:sp>
-        <p:nvSpPr>
-          <p:cNvPr id="11" name="Text 9"/>
-          <p:cNvSpPr/>
-          <p:nvPr/>
-        </p:nvSpPr>
-        <p:spPr>
-          <a:xfrm>
-            <a:off x="685800" y="4270248"/>
-            <a:ext cx="457200" cy="457200"/>
+        <p:txBody>
+          <a:bodyPr/>
+          <a:lstStyle/>
+          <a:p>
+            <a:endParaRPr lang="en-CH"/>
+          </a:p>
+        </p:txBody>
+      </p:sp>
+      <p:sp>
+        <p:nvSpPr>
+          <p:cNvPr id="14" name="Text 12"/>
+          <p:cNvSpPr/>
+          <p:nvPr/>
+        </p:nvSpPr>
+        <p:spPr>
+          <a:xfrm>
+            <a:off x="886968" y="5650992"/>
+            <a:ext cx="10424160" cy="201168"/>
           </a:xfrm>
           <a:prstGeom prst="rect">
             <a:avLst/>
@@ -5801,34 +5843,34 @@
           <a:bodyPr wrap="square" lIns="0" tIns="0" rIns="0" bIns="0" rtlCol="0" anchor="ctr"/>
           <a:lstStyle/>
           <a:p>
-            <a:pPr algn="ctr" indent="0" marL="0">
-              <a:buNone/>
-            </a:pPr>
-            <a:r>
-              <a:rPr lang="en-US" sz="1700" b="1" dirty="0">
-                <a:solidFill>
-                  <a:srgbClr val="FFFFFF"/>
+            <a:pPr marL="0" indent="0">
+              <a:buNone/>
+            </a:pPr>
+            <a:r>
+              <a:rPr lang="en-US" sz="950" b="1" kern="0" spc="300" dirty="0">
+                <a:solidFill>
+                  <a:srgbClr val="1E7F82"/>
                 </a:solidFill>
                 <a:latin typeface="Courier New" pitchFamily="34" charset="0"/>
                 <a:ea typeface="Courier New" pitchFamily="34" charset="-122"/>
                 <a:cs typeface="Courier New" pitchFamily="34" charset="-120"/>
               </a:rPr>
-              <a:t>3</a:t>
-            </a:r>
-            <a:endParaRPr lang="en-US" sz="1700" dirty="0"/>
-          </a:p>
-        </p:txBody>
-      </p:sp>
-      <p:sp>
-        <p:nvSpPr>
-          <p:cNvPr id="12" name="Text 10"/>
-          <p:cNvSpPr/>
-          <p:nvPr/>
-        </p:nvSpPr>
-        <p:spPr>
-          <a:xfrm>
-            <a:off x="1371600" y="4215384"/>
-            <a:ext cx="9966960" cy="1005840"/>
+              <a:t>TAKEAWAY</a:t>
+            </a:r>
+            <a:endParaRPr lang="en-US" sz="950" dirty="0"/>
+          </a:p>
+        </p:txBody>
+      </p:sp>
+      <p:sp>
+        <p:nvSpPr>
+          <p:cNvPr id="15" name="Text 13"/>
+          <p:cNvSpPr/>
+          <p:nvPr/>
+        </p:nvSpPr>
+        <p:spPr>
+          <a:xfrm>
+            <a:off x="886968" y="5852160"/>
+            <a:ext cx="10424160" cy="384048"/>
           </a:xfrm>
           <a:prstGeom prst="rect">
             <a:avLst/>
@@ -5840,14 +5882,11 @@
           <a:bodyPr wrap="square" lIns="0" tIns="0" rIns="0" bIns="0" rtlCol="0" anchor="t"/>
           <a:lstStyle/>
           <a:p>
-            <a:pPr indent="0" marL="0">
-              <a:lnSpc>
-                <a:spcPct val="112000"/>
-              </a:lnSpc>
-              <a:buNone/>
-            </a:pPr>
-            <a:r>
-              <a:rPr lang="en-US" sz="1400" b="1" dirty="0">
+            <a:pPr marL="0" indent="0">
+              <a:buNone/>
+            </a:pPr>
+            <a:r>
+              <a:rPr lang="en-US" sz="1250" dirty="0">
                 <a:solidFill>
                   <a:srgbClr val="14283C"/>
                 </a:solidFill>
@@ -5855,122 +5894,7 @@
                 <a:ea typeface="Arial" pitchFamily="34" charset="-122"/>
                 <a:cs typeface="Arial" pitchFamily="34" charset="-120"/>
               </a:rPr>
-              <a:t>A methodological finding of independent interest: </a:t>
-            </a:r>
-            <a:pPr indent="0" marL="0">
-              <a:lnSpc>
-                <a:spcPct val="112000"/>
-              </a:lnSpc>
-              <a:buNone/>
-            </a:pPr>
-            <a:r>
-              <a:rPr lang="en-US" sz="1400" dirty="0">
-                <a:solidFill>
-                  <a:srgbClr val="14283C"/>
-                </a:solidFill>
-                <a:latin typeface="Arial" pitchFamily="34" charset="0"/>
-                <a:ea typeface="Arial" pitchFamily="34" charset="-122"/>
-                <a:cs typeface="Arial" pitchFamily="34" charset="-120"/>
-              </a:rPr>
-              <a:t>sample-relative and absolutely anchored methods respond differently to concentrated debt profiles, consequential for the top of a ranking</a:t>
-            </a:r>
-            <a:endParaRPr lang="en-US" sz="1400" dirty="0"/>
-          </a:p>
-        </p:txBody>
-      </p:sp>
-      <p:sp>
-        <p:nvSpPr>
-          <p:cNvPr id="13" name="Shape 11"/>
-          <p:cNvSpPr/>
-          <p:nvPr/>
-        </p:nvSpPr>
-        <p:spPr>
-          <a:xfrm>
-            <a:off x="685800" y="5577840"/>
-            <a:ext cx="10789920" cy="713232"/>
-          </a:xfrm>
-          <a:prstGeom prst="rect">
-            <a:avLst/>
-          </a:prstGeom>
-          <a:solidFill>
-            <a:srgbClr val="F2F7F6"/>
-          </a:solidFill>
-          <a:ln/>
-        </p:spPr>
-      </p:sp>
-      <p:sp>
-        <p:nvSpPr>
-          <p:cNvPr id="14" name="Text 12"/>
-          <p:cNvSpPr/>
-          <p:nvPr/>
-        </p:nvSpPr>
-        <p:spPr>
-          <a:xfrm>
-            <a:off x="886968" y="5650992"/>
-            <a:ext cx="10424160" cy="201168"/>
-          </a:xfrm>
-          <a:prstGeom prst="rect">
-            <a:avLst/>
-          </a:prstGeom>
-          <a:noFill/>
-          <a:ln/>
-        </p:spPr>
-        <p:txBody>
-          <a:bodyPr wrap="square" lIns="0" tIns="0" rIns="0" bIns="0" rtlCol="0" anchor="ctr"/>
-          <a:lstStyle/>
-          <a:p>
-            <a:pPr indent="0" marL="0">
-              <a:buNone/>
-            </a:pPr>
-            <a:r>
-              <a:rPr lang="en-US" sz="950" b="1" spc="300" kern="0" dirty="0">
-                <a:solidFill>
-                  <a:srgbClr val="1E7F82"/>
-                </a:solidFill>
-                <a:latin typeface="Courier New" pitchFamily="34" charset="0"/>
-                <a:ea typeface="Courier New" pitchFamily="34" charset="-122"/>
-                <a:cs typeface="Courier New" pitchFamily="34" charset="-120"/>
-              </a:rPr>
-              <a:t>TAKEAWAY</a:t>
-            </a:r>
-            <a:endParaRPr lang="en-US" sz="950" dirty="0"/>
-          </a:p>
-        </p:txBody>
-      </p:sp>
-      <p:sp>
-        <p:nvSpPr>
-          <p:cNvPr id="15" name="Text 13"/>
-          <p:cNvSpPr/>
-          <p:nvPr/>
-        </p:nvSpPr>
-        <p:spPr>
-          <a:xfrm>
-            <a:off x="886968" y="5852160"/>
-            <a:ext cx="10424160" cy="384048"/>
-          </a:xfrm>
-          <a:prstGeom prst="rect">
-            <a:avLst/>
-          </a:prstGeom>
-          <a:noFill/>
-          <a:ln/>
-        </p:spPr>
-        <p:txBody>
-          <a:bodyPr wrap="square" lIns="0" tIns="0" rIns="0" bIns="0" rtlCol="0" anchor="t"/>
-          <a:lstStyle/>
-          <a:p>
-            <a:pPr indent="0" marL="0">
-              <a:buNone/>
-            </a:pPr>
-            <a:r>
-              <a:rPr lang="en-US" sz="1250" dirty="0">
-                <a:solidFill>
-                  <a:srgbClr val="14283C"/>
-                </a:solidFill>
-                <a:latin typeface="Arial" pitchFamily="34" charset="0"/>
-                <a:ea typeface="Arial" pitchFamily="34" charset="-122"/>
-                <a:cs typeface="Arial" pitchFamily="34" charset="-120"/>
-              </a:rPr>
-              <a:t>Practically: an auditable priority ordering from data organisations already hold, aligned with FINMA 2023/1 operational-resilience expectations, surfacing exactly the debt current governance misses.</a:t>
+              <a:t>Practically: a portfolio-wide, auditable priority ordering from data organisations already hold, surfacing exactly the debt current governance misses.</a:t>
             </a:r>
             <a:endParaRPr lang="en-US" sz="1250" dirty="0"/>
           </a:p>
@@ -5992,6 +5916,7 @@
         <a:solidFill>
           <a:srgbClr val="14283C"/>
         </a:solidFill>
+        <a:effectLst/>
       </p:bgPr>
     </p:bg>
     <p:spTree>
@@ -6029,11 +5954,11 @@
           <a:bodyPr wrap="square" lIns="0" tIns="0" rIns="0" bIns="0" rtlCol="0" anchor="ctr"/>
           <a:lstStyle/>
           <a:p>
-            <a:pPr indent="0" marL="0">
-              <a:buNone/>
-            </a:pPr>
-            <a:r>
-              <a:rPr lang="en-US" sz="1100" b="1" spc="300" kern="0" dirty="0">
+            <a:pPr marL="0" indent="0">
+              <a:buNone/>
+            </a:pPr>
+            <a:r>
+              <a:rPr lang="en-US" sz="1100" b="1" kern="0" spc="300" dirty="0">
                 <a:solidFill>
                   <a:srgbClr val="D98E1F"/>
                 </a:solidFill>
@@ -6068,7 +5993,7 @@
           <a:bodyPr wrap="square" lIns="0" tIns="0" rIns="0" bIns="0" rtlCol="0" anchor="t"/>
           <a:lstStyle/>
           <a:p>
-            <a:pPr indent="0" marL="0">
+            <a:pPr marL="0" indent="0">
               <a:lnSpc>
                 <a:spcPct val="125000"/>
               </a:lnSpc>
@@ -6084,332 +6009,331 @@
                 <a:cs typeface="Arial" pitchFamily="34" charset="-120"/>
               </a:rPr>
               <a:t>The framework does not measure technical debt.
-</a:t>
-            </a:r>
-            <a:pPr indent="0" marL="0">
-              <a:lnSpc>
-                <a:spcPct val="125000"/>
-              </a:lnSpc>
-              <a:buNone/>
-            </a:pPr>
-            <a:r>
-              <a:rPr lang="en-US" sz="2500" dirty="0">
-                <a:solidFill>
-                  <a:srgbClr val="FFFFFF"/>
+It orders services by the </a:t>
+            </a:r>
+            <a:r>
+              <a:rPr lang="en-US" sz="2500" b="1" dirty="0">
+                <a:solidFill>
+                  <a:srgbClr val="F0C67A"/>
                 </a:solidFill>
                 <a:latin typeface="Arial" pitchFamily="34" charset="0"/>
                 <a:ea typeface="Arial" pitchFamily="34" charset="-122"/>
                 <a:cs typeface="Arial" pitchFamily="34" charset="-120"/>
               </a:rPr>
-              <a:t>It orders services by the </a:t>
-            </a:r>
-            <a:pPr indent="0" marL="0">
-              <a:lnSpc>
-                <a:spcPct val="125000"/>
-              </a:lnSpc>
-              <a:buNone/>
-            </a:pPr>
-            <a:r>
-              <a:rPr lang="en-US" sz="2500" b="1" dirty="0">
-                <a:solidFill>
-                  <a:srgbClr val="F0C67A"/>
+              <a:t>operational shadow debt casts</a:t>
+            </a:r>
+            <a:r>
+              <a:rPr lang="en-US" sz="2500" dirty="0">
+                <a:solidFill>
+                  <a:srgbClr val="FFFFFF"/>
                 </a:solidFill>
                 <a:latin typeface="Arial" pitchFamily="34" charset="0"/>
                 <a:ea typeface="Arial" pitchFamily="34" charset="-122"/>
                 <a:cs typeface="Arial" pitchFamily="34" charset="-120"/>
               </a:rPr>
-              <a:t>operational shadow debt casts</a:t>
-            </a:r>
-            <a:pPr indent="0" marL="0">
-              <a:lnSpc>
-                <a:spcPct val="125000"/>
-              </a:lnSpc>
-              <a:buNone/>
-            </a:pPr>
-            <a:r>
-              <a:rPr lang="en-US" sz="2500" dirty="0">
+              <a:t>, and within stated limits it does so reproducibly, defensibly and in a form a regulated institution can act on.</a:t>
+            </a:r>
+            <a:endParaRPr lang="en-US" sz="2500" dirty="0"/>
+          </a:p>
+        </p:txBody>
+      </p:sp>
+      <p:sp>
+        <p:nvSpPr>
+          <p:cNvPr id="4" name="Text 2"/>
+          <p:cNvSpPr/>
+          <p:nvPr/>
+        </p:nvSpPr>
+        <p:spPr>
+          <a:xfrm>
+            <a:off x="685800" y="4114800"/>
+            <a:ext cx="960120" cy="237744"/>
+          </a:xfrm>
+          <a:prstGeom prst="rect">
+            <a:avLst/>
+          </a:prstGeom>
+          <a:noFill/>
+          <a:ln/>
+        </p:spPr>
+        <p:txBody>
+          <a:bodyPr wrap="square" lIns="0" tIns="0" rIns="0" bIns="0" rtlCol="0" anchor="ctr"/>
+          <a:lstStyle/>
+          <a:p>
+            <a:pPr marL="0" indent="0">
+              <a:buNone/>
+            </a:pPr>
+            <a:r>
+              <a:rPr lang="en-US" sz="1200" b="1" dirty="0">
                 <a:solidFill>
                   <a:srgbClr val="FFFFFF"/>
+                </a:solidFill>
+                <a:latin typeface="Courier New" pitchFamily="34" charset="0"/>
+                <a:ea typeface="Courier New" pitchFamily="34" charset="-122"/>
+                <a:cs typeface="Courier New" pitchFamily="34" charset="-120"/>
+              </a:rPr>
+              <a:t>SVC-01</a:t>
+            </a:r>
+            <a:endParaRPr lang="en-US" sz="1200" dirty="0"/>
+          </a:p>
+        </p:txBody>
+      </p:sp>
+      <p:sp>
+        <p:nvSpPr>
+          <p:cNvPr id="5" name="Shape 3"/>
+          <p:cNvSpPr/>
+          <p:nvPr/>
+        </p:nvSpPr>
+        <p:spPr>
+          <a:xfrm>
+            <a:off x="1737360" y="4133088"/>
+            <a:ext cx="4663440" cy="182880"/>
+          </a:xfrm>
+          <a:prstGeom prst="rect">
+            <a:avLst/>
+          </a:prstGeom>
+          <a:solidFill>
+            <a:srgbClr val="24405C"/>
+          </a:solidFill>
+          <a:ln/>
+        </p:spPr>
+        <p:txBody>
+          <a:bodyPr/>
+          <a:lstStyle/>
+          <a:p>
+            <a:endParaRPr lang="en-CH"/>
+          </a:p>
+        </p:txBody>
+      </p:sp>
+      <p:sp>
+        <p:nvSpPr>
+          <p:cNvPr id="6" name="Shape 4"/>
+          <p:cNvSpPr/>
+          <p:nvPr/>
+        </p:nvSpPr>
+        <p:spPr>
+          <a:xfrm>
+            <a:off x="1737360" y="4133088"/>
+            <a:ext cx="2471623" cy="182880"/>
+          </a:xfrm>
+          <a:prstGeom prst="rect">
+            <a:avLst/>
+          </a:prstGeom>
+          <a:solidFill>
+            <a:srgbClr val="D98E1F"/>
+          </a:solidFill>
+          <a:ln/>
+        </p:spPr>
+        <p:txBody>
+          <a:bodyPr/>
+          <a:lstStyle/>
+          <a:p>
+            <a:endParaRPr lang="en-CH"/>
+          </a:p>
+        </p:txBody>
+      </p:sp>
+      <p:sp>
+        <p:nvSpPr>
+          <p:cNvPr id="7" name="Text 5"/>
+          <p:cNvSpPr/>
+          <p:nvPr/>
+        </p:nvSpPr>
+        <p:spPr>
+          <a:xfrm>
+            <a:off x="6446520" y="4114800"/>
+            <a:ext cx="685800" cy="237744"/>
+          </a:xfrm>
+          <a:prstGeom prst="rect">
+            <a:avLst/>
+          </a:prstGeom>
+          <a:noFill/>
+          <a:ln/>
+        </p:spPr>
+        <p:txBody>
+          <a:bodyPr wrap="square" lIns="0" tIns="0" rIns="0" bIns="0" rtlCol="0" anchor="ctr"/>
+          <a:lstStyle/>
+          <a:p>
+            <a:pPr marL="0" indent="0" algn="r">
+              <a:buNone/>
+            </a:pPr>
+            <a:r>
+              <a:rPr lang="en-US" sz="1100" dirty="0">
+                <a:solidFill>
+                  <a:srgbClr val="9FB4C8"/>
+                </a:solidFill>
+                <a:latin typeface="Courier New" pitchFamily="34" charset="0"/>
+                <a:ea typeface="Courier New" pitchFamily="34" charset="-122"/>
+                <a:cs typeface="Courier New" pitchFamily="34" charset="-120"/>
+              </a:rPr>
+              <a:t>R1</a:t>
+            </a:r>
+            <a:endParaRPr lang="en-US" sz="1100" dirty="0"/>
+          </a:p>
+        </p:txBody>
+      </p:sp>
+      <p:sp>
+        <p:nvSpPr>
+          <p:cNvPr id="8" name="Text 6"/>
+          <p:cNvSpPr/>
+          <p:nvPr/>
+        </p:nvSpPr>
+        <p:spPr>
+          <a:xfrm>
+            <a:off x="685800" y="4553712"/>
+            <a:ext cx="960120" cy="237744"/>
+          </a:xfrm>
+          <a:prstGeom prst="rect">
+            <a:avLst/>
+          </a:prstGeom>
+          <a:noFill/>
+          <a:ln/>
+        </p:spPr>
+        <p:txBody>
+          <a:bodyPr wrap="square" lIns="0" tIns="0" rIns="0" bIns="0" rtlCol="0" anchor="ctr"/>
+          <a:lstStyle/>
+          <a:p>
+            <a:pPr marL="0" indent="0">
+              <a:buNone/>
+            </a:pPr>
+            <a:r>
+              <a:rPr lang="en-US" sz="1200" b="1" dirty="0">
+                <a:solidFill>
+                  <a:srgbClr val="FFFFFF"/>
+                </a:solidFill>
+                <a:latin typeface="Courier New" pitchFamily="34" charset="0"/>
+                <a:ea typeface="Courier New" pitchFamily="34" charset="-122"/>
+                <a:cs typeface="Courier New" pitchFamily="34" charset="-120"/>
+              </a:rPr>
+              <a:t>SVC-03</a:t>
+            </a:r>
+            <a:endParaRPr lang="en-US" sz="1200" dirty="0"/>
+          </a:p>
+        </p:txBody>
+      </p:sp>
+      <p:sp>
+        <p:nvSpPr>
+          <p:cNvPr id="9" name="Shape 7"/>
+          <p:cNvSpPr/>
+          <p:nvPr/>
+        </p:nvSpPr>
+        <p:spPr>
+          <a:xfrm>
+            <a:off x="1737360" y="4572000"/>
+            <a:ext cx="4663440" cy="182880"/>
+          </a:xfrm>
+          <a:prstGeom prst="rect">
+            <a:avLst/>
+          </a:prstGeom>
+          <a:solidFill>
+            <a:srgbClr val="24405C"/>
+          </a:solidFill>
+          <a:ln/>
+        </p:spPr>
+        <p:txBody>
+          <a:bodyPr/>
+          <a:lstStyle/>
+          <a:p>
+            <a:endParaRPr lang="en-CH"/>
+          </a:p>
+        </p:txBody>
+      </p:sp>
+      <p:sp>
+        <p:nvSpPr>
+          <p:cNvPr id="10" name="Shape 8"/>
+          <p:cNvSpPr/>
+          <p:nvPr/>
+        </p:nvSpPr>
+        <p:spPr>
+          <a:xfrm>
+            <a:off x="1737360" y="4572000"/>
+            <a:ext cx="93269" cy="182880"/>
+          </a:xfrm>
+          <a:prstGeom prst="rect">
+            <a:avLst/>
+          </a:prstGeom>
+          <a:solidFill>
+            <a:srgbClr val="8FA6BC"/>
+          </a:solidFill>
+          <a:ln/>
+        </p:spPr>
+        <p:txBody>
+          <a:bodyPr/>
+          <a:lstStyle/>
+          <a:p>
+            <a:endParaRPr lang="en-CH"/>
+          </a:p>
+        </p:txBody>
+      </p:sp>
+      <p:sp>
+        <p:nvSpPr>
+          <p:cNvPr id="11" name="Text 9"/>
+          <p:cNvSpPr/>
+          <p:nvPr/>
+        </p:nvSpPr>
+        <p:spPr>
+          <a:xfrm>
+            <a:off x="6446520" y="4553712"/>
+            <a:ext cx="685800" cy="237744"/>
+          </a:xfrm>
+          <a:prstGeom prst="rect">
+            <a:avLst/>
+          </a:prstGeom>
+          <a:noFill/>
+          <a:ln/>
+        </p:spPr>
+        <p:txBody>
+          <a:bodyPr wrap="square" lIns="0" tIns="0" rIns="0" bIns="0" rtlCol="0" anchor="ctr"/>
+          <a:lstStyle/>
+          <a:p>
+            <a:pPr marL="0" indent="0" algn="r">
+              <a:buNone/>
+            </a:pPr>
+            <a:r>
+              <a:rPr lang="en-US" sz="1100" dirty="0">
+                <a:solidFill>
+                  <a:srgbClr val="9FB4C8"/>
+                </a:solidFill>
+                <a:latin typeface="Courier New" pitchFamily="34" charset="0"/>
+                <a:ea typeface="Courier New" pitchFamily="34" charset="-122"/>
+                <a:cs typeface="Courier New" pitchFamily="34" charset="-120"/>
+              </a:rPr>
+              <a:t>R6</a:t>
+            </a:r>
+            <a:endParaRPr lang="en-US" sz="1100" dirty="0"/>
+          </a:p>
+        </p:txBody>
+      </p:sp>
+      <p:sp>
+        <p:nvSpPr>
+          <p:cNvPr id="12" name="Text 10"/>
+          <p:cNvSpPr/>
+          <p:nvPr/>
+        </p:nvSpPr>
+        <p:spPr>
+          <a:xfrm>
+            <a:off x="685800" y="5852160"/>
+            <a:ext cx="7315200" cy="365760"/>
+          </a:xfrm>
+          <a:prstGeom prst="rect">
+            <a:avLst/>
+          </a:prstGeom>
+          <a:noFill/>
+          <a:ln/>
+        </p:spPr>
+        <p:txBody>
+          <a:bodyPr wrap="square" lIns="0" tIns="0" rIns="0" bIns="0" rtlCol="0" anchor="ctr"/>
+          <a:lstStyle/>
+          <a:p>
+            <a:pPr marL="0" indent="0">
+              <a:buNone/>
+            </a:pPr>
+            <a:r>
+              <a:rPr lang="en-US" sz="1500" i="1" dirty="0">
+                <a:solidFill>
+                  <a:srgbClr val="AFC2D4"/>
                 </a:solidFill>
                 <a:latin typeface="Arial" pitchFamily="34" charset="0"/>
                 <a:ea typeface="Arial" pitchFamily="34" charset="-122"/>
                 <a:cs typeface="Arial" pitchFamily="34" charset="-120"/>
               </a:rPr>
-              <a:t>, and within stated limits it does so reproducibly, defensibly and in a form a regulated institution can act on.</a:t>
-            </a:r>
-            <a:endParaRPr lang="en-US" sz="2500" dirty="0"/>
-          </a:p>
-        </p:txBody>
-      </p:sp>
-      <p:sp>
-        <p:nvSpPr>
-          <p:cNvPr id="4" name="Text 2"/>
-          <p:cNvSpPr/>
-          <p:nvPr/>
-        </p:nvSpPr>
-        <p:spPr>
-          <a:xfrm>
-            <a:off x="685800" y="4114800"/>
-            <a:ext cx="960120" cy="237744"/>
-          </a:xfrm>
-          <a:prstGeom prst="rect">
-            <a:avLst/>
-          </a:prstGeom>
-          <a:noFill/>
-          <a:ln/>
-        </p:spPr>
-        <p:txBody>
-          <a:bodyPr wrap="square" lIns="0" tIns="0" rIns="0" bIns="0" rtlCol="0" anchor="ctr"/>
-          <a:lstStyle/>
-          <a:p>
-            <a:pPr indent="0" marL="0">
-              <a:buNone/>
-            </a:pPr>
-            <a:r>
-              <a:rPr lang="en-US" sz="1200" b="1" dirty="0">
-                <a:solidFill>
-                  <a:srgbClr val="FFFFFF"/>
-                </a:solidFill>
-                <a:latin typeface="Courier New" pitchFamily="34" charset="0"/>
-                <a:ea typeface="Courier New" pitchFamily="34" charset="-122"/>
-                <a:cs typeface="Courier New" pitchFamily="34" charset="-120"/>
-              </a:rPr>
-              <a:t>SVC-04</a:t>
-            </a:r>
-            <a:endParaRPr lang="en-US" sz="1200" dirty="0"/>
-          </a:p>
-        </p:txBody>
-      </p:sp>
-      <p:sp>
-        <p:nvSpPr>
-          <p:cNvPr id="5" name="Shape 3"/>
-          <p:cNvSpPr/>
-          <p:nvPr/>
-        </p:nvSpPr>
-        <p:spPr>
-          <a:xfrm>
-            <a:off x="1737360" y="4133088"/>
-            <a:ext cx="4663440" cy="182880"/>
-          </a:xfrm>
-          <a:prstGeom prst="rect">
-            <a:avLst/>
-          </a:prstGeom>
-          <a:solidFill>
-            <a:srgbClr val="24405C"/>
-          </a:solidFill>
-          <a:ln/>
-        </p:spPr>
-      </p:sp>
-      <p:sp>
-        <p:nvSpPr>
-          <p:cNvPr id="6" name="Shape 4"/>
-          <p:cNvSpPr/>
-          <p:nvPr/>
-        </p:nvSpPr>
-        <p:spPr>
-          <a:xfrm>
-            <a:off x="1737360" y="4133088"/>
-            <a:ext cx="2424989" cy="182880"/>
-          </a:xfrm>
-          <a:prstGeom prst="rect">
-            <a:avLst/>
-          </a:prstGeom>
-          <a:solidFill>
-            <a:srgbClr val="D98E1F"/>
-          </a:solidFill>
-          <a:ln/>
-        </p:spPr>
-      </p:sp>
-      <p:sp>
-        <p:nvSpPr>
-          <p:cNvPr id="7" name="Text 5"/>
-          <p:cNvSpPr/>
-          <p:nvPr/>
-        </p:nvSpPr>
-        <p:spPr>
-          <a:xfrm>
-            <a:off x="6446520" y="4114800"/>
-            <a:ext cx="685800" cy="237744"/>
-          </a:xfrm>
-          <a:prstGeom prst="rect">
-            <a:avLst/>
-          </a:prstGeom>
-          <a:noFill/>
-          <a:ln/>
-        </p:spPr>
-        <p:txBody>
-          <a:bodyPr wrap="square" lIns="0" tIns="0" rIns="0" bIns="0" rtlCol="0" anchor="ctr"/>
-          <a:lstStyle/>
-          <a:p>
-            <a:pPr algn="r" indent="0" marL="0">
-              <a:buNone/>
-            </a:pPr>
-            <a:r>
-              <a:rPr lang="en-US" sz="1100" dirty="0">
-                <a:solidFill>
-                  <a:srgbClr val="9FB4C8"/>
-                </a:solidFill>
-                <a:latin typeface="Courier New" pitchFamily="34" charset="0"/>
-                <a:ea typeface="Courier New" pitchFamily="34" charset="-122"/>
-                <a:cs typeface="Courier New" pitchFamily="34" charset="-120"/>
-              </a:rPr>
-              <a:t>R1</a:t>
-            </a:r>
-            <a:endParaRPr lang="en-US" sz="1100" dirty="0"/>
-          </a:p>
-        </p:txBody>
-      </p:sp>
-      <p:sp>
-        <p:nvSpPr>
-          <p:cNvPr id="8" name="Text 6"/>
-          <p:cNvSpPr/>
-          <p:nvPr/>
-        </p:nvSpPr>
-        <p:spPr>
-          <a:xfrm>
-            <a:off x="685800" y="4553712"/>
-            <a:ext cx="960120" cy="237744"/>
-          </a:xfrm>
-          <a:prstGeom prst="rect">
-            <a:avLst/>
-          </a:prstGeom>
-          <a:noFill/>
-          <a:ln/>
-        </p:spPr>
-        <p:txBody>
-          <a:bodyPr wrap="square" lIns="0" tIns="0" rIns="0" bIns="0" rtlCol="0" anchor="ctr"/>
-          <a:lstStyle/>
-          <a:p>
-            <a:pPr indent="0" marL="0">
-              <a:buNone/>
-            </a:pPr>
-            <a:r>
-              <a:rPr lang="en-US" sz="1200" b="1" dirty="0">
-                <a:solidFill>
-                  <a:srgbClr val="FFFFFF"/>
-                </a:solidFill>
-                <a:latin typeface="Courier New" pitchFamily="34" charset="0"/>
-                <a:ea typeface="Courier New" pitchFamily="34" charset="-122"/>
-                <a:cs typeface="Courier New" pitchFamily="34" charset="-120"/>
-              </a:rPr>
-              <a:t>SVC-03</a:t>
-            </a:r>
-            <a:endParaRPr lang="en-US" sz="1200" dirty="0"/>
-          </a:p>
-        </p:txBody>
-      </p:sp>
-      <p:sp>
-        <p:nvSpPr>
-          <p:cNvPr id="9" name="Shape 7"/>
-          <p:cNvSpPr/>
-          <p:nvPr/>
-        </p:nvSpPr>
-        <p:spPr>
-          <a:xfrm>
-            <a:off x="1737360" y="4572000"/>
-            <a:ext cx="4663440" cy="182880"/>
-          </a:xfrm>
-          <a:prstGeom prst="rect">
-            <a:avLst/>
-          </a:prstGeom>
-          <a:solidFill>
-            <a:srgbClr val="24405C"/>
-          </a:solidFill>
-          <a:ln/>
-        </p:spPr>
-      </p:sp>
-      <p:sp>
-        <p:nvSpPr>
-          <p:cNvPr id="10" name="Shape 8"/>
-          <p:cNvSpPr/>
-          <p:nvPr/>
-        </p:nvSpPr>
-        <p:spPr>
-          <a:xfrm>
-            <a:off x="1737360" y="4572000"/>
-            <a:ext cx="93269" cy="182880"/>
-          </a:xfrm>
-          <a:prstGeom prst="rect">
-            <a:avLst/>
-          </a:prstGeom>
-          <a:solidFill>
-            <a:srgbClr val="8FA6BC"/>
-          </a:solidFill>
-          <a:ln/>
-        </p:spPr>
-      </p:sp>
-      <p:sp>
-        <p:nvSpPr>
-          <p:cNvPr id="11" name="Text 9"/>
-          <p:cNvSpPr/>
-          <p:nvPr/>
-        </p:nvSpPr>
-        <p:spPr>
-          <a:xfrm>
-            <a:off x="6446520" y="4553712"/>
-            <a:ext cx="685800" cy="237744"/>
-          </a:xfrm>
-          <a:prstGeom prst="rect">
-            <a:avLst/>
-          </a:prstGeom>
-          <a:noFill/>
-          <a:ln/>
-        </p:spPr>
-        <p:txBody>
-          <a:bodyPr wrap="square" lIns="0" tIns="0" rIns="0" bIns="0" rtlCol="0" anchor="ctr"/>
-          <a:lstStyle/>
-          <a:p>
-            <a:pPr algn="r" indent="0" marL="0">
-              <a:buNone/>
-            </a:pPr>
-            <a:r>
-              <a:rPr lang="en-US" sz="1100" dirty="0">
-                <a:solidFill>
-                  <a:srgbClr val="9FB4C8"/>
-                </a:solidFill>
-                <a:latin typeface="Courier New" pitchFamily="34" charset="0"/>
-                <a:ea typeface="Courier New" pitchFamily="34" charset="-122"/>
-                <a:cs typeface="Courier New" pitchFamily="34" charset="-120"/>
-              </a:rPr>
-              <a:t>R6</a:t>
-            </a:r>
-            <a:endParaRPr lang="en-US" sz="1100" dirty="0"/>
-          </a:p>
-        </p:txBody>
-      </p:sp>
-      <p:sp>
-        <p:nvSpPr>
-          <p:cNvPr id="12" name="Text 10"/>
-          <p:cNvSpPr/>
-          <p:nvPr/>
-        </p:nvSpPr>
-        <p:spPr>
-          <a:xfrm>
-            <a:off x="685800" y="5852160"/>
-            <a:ext cx="7315200" cy="365760"/>
-          </a:xfrm>
-          <a:prstGeom prst="rect">
-            <a:avLst/>
-          </a:prstGeom>
-          <a:noFill/>
-          <a:ln/>
-        </p:spPr>
-        <p:txBody>
-          <a:bodyPr wrap="square" lIns="0" tIns="0" rIns="0" bIns="0" rtlCol="0" anchor="ctr"/>
-          <a:lstStyle/>
-          <a:p>
-            <a:pPr indent="0" marL="0">
-              <a:buNone/>
-            </a:pPr>
-            <a:r>
-              <a:rPr lang="en-US" sz="1500" i="1" dirty="0">
-                <a:solidFill>
-                  <a:srgbClr val="AFC2D4"/>
-                </a:solidFill>
-                <a:latin typeface="Arial" pitchFamily="34" charset="0"/>
-                <a:ea typeface="Arial" pitchFamily="34" charset="-122"/>
-                <a:cs typeface="Arial" pitchFamily="34" charset="-120"/>
-              </a:rPr>
               <a:t>Thank you. I welcome your questions.</a:t>
             </a:r>
             <a:endParaRPr lang="en-US" sz="1500" dirty="0"/>
@@ -6418,14 +6342,14 @@
       </p:sp>
       <p:pic>
         <p:nvPicPr>
-          <p:cNvPr id="13" name="Image 0" descr="logo_white.png">    </p:cNvPr>
+          <p:cNvPr id="13" name="Image 0" descr="logo_white.png"/>
           <p:cNvPicPr>
             <a:picLocks noChangeAspect="1"/>
           </p:cNvPicPr>
           <p:nvPr/>
         </p:nvPicPr>
         <p:blipFill>
-          <a:blip r:embed="rId1"/>
+          <a:blip r:embed="rId3"/>
           <a:stretch>
             <a:fillRect/>
           </a:stretch>
@@ -6461,11 +6385,11 @@
           <a:bodyPr wrap="square" lIns="0" tIns="0" rIns="0" bIns="0" rtlCol="0" anchor="ctr"/>
           <a:lstStyle/>
           <a:p>
-            <a:pPr indent="0" marL="0">
-              <a:buNone/>
-            </a:pPr>
-            <a:r>
-              <a:rPr lang="en-US" sz="1000" spc="200" kern="0" dirty="0">
+            <a:pPr marL="0" indent="0">
+              <a:buNone/>
+            </a:pPr>
+            <a:r>
+              <a:rPr lang="en-US" sz="1000" kern="0" spc="200" dirty="0">
                 <a:solidFill>
                   <a:srgbClr val="8FA6BC"/>
                 </a:solidFill>
@@ -6495,6 +6419,7 @@
         <a:solidFill>
           <a:srgbClr val="FFFFFF"/>
         </a:solidFill>
+        <a:effectLst/>
       </p:bgPr>
     </p:bg>
     <p:spTree>
@@ -6532,11 +6457,11 @@
           <a:bodyPr wrap="square" lIns="0" tIns="0" rIns="0" bIns="0" rtlCol="0" anchor="ctr"/>
           <a:lstStyle/>
           <a:p>
-            <a:pPr algn="l" indent="0" marL="0">
-              <a:buNone/>
-            </a:pPr>
-            <a:r>
-              <a:rPr lang="en-US" sz="1100" b="1" spc="300" kern="0" dirty="0">
+            <a:pPr marL="0" indent="0" algn="l">
+              <a:buNone/>
+            </a:pPr>
+            <a:r>
+              <a:rPr lang="en-US" sz="1100" b="1" kern="0" spc="300" dirty="0">
                 <a:solidFill>
                   <a:srgbClr val="5C7186"/>
                 </a:solidFill>
@@ -6571,7 +6496,7 @@
           <a:bodyPr wrap="square" lIns="0" tIns="0" rIns="0" bIns="0" rtlCol="0" anchor="ctr"/>
           <a:lstStyle/>
           <a:p>
-            <a:pPr algn="l" indent="0" marL="0">
+            <a:pPr marL="0" indent="0" algn="l">
               <a:buNone/>
             </a:pPr>
             <a:r>
@@ -6610,7 +6535,7 @@
           <a:bodyPr wrap="square" lIns="0" tIns="0" rIns="0" bIns="0" rtlCol="0" anchor="t"/>
           <a:lstStyle/>
           <a:p>
-            <a:pPr indent="0" marL="0">
+            <a:pPr marL="0" indent="0">
               <a:lnSpc>
                 <a:spcPct val="105000"/>
               </a:lnSpc>
@@ -6652,7 +6577,7 @@
           <a:bodyPr wrap="square" lIns="0" tIns="0" rIns="0" bIns="0" rtlCol="0" anchor="t"/>
           <a:lstStyle/>
           <a:p>
-            <a:pPr indent="0" marL="0">
+            <a:pPr marL="0" indent="0">
               <a:lnSpc>
                 <a:spcPct val="105000"/>
               </a:lnSpc>
@@ -6694,7 +6619,7 @@
           <a:bodyPr wrap="square" lIns="0" tIns="0" rIns="0" bIns="0" rtlCol="0" anchor="t"/>
           <a:lstStyle/>
           <a:p>
-            <a:pPr indent="0" marL="0">
+            <a:pPr marL="0" indent="0">
               <a:lnSpc>
                 <a:spcPct val="105000"/>
               </a:lnSpc>
@@ -6736,7 +6661,7 @@
           <a:bodyPr wrap="square" lIns="0" tIns="0" rIns="0" bIns="0" rtlCol="0" anchor="t"/>
           <a:lstStyle/>
           <a:p>
-            <a:pPr indent="0" marL="0">
+            <a:pPr marL="0" indent="0">
               <a:lnSpc>
                 <a:spcPct val="105000"/>
               </a:lnSpc>
@@ -6778,7 +6703,7 @@
           <a:bodyPr wrap="square" lIns="0" tIns="0" rIns="0" bIns="0" rtlCol="0" anchor="t"/>
           <a:lstStyle/>
           <a:p>
-            <a:pPr indent="0" marL="0">
+            <a:pPr marL="0" indent="0">
               <a:lnSpc>
                 <a:spcPct val="105000"/>
               </a:lnSpc>
@@ -6820,7 +6745,7 @@
           <a:bodyPr wrap="square" lIns="0" tIns="0" rIns="0" bIns="0" rtlCol="0" anchor="t"/>
           <a:lstStyle/>
           <a:p>
-            <a:pPr indent="0" marL="0">
+            <a:pPr marL="0" indent="0">
               <a:lnSpc>
                 <a:spcPct val="105000"/>
               </a:lnSpc>
@@ -6862,7 +6787,7 @@
           <a:bodyPr wrap="square" lIns="0" tIns="0" rIns="0" bIns="0" rtlCol="0" anchor="t"/>
           <a:lstStyle/>
           <a:p>
-            <a:pPr indent="0" marL="0">
+            <a:pPr marL="0" indent="0">
               <a:lnSpc>
                 <a:spcPct val="105000"/>
               </a:lnSpc>
@@ -6904,7 +6829,7 @@
           <a:bodyPr wrap="square" lIns="0" tIns="0" rIns="0" bIns="0" rtlCol="0" anchor="t"/>
           <a:lstStyle/>
           <a:p>
-            <a:pPr indent="0" marL="0">
+            <a:pPr marL="0" indent="0">
               <a:lnSpc>
                 <a:spcPct val="105000"/>
               </a:lnSpc>
@@ -6946,7 +6871,7 @@
           <a:bodyPr wrap="square" lIns="0" tIns="0" rIns="0" bIns="0" rtlCol="0" anchor="t"/>
           <a:lstStyle/>
           <a:p>
-            <a:pPr indent="0" marL="0">
+            <a:pPr marL="0" indent="0">
               <a:lnSpc>
                 <a:spcPct val="105000"/>
               </a:lnSpc>
@@ -6988,7 +6913,7 @@
           <a:bodyPr wrap="square" lIns="0" tIns="0" rIns="0" bIns="0" rtlCol="0" anchor="t"/>
           <a:lstStyle/>
           <a:p>
-            <a:pPr indent="0" marL="0">
+            <a:pPr marL="0" indent="0">
               <a:lnSpc>
                 <a:spcPct val="105000"/>
               </a:lnSpc>
@@ -7030,7 +6955,7 @@
           <a:bodyPr wrap="square" lIns="0" tIns="0" rIns="0" bIns="0" rtlCol="0" anchor="t"/>
           <a:lstStyle/>
           <a:p>
-            <a:pPr indent="0" marL="0">
+            <a:pPr marL="0" indent="0">
               <a:lnSpc>
                 <a:spcPct val="105000"/>
               </a:lnSpc>
@@ -7072,7 +6997,7 @@
           <a:bodyPr wrap="square" lIns="0" tIns="0" rIns="0" bIns="0" rtlCol="0" anchor="t"/>
           <a:lstStyle/>
           <a:p>
-            <a:pPr indent="0" marL="0">
+            <a:pPr marL="0" indent="0">
               <a:lnSpc>
                 <a:spcPct val="105000"/>
               </a:lnSpc>
@@ -7109,6 +7034,7 @@
         <a:solidFill>
           <a:srgbClr val="FFFFFF"/>
         </a:solidFill>
+        <a:effectLst/>
       </p:bgPr>
     </p:bg>
     <p:spTree>
@@ -7146,11 +7072,11 @@
           <a:bodyPr wrap="square" lIns="0" tIns="0" rIns="0" bIns="0" rtlCol="0" anchor="ctr"/>
           <a:lstStyle/>
           <a:p>
-            <a:pPr algn="l" indent="0" marL="0">
-              <a:buNone/>
-            </a:pPr>
-            <a:r>
-              <a:rPr lang="en-US" sz="1100" b="1" spc="300" kern="0" dirty="0">
+            <a:pPr marL="0" indent="0" algn="l">
+              <a:buNone/>
+            </a:pPr>
+            <a:r>
+              <a:rPr lang="en-US" sz="1100" b="1" kern="0" spc="300" dirty="0">
                 <a:solidFill>
                   <a:srgbClr val="5C7186"/>
                 </a:solidFill>
@@ -7185,7 +7111,7 @@
           <a:bodyPr wrap="square" lIns="0" tIns="0" rIns="0" bIns="0" rtlCol="0" anchor="ctr"/>
           <a:lstStyle/>
           <a:p>
-            <a:pPr algn="l" indent="0" marL="0">
+            <a:pPr marL="0" indent="0" algn="l">
               <a:buNone/>
             </a:pPr>
             <a:r>
@@ -7316,13 +7242,20 @@
           </a:solidFill>
           <a:ln/>
           <a:effectLst>
-            <a:outerShdw sx="100000" sy="100000" kx="0" ky="0" algn="bl" rotWithShape="0" blurRad="76200" dist="25400" dir="5400000">
+            <a:outerShdw blurRad="76200" dist="25400" dir="5400000" algn="bl" rotWithShape="0">
               <a:srgbClr val="9AA7B2">
                 <a:alpha val="25000"/>
               </a:srgbClr>
             </a:outerShdw>
           </a:effectLst>
         </p:spPr>
+        <p:txBody>
+          <a:bodyPr/>
+          <a:lstStyle/>
+          <a:p>
+            <a:endParaRPr lang="en-CH"/>
+          </a:p>
+        </p:txBody>
       </p:sp>
       <p:sp>
         <p:nvSpPr>
@@ -7345,7 +7278,7 @@
           <a:bodyPr wrap="square" lIns="0" tIns="0" rIns="0" bIns="0" rtlCol="0" anchor="ctr"/>
           <a:lstStyle/>
           <a:p>
-            <a:pPr indent="0" marL="0">
+            <a:pPr marL="0" indent="0">
               <a:buNone/>
             </a:pPr>
             <a:r>
@@ -7384,7 +7317,7 @@
           <a:bodyPr wrap="square" lIns="0" tIns="0" rIns="0" bIns="0" rtlCol="0" anchor="t"/>
           <a:lstStyle/>
           <a:p>
-            <a:pPr indent="0" marL="0">
+            <a:pPr marL="0" indent="0">
               <a:buNone/>
             </a:pPr>
             <a:r>
@@ -7421,13 +7354,20 @@
           </a:solidFill>
           <a:ln/>
           <a:effectLst>
-            <a:outerShdw sx="100000" sy="100000" kx="0" ky="0" algn="bl" rotWithShape="0" blurRad="76200" dist="25400" dir="5400000">
+            <a:outerShdw blurRad="76200" dist="25400" dir="5400000" algn="bl" rotWithShape="0">
               <a:srgbClr val="9AA7B2">
                 <a:alpha val="25000"/>
               </a:srgbClr>
             </a:outerShdw>
           </a:effectLst>
         </p:spPr>
+        <p:txBody>
+          <a:bodyPr/>
+          <a:lstStyle/>
+          <a:p>
+            <a:endParaRPr lang="en-CH"/>
+          </a:p>
+        </p:txBody>
       </p:sp>
       <p:sp>
         <p:nvSpPr>
@@ -7437,8 +7377,8 @@
         </p:nvSpPr>
         <p:spPr>
           <a:xfrm>
-            <a:off x="7040880" y="3218688"/>
-            <a:ext cx="2103120" cy="502920"/>
+            <a:off x="7040879" y="3218688"/>
+            <a:ext cx="2428435" cy="502920"/>
           </a:xfrm>
           <a:prstGeom prst="rect">
             <a:avLst/>
@@ -7450,7 +7390,7 @@
           <a:bodyPr wrap="square" lIns="0" tIns="0" rIns="0" bIns="0" rtlCol="0" anchor="ctr"/>
           <a:lstStyle/>
           <a:p>
-            <a:pPr indent="0" marL="0">
+            <a:pPr marL="0" indent="0">
               <a:buNone/>
             </a:pPr>
             <a:r>
@@ -7489,7 +7429,7 @@
           <a:bodyPr wrap="square" lIns="0" tIns="0" rIns="0" bIns="0" rtlCol="0" anchor="t"/>
           <a:lstStyle/>
           <a:p>
-            <a:pPr indent="0" marL="0">
+            <a:pPr marL="0" indent="0">
               <a:buNone/>
             </a:pPr>
             <a:r>
@@ -7526,13 +7466,20 @@
           </a:solidFill>
           <a:ln/>
           <a:effectLst>
-            <a:outerShdw sx="100000" sy="100000" kx="0" ky="0" algn="bl" rotWithShape="0" blurRad="76200" dist="25400" dir="5400000">
+            <a:outerShdw blurRad="76200" dist="25400" dir="5400000" algn="bl" rotWithShape="0">
               <a:srgbClr val="9AA7B2">
                 <a:alpha val="25000"/>
               </a:srgbClr>
             </a:outerShdw>
           </a:effectLst>
         </p:spPr>
+        <p:txBody>
+          <a:bodyPr/>
+          <a:lstStyle/>
+          <a:p>
+            <a:endParaRPr lang="en-CH"/>
+          </a:p>
+        </p:txBody>
       </p:sp>
       <p:sp>
         <p:nvSpPr>
@@ -7555,7 +7502,7 @@
           <a:bodyPr wrap="square" lIns="0" tIns="0" rIns="0" bIns="0" rtlCol="0" anchor="ctr"/>
           <a:lstStyle/>
           <a:p>
-            <a:pPr indent="0" marL="0">
+            <a:pPr marL="0" indent="0">
               <a:buNone/>
             </a:pPr>
             <a:r>
@@ -7594,7 +7541,7 @@
           <a:bodyPr wrap="square" lIns="0" tIns="0" rIns="0" bIns="0" rtlCol="0" anchor="t"/>
           <a:lstStyle/>
           <a:p>
-            <a:pPr indent="0" marL="0">
+            <a:pPr marL="0" indent="0">
               <a:buNone/>
             </a:pPr>
             <a:r>
@@ -7631,6 +7578,13 @@
           </a:solidFill>
           <a:ln/>
         </p:spPr>
+        <p:txBody>
+          <a:bodyPr/>
+          <a:lstStyle/>
+          <a:p>
+            <a:endParaRPr lang="en-CH"/>
+          </a:p>
+        </p:txBody>
       </p:sp>
       <p:sp>
         <p:nvSpPr>
@@ -7653,11 +7607,11 @@
           <a:bodyPr wrap="square" lIns="0" tIns="0" rIns="0" bIns="0" rtlCol="0" anchor="ctr"/>
           <a:lstStyle/>
           <a:p>
-            <a:pPr indent="0" marL="0">
-              <a:buNone/>
-            </a:pPr>
-            <a:r>
-              <a:rPr lang="en-US" sz="950" b="1" spc="300" kern="0" dirty="0">
+            <a:pPr marL="0" indent="0">
+              <a:buNone/>
+            </a:pPr>
+            <a:r>
+              <a:rPr lang="en-US" sz="950" b="1" kern="0" spc="300" dirty="0">
                 <a:solidFill>
                   <a:srgbClr val="1E7F82"/>
                 </a:solidFill>
@@ -7692,7 +7646,7 @@
           <a:bodyPr wrap="square" lIns="0" tIns="0" rIns="0" bIns="0" rtlCol="0" anchor="t"/>
           <a:lstStyle/>
           <a:p>
-            <a:pPr indent="0" marL="0">
+            <a:pPr marL="0" indent="0">
               <a:buNone/>
             </a:pPr>
             <a:r>
@@ -7726,6 +7680,7 @@
         <a:solidFill>
           <a:srgbClr val="FFFFFF"/>
         </a:solidFill>
+        <a:effectLst/>
       </p:bgPr>
     </p:bg>
     <p:spTree>
@@ -7763,11 +7718,11 @@
           <a:bodyPr wrap="square" lIns="0" tIns="0" rIns="0" bIns="0" rtlCol="0" anchor="ctr"/>
           <a:lstStyle/>
           <a:p>
-            <a:pPr algn="l" indent="0" marL="0">
-              <a:buNone/>
-            </a:pPr>
-            <a:r>
-              <a:rPr lang="en-US" sz="1100" b="1" spc="300" kern="0" dirty="0">
+            <a:pPr marL="0" indent="0" algn="l">
+              <a:buNone/>
+            </a:pPr>
+            <a:r>
+              <a:rPr lang="en-US" sz="1100" b="1" kern="0" spc="300" dirty="0">
                 <a:solidFill>
                   <a:srgbClr val="5C7186"/>
                 </a:solidFill>
@@ -7802,7 +7757,7 @@
           <a:bodyPr wrap="square" lIns="0" tIns="0" rIns="0" bIns="0" rtlCol="0" anchor="ctr"/>
           <a:lstStyle/>
           <a:p>
-            <a:pPr algn="l" indent="0" marL="0">
+            <a:pPr marL="0" indent="0" algn="l">
               <a:buNone/>
             </a:pPr>
             <a:r>
@@ -7841,7 +7796,7 @@
           <a:bodyPr wrap="square" lIns="0" tIns="0" rIns="0" bIns="0" rtlCol="0" anchor="t"/>
           <a:lstStyle/>
           <a:p>
-            <a:pPr indent="0" marL="0">
+            <a:pPr marL="0" indent="0">
               <a:lnSpc>
                 <a:spcPct val="115000"/>
               </a:lnSpc>
@@ -7858,12 +7813,6 @@
               </a:rPr>
               <a:t>Across 44 primary studies on TD prioritisation, quantitative multi-criteria approaches are uncommon and industrial validation is rare (Lenarduzzi et al., 2021). </a:t>
             </a:r>
-            <a:pPr indent="0" marL="0">
-              <a:lnSpc>
-                <a:spcPct val="115000"/>
-              </a:lnSpc>
-              <a:buNone/>
-            </a:pPr>
             <a:r>
               <a:rPr lang="en-US" sz="1500" b="1" dirty="0">
                 <a:solidFill>
@@ -7875,12 +7824,6 @@
               </a:rPr>
               <a:t>No reviewed study combines</a:t>
             </a:r>
-            <a:pPr indent="0" marL="0">
-              <a:lnSpc>
-                <a:spcPct val="115000"/>
-              </a:lnSpc>
-              <a:buNone/>
-            </a:pPr>
             <a:r>
               <a:rPr lang="en-US" sz="1500" dirty="0">
                 <a:solidFill>
@@ -7915,6 +7858,13 @@
           </a:solidFill>
           <a:ln/>
         </p:spPr>
+        <p:txBody>
+          <a:bodyPr/>
+          <a:lstStyle/>
+          <a:p>
+            <a:endParaRPr lang="en-CH"/>
+          </a:p>
+        </p:txBody>
       </p:sp>
       <p:sp>
         <p:nvSpPr>
@@ -7937,7 +7887,7 @@
           <a:bodyPr wrap="square" lIns="0" tIns="0" rIns="0" bIns="0" rtlCol="0" anchor="ctr"/>
           <a:lstStyle/>
           <a:p>
-            <a:pPr indent="0" marL="0">
+            <a:pPr marL="0" indent="0">
               <a:buNone/>
             </a:pPr>
             <a:r>
@@ -7976,7 +7926,7 @@
           <a:bodyPr wrap="square" lIns="0" tIns="0" rIns="0" bIns="0" rtlCol="0" anchor="ctr"/>
           <a:lstStyle/>
           <a:p>
-            <a:pPr indent="0" marL="0">
+            <a:pPr marL="0" indent="0">
               <a:buNone/>
             </a:pPr>
             <a:r>
@@ -8013,6 +7963,13 @@
           </a:solidFill>
           <a:ln/>
         </p:spPr>
+        <p:txBody>
+          <a:bodyPr/>
+          <a:lstStyle/>
+          <a:p>
+            <a:endParaRPr lang="en-CH"/>
+          </a:p>
+        </p:txBody>
       </p:sp>
       <p:sp>
         <p:nvSpPr>
@@ -8035,7 +7992,7 @@
           <a:bodyPr wrap="square" lIns="0" tIns="0" rIns="0" bIns="0" rtlCol="0" anchor="ctr"/>
           <a:lstStyle/>
           <a:p>
-            <a:pPr indent="0" marL="0">
+            <a:pPr marL="0" indent="0">
               <a:buNone/>
             </a:pPr>
             <a:r>
@@ -8074,7 +8031,7 @@
           <a:bodyPr wrap="square" lIns="0" tIns="0" rIns="0" bIns="0" rtlCol="0" anchor="ctr"/>
           <a:lstStyle/>
           <a:p>
-            <a:pPr indent="0" marL="0">
+            <a:pPr marL="0" indent="0">
               <a:buNone/>
             </a:pPr>
             <a:r>
@@ -8111,6 +8068,13 @@
           </a:solidFill>
           <a:ln/>
         </p:spPr>
+        <p:txBody>
+          <a:bodyPr/>
+          <a:lstStyle/>
+          <a:p>
+            <a:endParaRPr lang="en-CH"/>
+          </a:p>
+        </p:txBody>
       </p:sp>
       <p:sp>
         <p:nvSpPr>
@@ -8133,7 +8097,7 @@
           <a:bodyPr wrap="square" lIns="0" tIns="0" rIns="0" bIns="0" rtlCol="0" anchor="ctr"/>
           <a:lstStyle/>
           <a:p>
-            <a:pPr indent="0" marL="0">
+            <a:pPr marL="0" indent="0">
               <a:buNone/>
             </a:pPr>
             <a:r>
@@ -8172,7 +8136,7 @@
           <a:bodyPr wrap="square" lIns="0" tIns="0" rIns="0" bIns="0" rtlCol="0" anchor="ctr"/>
           <a:lstStyle/>
           <a:p>
-            <a:pPr indent="0" marL="0">
+            <a:pPr marL="0" indent="0">
               <a:buNone/>
             </a:pPr>
             <a:r>
@@ -8206,6 +8170,7 @@
         <a:solidFill>
           <a:srgbClr val="FFFFFF"/>
         </a:solidFill>
+        <a:effectLst/>
       </p:bgPr>
     </p:bg>
     <p:spTree>
@@ -8243,11 +8208,11 @@
           <a:bodyPr wrap="square" lIns="0" tIns="0" rIns="0" bIns="0" rtlCol="0" anchor="ctr"/>
           <a:lstStyle/>
           <a:p>
-            <a:pPr algn="l" indent="0" marL="0">
-              <a:buNone/>
-            </a:pPr>
-            <a:r>
-              <a:rPr lang="en-US" sz="1100" b="1" spc="300" kern="0" dirty="0">
+            <a:pPr marL="0" indent="0" algn="l">
+              <a:buNone/>
+            </a:pPr>
+            <a:r>
+              <a:rPr lang="en-US" sz="1100" b="1" kern="0" spc="300" dirty="0">
                 <a:solidFill>
                   <a:srgbClr val="5C7186"/>
                 </a:solidFill>
@@ -8282,7 +8247,7 @@
           <a:bodyPr wrap="square" lIns="0" tIns="0" rIns="0" bIns="0" rtlCol="0" anchor="ctr"/>
           <a:lstStyle/>
           <a:p>
-            <a:pPr algn="l" indent="0" marL="0">
+            <a:pPr marL="0" indent="0" algn="l">
               <a:buNone/>
             </a:pPr>
             <a:r>
@@ -8321,7 +8286,7 @@
           <a:bodyPr wrap="square" lIns="0" tIns="0" rIns="0" bIns="0" rtlCol="0" anchor="ctr"/>
           <a:lstStyle/>
           <a:p>
-            <a:pPr indent="0" marL="0">
+            <a:pPr marL="0" indent="0">
               <a:buNone/>
             </a:pPr>
             <a:r>
@@ -8355,16 +8320,34 @@
         </p:nvGraphicFramePr>
         <p:xfrm>
           <a:off x="685800" y="2286000"/>
-          <a:ext cx="10789920" cy="914400"/>
+          <a:ext cx="10789920" cy="2743200"/>
         </p:xfrm>
         <a:graphic>
           <a:graphicData uri="http://schemas.openxmlformats.org/drawingml/2006/table">
             <a:tbl>
               <a:tblPr/>
               <a:tblGrid>
-                <a:gridCol w="4206240"/>
-                <a:gridCol w="1737360"/>
-                <a:gridCol w="4846320"/>
+                <a:gridCol w="4206240">
+                  <a:extLst>
+                    <a:ext uri="{9D8B030D-6E8A-4147-A177-3AD203B41FA5}">
+                      <a16:colId xmlns:a16="http://schemas.microsoft.com/office/drawing/2014/main" val="20000"/>
+                    </a:ext>
+                  </a:extLst>
+                </a:gridCol>
+                <a:gridCol w="1737360">
+                  <a:extLst>
+                    <a:ext uri="{9D8B030D-6E8A-4147-A177-3AD203B41FA5}">
+                      <a16:colId xmlns:a16="http://schemas.microsoft.com/office/drawing/2014/main" val="20001"/>
+                    </a:ext>
+                  </a:extLst>
+                </a:gridCol>
+                <a:gridCol w="4846320">
+                  <a:extLst>
+                    <a:ext uri="{9D8B030D-6E8A-4147-A177-3AD203B41FA5}">
+                      <a16:colId xmlns:a16="http://schemas.microsoft.com/office/drawing/2014/main" val="20002"/>
+                    </a:ext>
+                  </a:extLst>
+                </a:gridCol>
               </a:tblGrid>
               <a:tr h="457200">
                 <a:tc>
@@ -8372,7 +8355,7 @@
                     <a:bodyPr/>
                     <a:lstStyle/>
                     <a:p>
-                      <a:pPr indent="0" marL="0">
+                      <a:pPr marL="0" indent="0">
                         <a:buNone/>
                       </a:pPr>
                       <a:r>
@@ -8422,7 +8405,7 @@
                     <a:bodyPr/>
                     <a:lstStyle/>
                     <a:p>
-                      <a:pPr indent="0" marL="0">
+                      <a:pPr marL="0" indent="0">
                         <a:buNone/>
                       </a:pPr>
                       <a:r>
@@ -8472,7 +8455,7 @@
                     <a:bodyPr/>
                     <a:lstStyle/>
                     <a:p>
-                      <a:pPr indent="0" marL="0">
+                      <a:pPr marL="0" indent="0">
                         <a:buNone/>
                       </a:pPr>
                       <a:r>
@@ -8517,6 +8500,11 @@
                     </a:solidFill>
                   </a:tcPr>
                 </a:tc>
+                <a:extLst>
+                  <a:ext uri="{0D108BD9-81ED-4DB2-BD59-A6C34878D82A}">
+                    <a16:rowId xmlns:a16="http://schemas.microsoft.com/office/drawing/2014/main" val="10000"/>
+                  </a:ext>
+                </a:extLst>
               </a:tr>
               <a:tr h="457200">
                 <a:tc>
@@ -8524,7 +8512,7 @@
                     <a:bodyPr/>
                     <a:lstStyle/>
                     <a:p>
-                      <a:pPr indent="0" marL="0">
+                      <a:pPr marL="0" indent="0">
                         <a:buNone/>
                       </a:pPr>
                       <a:r>
@@ -8552,8 +8540,14 @@
                     <a:lnR w="0" cap="flat" cmpd="sng" algn="ctr">
                       <a:noFill/>
                     </a:lnR>
-                    <a:lnT w="0" cap="flat" cmpd="sng" algn="ctr">
-                      <a:noFill/>
+                    <a:lnT w="9525" cap="flat" cmpd="sng" algn="ctr">
+                      <a:solidFill>
+                        <a:srgbClr val="D8DFE5"/>
+                      </a:solidFill>
+                      <a:prstDash val="solid"/>
+                      <a:round/>
+                      <a:headEnd type="none" w="med" len="med"/>
+                      <a:tailEnd type="none" w="med" len="med"/>
                     </a:lnT>
                     <a:lnB w="9525" cap="flat" cmpd="sng" algn="ctr">
                       <a:solidFill>
@@ -8574,7 +8568,7 @@
                     <a:bodyPr/>
                     <a:lstStyle/>
                     <a:p>
-                      <a:pPr indent="0" marL="0">
+                      <a:pPr marL="0" indent="0">
                         <a:buNone/>
                       </a:pPr>
                       <a:r>
@@ -8602,8 +8596,14 @@
                     <a:lnR w="0" cap="flat" cmpd="sng" algn="ctr">
                       <a:noFill/>
                     </a:lnR>
-                    <a:lnT w="0" cap="flat" cmpd="sng" algn="ctr">
-                      <a:noFill/>
+                    <a:lnT w="9525" cap="flat" cmpd="sng" algn="ctr">
+                      <a:solidFill>
+                        <a:srgbClr val="D8DFE5"/>
+                      </a:solidFill>
+                      <a:prstDash val="solid"/>
+                      <a:round/>
+                      <a:headEnd type="none" w="med" len="med"/>
+                      <a:tailEnd type="none" w="med" len="med"/>
                     </a:lnT>
                     <a:lnB w="9525" cap="flat" cmpd="sng" algn="ctr">
                       <a:solidFill>
@@ -8624,7 +8624,7 @@
                     <a:bodyPr/>
                     <a:lstStyle/>
                     <a:p>
-                      <a:pPr indent="0" marL="0">
+                      <a:pPr marL="0" indent="0">
                         <a:buNone/>
                       </a:pPr>
                       <a:r>
@@ -8652,8 +8652,14 @@
                     <a:lnR w="0" cap="flat" cmpd="sng" algn="ctr">
                       <a:noFill/>
                     </a:lnR>
-                    <a:lnT w="0" cap="flat" cmpd="sng" algn="ctr">
-                      <a:noFill/>
+                    <a:lnT w="9525" cap="flat" cmpd="sng" algn="ctr">
+                      <a:solidFill>
+                        <a:srgbClr val="D8DFE5"/>
+                      </a:solidFill>
+                      <a:prstDash val="solid"/>
+                      <a:round/>
+                      <a:headEnd type="none" w="med" len="med"/>
+                      <a:tailEnd type="none" w="med" len="med"/>
                     </a:lnT>
                     <a:lnB w="9525" cap="flat" cmpd="sng" algn="ctr">
                       <a:solidFill>
@@ -8669,6 +8675,11 @@
                     </a:solidFill>
                   </a:tcPr>
                 </a:tc>
+                <a:extLst>
+                  <a:ext uri="{0D108BD9-81ED-4DB2-BD59-A6C34878D82A}">
+                    <a16:rowId xmlns:a16="http://schemas.microsoft.com/office/drawing/2014/main" val="10001"/>
+                  </a:ext>
+                </a:extLst>
               </a:tr>
               <a:tr h="457200">
                 <a:tc>
@@ -8676,7 +8687,7 @@
                     <a:bodyPr/>
                     <a:lstStyle/>
                     <a:p>
-                      <a:pPr indent="0" marL="0">
+                      <a:pPr marL="0" indent="0">
                         <a:buNone/>
                       </a:pPr>
                       <a:r>
@@ -8704,8 +8715,14 @@
                     <a:lnR w="0" cap="flat" cmpd="sng" algn="ctr">
                       <a:noFill/>
                     </a:lnR>
-                    <a:lnT w="0" cap="flat" cmpd="sng" algn="ctr">
-                      <a:noFill/>
+                    <a:lnT w="9525" cap="flat" cmpd="sng" algn="ctr">
+                      <a:solidFill>
+                        <a:srgbClr val="D8DFE5"/>
+                      </a:solidFill>
+                      <a:prstDash val="solid"/>
+                      <a:round/>
+                      <a:headEnd type="none" w="med" len="med"/>
+                      <a:tailEnd type="none" w="med" len="med"/>
                     </a:lnT>
                     <a:lnB w="9525" cap="flat" cmpd="sng" algn="ctr">
                       <a:solidFill>
@@ -8726,7 +8743,7 @@
                     <a:bodyPr/>
                     <a:lstStyle/>
                     <a:p>
-                      <a:pPr indent="0" marL="0">
+                      <a:pPr marL="0" indent="0">
                         <a:buNone/>
                       </a:pPr>
                       <a:r>
@@ -8754,8 +8771,14 @@
                     <a:lnR w="0" cap="flat" cmpd="sng" algn="ctr">
                       <a:noFill/>
                     </a:lnR>
-                    <a:lnT w="0" cap="flat" cmpd="sng" algn="ctr">
-                      <a:noFill/>
+                    <a:lnT w="9525" cap="flat" cmpd="sng" algn="ctr">
+                      <a:solidFill>
+                        <a:srgbClr val="D8DFE5"/>
+                      </a:solidFill>
+                      <a:prstDash val="solid"/>
+                      <a:round/>
+                      <a:headEnd type="none" w="med" len="med"/>
+                      <a:tailEnd type="none" w="med" len="med"/>
                     </a:lnT>
                     <a:lnB w="9525" cap="flat" cmpd="sng" algn="ctr">
                       <a:solidFill>
@@ -8776,7 +8799,7 @@
                     <a:bodyPr/>
                     <a:lstStyle/>
                     <a:p>
-                      <a:pPr indent="0" marL="0">
+                      <a:pPr marL="0" indent="0">
                         <a:buNone/>
                       </a:pPr>
                       <a:r>
@@ -8804,8 +8827,14 @@
                     <a:lnR w="0" cap="flat" cmpd="sng" algn="ctr">
                       <a:noFill/>
                     </a:lnR>
-                    <a:lnT w="0" cap="flat" cmpd="sng" algn="ctr">
-                      <a:noFill/>
+                    <a:lnT w="9525" cap="flat" cmpd="sng" algn="ctr">
+                      <a:solidFill>
+                        <a:srgbClr val="D8DFE5"/>
+                      </a:solidFill>
+                      <a:prstDash val="solid"/>
+                      <a:round/>
+                      <a:headEnd type="none" w="med" len="med"/>
+                      <a:tailEnd type="none" w="med" len="med"/>
                     </a:lnT>
                     <a:lnB w="9525" cap="flat" cmpd="sng" algn="ctr">
                       <a:solidFill>
@@ -8821,6 +8850,11 @@
                     </a:solidFill>
                   </a:tcPr>
                 </a:tc>
+                <a:extLst>
+                  <a:ext uri="{0D108BD9-81ED-4DB2-BD59-A6C34878D82A}">
+                    <a16:rowId xmlns:a16="http://schemas.microsoft.com/office/drawing/2014/main" val="10002"/>
+                  </a:ext>
+                </a:extLst>
               </a:tr>
               <a:tr h="457200">
                 <a:tc>
@@ -8828,7 +8862,7 @@
                     <a:bodyPr/>
                     <a:lstStyle/>
                     <a:p>
-                      <a:pPr indent="0" marL="0">
+                      <a:pPr marL="0" indent="0">
                         <a:buNone/>
                       </a:pPr>
                       <a:r>
@@ -8856,8 +8890,14 @@
                     <a:lnR w="0" cap="flat" cmpd="sng" algn="ctr">
                       <a:noFill/>
                     </a:lnR>
-                    <a:lnT w="0" cap="flat" cmpd="sng" algn="ctr">
-                      <a:noFill/>
+                    <a:lnT w="9525" cap="flat" cmpd="sng" algn="ctr">
+                      <a:solidFill>
+                        <a:srgbClr val="D8DFE5"/>
+                      </a:solidFill>
+                      <a:prstDash val="solid"/>
+                      <a:round/>
+                      <a:headEnd type="none" w="med" len="med"/>
+                      <a:tailEnd type="none" w="med" len="med"/>
                     </a:lnT>
                     <a:lnB w="9525" cap="flat" cmpd="sng" algn="ctr">
                       <a:solidFill>
@@ -8878,7 +8918,7 @@
                     <a:bodyPr/>
                     <a:lstStyle/>
                     <a:p>
-                      <a:pPr indent="0" marL="0">
+                      <a:pPr marL="0" indent="0">
                         <a:buNone/>
                       </a:pPr>
                       <a:r>
@@ -8906,8 +8946,14 @@
                     <a:lnR w="0" cap="flat" cmpd="sng" algn="ctr">
                       <a:noFill/>
                     </a:lnR>
-                    <a:lnT w="0" cap="flat" cmpd="sng" algn="ctr">
-                      <a:noFill/>
+                    <a:lnT w="9525" cap="flat" cmpd="sng" algn="ctr">
+                      <a:solidFill>
+                        <a:srgbClr val="D8DFE5"/>
+                      </a:solidFill>
+                      <a:prstDash val="solid"/>
+                      <a:round/>
+                      <a:headEnd type="none" w="med" len="med"/>
+                      <a:tailEnd type="none" w="med" len="med"/>
                     </a:lnT>
                     <a:lnB w="9525" cap="flat" cmpd="sng" algn="ctr">
                       <a:solidFill>
@@ -8928,7 +8974,7 @@
                     <a:bodyPr/>
                     <a:lstStyle/>
                     <a:p>
-                      <a:pPr indent="0" marL="0">
+                      <a:pPr marL="0" indent="0">
                         <a:buNone/>
                       </a:pPr>
                       <a:r>
@@ -8956,8 +9002,14 @@
                     <a:lnR w="0" cap="flat" cmpd="sng" algn="ctr">
                       <a:noFill/>
                     </a:lnR>
-                    <a:lnT w="0" cap="flat" cmpd="sng" algn="ctr">
-                      <a:noFill/>
+                    <a:lnT w="9525" cap="flat" cmpd="sng" algn="ctr">
+                      <a:solidFill>
+                        <a:srgbClr val="D8DFE5"/>
+                      </a:solidFill>
+                      <a:prstDash val="solid"/>
+                      <a:round/>
+                      <a:headEnd type="none" w="med" len="med"/>
+                      <a:tailEnd type="none" w="med" len="med"/>
                     </a:lnT>
                     <a:lnB w="9525" cap="flat" cmpd="sng" algn="ctr">
                       <a:solidFill>
@@ -8973,6 +9025,11 @@
                     </a:solidFill>
                   </a:tcPr>
                 </a:tc>
+                <a:extLst>
+                  <a:ext uri="{0D108BD9-81ED-4DB2-BD59-A6C34878D82A}">
+                    <a16:rowId xmlns:a16="http://schemas.microsoft.com/office/drawing/2014/main" val="10003"/>
+                  </a:ext>
+                </a:extLst>
               </a:tr>
               <a:tr h="457200">
                 <a:tc>
@@ -8980,7 +9037,7 @@
                     <a:bodyPr/>
                     <a:lstStyle/>
                     <a:p>
-                      <a:pPr indent="0" marL="0">
+                      <a:pPr marL="0" indent="0">
                         <a:buNone/>
                       </a:pPr>
                       <a:r>
@@ -9008,8 +9065,14 @@
                     <a:lnR w="0" cap="flat" cmpd="sng" algn="ctr">
                       <a:noFill/>
                     </a:lnR>
-                    <a:lnT w="0" cap="flat" cmpd="sng" algn="ctr">
-                      <a:noFill/>
+                    <a:lnT w="9525" cap="flat" cmpd="sng" algn="ctr">
+                      <a:solidFill>
+                        <a:srgbClr val="D8DFE5"/>
+                      </a:solidFill>
+                      <a:prstDash val="solid"/>
+                      <a:round/>
+                      <a:headEnd type="none" w="med" len="med"/>
+                      <a:tailEnd type="none" w="med" len="med"/>
                     </a:lnT>
                     <a:lnB w="9525" cap="flat" cmpd="sng" algn="ctr">
                       <a:solidFill>
@@ -9030,7 +9093,7 @@
                     <a:bodyPr/>
                     <a:lstStyle/>
                     <a:p>
-                      <a:pPr indent="0" marL="0">
+                      <a:pPr marL="0" indent="0">
                         <a:buNone/>
                       </a:pPr>
                       <a:r>
@@ -9058,8 +9121,14 @@
                     <a:lnR w="0" cap="flat" cmpd="sng" algn="ctr">
                       <a:noFill/>
                     </a:lnR>
-                    <a:lnT w="0" cap="flat" cmpd="sng" algn="ctr">
-                      <a:noFill/>
+                    <a:lnT w="9525" cap="flat" cmpd="sng" algn="ctr">
+                      <a:solidFill>
+                        <a:srgbClr val="D8DFE5"/>
+                      </a:solidFill>
+                      <a:prstDash val="solid"/>
+                      <a:round/>
+                      <a:headEnd type="none" w="med" len="med"/>
+                      <a:tailEnd type="none" w="med" len="med"/>
                     </a:lnT>
                     <a:lnB w="9525" cap="flat" cmpd="sng" algn="ctr">
                       <a:solidFill>
@@ -9080,7 +9149,7 @@
                     <a:bodyPr/>
                     <a:lstStyle/>
                     <a:p>
-                      <a:pPr indent="0" marL="0">
+                      <a:pPr marL="0" indent="0">
                         <a:buNone/>
                       </a:pPr>
                       <a:r>
@@ -9108,8 +9177,14 @@
                     <a:lnR w="0" cap="flat" cmpd="sng" algn="ctr">
                       <a:noFill/>
                     </a:lnR>
-                    <a:lnT w="0" cap="flat" cmpd="sng" algn="ctr">
-                      <a:noFill/>
+                    <a:lnT w="9525" cap="flat" cmpd="sng" algn="ctr">
+                      <a:solidFill>
+                        <a:srgbClr val="D8DFE5"/>
+                      </a:solidFill>
+                      <a:prstDash val="solid"/>
+                      <a:round/>
+                      <a:headEnd type="none" w="med" len="med"/>
+                      <a:tailEnd type="none" w="med" len="med"/>
                     </a:lnT>
                     <a:lnB w="9525" cap="flat" cmpd="sng" algn="ctr">
                       <a:solidFill>
@@ -9125,6 +9200,11 @@
                     </a:solidFill>
                   </a:tcPr>
                 </a:tc>
+                <a:extLst>
+                  <a:ext uri="{0D108BD9-81ED-4DB2-BD59-A6C34878D82A}">
+                    <a16:rowId xmlns:a16="http://schemas.microsoft.com/office/drawing/2014/main" val="10004"/>
+                  </a:ext>
+                </a:extLst>
               </a:tr>
               <a:tr h="457200">
                 <a:tc>
@@ -9132,7 +9212,7 @@
                     <a:bodyPr/>
                     <a:lstStyle/>
                     <a:p>
-                      <a:pPr indent="0" marL="0">
+                      <a:pPr marL="0" indent="0">
                         <a:buNone/>
                       </a:pPr>
                       <a:r>
@@ -9160,8 +9240,14 @@
                     <a:lnR w="0" cap="flat" cmpd="sng" algn="ctr">
                       <a:noFill/>
                     </a:lnR>
-                    <a:lnT w="0" cap="flat" cmpd="sng" algn="ctr">
-                      <a:noFill/>
+                    <a:lnT w="9525" cap="flat" cmpd="sng" algn="ctr">
+                      <a:solidFill>
+                        <a:srgbClr val="D8DFE5"/>
+                      </a:solidFill>
+                      <a:prstDash val="solid"/>
+                      <a:round/>
+                      <a:headEnd type="none" w="med" len="med"/>
+                      <a:tailEnd type="none" w="med" len="med"/>
                     </a:lnT>
                     <a:lnB w="9525" cap="flat" cmpd="sng" algn="ctr">
                       <a:solidFill>
@@ -9182,7 +9268,7 @@
                     <a:bodyPr/>
                     <a:lstStyle/>
                     <a:p>
-                      <a:pPr indent="0" marL="0">
+                      <a:pPr marL="0" indent="0">
                         <a:buNone/>
                       </a:pPr>
                       <a:r>
@@ -9210,8 +9296,14 @@
                     <a:lnR w="0" cap="flat" cmpd="sng" algn="ctr">
                       <a:noFill/>
                     </a:lnR>
-                    <a:lnT w="0" cap="flat" cmpd="sng" algn="ctr">
-                      <a:noFill/>
+                    <a:lnT w="9525" cap="flat" cmpd="sng" algn="ctr">
+                      <a:solidFill>
+                        <a:srgbClr val="D8DFE5"/>
+                      </a:solidFill>
+                      <a:prstDash val="solid"/>
+                      <a:round/>
+                      <a:headEnd type="none" w="med" len="med"/>
+                      <a:tailEnd type="none" w="med" len="med"/>
                     </a:lnT>
                     <a:lnB w="9525" cap="flat" cmpd="sng" algn="ctr">
                       <a:solidFill>
@@ -9232,7 +9324,7 @@
                     <a:bodyPr/>
                     <a:lstStyle/>
                     <a:p>
-                      <a:pPr indent="0" marL="0">
+                      <a:pPr marL="0" indent="0">
                         <a:buNone/>
                       </a:pPr>
                       <a:r>
@@ -9260,8 +9352,14 @@
                     <a:lnR w="0" cap="flat" cmpd="sng" algn="ctr">
                       <a:noFill/>
                     </a:lnR>
-                    <a:lnT w="0" cap="flat" cmpd="sng" algn="ctr">
-                      <a:noFill/>
+                    <a:lnT w="9525" cap="flat" cmpd="sng" algn="ctr">
+                      <a:solidFill>
+                        <a:srgbClr val="D8DFE5"/>
+                      </a:solidFill>
+                      <a:prstDash val="solid"/>
+                      <a:round/>
+                      <a:headEnd type="none" w="med" len="med"/>
+                      <a:tailEnd type="none" w="med" len="med"/>
                     </a:lnT>
                     <a:lnB w="9525" cap="flat" cmpd="sng" algn="ctr">
                       <a:solidFill>
@@ -9277,6 +9375,11 @@
                     </a:solidFill>
                   </a:tcPr>
                 </a:tc>
+                <a:extLst>
+                  <a:ext uri="{0D108BD9-81ED-4DB2-BD59-A6C34878D82A}">
+                    <a16:rowId xmlns:a16="http://schemas.microsoft.com/office/drawing/2014/main" val="10005"/>
+                  </a:ext>
+                </a:extLst>
               </a:tr>
             </a:tbl>
           </a:graphicData>
@@ -9303,7 +9406,7 @@
           <a:bodyPr wrap="square" lIns="0" tIns="0" rIns="0" bIns="0" rtlCol="0" anchor="ctr"/>
           <a:lstStyle/>
           <a:p>
-            <a:pPr indent="0" marL="0">
+            <a:pPr marL="0" indent="0">
               <a:buNone/>
             </a:pPr>
             <a:r>
@@ -9337,6 +9440,7 @@
         <a:solidFill>
           <a:srgbClr val="FFFFFF"/>
         </a:solidFill>
+        <a:effectLst/>
       </p:bgPr>
     </p:bg>
     <p:spTree>
@@ -9374,11 +9478,11 @@
           <a:bodyPr wrap="square" lIns="0" tIns="0" rIns="0" bIns="0" rtlCol="0" anchor="ctr"/>
           <a:lstStyle/>
           <a:p>
-            <a:pPr algn="l" indent="0" marL="0">
-              <a:buNone/>
-            </a:pPr>
-            <a:r>
-              <a:rPr lang="en-US" sz="1100" b="1" spc="300" kern="0" dirty="0">
+            <a:pPr marL="0" indent="0" algn="l">
+              <a:buNone/>
+            </a:pPr>
+            <a:r>
+              <a:rPr lang="en-US" sz="1100" b="1" kern="0" spc="300" dirty="0">
                 <a:solidFill>
                   <a:srgbClr val="5C7186"/>
                 </a:solidFill>
@@ -9413,7 +9517,7 @@
           <a:bodyPr wrap="square" lIns="0" tIns="0" rIns="0" bIns="0" rtlCol="0" anchor="ctr"/>
           <a:lstStyle/>
           <a:p>
-            <a:pPr algn="l" indent="0" marL="0">
+            <a:pPr marL="0" indent="0" algn="l">
               <a:buNone/>
             </a:pPr>
             <a:r>
@@ -9452,7 +9556,7 @@
           <a:bodyPr wrap="square" lIns="0" tIns="0" rIns="0" bIns="0" rtlCol="0" anchor="ctr"/>
           <a:lstStyle/>
           <a:p>
-            <a:pPr indent="0" marL="0">
+            <a:pPr marL="0" indent="0">
               <a:buNone/>
             </a:pPr>
             <a:r>
@@ -9489,6 +9593,13 @@
           </a:solidFill>
           <a:ln/>
         </p:spPr>
+        <p:txBody>
+          <a:bodyPr/>
+          <a:lstStyle/>
+          <a:p>
+            <a:endParaRPr lang="en-CH"/>
+          </a:p>
+        </p:txBody>
       </p:sp>
       <p:sp>
         <p:nvSpPr>
@@ -9511,7 +9622,7 @@
           <a:bodyPr wrap="square" lIns="0" tIns="0" rIns="0" bIns="0" rtlCol="0" anchor="ctr"/>
           <a:lstStyle/>
           <a:p>
-            <a:pPr algn="ctr" indent="0" marL="0">
+            <a:pPr marL="0" indent="0" algn="ctr">
               <a:buNone/>
             </a:pPr>
             <a:r>
@@ -9550,7 +9661,7 @@
           <a:bodyPr wrap="square" lIns="0" tIns="0" rIns="0" bIns="0" rtlCol="0" anchor="ctr"/>
           <a:lstStyle/>
           <a:p>
-            <a:pPr indent="0" marL="0">
+            <a:pPr marL="0" indent="0">
               <a:buNone/>
             </a:pPr>
             <a:r>
@@ -9587,6 +9698,13 @@
           </a:solidFill>
           <a:ln/>
         </p:spPr>
+        <p:txBody>
+          <a:bodyPr/>
+          <a:lstStyle/>
+          <a:p>
+            <a:endParaRPr lang="en-CH"/>
+          </a:p>
+        </p:txBody>
       </p:sp>
       <p:sp>
         <p:nvSpPr>
@@ -9609,7 +9727,7 @@
           <a:bodyPr wrap="square" lIns="0" tIns="0" rIns="0" bIns="0" rtlCol="0" anchor="ctr"/>
           <a:lstStyle/>
           <a:p>
-            <a:pPr algn="ctr" indent="0" marL="0">
+            <a:pPr marL="0" indent="0" algn="ctr">
               <a:buNone/>
             </a:pPr>
             <a:r>
@@ -9648,7 +9766,7 @@
           <a:bodyPr wrap="square" lIns="0" tIns="0" rIns="0" bIns="0" rtlCol="0" anchor="ctr"/>
           <a:lstStyle/>
           <a:p>
-            <a:pPr indent="0" marL="0">
+            <a:pPr marL="0" indent="0">
               <a:buNone/>
             </a:pPr>
             <a:r>
@@ -9685,6 +9803,13 @@
           </a:solidFill>
           <a:ln/>
         </p:spPr>
+        <p:txBody>
+          <a:bodyPr/>
+          <a:lstStyle/>
+          <a:p>
+            <a:endParaRPr lang="en-CH"/>
+          </a:p>
+        </p:txBody>
       </p:sp>
       <p:sp>
         <p:nvSpPr>
@@ -9707,7 +9832,7 @@
           <a:bodyPr wrap="square" lIns="0" tIns="0" rIns="0" bIns="0" rtlCol="0" anchor="ctr"/>
           <a:lstStyle/>
           <a:p>
-            <a:pPr algn="ctr" indent="0" marL="0">
+            <a:pPr marL="0" indent="0" algn="ctr">
               <a:buNone/>
             </a:pPr>
             <a:r>
@@ -9746,7 +9871,7 @@
           <a:bodyPr wrap="square" lIns="0" tIns="0" rIns="0" bIns="0" rtlCol="0" anchor="ctr"/>
           <a:lstStyle/>
           <a:p>
-            <a:pPr indent="0" marL="0">
+            <a:pPr marL="0" indent="0">
               <a:buNone/>
             </a:pPr>
             <a:r>
@@ -9783,6 +9908,13 @@
           </a:solidFill>
           <a:ln/>
         </p:spPr>
+        <p:txBody>
+          <a:bodyPr/>
+          <a:lstStyle/>
+          <a:p>
+            <a:endParaRPr lang="en-CH"/>
+          </a:p>
+        </p:txBody>
       </p:sp>
       <p:sp>
         <p:nvSpPr>
@@ -9805,7 +9937,7 @@
           <a:bodyPr wrap="square" lIns="0" tIns="0" rIns="0" bIns="0" rtlCol="0" anchor="ctr"/>
           <a:lstStyle/>
           <a:p>
-            <a:pPr algn="ctr" indent="0" marL="0">
+            <a:pPr marL="0" indent="0" algn="ctr">
               <a:buNone/>
             </a:pPr>
             <a:r>
@@ -9844,7 +9976,7 @@
           <a:bodyPr wrap="square" lIns="0" tIns="0" rIns="0" bIns="0" rtlCol="0" anchor="ctr"/>
           <a:lstStyle/>
           <a:p>
-            <a:pPr indent="0" marL="0">
+            <a:pPr marL="0" indent="0">
               <a:buNone/>
             </a:pPr>
             <a:r>
@@ -9881,6 +10013,13 @@
           </a:solidFill>
           <a:ln/>
         </p:spPr>
+        <p:txBody>
+          <a:bodyPr/>
+          <a:lstStyle/>
+          <a:p>
+            <a:endParaRPr lang="en-CH"/>
+          </a:p>
+        </p:txBody>
       </p:sp>
       <p:sp>
         <p:nvSpPr>
@@ -9903,7 +10042,7 @@
           <a:bodyPr wrap="square" lIns="0" tIns="0" rIns="0" bIns="0" rtlCol="0" anchor="ctr"/>
           <a:lstStyle/>
           <a:p>
-            <a:pPr algn="ctr" indent="0" marL="0">
+            <a:pPr marL="0" indent="0" algn="ctr">
               <a:buNone/>
             </a:pPr>
             <a:r>
@@ -9942,7 +10081,7 @@
           <a:bodyPr wrap="square" lIns="0" tIns="0" rIns="0" bIns="0" rtlCol="0" anchor="ctr"/>
           <a:lstStyle/>
           <a:p>
-            <a:pPr indent="0" marL="0">
+            <a:pPr marL="0" indent="0">
               <a:buNone/>
             </a:pPr>
             <a:r>
@@ -9981,7 +10120,7 @@
           <a:bodyPr wrap="square" lIns="0" tIns="0" rIns="0" bIns="0" rtlCol="0" anchor="ctr"/>
           <a:lstStyle/>
           <a:p>
-            <a:pPr indent="0" marL="0">
+            <a:pPr marL="0" indent="0">
               <a:buNone/>
             </a:pPr>
             <a:r>
@@ -10136,6 +10275,13 @@
           </a:solidFill>
           <a:ln/>
         </p:spPr>
+        <p:txBody>
+          <a:bodyPr/>
+          <a:lstStyle/>
+          <a:p>
+            <a:endParaRPr lang="en-CH"/>
+          </a:p>
+        </p:txBody>
       </p:sp>
       <p:sp>
         <p:nvSpPr>
@@ -10158,11 +10304,11 @@
           <a:bodyPr wrap="square" lIns="0" tIns="0" rIns="0" bIns="0" rtlCol="0" anchor="ctr"/>
           <a:lstStyle/>
           <a:p>
-            <a:pPr indent="0" marL="0">
-              <a:buNone/>
-            </a:pPr>
-            <a:r>
-              <a:rPr lang="en-US" sz="950" b="1" spc="300" kern="0" dirty="0">
+            <a:pPr marL="0" indent="0">
+              <a:buNone/>
+            </a:pPr>
+            <a:r>
+              <a:rPr lang="en-US" sz="950" b="1" kern="0" spc="300" dirty="0">
                 <a:solidFill>
                   <a:srgbClr val="1E7F82"/>
                 </a:solidFill>
@@ -10197,7 +10343,7 @@
           <a:bodyPr wrap="square" lIns="0" tIns="0" rIns="0" bIns="0" rtlCol="0" anchor="t"/>
           <a:lstStyle/>
           <a:p>
-            <a:pPr indent="0" marL="0">
+            <a:pPr marL="0" indent="0">
               <a:buNone/>
             </a:pPr>
             <a:r>
@@ -10231,6 +10377,7 @@
         <a:solidFill>
           <a:srgbClr val="FFFFFF"/>
         </a:solidFill>
+        <a:effectLst/>
       </p:bgPr>
     </p:bg>
     <p:spTree>
@@ -10268,11 +10415,11 @@
           <a:bodyPr wrap="square" lIns="0" tIns="0" rIns="0" bIns="0" rtlCol="0" anchor="ctr"/>
           <a:lstStyle/>
           <a:p>
-            <a:pPr algn="l" indent="0" marL="0">
-              <a:buNone/>
-            </a:pPr>
-            <a:r>
-              <a:rPr lang="en-US" sz="1100" b="1" spc="300" kern="0" dirty="0">
+            <a:pPr marL="0" indent="0" algn="l">
+              <a:buNone/>
+            </a:pPr>
+            <a:r>
+              <a:rPr lang="en-US" sz="1100" b="1" kern="0" spc="300" dirty="0">
                 <a:solidFill>
                   <a:srgbClr val="5C7186"/>
                 </a:solidFill>
@@ -10307,7 +10454,7 @@
           <a:bodyPr wrap="square" lIns="0" tIns="0" rIns="0" bIns="0" rtlCol="0" anchor="ctr"/>
           <a:lstStyle/>
           <a:p>
-            <a:pPr algn="l" indent="0" marL="0">
+            <a:pPr marL="0" indent="0" algn="l">
               <a:buNone/>
             </a:pPr>
             <a:r>
@@ -10346,7 +10493,7 @@
           <a:bodyPr wrap="square" lIns="0" tIns="0" rIns="0" bIns="0" rtlCol="0" anchor="ctr"/>
           <a:lstStyle/>
           <a:p>
-            <a:pPr indent="0" marL="0">
+            <a:pPr marL="0" indent="0">
               <a:buNone/>
             </a:pPr>
             <a:r>
@@ -10479,7 +10626,7 @@
           <a:bodyPr wrap="square" lIns="0" tIns="0" rIns="0" bIns="0" rtlCol="0" anchor="ctr"/>
           <a:lstStyle/>
           <a:p>
-            <a:pPr indent="0" marL="0">
+            <a:pPr marL="0" indent="0">
               <a:buNone/>
             </a:pPr>
             <a:r>
@@ -10610,6 +10757,13 @@
           </a:solidFill>
           <a:ln/>
         </p:spPr>
+        <p:txBody>
+          <a:bodyPr/>
+          <a:lstStyle/>
+          <a:p>
+            <a:endParaRPr lang="en-CH"/>
+          </a:p>
+        </p:txBody>
       </p:sp>
       <p:sp>
         <p:nvSpPr>
@@ -10632,11 +10786,11 @@
           <a:bodyPr wrap="square" lIns="0" tIns="0" rIns="0" bIns="0" rtlCol="0" anchor="ctr"/>
           <a:lstStyle/>
           <a:p>
-            <a:pPr indent="0" marL="0">
-              <a:buNone/>
-            </a:pPr>
-            <a:r>
-              <a:rPr lang="en-US" sz="950" b="1" spc="300" kern="0" dirty="0">
+            <a:pPr marL="0" indent="0">
+              <a:buNone/>
+            </a:pPr>
+            <a:r>
+              <a:rPr lang="en-US" sz="950" b="1" kern="0" spc="300" dirty="0">
                 <a:solidFill>
                   <a:srgbClr val="1E7F82"/>
                 </a:solidFill>
@@ -10671,7 +10825,7 @@
           <a:bodyPr wrap="square" lIns="0" tIns="0" rIns="0" bIns="0" rtlCol="0" anchor="t"/>
           <a:lstStyle/>
           <a:p>
-            <a:pPr indent="0" marL="0">
+            <a:pPr marL="0" indent="0">
               <a:buNone/>
             </a:pPr>
             <a:r>
@@ -10705,6 +10859,7 @@
         <a:solidFill>
           <a:srgbClr val="FFFFFF"/>
         </a:solidFill>
+        <a:effectLst/>
       </p:bgPr>
     </p:bg>
     <p:spTree>
@@ -10742,11 +10897,11 @@
           <a:bodyPr wrap="square" lIns="0" tIns="0" rIns="0" bIns="0" rtlCol="0" anchor="ctr"/>
           <a:lstStyle/>
           <a:p>
-            <a:pPr algn="l" indent="0" marL="0">
-              <a:buNone/>
-            </a:pPr>
-            <a:r>
-              <a:rPr lang="en-US" sz="1100" b="1" spc="300" kern="0" dirty="0">
+            <a:pPr marL="0" indent="0" algn="l">
+              <a:buNone/>
+            </a:pPr>
+            <a:r>
+              <a:rPr lang="en-US" sz="1100" b="1" kern="0" spc="300" dirty="0">
                 <a:solidFill>
                   <a:srgbClr val="5C7186"/>
                 </a:solidFill>
@@ -10781,7 +10936,7 @@
           <a:bodyPr wrap="square" lIns="0" tIns="0" rIns="0" bIns="0" rtlCol="0" anchor="ctr"/>
           <a:lstStyle/>
           <a:p>
-            <a:pPr algn="l" indent="0" marL="0">
+            <a:pPr marL="0" indent="0" algn="l">
               <a:buNone/>
             </a:pPr>
             <a:r>
@@ -10820,7 +10975,7 @@
           <a:bodyPr wrap="square" lIns="0" tIns="0" rIns="0" bIns="0" rtlCol="0" anchor="ctr"/>
           <a:lstStyle/>
           <a:p>
-            <a:pPr indent="0" marL="0">
+            <a:pPr marL="0" indent="0">
               <a:buNone/>
             </a:pPr>
             <a:r>
@@ -10832,7 +10987,7 @@
                 <a:ea typeface="Courier New" pitchFamily="34" charset="-122"/>
                 <a:cs typeface="Courier New" pitchFamily="34" charset="-120"/>
               </a:rPr>
-              <a:t>SVC-04</a:t>
+              <a:t>SVC-01</a:t>
             </a:r>
             <a:endParaRPr lang="en-US" sz="1200" dirty="0"/>
           </a:p>
@@ -10857,6 +11012,13 @@
           </a:solidFill>
           <a:ln/>
         </p:spPr>
+        <p:txBody>
+          <a:bodyPr/>
+          <a:lstStyle/>
+          <a:p>
+            <a:endParaRPr lang="en-CH"/>
+          </a:p>
+        </p:txBody>
       </p:sp>
       <p:sp>
         <p:nvSpPr>
@@ -10867,7 +11029,7 @@
         <p:spPr>
           <a:xfrm>
             <a:off x="1737360" y="1847088"/>
-            <a:ext cx="2424989" cy="182880"/>
+            <a:ext cx="2471623" cy="182880"/>
           </a:xfrm>
           <a:prstGeom prst="rect">
             <a:avLst/>
@@ -10877,6 +11039,13 @@
           </a:solidFill>
           <a:ln/>
         </p:spPr>
+        <p:txBody>
+          <a:bodyPr/>
+          <a:lstStyle/>
+          <a:p>
+            <a:endParaRPr lang="en-CH"/>
+          </a:p>
+        </p:txBody>
       </p:sp>
       <p:sp>
         <p:nvSpPr>
@@ -10899,7 +11068,7 @@
           <a:bodyPr wrap="square" lIns="0" tIns="0" rIns="0" bIns="0" rtlCol="0" anchor="ctr"/>
           <a:lstStyle/>
           <a:p>
-            <a:pPr algn="r" indent="0" marL="0">
+            <a:pPr marL="0" indent="0" algn="r">
               <a:buNone/>
             </a:pPr>
             <a:r>
@@ -10911,7 +11080,7 @@
                 <a:ea typeface="Courier New" pitchFamily="34" charset="-122"/>
                 <a:cs typeface="Courier New" pitchFamily="34" charset="-120"/>
               </a:rPr>
-              <a:t>0.478</a:t>
+              <a:t>0.470</a:t>
             </a:r>
             <a:endParaRPr lang="en-US" sz="1100" dirty="0"/>
           </a:p>
@@ -10938,7 +11107,7 @@
           <a:bodyPr wrap="square" lIns="0" tIns="0" rIns="0" bIns="0" rtlCol="0" anchor="ctr"/>
           <a:lstStyle/>
           <a:p>
-            <a:pPr indent="0" marL="0">
+            <a:pPr marL="0" indent="0">
               <a:buNone/>
             </a:pPr>
             <a:r>
@@ -10950,7 +11119,7 @@
                 <a:ea typeface="Courier New" pitchFamily="34" charset="-122"/>
                 <a:cs typeface="Courier New" pitchFamily="34" charset="-120"/>
               </a:rPr>
-              <a:t>SVC-06</a:t>
+              <a:t>SVC-04</a:t>
             </a:r>
             <a:endParaRPr lang="en-US" sz="1200" dirty="0"/>
           </a:p>
@@ -10975,6 +11144,13 @@
           </a:solidFill>
           <a:ln/>
         </p:spPr>
+        <p:txBody>
+          <a:bodyPr/>
+          <a:lstStyle/>
+          <a:p>
+            <a:endParaRPr lang="en-CH"/>
+          </a:p>
+        </p:txBody>
       </p:sp>
       <p:sp>
         <p:nvSpPr>
@@ -10985,7 +11161,7 @@
         <p:spPr>
           <a:xfrm>
             <a:off x="1737360" y="2258568"/>
-            <a:ext cx="2285086" cy="182880"/>
+            <a:ext cx="2424989" cy="182880"/>
           </a:xfrm>
           <a:prstGeom prst="rect">
             <a:avLst/>
@@ -10995,6 +11171,13 @@
           </a:solidFill>
           <a:ln/>
         </p:spPr>
+        <p:txBody>
+          <a:bodyPr/>
+          <a:lstStyle/>
+          <a:p>
+            <a:endParaRPr lang="en-CH"/>
+          </a:p>
+        </p:txBody>
       </p:sp>
       <p:sp>
         <p:nvSpPr>
@@ -11017,7 +11200,7 @@
           <a:bodyPr wrap="square" lIns="0" tIns="0" rIns="0" bIns="0" rtlCol="0" anchor="ctr"/>
           <a:lstStyle/>
           <a:p>
-            <a:pPr algn="r" indent="0" marL="0">
+            <a:pPr marL="0" indent="0" algn="r">
               <a:buNone/>
             </a:pPr>
             <a:r>
@@ -11029,7 +11212,7 @@
                 <a:ea typeface="Courier New" pitchFamily="34" charset="-122"/>
                 <a:cs typeface="Courier New" pitchFamily="34" charset="-120"/>
               </a:rPr>
-              <a:t>0.510</a:t>
+              <a:t>0.478</a:t>
             </a:r>
             <a:endParaRPr lang="en-US" sz="1100" dirty="0"/>
           </a:p>
@@ -11056,7 +11239,7 @@
           <a:bodyPr wrap="square" lIns="0" tIns="0" rIns="0" bIns="0" rtlCol="0" anchor="ctr"/>
           <a:lstStyle/>
           <a:p>
-            <a:pPr indent="0" marL="0">
+            <a:pPr marL="0" indent="0">
               <a:buNone/>
             </a:pPr>
             <a:r>
@@ -11068,7 +11251,7 @@
                 <a:ea typeface="Courier New" pitchFamily="34" charset="-122"/>
                 <a:cs typeface="Courier New" pitchFamily="34" charset="-120"/>
               </a:rPr>
-              <a:t>SVC-02</a:t>
+              <a:t>SVC-06</a:t>
             </a:r>
             <a:endParaRPr lang="en-US" sz="1200" dirty="0"/>
           </a:p>
@@ -11093,6 +11276,13 @@
           </a:solidFill>
           <a:ln/>
         </p:spPr>
+        <p:txBody>
+          <a:bodyPr/>
+          <a:lstStyle/>
+          <a:p>
+            <a:endParaRPr lang="en-CH"/>
+          </a:p>
+        </p:txBody>
       </p:sp>
       <p:sp>
         <p:nvSpPr>
@@ -11103,7 +11293,7 @@
         <p:spPr>
           <a:xfrm>
             <a:off x="1737360" y="2670048"/>
-            <a:ext cx="2238451" cy="182880"/>
+            <a:ext cx="2098548" cy="182880"/>
           </a:xfrm>
           <a:prstGeom prst="rect">
             <a:avLst/>
@@ -11113,6 +11303,13 @@
           </a:solidFill>
           <a:ln/>
         </p:spPr>
+        <p:txBody>
+          <a:bodyPr/>
+          <a:lstStyle/>
+          <a:p>
+            <a:endParaRPr lang="en-CH"/>
+          </a:p>
+        </p:txBody>
       </p:sp>
       <p:sp>
         <p:nvSpPr>
@@ -11135,7 +11332,7 @@
           <a:bodyPr wrap="square" lIns="0" tIns="0" rIns="0" bIns="0" rtlCol="0" anchor="ctr"/>
           <a:lstStyle/>
           <a:p>
-            <a:pPr algn="r" indent="0" marL="0">
+            <a:pPr marL="0" indent="0" algn="r">
               <a:buNone/>
             </a:pPr>
             <a:r>
@@ -11147,7 +11344,7 @@
                 <a:ea typeface="Courier New" pitchFamily="34" charset="-122"/>
                 <a:cs typeface="Courier New" pitchFamily="34" charset="-120"/>
               </a:rPr>
-              <a:t>0.524</a:t>
+              <a:t>0.554</a:t>
             </a:r>
             <a:endParaRPr lang="en-US" sz="1100" dirty="0"/>
           </a:p>
@@ -11174,7 +11371,7 @@
           <a:bodyPr wrap="square" lIns="0" tIns="0" rIns="0" bIns="0" rtlCol="0" anchor="ctr"/>
           <a:lstStyle/>
           <a:p>
-            <a:pPr indent="0" marL="0">
+            <a:pPr marL="0" indent="0">
               <a:buNone/>
             </a:pPr>
             <a:r>
@@ -11186,7 +11383,7 @@
                 <a:ea typeface="Courier New" pitchFamily="34" charset="-122"/>
                 <a:cs typeface="Courier New" pitchFamily="34" charset="-120"/>
               </a:rPr>
-              <a:t>SVC-01</a:t>
+              <a:t>SVC-02</a:t>
             </a:r>
             <a:endParaRPr lang="en-US" sz="1200" dirty="0"/>
           </a:p>
@@ -11211,6 +11408,13 @@
           </a:solidFill>
           <a:ln/>
         </p:spPr>
+        <p:txBody>
+          <a:bodyPr/>
+          <a:lstStyle/>
+          <a:p>
+            <a:endParaRPr lang="en-CH"/>
+          </a:p>
+        </p:txBody>
       </p:sp>
       <p:sp>
         <p:nvSpPr>
@@ -11221,7 +11425,7 @@
         <p:spPr>
           <a:xfrm>
             <a:off x="1737360" y="3081528"/>
-            <a:ext cx="1212494" cy="182880"/>
+            <a:ext cx="1072591" cy="182880"/>
           </a:xfrm>
           <a:prstGeom prst="rect">
             <a:avLst/>
@@ -11231,6 +11435,13 @@
           </a:solidFill>
           <a:ln/>
         </p:spPr>
+        <p:txBody>
+          <a:bodyPr/>
+          <a:lstStyle/>
+          <a:p>
+            <a:endParaRPr lang="en-CH"/>
+          </a:p>
+        </p:txBody>
       </p:sp>
       <p:sp>
         <p:nvSpPr>
@@ -11253,7 +11464,7 @@
           <a:bodyPr wrap="square" lIns="0" tIns="0" rIns="0" bIns="0" rtlCol="0" anchor="ctr"/>
           <a:lstStyle/>
           <a:p>
-            <a:pPr algn="r" indent="0" marL="0">
+            <a:pPr marL="0" indent="0" algn="r">
               <a:buNone/>
             </a:pPr>
             <a:r>
@@ -11265,7 +11476,7 @@
                 <a:ea typeface="Courier New" pitchFamily="34" charset="-122"/>
                 <a:cs typeface="Courier New" pitchFamily="34" charset="-120"/>
               </a:rPr>
-              <a:t>0.743</a:t>
+              <a:t>0.768</a:t>
             </a:r>
             <a:endParaRPr lang="en-US" sz="1100" dirty="0"/>
           </a:p>
@@ -11292,7 +11503,7 @@
           <a:bodyPr wrap="square" lIns="0" tIns="0" rIns="0" bIns="0" rtlCol="0" anchor="ctr"/>
           <a:lstStyle/>
           <a:p>
-            <a:pPr indent="0" marL="0">
+            <a:pPr marL="0" indent="0">
               <a:buNone/>
             </a:pPr>
             <a:r>
@@ -11329,6 +11540,13 @@
           </a:solidFill>
           <a:ln/>
         </p:spPr>
+        <p:txBody>
+          <a:bodyPr/>
+          <a:lstStyle/>
+          <a:p>
+            <a:endParaRPr lang="en-CH"/>
+          </a:p>
+        </p:txBody>
       </p:sp>
       <p:sp>
         <p:nvSpPr>
@@ -11349,6 +11567,13 @@
           </a:solidFill>
           <a:ln/>
         </p:spPr>
+        <p:txBody>
+          <a:bodyPr/>
+          <a:lstStyle/>
+          <a:p>
+            <a:endParaRPr lang="en-CH"/>
+          </a:p>
+        </p:txBody>
       </p:sp>
       <p:sp>
         <p:nvSpPr>
@@ -11371,7 +11596,7 @@
           <a:bodyPr wrap="square" lIns="0" tIns="0" rIns="0" bIns="0" rtlCol="0" anchor="ctr"/>
           <a:lstStyle/>
           <a:p>
-            <a:pPr algn="r" indent="0" marL="0">
+            <a:pPr marL="0" indent="0" algn="r">
               <a:buNone/>
             </a:pPr>
             <a:r>
@@ -11410,7 +11635,7 @@
           <a:bodyPr wrap="square" lIns="0" tIns="0" rIns="0" bIns="0" rtlCol="0" anchor="ctr"/>
           <a:lstStyle/>
           <a:p>
-            <a:pPr indent="0" marL="0">
+            <a:pPr marL="0" indent="0">
               <a:buNone/>
             </a:pPr>
             <a:r>
@@ -11447,6 +11672,13 @@
           </a:solidFill>
           <a:ln/>
         </p:spPr>
+        <p:txBody>
+          <a:bodyPr/>
+          <a:lstStyle/>
+          <a:p>
+            <a:endParaRPr lang="en-CH"/>
+          </a:p>
+        </p:txBody>
       </p:sp>
       <p:sp>
         <p:nvSpPr>
@@ -11467,6 +11699,13 @@
           </a:solidFill>
           <a:ln/>
         </p:spPr>
+        <p:txBody>
+          <a:bodyPr/>
+          <a:lstStyle/>
+          <a:p>
+            <a:endParaRPr lang="en-CH"/>
+          </a:p>
+        </p:txBody>
       </p:sp>
       <p:sp>
         <p:nvSpPr>
@@ -11489,7 +11728,7 @@
           <a:bodyPr wrap="square" lIns="0" tIns="0" rIns="0" bIns="0" rtlCol="0" anchor="ctr"/>
           <a:lstStyle/>
           <a:p>
-            <a:pPr algn="r" indent="0" marL="0">
+            <a:pPr marL="0" indent="0" algn="r">
               <a:buNone/>
             </a:pPr>
             <a:r>
@@ -11522,10 +11761,17 @@
             <a:avLst/>
           </a:prstGeom>
           <a:solidFill>
-            <a:srgbClr val="F7F9FA"/>
+            <a:srgbClr val="FBF4E8"/>
           </a:solidFill>
           <a:ln/>
         </p:spPr>
+        <p:txBody>
+          <a:bodyPr/>
+          <a:lstStyle/>
+          <a:p>
+            <a:endParaRPr lang="en-CH"/>
+          </a:p>
+        </p:txBody>
       </p:sp>
       <p:sp>
         <p:nvSpPr>
@@ -11548,19 +11794,19 @@
           <a:bodyPr wrap="square" lIns="0" tIns="0" rIns="0" bIns="0" rtlCol="0" anchor="ctr"/>
           <a:lstStyle/>
           <a:p>
-            <a:pPr indent="0" marL="0">
+            <a:pPr marL="0" indent="0">
               <a:buNone/>
             </a:pPr>
             <a:r>
               <a:rPr lang="en-US" sz="1250" b="1" dirty="0">
                 <a:solidFill>
-                  <a:srgbClr val="14283C"/>
+                  <a:srgbClr val="D98E1F"/>
                 </a:solidFill>
                 <a:latin typeface="Courier New" pitchFamily="34" charset="0"/>
                 <a:ea typeface="Courier New" pitchFamily="34" charset="-122"/>
                 <a:cs typeface="Courier New" pitchFamily="34" charset="-120"/>
               </a:rPr>
-              <a:t>SVC-04 · rank 1</a:t>
+              <a:t>SVC-01 · rank 1</a:t>
             </a:r>
             <a:endParaRPr lang="en-US" sz="1250" dirty="0"/>
           </a:p>
@@ -11587,7 +11833,7 @@
           <a:bodyPr wrap="square" lIns="0" tIns="0" rIns="0" bIns="0" rtlCol="0" anchor="t"/>
           <a:lstStyle/>
           <a:p>
-            <a:pPr indent="0" marL="0">
+            <a:pPr marL="0" indent="0">
               <a:buNone/>
             </a:pPr>
             <a:r>
@@ -11599,7 +11845,7 @@
                 <a:ea typeface="Arial" pitchFamily="34" charset="-122"/>
                 <a:cs typeface="Arial" pitchFamily="34" charset="-120"/>
               </a:rPr>
-              <a:t>574 incidents/yr, MTTR 41.9 h, CFR 3.38, yet a clean lifecycle record → architectural, platform &amp; process debt</a:t>
+              <a:t>Only 64 incidents/yr, but 4,210 unsupported component months and patch recency 63.2 → the debt an incident count cannot see</a:t>
             </a:r>
             <a:endParaRPr lang="en-US" sz="1100" dirty="0"/>
           </a:p>
@@ -11620,10 +11866,17 @@
             <a:avLst/>
           </a:prstGeom>
           <a:solidFill>
-            <a:srgbClr val="FBF4E8"/>
+            <a:srgbClr val="F7F9FA"/>
           </a:solidFill>
           <a:ln/>
         </p:spPr>
+        <p:txBody>
+          <a:bodyPr/>
+          <a:lstStyle/>
+          <a:p>
+            <a:endParaRPr lang="en-CH"/>
+          </a:p>
+        </p:txBody>
       </p:sp>
       <p:sp>
         <p:nvSpPr>
@@ -11646,19 +11899,19 @@
           <a:bodyPr wrap="square" lIns="0" tIns="0" rIns="0" bIns="0" rtlCol="0" anchor="ctr"/>
           <a:lstStyle/>
           <a:p>
-            <a:pPr indent="0" marL="0">
+            <a:pPr marL="0" indent="0">
               <a:buNone/>
             </a:pPr>
             <a:r>
               <a:rPr lang="en-US" sz="1250" b="1" dirty="0">
                 <a:solidFill>
-                  <a:srgbClr val="D98E1F"/>
+                  <a:srgbClr val="14283C"/>
                 </a:solidFill>
                 <a:latin typeface="Courier New" pitchFamily="34" charset="0"/>
                 <a:ea typeface="Courier New" pitchFamily="34" charset="-122"/>
                 <a:cs typeface="Courier New" pitchFamily="34" charset="-120"/>
               </a:rPr>
-              <a:t>SVC-02 · rank 3</a:t>
+              <a:t>SVC-04 · rank 2</a:t>
             </a:r>
             <a:endParaRPr lang="en-US" sz="1250" dirty="0"/>
           </a:p>
@@ -11685,7 +11938,7 @@
           <a:bodyPr wrap="square" lIns="0" tIns="0" rIns="0" bIns="0" rtlCol="0" anchor="t"/>
           <a:lstStyle/>
           <a:p>
-            <a:pPr indent="0" marL="0">
+            <a:pPr marL="0" indent="0">
               <a:buNone/>
             </a:pPr>
             <a:r>
@@ -11697,7 +11950,7 @@
                 <a:ea typeface="Arial" pitchFamily="34" charset="-122"/>
                 <a:cs typeface="Arial" pitchFamily="34" charset="-120"/>
               </a:rPr>
-              <a:t>Only 30 incidents/yr, but 1,221 unsupported component months → the debt an incident count cannot see</a:t>
+              <a:t>574 incidents/yr, MTTR 41.9 h, CFR 3.38, yet a clean lifecycle record → architectural &amp; process debt</a:t>
             </a:r>
             <a:endParaRPr lang="en-US" sz="1100" dirty="0"/>
           </a:p>
@@ -11722,6 +11975,13 @@
           </a:solidFill>
           <a:ln/>
         </p:spPr>
+        <p:txBody>
+          <a:bodyPr/>
+          <a:lstStyle/>
+          <a:p>
+            <a:endParaRPr lang="en-CH"/>
+          </a:p>
+        </p:txBody>
       </p:sp>
       <p:sp>
         <p:nvSpPr>
@@ -11744,7 +12004,7 @@
           <a:bodyPr wrap="square" lIns="0" tIns="0" rIns="0" bIns="0" rtlCol="0" anchor="ctr"/>
           <a:lstStyle/>
           <a:p>
-            <a:pPr indent="0" marL="0">
+            <a:pPr marL="0" indent="0">
               <a:buNone/>
             </a:pPr>
             <a:r>
@@ -11783,7 +12043,7 @@
           <a:bodyPr wrap="square" lIns="0" tIns="0" rIns="0" bIns="0" rtlCol="0" anchor="t"/>
           <a:lstStyle/>
           <a:p>
-            <a:pPr indent="0" marL="0">
+            <a:pPr marL="0" indent="0">
               <a:buNone/>
             </a:pPr>
             <a:r>
@@ -11820,6 +12080,13 @@
           </a:solidFill>
           <a:ln/>
         </p:spPr>
+        <p:txBody>
+          <a:bodyPr/>
+          <a:lstStyle/>
+          <a:p>
+            <a:endParaRPr lang="en-CH"/>
+          </a:p>
+        </p:txBody>
       </p:sp>
       <p:sp>
         <p:nvSpPr>
@@ -11842,11 +12109,11 @@
           <a:bodyPr wrap="square" lIns="0" tIns="0" rIns="0" bIns="0" rtlCol="0" anchor="ctr"/>
           <a:lstStyle/>
           <a:p>
-            <a:pPr indent="0" marL="0">
-              <a:buNone/>
-            </a:pPr>
-            <a:r>
-              <a:rPr lang="en-US" sz="950" b="1" spc="300" kern="0" dirty="0">
+            <a:pPr marL="0" indent="0">
+              <a:buNone/>
+            </a:pPr>
+            <a:r>
+              <a:rPr lang="en-US" sz="950" b="1" kern="0" spc="300" dirty="0">
                 <a:solidFill>
                   <a:srgbClr val="1E7F82"/>
                 </a:solidFill>
@@ -11881,7 +12148,7 @@
           <a:bodyPr wrap="square" lIns="0" tIns="0" rIns="0" bIns="0" rtlCol="0" anchor="t"/>
           <a:lstStyle/>
           <a:p>
-            <a:pPr indent="0" marL="0">
+            <a:pPr marL="0" indent="0">
               <a:buNone/>
             </a:pPr>
             <a:r>
@@ -11915,6 +12182,7 @@
         <a:solidFill>
           <a:srgbClr val="FFFFFF"/>
         </a:solidFill>
+        <a:effectLst/>
       </p:bgPr>
     </p:bg>
     <p:spTree>
@@ -11952,11 +12220,11 @@
           <a:bodyPr wrap="square" lIns="0" tIns="0" rIns="0" bIns="0" rtlCol="0" anchor="ctr"/>
           <a:lstStyle/>
           <a:p>
-            <a:pPr algn="l" indent="0" marL="0">
-              <a:buNone/>
-            </a:pPr>
-            <a:r>
-              <a:rPr lang="en-US" sz="1100" b="1" spc="300" kern="0" dirty="0">
+            <a:pPr marL="0" indent="0" algn="l">
+              <a:buNone/>
+            </a:pPr>
+            <a:r>
+              <a:rPr lang="en-US" sz="1100" b="1" kern="0" spc="300" dirty="0">
                 <a:solidFill>
                   <a:srgbClr val="5C7186"/>
                 </a:solidFill>
@@ -11991,7 +12259,7 @@
           <a:bodyPr wrap="square" lIns="0" tIns="0" rIns="0" bIns="0" rtlCol="0" anchor="ctr"/>
           <a:lstStyle/>
           <a:p>
-            <a:pPr algn="l" indent="0" marL="0">
+            <a:pPr marL="0" indent="0" algn="l">
               <a:buNone/>
             </a:pPr>
             <a:r>
@@ -12028,13 +12296,20 @@
           </a:solidFill>
           <a:ln/>
           <a:effectLst>
-            <a:outerShdw sx="100000" sy="100000" kx="0" ky="0" algn="bl" rotWithShape="0" blurRad="63500" dist="25400" dir="5400000">
+            <a:outerShdw blurRad="63500" dist="25400" dir="5400000" algn="bl" rotWithShape="0">
               <a:srgbClr val="9AA7B2">
                 <a:alpha val="22000"/>
               </a:srgbClr>
             </a:outerShdw>
           </a:effectLst>
         </p:spPr>
+        <p:txBody>
+          <a:bodyPr/>
+          <a:lstStyle/>
+          <a:p>
+            <a:endParaRPr lang="en-CH"/>
+          </a:p>
+        </p:txBody>
       </p:sp>
       <p:sp>
         <p:nvSpPr>
@@ -12057,7 +12332,7 @@
           <a:bodyPr wrap="square" lIns="0" tIns="0" rIns="0" bIns="0" rtlCol="0" anchor="ctr"/>
           <a:lstStyle/>
           <a:p>
-            <a:pPr indent="0" marL="0">
+            <a:pPr marL="0" indent="0">
               <a:buNone/>
             </a:pPr>
             <a:r>
@@ -12096,7 +12371,7 @@
           <a:bodyPr wrap="square" lIns="0" tIns="0" rIns="0" bIns="0" rtlCol="0" anchor="t"/>
           <a:lstStyle/>
           <a:p>
-            <a:pPr indent="0" marL="0">
+            <a:pPr marL="0" indent="0">
               <a:buNone/>
             </a:pPr>
             <a:r>
@@ -12135,7 +12410,7 @@
           <a:bodyPr wrap="square" lIns="0" tIns="0" rIns="0" bIns="0" rtlCol="0" anchor="ctr"/>
           <a:lstStyle/>
           <a:p>
-            <a:pPr indent="0" marL="0">
+            <a:pPr marL="0" indent="0">
               <a:buNone/>
             </a:pPr>
             <a:r>
@@ -12147,7 +12422,7 @@
                 <a:ea typeface="Courier New" pitchFamily="34" charset="-122"/>
                 <a:cs typeface="Courier New" pitchFamily="34" charset="-120"/>
               </a:rPr>
-              <a:t>τ = 0.73–1.00</a:t>
+              <a:t>τ = 0.60–1.00</a:t>
             </a:r>
             <a:endParaRPr lang="en-US" sz="1200" dirty="0"/>
           </a:p>
@@ -12172,13 +12447,20 @@
           </a:solidFill>
           <a:ln/>
           <a:effectLst>
-            <a:outerShdw sx="100000" sy="100000" kx="0" ky="0" algn="bl" rotWithShape="0" blurRad="63500" dist="25400" dir="5400000">
+            <a:outerShdw blurRad="63500" dist="25400" dir="5400000" algn="bl" rotWithShape="0">
               <a:srgbClr val="9AA7B2">
                 <a:alpha val="22000"/>
               </a:srgbClr>
             </a:outerShdw>
           </a:effectLst>
         </p:spPr>
+        <p:txBody>
+          <a:bodyPr/>
+          <a:lstStyle/>
+          <a:p>
+            <a:endParaRPr lang="en-CH"/>
+          </a:p>
+        </p:txBody>
       </p:sp>
       <p:sp>
         <p:nvSpPr>
@@ -12201,7 +12483,7 @@
           <a:bodyPr wrap="square" lIns="0" tIns="0" rIns="0" bIns="0" rtlCol="0" anchor="ctr"/>
           <a:lstStyle/>
           <a:p>
-            <a:pPr indent="0" marL="0">
+            <a:pPr marL="0" indent="0">
               <a:buNone/>
             </a:pPr>
             <a:r>
@@ -12240,7 +12522,7 @@
           <a:bodyPr wrap="square" lIns="0" tIns="0" rIns="0" bIns="0" rtlCol="0" anchor="t"/>
           <a:lstStyle/>
           <a:p>
-            <a:pPr indent="0" marL="0">
+            <a:pPr marL="0" indent="0">
               <a:buNone/>
             </a:pPr>
             <a:r>
@@ -12279,7 +12561,7 @@
           <a:bodyPr wrap="square" lIns="0" tIns="0" rIns="0" bIns="0" rtlCol="0" anchor="ctr"/>
           <a:lstStyle/>
           <a:p>
-            <a:pPr indent="0" marL="0">
+            <a:pPr marL="0" indent="0">
               <a:buNone/>
             </a:pPr>
             <a:r>
@@ -12316,13 +12598,20 @@
           </a:solidFill>
           <a:ln/>
           <a:effectLst>
-            <a:outerShdw sx="100000" sy="100000" kx="0" ky="0" algn="bl" rotWithShape="0" blurRad="63500" dist="25400" dir="5400000">
+            <a:outerShdw blurRad="63500" dist="25400" dir="5400000" algn="bl" rotWithShape="0">
               <a:srgbClr val="9AA7B2">
                 <a:alpha val="22000"/>
               </a:srgbClr>
             </a:outerShdw>
           </a:effectLst>
         </p:spPr>
+        <p:txBody>
+          <a:bodyPr/>
+          <a:lstStyle/>
+          <a:p>
+            <a:endParaRPr lang="en-CH"/>
+          </a:p>
+        </p:txBody>
       </p:sp>
       <p:sp>
         <p:nvSpPr>
@@ -12345,7 +12634,7 @@
           <a:bodyPr wrap="square" lIns="0" tIns="0" rIns="0" bIns="0" rtlCol="0" anchor="ctr"/>
           <a:lstStyle/>
           <a:p>
-            <a:pPr indent="0" marL="0">
+            <a:pPr marL="0" indent="0">
               <a:buNone/>
             </a:pPr>
             <a:r>
@@ -12384,7 +12673,7 @@
           <a:bodyPr wrap="square" lIns="0" tIns="0" rIns="0" bIns="0" rtlCol="0" anchor="t"/>
           <a:lstStyle/>
           <a:p>
-            <a:pPr indent="0" marL="0">
+            <a:pPr marL="0" indent="0">
               <a:buNone/>
             </a:pPr>
             <a:r>
@@ -12423,7 +12712,7 @@
           <a:bodyPr wrap="square" lIns="0" tIns="0" rIns="0" bIns="0" rtlCol="0" anchor="ctr"/>
           <a:lstStyle/>
           <a:p>
-            <a:pPr indent="0" marL="0">
+            <a:pPr marL="0" indent="0">
               <a:buNone/>
             </a:pPr>
             <a:r>
@@ -12435,7 +12724,7 @@
                 <a:ea typeface="Courier New" pitchFamily="34" charset="-122"/>
                 <a:cs typeface="Courier New" pitchFamily="34" charset="-120"/>
               </a:rPr>
-              <a:t>τ = 0.60–0.87</a:t>
+              <a:t>τ = 0.60–1.00</a:t>
             </a:r>
             <a:endParaRPr lang="en-US" sz="1200" dirty="0"/>
           </a:p>
@@ -12460,13 +12749,20 @@
           </a:solidFill>
           <a:ln/>
           <a:effectLst>
-            <a:outerShdw sx="100000" sy="100000" kx="0" ky="0" algn="bl" rotWithShape="0" blurRad="63500" dist="25400" dir="5400000">
+            <a:outerShdw blurRad="63500" dist="25400" dir="5400000" algn="bl" rotWithShape="0">
               <a:srgbClr val="9AA7B2">
                 <a:alpha val="22000"/>
               </a:srgbClr>
             </a:outerShdw>
           </a:effectLst>
         </p:spPr>
+        <p:txBody>
+          <a:bodyPr/>
+          <a:lstStyle/>
+          <a:p>
+            <a:endParaRPr lang="en-CH"/>
+          </a:p>
+        </p:txBody>
       </p:sp>
       <p:sp>
         <p:nvSpPr>
@@ -12489,7 +12785,7 @@
           <a:bodyPr wrap="square" lIns="0" tIns="0" rIns="0" bIns="0" rtlCol="0" anchor="ctr"/>
           <a:lstStyle/>
           <a:p>
-            <a:pPr indent="0" marL="0">
+            <a:pPr marL="0" indent="0">
               <a:buNone/>
             </a:pPr>
             <a:r>
@@ -12528,7 +12824,7 @@
           <a:bodyPr wrap="square" lIns="0" tIns="0" rIns="0" bIns="0" rtlCol="0" anchor="t"/>
           <a:lstStyle/>
           <a:p>
-            <a:pPr indent="0" marL="0">
+            <a:pPr marL="0" indent="0">
               <a:buNone/>
             </a:pPr>
             <a:r>
@@ -12567,7 +12863,7 @@
           <a:bodyPr wrap="square" lIns="0" tIns="0" rIns="0" bIns="0" rtlCol="0" anchor="ctr"/>
           <a:lstStyle/>
           <a:p>
-            <a:pPr indent="0" marL="0">
+            <a:pPr marL="0" indent="0">
               <a:buNone/>
             </a:pPr>
             <a:r>
@@ -12579,7 +12875,7 @@
                 <a:ea typeface="Courier New" pitchFamily="34" charset="-122"/>
                 <a:cs typeface="Courier New" pitchFamily="34" charset="-120"/>
               </a:rPr>
-              <a:t>τ = 0.60 / 0.20</a:t>
+              <a:t>τ = 0.47 / 0.33</a:t>
             </a:r>
             <a:endParaRPr lang="en-US" sz="1200" dirty="0"/>
           </a:p>
@@ -12604,13 +12900,20 @@
           </a:solidFill>
           <a:ln/>
           <a:effectLst>
-            <a:outerShdw sx="100000" sy="100000" kx="0" ky="0" algn="bl" rotWithShape="0" blurRad="63500" dist="25400" dir="5400000">
+            <a:outerShdw blurRad="63500" dist="25400" dir="5400000" algn="bl" rotWithShape="0">
               <a:srgbClr val="9AA7B2">
                 <a:alpha val="22000"/>
               </a:srgbClr>
             </a:outerShdw>
           </a:effectLst>
         </p:spPr>
+        <p:txBody>
+          <a:bodyPr/>
+          <a:lstStyle/>
+          <a:p>
+            <a:endParaRPr lang="en-CH"/>
+          </a:p>
+        </p:txBody>
       </p:sp>
       <p:sp>
         <p:nvSpPr>
@@ -12633,7 +12936,7 @@
           <a:bodyPr wrap="square" lIns="0" tIns="0" rIns="0" bIns="0" rtlCol="0" anchor="ctr"/>
           <a:lstStyle/>
           <a:p>
-            <a:pPr indent="0" marL="0">
+            <a:pPr marL="0" indent="0">
               <a:buNone/>
             </a:pPr>
             <a:r>
@@ -12672,7 +12975,7 @@
           <a:bodyPr wrap="square" lIns="0" tIns="0" rIns="0" bIns="0" rtlCol="0" anchor="t"/>
           <a:lstStyle/>
           <a:p>
-            <a:pPr indent="0" marL="0">
+            <a:pPr marL="0" indent="0">
               <a:buNone/>
             </a:pPr>
             <a:r>
@@ -12711,7 +13014,7 @@
           <a:bodyPr wrap="square" lIns="0" tIns="0" rIns="0" bIns="0" rtlCol="0" anchor="ctr"/>
           <a:lstStyle/>
           <a:p>
-            <a:pPr indent="0" marL="0">
+            <a:pPr marL="0" indent="0">
               <a:buNone/>
             </a:pPr>
             <a:r>
@@ -12748,6 +13051,13 @@
           </a:solidFill>
           <a:ln/>
         </p:spPr>
+        <p:txBody>
+          <a:bodyPr/>
+          <a:lstStyle/>
+          <a:p>
+            <a:endParaRPr lang="en-CH"/>
+          </a:p>
+        </p:txBody>
       </p:sp>
       <p:sp>
         <p:nvSpPr>
@@ -12770,11 +13080,11 @@
           <a:bodyPr wrap="square" lIns="0" tIns="0" rIns="0" bIns="0" rtlCol="0" anchor="ctr"/>
           <a:lstStyle/>
           <a:p>
-            <a:pPr indent="0" marL="0">
-              <a:buNone/>
-            </a:pPr>
-            <a:r>
-              <a:rPr lang="en-US" sz="950" b="1" spc="300" kern="0" dirty="0">
+            <a:pPr marL="0" indent="0">
+              <a:buNone/>
+            </a:pPr>
+            <a:r>
+              <a:rPr lang="en-US" sz="950" b="1" kern="0" spc="300" dirty="0">
                 <a:solidFill>
                   <a:srgbClr val="1E7F82"/>
                 </a:solidFill>
@@ -12809,7 +13119,7 @@
           <a:bodyPr wrap="square" lIns="0" tIns="0" rIns="0" bIns="0" rtlCol="0" anchor="t"/>
           <a:lstStyle/>
           <a:p>
-            <a:pPr indent="0" marL="0">
+            <a:pPr marL="0" indent="0">
               <a:buNone/>
             </a:pPr>
             <a:r>
@@ -12843,6 +13153,7 @@
         <a:solidFill>
           <a:srgbClr val="FFFFFF"/>
         </a:solidFill>
+        <a:effectLst/>
       </p:bgPr>
     </p:bg>
     <p:spTree>
@@ -12880,11 +13191,11 @@
           <a:bodyPr wrap="square" lIns="0" tIns="0" rIns="0" bIns="0" rtlCol="0" anchor="ctr"/>
           <a:lstStyle/>
           <a:p>
-            <a:pPr algn="l" indent="0" marL="0">
-              <a:buNone/>
-            </a:pPr>
-            <a:r>
-              <a:rPr lang="en-US" sz="1100" b="1" spc="300" kern="0" dirty="0">
+            <a:pPr marL="0" indent="0" algn="l">
+              <a:buNone/>
+            </a:pPr>
+            <a:r>
+              <a:rPr lang="en-US" sz="1100" b="1" kern="0" spc="300" dirty="0">
                 <a:solidFill>
                   <a:srgbClr val="5C7186"/>
                 </a:solidFill>
@@ -12919,7 +13230,7 @@
           <a:bodyPr wrap="square" lIns="0" tIns="0" rIns="0" bIns="0" rtlCol="0" anchor="ctr"/>
           <a:lstStyle/>
           <a:p>
-            <a:pPr algn="l" indent="0" marL="0">
+            <a:pPr marL="0" indent="0" algn="l">
               <a:buNone/>
             </a:pPr>
             <a:r>
@@ -12958,7 +13269,7 @@
           <a:bodyPr wrap="square" lIns="0" tIns="0" rIns="0" bIns="0" rtlCol="0" anchor="ctr"/>
           <a:lstStyle/>
           <a:p>
-            <a:pPr indent="0" marL="0">
+            <a:pPr marL="0" indent="0">
               <a:buNone/>
             </a:pPr>
             <a:r>
@@ -13016,7 +13327,7 @@
                 <a:ea typeface="Arial" pitchFamily="34" charset="-122"/>
                 <a:cs typeface="Arial" pitchFamily="34" charset="-120"/>
               </a:rPr>
-              <a:t>Weight sensitivity 2025: τ = 0.867 (one adjacent swap)</a:t>
+              <a:t>Weight sensitivity 2025: τ = 1.000 (identical order)</a:t>
             </a:r>
             <a:endParaRPr lang="en-US" sz="1350" dirty="0"/>
           </a:p>
@@ -13040,7 +13351,7 @@
                 <a:ea typeface="Arial" pitchFamily="34" charset="-122"/>
                 <a:cs typeface="Arial" pitchFamily="34" charset="-120"/>
               </a:rPr>
-              <a:t>Temporal 2025 vs 2024: τ = 0.867 / 1.000</a:t>
+              <a:t>Weight sensitivity 2024: τ = 0.867 (one swap at the top)</a:t>
             </a:r>
             <a:endParaRPr lang="en-US" sz="1350" dirty="0"/>
           </a:p>
@@ -13064,7 +13375,7 @@
                 <a:ea typeface="Arial" pitchFamily="34" charset="-122"/>
                 <a:cs typeface="Arial" pitchFamily="34" charset="-120"/>
               </a:rPr>
-              <a:t>Weakest: 2024 weights, τ = 0.733, tightly grouped mid-field profiles</a:t>
+              <a:t>Temporal 2025 vs 2024: τ = 0.600 / 0.733, tracking real profile change, above all SVC-06's broad deterioration</a:t>
             </a:r>
             <a:endParaRPr lang="en-US" sz="1350" dirty="0"/>
           </a:p>
@@ -13088,7 +13399,7 @@
                 <a:ea typeface="Arial" pitchFamily="34" charset="-122"/>
                 <a:cs typeface="Arial" pitchFamily="34" charset="-120"/>
               </a:rPr>
-              <a:t>Top and bottom positions identical in every run</a:t>
+              <a:t>The lowest-priority position is identical in every run</a:t>
             </a:r>
             <a:endParaRPr lang="en-US" sz="1350" dirty="0"/>
           </a:p>
@@ -13113,13 +13424,20 @@
           </a:solidFill>
           <a:ln/>
           <a:effectLst>
-            <a:outerShdw sx="100000" sy="100000" kx="0" ky="0" algn="bl" rotWithShape="0" blurRad="76200" dist="25400" dir="5400000">
+            <a:outerShdw blurRad="76200" dist="25400" dir="5400000" algn="bl" rotWithShape="0">
               <a:srgbClr val="9AA7B2">
                 <a:alpha val="25000"/>
               </a:srgbClr>
             </a:outerShdw>
           </a:effectLst>
         </p:spPr>
+        <p:txBody>
+          <a:bodyPr/>
+          <a:lstStyle/>
+          <a:p>
+            <a:endParaRPr lang="en-CH"/>
+          </a:p>
+        </p:txBody>
       </p:sp>
       <p:sp>
         <p:nvSpPr>
@@ -13142,11 +13460,11 @@
           <a:bodyPr wrap="square" lIns="0" tIns="0" rIns="0" bIns="0" rtlCol="0" anchor="ctr"/>
           <a:lstStyle/>
           <a:p>
-            <a:pPr indent="0" marL="0">
-              <a:buNone/>
-            </a:pPr>
-            <a:r>
-              <a:rPr lang="en-US" sz="1100" b="1" spc="200" kern="0" dirty="0">
+            <a:pPr marL="0" indent="0">
+              <a:buNone/>
+            </a:pPr>
+            <a:r>
+              <a:rPr lang="en-US" sz="1100" b="1" kern="0" spc="200" dirty="0">
                 <a:solidFill>
                   <a:srgbClr val="5C7186"/>
                 </a:solidFill>
@@ -13181,7 +13499,7 @@
           <a:bodyPr wrap="square" lIns="0" tIns="0" rIns="0" bIns="0" rtlCol="0" anchor="ctr"/>
           <a:lstStyle/>
           <a:p>
-            <a:pPr indent="0" marL="0">
+            <a:pPr marL="0" indent="0">
               <a:buNone/>
             </a:pPr>
             <a:r>
@@ -13193,7 +13511,7 @@
                 <a:ea typeface="Courier New" pitchFamily="34" charset="-122"/>
                 <a:cs typeface="Courier New" pitchFamily="34" charset="-120"/>
               </a:rPr>
-              <a:t>99.1%</a:t>
+              <a:t>98.3%</a:t>
             </a:r>
             <a:endParaRPr lang="en-US" sz="6000" dirty="0"/>
           </a:p>
@@ -13220,7 +13538,7 @@
           <a:bodyPr wrap="square" lIns="0" tIns="0" rIns="0" bIns="0" rtlCol="0" anchor="t"/>
           <a:lstStyle/>
           <a:p>
-            <a:pPr indent="0" marL="0">
+            <a:pPr marL="0" indent="0">
               <a:lnSpc>
                 <a:spcPct val="115000"/>
               </a:lnSpc>
@@ -13235,7 +13553,7 @@
                 <a:ea typeface="Arial" pitchFamily="34" charset="-122"/>
                 <a:cs typeface="Arial" pitchFamily="34" charset="-120"/>
               </a:rPr>
-              <a:t>of all admissible weightings place SVC-03 last; the high-priority cluster {SVC-04, SVC-06, SVC-02} holds the top three in the large majority. Sensitivity is confined to the middle ranks.</a:t>
+              <a:t>of all admissible weightings place SVC-03 last, and rank 1 falls to SVC-01, SVC-06 or SVC-04 in every single draw (41%, 32%, 27%). The bottom is weight-independent; the single top rank is a property of the cluster.</a:t>
             </a:r>
             <a:endParaRPr lang="en-US" sz="1250" dirty="0"/>
           </a:p>
@@ -13260,6 +13578,13 @@
           </a:solidFill>
           <a:ln/>
         </p:spPr>
+        <p:txBody>
+          <a:bodyPr/>
+          <a:lstStyle/>
+          <a:p>
+            <a:endParaRPr lang="en-CH"/>
+          </a:p>
+        </p:txBody>
       </p:sp>
       <p:sp>
         <p:nvSpPr>
@@ -13282,11 +13607,11 @@
           <a:bodyPr wrap="square" lIns="0" tIns="0" rIns="0" bIns="0" rtlCol="0" anchor="ctr"/>
           <a:lstStyle/>
           <a:p>
-            <a:pPr indent="0" marL="0">
-              <a:buNone/>
-            </a:pPr>
-            <a:r>
-              <a:rPr lang="en-US" sz="950" b="1" spc="300" kern="0" dirty="0">
+            <a:pPr marL="0" indent="0">
+              <a:buNone/>
+            </a:pPr>
+            <a:r>
+              <a:rPr lang="en-US" sz="950" b="1" kern="0" spc="300" dirty="0">
                 <a:solidFill>
                   <a:srgbClr val="1E7F82"/>
                 </a:solidFill>
@@ -13321,7 +13646,7 @@
           <a:bodyPr wrap="square" lIns="0" tIns="0" rIns="0" bIns="0" rtlCol="0" anchor="t"/>
           <a:lstStyle/>
           <a:p>
-            <a:pPr indent="0" marL="0">
+            <a:pPr marL="0" indent="0">
               <a:buNone/>
             </a:pPr>
             <a:r>
@@ -13640,4 +13965,319 @@
     </a:ext>
   </a:extLst>
 </a:theme>
+</file>
+
+<file path=ppt/theme/theme2.xml><?xml version="1.0" encoding="utf-8"?>
+<a:theme xmlns:a="http://schemas.openxmlformats.org/drawingml/2006/main" name="Office Theme">
+  <a:themeElements>
+    <a:clrScheme name="Office">
+      <a:dk1>
+        <a:sysClr val="windowText" lastClr="000000"/>
+      </a:dk1>
+      <a:lt1>
+        <a:sysClr val="window" lastClr="FFFFFF"/>
+      </a:lt1>
+      <a:dk2>
+        <a:srgbClr val="0E2841"/>
+      </a:dk2>
+      <a:lt2>
+        <a:srgbClr val="E8E8E8"/>
+      </a:lt2>
+      <a:accent1>
+        <a:srgbClr val="156082"/>
+      </a:accent1>
+      <a:accent2>
+        <a:srgbClr val="E97132"/>
+      </a:accent2>
+      <a:accent3>
+        <a:srgbClr val="196B24"/>
+      </a:accent3>
+      <a:accent4>
+        <a:srgbClr val="0F9ED5"/>
+      </a:accent4>
+      <a:accent5>
+        <a:srgbClr val="A02B93"/>
+      </a:accent5>
+      <a:accent6>
+        <a:srgbClr val="4EA72E"/>
+      </a:accent6>
+      <a:hlink>
+        <a:srgbClr val="467886"/>
+      </a:hlink>
+      <a:folHlink>
+        <a:srgbClr val="96607D"/>
+      </a:folHlink>
+    </a:clrScheme>
+    <a:fontScheme name="Office">
+      <a:majorFont>
+        <a:latin typeface="Aptos Display" panose="02110004020202020204"/>
+        <a:ea typeface=""/>
+        <a:cs typeface=""/>
+        <a:font script="Jpan" typeface="游ゴシック Light"/>
+        <a:font script="Hang" typeface="맑은 고딕"/>
+        <a:font script="Hans" typeface="等线 Light"/>
+        <a:font script="Hant" typeface="新細明體"/>
+        <a:font script="Arab" typeface="Times New Roman"/>
+        <a:font script="Hebr" typeface="Times New Roman"/>
+        <a:font script="Thai" typeface="Angsana New"/>
+        <a:font script="Ethi" typeface="Nyala"/>
+        <a:font script="Beng" typeface="Vrinda"/>
+        <a:font script="Gujr" typeface="Shruti"/>
+        <a:font script="Khmr" typeface="MoolBoran"/>
+        <a:font script="Knda" typeface="Tunga"/>
+        <a:font script="Guru" typeface="Raavi"/>
+        <a:font script="Cans" typeface="Euphemia"/>
+        <a:font script="Cher" typeface="Plantagenet Cherokee"/>
+        <a:font script="Yiii" typeface="Microsoft Yi Baiti"/>
+        <a:font script="Tibt" typeface="Microsoft Himalaya"/>
+        <a:font script="Thaa" typeface="MV Boli"/>
+        <a:font script="Deva" typeface="Mangal"/>
+        <a:font script="Telu" typeface="Gautami"/>
+        <a:font script="Taml" typeface="Latha"/>
+        <a:font script="Syrc" typeface="Estrangelo Edessa"/>
+        <a:font script="Orya" typeface="Kalinga"/>
+        <a:font script="Mlym" typeface="Kartika"/>
+        <a:font script="Laoo" typeface="DokChampa"/>
+        <a:font script="Sinh" typeface="Iskoola Pota"/>
+        <a:font script="Mong" typeface="Mongolian Baiti"/>
+        <a:font script="Viet" typeface="Times New Roman"/>
+        <a:font script="Uigh" typeface="Microsoft Uighur"/>
+        <a:font script="Geor" typeface="Sylfaen"/>
+        <a:font script="Armn" typeface="Arial"/>
+        <a:font script="Bugi" typeface="Leelawadee UI"/>
+        <a:font script="Bopo" typeface="Microsoft JhengHei"/>
+        <a:font script="Java" typeface="Javanese Text"/>
+        <a:font script="Lisu" typeface="Segoe UI"/>
+        <a:font script="Mymr" typeface="Myanmar Text"/>
+        <a:font script="Nkoo" typeface="Ebrima"/>
+        <a:font script="Olck" typeface="Nirmala UI"/>
+        <a:font script="Osma" typeface="Ebrima"/>
+        <a:font script="Phag" typeface="Phagspa"/>
+        <a:font script="Syrn" typeface="Estrangelo Edessa"/>
+        <a:font script="Syrj" typeface="Estrangelo Edessa"/>
+        <a:font script="Syre" typeface="Estrangelo Edessa"/>
+        <a:font script="Sora" typeface="Nirmala UI"/>
+        <a:font script="Tale" typeface="Microsoft Tai Le"/>
+        <a:font script="Talu" typeface="Microsoft New Tai Lue"/>
+        <a:font script="Tfng" typeface="Ebrima"/>
+      </a:majorFont>
+      <a:minorFont>
+        <a:latin typeface="Aptos" panose="02110004020202020204"/>
+        <a:ea typeface=""/>
+        <a:cs typeface=""/>
+        <a:font script="Jpan" typeface="游ゴシック"/>
+        <a:font script="Hang" typeface="맑은 고딕"/>
+        <a:font script="Hans" typeface="等线"/>
+        <a:font script="Hant" typeface="新細明體"/>
+        <a:font script="Arab" typeface="Arial"/>
+        <a:font script="Hebr" typeface="Arial"/>
+        <a:font script="Thai" typeface="Cordia New"/>
+        <a:font script="Ethi" typeface="Nyala"/>
+        <a:font script="Beng" typeface="Vrinda"/>
+        <a:font script="Gujr" typeface="Shruti"/>
+        <a:font script="Khmr" typeface="DaunPenh"/>
+        <a:font script="Knda" typeface="Tunga"/>
+        <a:font script="Guru" typeface="Raavi"/>
+        <a:font script="Cans" typeface="Euphemia"/>
+        <a:font script="Cher" typeface="Plantagenet Cherokee"/>
+        <a:font script="Yiii" typeface="Microsoft Yi Baiti"/>
+        <a:font script="Tibt" typeface="Microsoft Himalaya"/>
+        <a:font script="Thaa" typeface="MV Boli"/>
+        <a:font script="Deva" typeface="Mangal"/>
+        <a:font script="Telu" typeface="Gautami"/>
+        <a:font script="Taml" typeface="Latha"/>
+        <a:font script="Syrc" typeface="Estrangelo Edessa"/>
+        <a:font script="Orya" typeface="Kalinga"/>
+        <a:font script="Mlym" typeface="Kartika"/>
+        <a:font script="Laoo" typeface="DokChampa"/>
+        <a:font script="Sinh" typeface="Iskoola Pota"/>
+        <a:font script="Mong" typeface="Mongolian Baiti"/>
+        <a:font script="Viet" typeface="Arial"/>
+        <a:font script="Uigh" typeface="Microsoft Uighur"/>
+        <a:font script="Geor" typeface="Sylfaen"/>
+        <a:font script="Armn" typeface="Arial"/>
+        <a:font script="Bugi" typeface="Leelawadee UI"/>
+        <a:font script="Bopo" typeface="Microsoft JhengHei"/>
+        <a:font script="Java" typeface="Javanese Text"/>
+        <a:font script="Lisu" typeface="Segoe UI"/>
+        <a:font script="Mymr" typeface="Myanmar Text"/>
+        <a:font script="Nkoo" typeface="Ebrima"/>
+        <a:font script="Olck" typeface="Nirmala UI"/>
+        <a:font script="Osma" typeface="Ebrima"/>
+        <a:font script="Phag" typeface="Phagspa"/>
+        <a:font script="Syrn" typeface="Estrangelo Edessa"/>
+        <a:font script="Syrj" typeface="Estrangelo Edessa"/>
+        <a:font script="Syre" typeface="Estrangelo Edessa"/>
+        <a:font script="Sora" typeface="Nirmala UI"/>
+        <a:font script="Tale" typeface="Microsoft Tai Le"/>
+        <a:font script="Talu" typeface="Microsoft New Tai Lue"/>
+        <a:font script="Tfng" typeface="Ebrima"/>
+      </a:minorFont>
+    </a:fontScheme>
+    <a:fmtScheme name="Office">
+      <a:fillStyleLst>
+        <a:solidFill>
+          <a:schemeClr val="phClr"/>
+        </a:solidFill>
+        <a:gradFill rotWithShape="1">
+          <a:gsLst>
+            <a:gs pos="0">
+              <a:schemeClr val="phClr">
+                <a:lumMod val="110000"/>
+                <a:satMod val="105000"/>
+                <a:tint val="67000"/>
+              </a:schemeClr>
+            </a:gs>
+            <a:gs pos="50000">
+              <a:schemeClr val="phClr">
+                <a:lumMod val="105000"/>
+                <a:satMod val="103000"/>
+                <a:tint val="73000"/>
+              </a:schemeClr>
+            </a:gs>
+            <a:gs pos="100000">
+              <a:schemeClr val="phClr">
+                <a:lumMod val="105000"/>
+                <a:satMod val="109000"/>
+                <a:tint val="81000"/>
+              </a:schemeClr>
+            </a:gs>
+          </a:gsLst>
+          <a:lin ang="5400000" scaled="0"/>
+        </a:gradFill>
+        <a:gradFill rotWithShape="1">
+          <a:gsLst>
+            <a:gs pos="0">
+              <a:schemeClr val="phClr">
+                <a:satMod val="103000"/>
+                <a:lumMod val="102000"/>
+                <a:tint val="94000"/>
+              </a:schemeClr>
+            </a:gs>
+            <a:gs pos="50000">
+              <a:schemeClr val="phClr">
+                <a:satMod val="110000"/>
+                <a:lumMod val="100000"/>
+                <a:shade val="100000"/>
+              </a:schemeClr>
+            </a:gs>
+            <a:gs pos="100000">
+              <a:schemeClr val="phClr">
+                <a:lumMod val="99000"/>
+                <a:satMod val="120000"/>
+                <a:shade val="78000"/>
+              </a:schemeClr>
+            </a:gs>
+          </a:gsLst>
+          <a:lin ang="5400000" scaled="0"/>
+        </a:gradFill>
+      </a:fillStyleLst>
+      <a:lnStyleLst>
+        <a:ln w="12700" cap="flat" cmpd="sng" algn="ctr">
+          <a:solidFill>
+            <a:schemeClr val="phClr"/>
+          </a:solidFill>
+          <a:prstDash val="solid"/>
+          <a:miter lim="800000"/>
+        </a:ln>
+        <a:ln w="19050" cap="flat" cmpd="sng" algn="ctr">
+          <a:solidFill>
+            <a:schemeClr val="phClr"/>
+          </a:solidFill>
+          <a:prstDash val="solid"/>
+          <a:miter lim="800000"/>
+        </a:ln>
+        <a:ln w="25400" cap="flat" cmpd="sng" algn="ctr">
+          <a:solidFill>
+            <a:schemeClr val="phClr"/>
+          </a:solidFill>
+          <a:prstDash val="solid"/>
+          <a:miter lim="800000"/>
+        </a:ln>
+      </a:lnStyleLst>
+      <a:effectStyleLst>
+        <a:effectStyle>
+          <a:effectLst/>
+        </a:effectStyle>
+        <a:effectStyle>
+          <a:effectLst/>
+        </a:effectStyle>
+        <a:effectStyle>
+          <a:effectLst>
+            <a:outerShdw blurRad="57150" dist="19050" dir="5400000" algn="ctr" rotWithShape="0">
+              <a:srgbClr val="000000">
+                <a:alpha val="63000"/>
+              </a:srgbClr>
+            </a:outerShdw>
+          </a:effectLst>
+        </a:effectStyle>
+      </a:effectStyleLst>
+      <a:bgFillStyleLst>
+        <a:solidFill>
+          <a:schemeClr val="phClr"/>
+        </a:solidFill>
+        <a:solidFill>
+          <a:schemeClr val="phClr">
+            <a:tint val="95000"/>
+            <a:satMod val="170000"/>
+          </a:schemeClr>
+        </a:solidFill>
+        <a:gradFill rotWithShape="1">
+          <a:gsLst>
+            <a:gs pos="0">
+              <a:schemeClr val="phClr">
+                <a:tint val="93000"/>
+                <a:satMod val="150000"/>
+                <a:shade val="98000"/>
+                <a:lumMod val="102000"/>
+              </a:schemeClr>
+            </a:gs>
+            <a:gs pos="50000">
+              <a:schemeClr val="phClr">
+                <a:tint val="98000"/>
+                <a:satMod val="130000"/>
+                <a:shade val="90000"/>
+                <a:lumMod val="103000"/>
+              </a:schemeClr>
+            </a:gs>
+            <a:gs pos="100000">
+              <a:schemeClr val="phClr">
+                <a:shade val="63000"/>
+                <a:satMod val="120000"/>
+              </a:schemeClr>
+            </a:gs>
+          </a:gsLst>
+          <a:lin ang="5400000" scaled="0"/>
+        </a:gradFill>
+      </a:bgFillStyleLst>
+    </a:fmtScheme>
+  </a:themeElements>
+  <a:objectDefaults>
+    <a:lnDef>
+      <a:spPr/>
+      <a:bodyPr/>
+      <a:lstStyle/>
+      <a:style>
+        <a:lnRef idx="2">
+          <a:schemeClr val="accent1"/>
+        </a:lnRef>
+        <a:fillRef idx="0">
+          <a:schemeClr val="accent1"/>
+        </a:fillRef>
+        <a:effectRef idx="1">
+          <a:schemeClr val="accent1"/>
+        </a:effectRef>
+        <a:fontRef idx="minor">
+          <a:schemeClr val="tx1"/>
+        </a:fontRef>
+      </a:style>
+    </a:lnDef>
+  </a:objectDefaults>
+  <a:extraClrSchemeLst/>
+  <a:extLst>
+    <a:ext uri="{05A4C25C-085E-4340-85A3-A5531E510DB2}">
+      <thm15:themeFamily xmlns:thm15="http://schemas.microsoft.com/office/thememl/2012/main" name="Office Theme" id="{2E142A2C-CD16-42D6-873A-C26D2A0506FA}" vid="{1BDDFF52-6CD6-40A5-AB3C-68EB2F1E4D0A}"/>
+    </a:ext>
+  </a:extLst>
+</a:theme>
 </file>
--- a/presentation/defense.pptx
+++ b/presentation/defense.pptx
@@ -153,7 +153,7 @@
     </p:spTree>
     <p:extLst>
       <p:ext uri="{BB962C8B-B14F-4D97-AF65-F5344CB8AC3E}">
-        <p14:creationId xmlns:p14="http://schemas.microsoft.com/office/powerpoint/2010/main" val="3608353361"/>
+        <p14:creationId xmlns:p14="http://schemas.microsoft.com/office/powerpoint/2010/main" val="2476988986"/>
       </p:ext>
     </p:extLst>
   </p:cSld>
@@ -473,7 +473,7 @@
           <a:p>
             <a:r>
               <a:rPr lang="en-US" dirty="0"/>
-              <a:t>10:00-11:15. The distinctive finding. The 2024 equal-weight top rank is a photo-finish: classic TOPSIS puts SVC-04 first by 0.004; SAW, VIKOR and the absolute variant put SVC-01 first, because regret capping and fixed anchors register SVC-01's worst patch recency and 4,054 unsupported months at full strength while vector normalisation is dominated by SVC-04's incident mass. In 2025 and under 2024 adjusted weights everything agrees on SVC-01.</a:t>
+              <a:t>10:00-11:15. The 2024 equal-weight top rank is a photo-finish: classic TOPSIS puts SVC-04 first by 0.004; SAW, VIKOR and the absolute variant put SVC-01 first. Both services are worst on exactly two criteria; SVC-04 is perfect on its other two while SVC-01 is only good, so linear aggregation favours SVC-01 while vector normalisation, which preserves SVC-04's outlying incident count, does not. If pressed: VIKOR's utility term is algebraically 1 minus SAW, so those two are not fully independent; VIKOR adds information only through regret. In 2025 everything agrees on SVC-01.</a:t>
             </a:r>
           </a:p>
         </p:txBody>
@@ -2582,7 +2582,7 @@
               <a:buNone/>
             </a:pPr>
             <a:r>
-              <a:rPr lang="en-US" sz="1700" b="1" dirty="0">
+              <a:rPr lang="en-US" sz="1600" b="1" dirty="0">
                 <a:solidFill>
                   <a:srgbClr val="D98E1F"/>
                 </a:solidFill>
@@ -2592,7 +2592,7 @@
               </a:rPr>
               <a:t>SVC-01 rises, fourth to first</a:t>
             </a:r>
-            <a:endParaRPr lang="en-US" sz="1700" dirty="0"/>
+            <a:endParaRPr lang="en-US" sz="1600" dirty="0"/>
           </a:p>
         </p:txBody>
       </p:sp>
@@ -2624,7 +2624,7 @@
               <a:buNone/>
             </a:pPr>
             <a:r>
-              <a:rPr lang="en-US" sz="1300" dirty="0">
+              <a:rPr lang="en-US" sz="1400" dirty="0">
                 <a:solidFill>
                   <a:srgbClr val="2A3F55"/>
                 </a:solidFill>
@@ -2634,7 +2634,7 @@
               </a:rPr>
               <a:t>Infrastructure lifecycle debt (4,210 unsupported component months, patch recency 63.18) is invisible to an incident count. This is precisely the signal the framework was built to surface.</a:t>
             </a:r>
-            <a:endParaRPr lang="en-US" sz="1300" dirty="0"/>
+            <a:endParaRPr lang="en-US" sz="1400" dirty="0"/>
           </a:p>
         </p:txBody>
       </p:sp>
@@ -2697,7 +2697,7 @@
               <a:buNone/>
             </a:pPr>
             <a:r>
-              <a:rPr lang="en-US" sz="1700" b="1" dirty="0">
+              <a:rPr lang="en-US" sz="1600" b="1" dirty="0">
                 <a:solidFill>
                   <a:srgbClr val="14283C"/>
                 </a:solidFill>
@@ -2707,7 +2707,7 @@
               </a:rPr>
               <a:t>SVC-05 falls, third to fifth</a:t>
             </a:r>
-            <a:endParaRPr lang="en-US" sz="1700" dirty="0"/>
+            <a:endParaRPr lang="en-US" sz="1600" dirty="0"/>
           </a:p>
         </p:txBody>
       </p:sp>
@@ -2739,7 +2739,7 @@
               <a:buNone/>
             </a:pPr>
             <a:r>
-              <a:rPr lang="en-US" sz="1300" dirty="0">
+              <a:rPr lang="en-US" sz="1400" dirty="0">
                 <a:solidFill>
                   <a:srgbClr val="2A3F55"/>
                 </a:solidFill>
@@ -2749,7 +2749,7 @@
               </a:rPr>
               <a:t>High incident volume (171/yr) offset by full patch recency and zero unsupported components: noisy, but structurally sound.</a:t>
             </a:r>
-            <a:endParaRPr lang="en-US" sz="1300" dirty="0"/>
+            <a:endParaRPr lang="en-US" sz="1400" dirty="0"/>
           </a:p>
         </p:txBody>
       </p:sp>
@@ -2761,7 +2761,7 @@
         </p:nvSpPr>
         <p:spPr>
           <a:xfrm>
-            <a:off x="685800" y="5120640"/>
+            <a:off x="685800" y="5850400"/>
             <a:ext cx="10789920" cy="713232"/>
           </a:xfrm>
           <a:prstGeom prst="rect">
@@ -2788,7 +2788,7 @@
         </p:nvSpPr>
         <p:spPr>
           <a:xfrm>
-            <a:off x="886968" y="5193792"/>
+            <a:off x="886968" y="5923552"/>
             <a:ext cx="10424160" cy="201168"/>
           </a:xfrm>
           <a:prstGeom prst="rect">
@@ -2827,7 +2827,7 @@
         </p:nvSpPr>
         <p:spPr>
           <a:xfrm>
-            <a:off x="886968" y="5394960"/>
+            <a:off x="886968" y="6124720"/>
             <a:ext cx="10424160" cy="384048"/>
           </a:xfrm>
           <a:prstGeom prst="rect">
@@ -2852,7 +2852,51 @@
                 <a:ea typeface="Arial" pitchFamily="34" charset="-122"/>
                 <a:cs typeface="Arial" pitchFamily="34" charset="-120"/>
               </a:rPr>
-              <a:t>The divergence is not noise; it concentrates exactly where multi-criteria measurement should add information over a single signal (Albarak &amp; Bahsoon, 2022).</a:t>
+              <a:t>The divergence is not noise; it concentrates exactly where multi-criteria measurement should add information over a single signal (</a:t>
+            </a:r>
+            <a:r>
+              <a:rPr lang="en-US" sz="1250" dirty="0" err="1">
+                <a:solidFill>
+                  <a:srgbClr val="14283C"/>
+                </a:solidFill>
+                <a:latin typeface="Arial" pitchFamily="34" charset="0"/>
+                <a:ea typeface="Arial" pitchFamily="34" charset="-122"/>
+                <a:cs typeface="Arial" pitchFamily="34" charset="-120"/>
+              </a:rPr>
+              <a:t>Albarak</a:t>
+            </a:r>
+            <a:r>
+              <a:rPr lang="en-US" sz="1250" dirty="0">
+                <a:solidFill>
+                  <a:srgbClr val="14283C"/>
+                </a:solidFill>
+                <a:latin typeface="Arial" pitchFamily="34" charset="0"/>
+                <a:ea typeface="Arial" pitchFamily="34" charset="-122"/>
+                <a:cs typeface="Arial" pitchFamily="34" charset="-120"/>
+              </a:rPr>
+              <a:t> </a:t>
+            </a:r>
+            <a:r>
+              <a:rPr lang="en-US" sz="1250" i="1" dirty="0">
+                <a:solidFill>
+                  <a:srgbClr val="14283C"/>
+                </a:solidFill>
+                <a:latin typeface="Arial" pitchFamily="34" charset="0"/>
+                <a:ea typeface="Arial" pitchFamily="34" charset="-122"/>
+                <a:cs typeface="Arial" pitchFamily="34" charset="-120"/>
+              </a:rPr>
+              <a:t>et al.</a:t>
+            </a:r>
+            <a:r>
+              <a:rPr lang="en-US" sz="1250" dirty="0">
+                <a:solidFill>
+                  <a:srgbClr val="14283C"/>
+                </a:solidFill>
+                <a:latin typeface="Arial" pitchFamily="34" charset="0"/>
+                <a:ea typeface="Arial" pitchFamily="34" charset="-122"/>
+                <a:cs typeface="Arial" pitchFamily="34" charset="-120"/>
+              </a:rPr>
+              <a:t>, 2022).</a:t>
             </a:r>
             <a:endParaRPr lang="en-US" sz="1250" dirty="0"/>
           </a:p>
@@ -2994,7 +3038,7 @@
               <a:buNone/>
             </a:pPr>
             <a:r>
-              <a:rPr lang="en-US" sz="1450" dirty="0">
+              <a:rPr lang="en-US" sz="1500" dirty="0">
                 <a:solidFill>
                   <a:srgbClr val="14283C"/>
                 </a:solidFill>
@@ -3005,7 +3049,7 @@
               <a:t>In 2025 all methods agree exactly under equal weights, with SVC-01 first. The one disagreement is the 2024 equal-weights top rank, and it is a </a:t>
             </a:r>
             <a:r>
-              <a:rPr lang="en-US" sz="1450" b="1" dirty="0">
+              <a:rPr lang="en-US" sz="1500" b="1" dirty="0">
                 <a:solidFill>
                   <a:srgbClr val="D98E1F"/>
                 </a:solidFill>
@@ -3015,7 +3059,7 @@
               </a:rPr>
               <a:t>photo-finish.</a:t>
             </a:r>
-            <a:endParaRPr lang="en-US" sz="1450" dirty="0"/>
+            <a:endParaRPr lang="en-US" sz="1500" dirty="0"/>
           </a:p>
         </p:txBody>
       </p:sp>
@@ -3028,14 +3072,14 @@
           <p:nvPr>
             <p:extLst>
               <p:ext uri="{D42A27DB-BD31-4B8C-83A1-F6EECF244321}">
-                <p14:modId xmlns:p14="http://schemas.microsoft.com/office/powerpoint/2010/main" val="1579011935"/>
+                <p14:modId xmlns:p14="http://schemas.microsoft.com/office/powerpoint/2010/main" val="2674304687"/>
               </p:ext>
             </p:extLst>
           </p:nvPr>
         </p:nvGraphicFramePr>
         <p:xfrm>
           <a:off x="685800" y="2377440"/>
-          <a:ext cx="7589520" cy="1920240"/>
+          <a:ext cx="7589520" cy="2188464"/>
         </p:xfrm>
         <a:graphic>
           <a:graphicData uri="http://schemas.openxmlformats.org/drawingml/2006/table">
@@ -3074,7 +3118,7 @@
                         <a:buNone/>
                       </a:pPr>
                       <a:r>
-                        <a:rPr lang="en-US" sz="1250" b="1" dirty="0">
+                        <a:rPr lang="en-US" sz="1400" b="1" dirty="0">
                           <a:solidFill>
                             <a:srgbClr val="14283C"/>
                           </a:solidFill>
@@ -3084,7 +3128,7 @@
                         </a:rPr>
                         <a:t>2024, equal weights</a:t>
                       </a:r>
-                      <a:endParaRPr lang="en-US" sz="1250" dirty="0">
+                      <a:endParaRPr lang="en-US" sz="1400" dirty="0">
                         <a:latin typeface="Arial" charset="0"/>
                         <a:ea typeface="Arial" charset="0"/>
                         <a:cs typeface="Arial" charset="0"/>
@@ -3121,7 +3165,7 @@
                         <a:buNone/>
                       </a:pPr>
                       <a:r>
-                        <a:rPr lang="en-US" sz="1250" b="1" dirty="0">
+                        <a:rPr lang="en-US" sz="1400" b="1" dirty="0">
                           <a:solidFill>
                             <a:srgbClr val="14283C"/>
                           </a:solidFill>
@@ -3131,7 +3175,7 @@
                         </a:rPr>
                         <a:t>TOPSIS classic</a:t>
                       </a:r>
-                      <a:endParaRPr lang="en-US" sz="1250" dirty="0">
+                      <a:endParaRPr lang="en-US" sz="1400" dirty="0">
                         <a:latin typeface="Arial" charset="0"/>
                         <a:ea typeface="Arial" charset="0"/>
                         <a:cs typeface="Arial" charset="0"/>
@@ -3168,7 +3212,7 @@
                         <a:buNone/>
                       </a:pPr>
                       <a:r>
-                        <a:rPr lang="en-US" sz="1250" b="1" dirty="0">
+                        <a:rPr lang="en-US" sz="1400" b="1" dirty="0">
                           <a:solidFill>
                             <a:srgbClr val="14283C"/>
                           </a:solidFill>
@@ -3178,7 +3222,7 @@
                         </a:rPr>
                         <a:t>SAW · VIKOR · TOPSIS absolute</a:t>
                       </a:r>
-                      <a:endParaRPr lang="en-US" sz="1250" dirty="0">
+                      <a:endParaRPr lang="en-US" sz="1400" dirty="0">
                         <a:latin typeface="Arial" charset="0"/>
                         <a:ea typeface="Arial" charset="0"/>
                         <a:cs typeface="Arial" charset="0"/>
@@ -3222,7 +3266,7 @@
                         <a:buNone/>
                       </a:pPr>
                       <a:r>
-                        <a:rPr lang="en-US" sz="1250" dirty="0">
+                        <a:rPr lang="en-US" sz="1400" dirty="0">
                           <a:solidFill>
                             <a:srgbClr val="14283C"/>
                           </a:solidFill>
@@ -3232,7 +3276,7 @@
                         </a:rPr>
                         <a:t>Top-ranked service</a:t>
                       </a:r>
-                      <a:endParaRPr lang="en-US" sz="1250" dirty="0">
+                      <a:endParaRPr lang="en-US" sz="1400" dirty="0">
                         <a:latin typeface="Arial" charset="0"/>
                         <a:ea typeface="Arial" charset="0"/>
                         <a:cs typeface="Arial" charset="0"/>
@@ -3275,7 +3319,7 @@
                         <a:buNone/>
                       </a:pPr>
                       <a:r>
-                        <a:rPr lang="en-US" sz="1250" dirty="0">
+                        <a:rPr lang="en-US" sz="1400" dirty="0">
                           <a:solidFill>
                             <a:srgbClr val="14283C"/>
                           </a:solidFill>
@@ -3285,7 +3329,7 @@
                         </a:rPr>
                         <a:t>SVC-04 (C* = 0.4847)</a:t>
                       </a:r>
-                      <a:endParaRPr lang="en-US" sz="1250" dirty="0">
+                      <a:endParaRPr lang="en-US" sz="1400" dirty="0">
                         <a:latin typeface="Arial" charset="0"/>
                         <a:ea typeface="Arial" charset="0"/>
                         <a:cs typeface="Arial" charset="0"/>
@@ -3328,7 +3372,7 @@
                         <a:buNone/>
                       </a:pPr>
                       <a:r>
-                        <a:rPr lang="en-US" sz="1250" dirty="0">
+                        <a:rPr lang="en-US" sz="1400" dirty="0">
                           <a:solidFill>
                             <a:srgbClr val="14283C"/>
                           </a:solidFill>
@@ -3338,7 +3382,7 @@
                         </a:rPr>
                         <a:t>SVC-01</a:t>
                       </a:r>
-                      <a:endParaRPr lang="en-US" sz="1250" dirty="0">
+                      <a:endParaRPr lang="en-US" sz="1400" dirty="0">
                         <a:latin typeface="Arial" charset="0"/>
                         <a:ea typeface="Arial" charset="0"/>
                         <a:cs typeface="Arial" charset="0"/>
@@ -3388,7 +3432,7 @@
                         <a:buNone/>
                       </a:pPr>
                       <a:r>
-                        <a:rPr lang="en-US" sz="1250" dirty="0">
+                        <a:rPr lang="en-US" sz="1400" dirty="0">
                           <a:solidFill>
                             <a:srgbClr val="14283C"/>
                           </a:solidFill>
@@ -3398,7 +3442,7 @@
                         </a:rPr>
                         <a:t>Margin</a:t>
                       </a:r>
-                      <a:endParaRPr lang="en-US" sz="1250" dirty="0">
+                      <a:endParaRPr lang="en-US" sz="1400" dirty="0">
                         <a:latin typeface="Arial" charset="0"/>
                         <a:ea typeface="Arial" charset="0"/>
                         <a:cs typeface="Arial" charset="0"/>
@@ -3441,7 +3485,7 @@
                         <a:buNone/>
                       </a:pPr>
                       <a:r>
-                        <a:rPr lang="en-US" sz="1250" dirty="0">
+                        <a:rPr lang="en-US" sz="1400" dirty="0">
                           <a:solidFill>
                             <a:srgbClr val="14283C"/>
                           </a:solidFill>
@@ -3451,7 +3495,7 @@
                         </a:rPr>
                         <a:t>ΔC* = 0.004 to SVC-01 (0.4886)</a:t>
                       </a:r>
-                      <a:endParaRPr lang="en-US" sz="1250" dirty="0">
+                      <a:endParaRPr lang="en-US" sz="1400" dirty="0">
                         <a:latin typeface="Arial" charset="0"/>
                         <a:ea typeface="Arial" charset="0"/>
                         <a:cs typeface="Arial" charset="0"/>
@@ -3494,7 +3538,7 @@
                         <a:buNone/>
                       </a:pPr>
                       <a:r>
-                        <a:rPr lang="en-US" sz="1250" dirty="0">
+                        <a:rPr lang="en-US" sz="1400" dirty="0">
                           <a:solidFill>
                             <a:srgbClr val="14283C"/>
                           </a:solidFill>
@@ -3502,9 +3546,9 @@
                           <a:ea typeface="Arial" pitchFamily="34" charset="-122"/>
                           <a:cs typeface="Arial" pitchFamily="34" charset="-120"/>
                         </a:rPr>
-                        <a:t>VIKOR regret capped on SVC-01</a:t>
+                        <a:t>Each worst on exactly 2 criteria</a:t>
                       </a:r>
-                      <a:endParaRPr lang="en-US" sz="1250" dirty="0">
+                      <a:endParaRPr lang="en-US" sz="1400" dirty="0">
                         <a:latin typeface="Arial" charset="0"/>
                         <a:ea typeface="Arial" charset="0"/>
                         <a:cs typeface="Arial" charset="0"/>
@@ -3554,7 +3598,7 @@
                         <a:buNone/>
                       </a:pPr>
                       <a:r>
-                        <a:rPr lang="en-US" sz="1250" dirty="0">
+                        <a:rPr lang="en-US" sz="1400" dirty="0">
                           <a:solidFill>
                             <a:srgbClr val="14283C"/>
                           </a:solidFill>
@@ -3564,7 +3608,7 @@
                         </a:rPr>
                         <a:t>Agreement</a:t>
                       </a:r>
-                      <a:endParaRPr lang="en-US" sz="1250" dirty="0">
+                      <a:endParaRPr lang="en-US" sz="1400" dirty="0">
                         <a:latin typeface="Arial" charset="0"/>
                         <a:ea typeface="Arial" charset="0"/>
                         <a:cs typeface="Arial" charset="0"/>
@@ -3607,7 +3651,7 @@
                         <a:buNone/>
                       </a:pPr>
                       <a:r>
-                        <a:rPr lang="en-US" sz="1250" dirty="0">
+                        <a:rPr lang="en-US" sz="1400" dirty="0">
                           <a:solidFill>
                             <a:srgbClr val="14283C"/>
                           </a:solidFill>
@@ -3617,7 +3661,7 @@
                         </a:rPr>
                         <a:t>vs SAW τ = 0.600</a:t>
                       </a:r>
-                      <a:endParaRPr lang="en-US" sz="1250" dirty="0">
+                      <a:endParaRPr lang="en-US" sz="1400" dirty="0">
                         <a:latin typeface="Arial" charset="0"/>
                         <a:ea typeface="Arial" charset="0"/>
                         <a:cs typeface="Arial" charset="0"/>
@@ -3660,7 +3704,7 @@
                         <a:buNone/>
                       </a:pPr>
                       <a:r>
-                        <a:rPr lang="en-US" sz="1250" dirty="0">
+                        <a:rPr lang="en-US" sz="1400" dirty="0">
                           <a:solidFill>
                             <a:srgbClr val="14283C"/>
                           </a:solidFill>
@@ -3670,7 +3714,7 @@
                         </a:rPr>
                         <a:t>absolute vs VIKOR τ = 1.000</a:t>
                       </a:r>
-                      <a:endParaRPr lang="en-US" sz="1250" dirty="0">
+                      <a:endParaRPr lang="en-US" sz="1400" dirty="0">
                         <a:latin typeface="Arial" charset="0"/>
                         <a:ea typeface="Arial" charset="0"/>
                         <a:cs typeface="Arial" charset="0"/>
@@ -3720,7 +3764,7 @@
                         <a:buNone/>
                       </a:pPr>
                       <a:r>
-                        <a:rPr lang="en-US" sz="1250" dirty="0">
+                        <a:rPr lang="en-US" sz="1400" dirty="0">
                           <a:solidFill>
                             <a:srgbClr val="14283C"/>
                           </a:solidFill>
@@ -3730,7 +3774,7 @@
                         </a:rPr>
                         <a:t>2025 and 2024 adjusted</a:t>
                       </a:r>
-                      <a:endParaRPr lang="en-US" sz="1250" dirty="0">
+                      <a:endParaRPr lang="en-US" sz="1400" dirty="0">
                         <a:latin typeface="Arial" charset="0"/>
                         <a:ea typeface="Arial" charset="0"/>
                         <a:cs typeface="Arial" charset="0"/>
@@ -3773,7 +3817,7 @@
                         <a:buNone/>
                       </a:pPr>
                       <a:r>
-                        <a:rPr lang="en-US" sz="1250" dirty="0">
+                        <a:rPr lang="en-US" sz="1400" dirty="0">
                           <a:solidFill>
                             <a:srgbClr val="14283C"/>
                           </a:solidFill>
@@ -3783,7 +3827,7 @@
                         </a:rPr>
                         <a:t>SVC-01 first under every method</a:t>
                       </a:r>
-                      <a:endParaRPr lang="en-US" sz="1250" dirty="0">
+                      <a:endParaRPr lang="en-US" sz="1400" dirty="0">
                         <a:latin typeface="Arial" charset="0"/>
                         <a:ea typeface="Arial" charset="0"/>
                         <a:cs typeface="Arial" charset="0"/>
@@ -3825,7 +3869,7 @@
                       <a:pPr marL="0" indent="0">
                         <a:buNone/>
                       </a:pPr>
-                      <a:endParaRPr lang="en-US" sz="1250" dirty="0">
+                      <a:endParaRPr lang="en-US" sz="1400" dirty="0">
                         <a:latin typeface="Arial" charset="0"/>
                         <a:ea typeface="Arial" charset="0"/>
                         <a:cs typeface="Arial" charset="0"/>
@@ -3877,8 +3921,8 @@
         </p:nvSpPr>
         <p:spPr>
           <a:xfrm>
-            <a:off x="8549640" y="2377440"/>
-            <a:ext cx="2926080" cy="2377440"/>
+            <a:off x="8549640" y="2377439"/>
+            <a:ext cx="2926080" cy="2458329"/>
           </a:xfrm>
           <a:prstGeom prst="rect">
             <a:avLst/>
@@ -3921,7 +3965,7 @@
               <a:buNone/>
             </a:pPr>
             <a:r>
-              <a:rPr lang="en-US" sz="1000" b="1" kern="0" spc="200" dirty="0">
+              <a:rPr lang="en-US" sz="1400" b="1" kern="0" spc="200" dirty="0">
                 <a:solidFill>
                   <a:srgbClr val="D98E1F"/>
                 </a:solidFill>
@@ -3931,7 +3975,7 @@
               </a:rPr>
               <a:t>MECHANISM</a:t>
             </a:r>
-            <a:endParaRPr lang="en-US" sz="1000" dirty="0"/>
+            <a:endParaRPr lang="en-US" sz="1400" dirty="0"/>
           </a:p>
         </p:txBody>
       </p:sp>
@@ -3963,7 +4007,7 @@
               <a:buNone/>
             </a:pPr>
             <a:r>
-              <a:rPr lang="en-US" sz="1050" dirty="0">
+              <a:rPr lang="en-US" sz="1400" dirty="0">
                 <a:solidFill>
                   <a:srgbClr val="2A3F55"/>
                 </a:solidFill>
@@ -3971,9 +4015,9 @@
                 <a:ea typeface="Arial" pitchFamily="34" charset="-122"/>
                 <a:cs typeface="Arial" pitchFamily="34" charset="-120"/>
               </a:rPr>
-              <a:t>Vector normalisation lets SVC-04’s 410-incident load dominate the incident axis. Fixed anchors and VIKOR’s regret register SVC-01’s concentrated structural exposure, the worst patch recency (65.83) and 4,054 unsupported months, at full strength.</a:t>
-            </a:r>
-            <a:endParaRPr lang="en-US" sz="1050" dirty="0"/>
+              <a:t>Both are worst on exactly two criteria. SVC-04 is perfect on the other two; SVC-01 is only good. Linear aggregation puts SVC-01 first; vector normalisation, preserving SVC-04’s outlying 410 incidents, reverses the pair by 0.004.</a:t>
+            </a:r>
+            <a:endParaRPr lang="en-US" sz="1400" dirty="0"/>
           </a:p>
         </p:txBody>
       </p:sp>
@@ -3985,7 +4029,7 @@
         </p:nvSpPr>
         <p:spPr>
           <a:xfrm>
-            <a:off x="685800" y="5074920"/>
+            <a:off x="685800" y="5822267"/>
             <a:ext cx="10789920" cy="713232"/>
           </a:xfrm>
           <a:prstGeom prst="rect">
@@ -4012,7 +4056,7 @@
         </p:nvSpPr>
         <p:spPr>
           <a:xfrm>
-            <a:off x="886968" y="5148072"/>
+            <a:off x="886968" y="5895419"/>
             <a:ext cx="10424160" cy="201168"/>
           </a:xfrm>
           <a:prstGeom prst="rect">
@@ -4051,7 +4095,7 @@
         </p:nvSpPr>
         <p:spPr>
           <a:xfrm>
-            <a:off x="886968" y="5349240"/>
+            <a:off x="886968" y="6096587"/>
             <a:ext cx="10424160" cy="384048"/>
           </a:xfrm>
           <a:prstGeom prst="rect">
@@ -4076,7 +4120,7 @@
                 <a:ea typeface="Arial" pitchFamily="34" charset="-122"/>
                 <a:cs typeface="Arial" pitchFamily="34" charset="-120"/>
               </a:rPr>
-              <a:t>Concentrated structural exposure versus diffuse operational load, separated by 0.004: the framework reports the photo-finish rather than hiding it. By 2025 every method places SVC-01 first.</a:t>
+              <a:t>A 0.004 margin decided by normalisation, not by a real gap. Three of four scorers say SVC-01. The framework reports the photo-finish rather than hiding it; by 2025 every method agrees.</a:t>
             </a:r>
             <a:endParaRPr lang="en-US" sz="1250" dirty="0"/>
           </a:p>
@@ -4264,7 +4308,7 @@
               <a:buChar char="•"/>
             </a:pPr>
             <a:r>
-              <a:rPr lang="en-US" sz="1350" dirty="0">
+              <a:rPr lang="en-US" sz="1500" dirty="0">
                 <a:solidFill>
                   <a:srgbClr val="14283C"/>
                 </a:solidFill>
@@ -4274,7 +4318,7 @@
               </a:rPr>
               <a:t>Primary prioritisation signal</a:t>
             </a:r>
-            <a:endParaRPr lang="en-US" sz="1350" dirty="0"/>
+            <a:endParaRPr lang="en-US" sz="1500" dirty="0"/>
           </a:p>
           <a:p>
             <a:pPr marL="177800" indent="-177800">
@@ -4288,7 +4332,7 @@
               <a:buChar char="•"/>
             </a:pPr>
             <a:r>
-              <a:rPr lang="en-US" sz="1350" dirty="0">
+              <a:rPr lang="en-US" sz="1500" dirty="0">
                 <a:solidFill>
                   <a:srgbClr val="14283C"/>
                 </a:solidFill>
@@ -4296,9 +4340,9 @@
                 <a:ea typeface="Arial" pitchFamily="34" charset="-122"/>
                 <a:cs typeface="Arial" pitchFamily="34" charset="-120"/>
               </a:rPr>
-              <a:t>VIKOR's regret and the absolute anchor both flag SVC-01's concentrated structural exposure, which distance aggregation alone underweights</a:t>
-            </a:r>
-            <a:endParaRPr lang="en-US" sz="1350" dirty="0"/>
+              <a:t>Triangulation, not a single number: where scorers split by 0.004, the margin is too small to carry a remediation decision</a:t>
+            </a:r>
+            <a:endParaRPr lang="en-US" sz="1500" dirty="0"/>
           </a:p>
         </p:txBody>
       </p:sp>
@@ -4373,7 +4417,7 @@
               <a:buChar char="•"/>
             </a:pPr>
             <a:r>
-              <a:rPr lang="en-US" sz="1350" dirty="0">
+              <a:rPr lang="en-US" sz="1500" dirty="0">
                 <a:solidFill>
                   <a:srgbClr val="14283C"/>
                 </a:solidFill>
@@ -4383,7 +4427,7 @@
               </a:rPr>
               <a:t>Rank-reversal free by construction: every leave-one-out removal preserved, where the classic top rank flips (García-Cascales &amp; Lamata 2012; Yang 2020)</a:t>
             </a:r>
-            <a:endParaRPr lang="en-US" sz="1350" dirty="0"/>
+            <a:endParaRPr lang="en-US" sz="1500" dirty="0"/>
           </a:p>
           <a:p>
             <a:pPr marL="177800" indent="-177800">
@@ -4397,7 +4441,7 @@
               <a:buChar char="•"/>
             </a:pPr>
             <a:r>
-              <a:rPr lang="en-US" sz="1350" dirty="0">
+              <a:rPr lang="en-US" sz="1500" dirty="0">
                 <a:solidFill>
                   <a:srgbClr val="14283C"/>
                 </a:solidFill>
@@ -4407,7 +4451,7 @@
               </a:rPr>
               <a:t>Scores comparable across observation periods, uniquely among the methods used</a:t>
             </a:r>
-            <a:endParaRPr lang="en-US" sz="1350" dirty="0"/>
+            <a:endParaRPr lang="en-US" sz="1500" dirty="0"/>
           </a:p>
           <a:p>
             <a:pPr marL="177800" indent="-177800">
@@ -4421,7 +4465,7 @@
               <a:buChar char="•"/>
             </a:pPr>
             <a:r>
-              <a:rPr lang="en-US" sz="1350" dirty="0">
+              <a:rPr lang="en-US" sz="1500" dirty="0">
                 <a:solidFill>
                   <a:srgbClr val="14283C"/>
                 </a:solidFill>
@@ -4431,7 +4475,7 @@
               </a:rPr>
               <a:t>Complementary perspective; also powers the Monte Carlo cleanly</a:t>
             </a:r>
-            <a:endParaRPr lang="en-US" sz="1350" dirty="0"/>
+            <a:endParaRPr lang="en-US" sz="1500" dirty="0"/>
           </a:p>
         </p:txBody>
       </p:sp>
@@ -4443,7 +4487,7 @@
         </p:nvSpPr>
         <p:spPr>
           <a:xfrm>
-            <a:off x="685800" y="5532120"/>
+            <a:off x="685800" y="5822265"/>
             <a:ext cx="10789920" cy="713232"/>
           </a:xfrm>
           <a:prstGeom prst="rect">
@@ -4470,7 +4514,7 @@
         </p:nvSpPr>
         <p:spPr>
           <a:xfrm>
-            <a:off x="886968" y="5605272"/>
+            <a:off x="886968" y="5895417"/>
             <a:ext cx="10424160" cy="201168"/>
           </a:xfrm>
           <a:prstGeom prst="rect">
@@ -4509,7 +4553,7 @@
         </p:nvSpPr>
         <p:spPr>
           <a:xfrm>
-            <a:off x="886968" y="5806440"/>
+            <a:off x="886968" y="6096585"/>
             <a:ext cx="10424160" cy="384048"/>
           </a:xfrm>
           <a:prstGeom prst="rect">
@@ -4676,7 +4720,7 @@
               <a:buNone/>
             </a:pPr>
             <a:r>
-              <a:rPr lang="en-US" sz="1500" b="1" dirty="0">
+              <a:rPr lang="en-US" sz="1600" b="1" dirty="0">
                 <a:solidFill>
                   <a:srgbClr val="D98E1F"/>
                 </a:solidFill>
@@ -4687,7 +4731,7 @@
               <a:t>Q  </a:t>
             </a:r>
             <a:r>
-              <a:rPr lang="en-US" sz="1500" b="1" dirty="0">
+              <a:rPr lang="en-US" sz="1600" b="1" dirty="0">
                 <a:solidFill>
                   <a:srgbClr val="14283C"/>
                 </a:solidFill>
@@ -4697,7 +4741,7 @@
               </a:rPr>
               <a:t>Only six services: what can that prove?</a:t>
             </a:r>
-            <a:endParaRPr lang="en-US" sz="1500" dirty="0"/>
+            <a:endParaRPr lang="en-US" sz="1600" dirty="0"/>
           </a:p>
         </p:txBody>
       </p:sp>
@@ -4709,8 +4753,8 @@
         </p:nvSpPr>
         <p:spPr>
           <a:xfrm>
-            <a:off x="1188720" y="2258568"/>
-            <a:ext cx="10149840" cy="731520"/>
+            <a:off x="1188720" y="2315473"/>
+            <a:ext cx="10149840" cy="563763"/>
           </a:xfrm>
           <a:prstGeom prst="rect">
             <a:avLst/>
@@ -4729,7 +4773,7 @@
               <a:buNone/>
             </a:pPr>
             <a:r>
-              <a:rPr lang="en-US" sz="1250" dirty="0">
+              <a:rPr lang="en-US" sz="1500" dirty="0">
                 <a:solidFill>
                   <a:srgbClr val="2A3F55"/>
                 </a:solidFill>
@@ -4739,7 +4783,7 @@
               </a:rPr>
               <a:t>The contribution is the instrument and evaluation logic, not a portfolio ranking. Selection was by data completeness; p-values are exact over all 720 permutations and read as effect sizes; portfolio-wide deployment is stated future work.</a:t>
             </a:r>
-            <a:endParaRPr lang="en-US" sz="1250" dirty="0"/>
+            <a:endParaRPr lang="en-US" sz="1500" dirty="0"/>
           </a:p>
         </p:txBody>
       </p:sp>
@@ -4751,7 +4795,7 @@
         </p:nvSpPr>
         <p:spPr>
           <a:xfrm>
-            <a:off x="685800" y="3191256"/>
+            <a:off x="685800" y="3043053"/>
             <a:ext cx="10789920" cy="347472"/>
           </a:xfrm>
           <a:prstGeom prst="rect">
@@ -4768,7 +4812,7 @@
               <a:buNone/>
             </a:pPr>
             <a:r>
-              <a:rPr lang="en-US" sz="1500" b="1" dirty="0">
+              <a:rPr lang="en-US" sz="1600" b="1" dirty="0">
                 <a:solidFill>
                   <a:srgbClr val="D98E1F"/>
                 </a:solidFill>
@@ -4779,7 +4823,7 @@
               <a:t>Q  </a:t>
             </a:r>
             <a:r>
-              <a:rPr lang="en-US" sz="1500" b="1" dirty="0">
+              <a:rPr lang="en-US" sz="1600" b="1" dirty="0">
                 <a:solidFill>
                   <a:srgbClr val="14283C"/>
                 </a:solidFill>
@@ -4789,7 +4833,7 @@
               </a:rPr>
               <a:t>You built and evaluated on the same data. Circular?</a:t>
             </a:r>
-            <a:endParaRPr lang="en-US" sz="1500" dirty="0"/>
+            <a:endParaRPr lang="en-US" sz="1600" dirty="0"/>
           </a:p>
         </p:txBody>
       </p:sp>
@@ -4801,8 +4845,8 @@
         </p:nvSpPr>
         <p:spPr>
           <a:xfrm>
-            <a:off x="1188720" y="3575304"/>
-            <a:ext cx="10149840" cy="731520"/>
+            <a:off x="1188720" y="3484006"/>
+            <a:ext cx="10149840" cy="768096"/>
           </a:xfrm>
           <a:prstGeom prst="rect">
             <a:avLst/>
@@ -4821,7 +4865,7 @@
               <a:buNone/>
             </a:pPr>
             <a:r>
-              <a:rPr lang="en-US" sz="1250" dirty="0">
+              <a:rPr lang="en-US" sz="1500" dirty="0">
                 <a:solidFill>
                   <a:srgbClr val="2A3F55"/>
                 </a:solidFill>
@@ -4831,7 +4875,7 @@
               </a:rPr>
               <a:t>Declared openly: the evaluation establishes robustness, method-independence and discriminant value, not criterion validity, because no independent measure of non-code debt exists. External validation is the primary future-work avenue.</a:t>
             </a:r>
-            <a:endParaRPr lang="en-US" sz="1250" dirty="0"/>
+            <a:endParaRPr lang="en-US" sz="1500" dirty="0"/>
           </a:p>
         </p:txBody>
       </p:sp>
@@ -4843,7 +4887,7 @@
         </p:nvSpPr>
         <p:spPr>
           <a:xfrm>
-            <a:off x="685800" y="4507992"/>
+            <a:off x="685800" y="4415919"/>
             <a:ext cx="10789920" cy="347472"/>
           </a:xfrm>
           <a:prstGeom prst="rect">
@@ -4860,7 +4904,7 @@
               <a:buNone/>
             </a:pPr>
             <a:r>
-              <a:rPr lang="en-US" sz="1500" b="1" dirty="0">
+              <a:rPr lang="en-US" sz="1600" b="1" dirty="0">
                 <a:solidFill>
                   <a:srgbClr val="D98E1F"/>
                 </a:solidFill>
@@ -4871,7 +4915,7 @@
               <a:t>Q  </a:t>
             </a:r>
             <a:r>
-              <a:rPr lang="en-US" sz="1500" b="1" dirty="0">
+              <a:rPr lang="en-US" sz="1600" b="1" dirty="0">
                 <a:solidFill>
                   <a:srgbClr val="14283C"/>
                 </a:solidFill>
@@ -4881,7 +4925,7 @@
               </a:rPr>
               <a:t>Are DORA metrics really debt proxies?</a:t>
             </a:r>
-            <a:endParaRPr lang="en-US" sz="1500" dirty="0"/>
+            <a:endParaRPr lang="en-US" sz="1600" dirty="0"/>
           </a:p>
         </p:txBody>
       </p:sp>
@@ -4893,8 +4937,8 @@
         </p:nvSpPr>
         <p:spPr>
           <a:xfrm>
-            <a:off x="1188720" y="4892040"/>
-            <a:ext cx="10149840" cy="731520"/>
+            <a:off x="1188720" y="4856871"/>
+            <a:ext cx="10149840" cy="805375"/>
           </a:xfrm>
           <a:prstGeom prst="rect">
             <a:avLst/>
@@ -4906,14 +4950,13 @@
           <a:bodyPr wrap="square" lIns="0" tIns="0" rIns="0" bIns="0" rtlCol="0" anchor="t"/>
           <a:lstStyle/>
           <a:p>
-            <a:pPr marL="0" indent="0">
+            <a:pPr>
               <a:lnSpc>
                 <a:spcPct val="112000"/>
               </a:lnSpc>
-              <a:buNone/>
-            </a:pPr>
-            <a:r>
-              <a:rPr lang="en-US" sz="1250" dirty="0">
+            </a:pPr>
+            <a:r>
+              <a:rPr lang="en-US" sz="1500" dirty="0">
                 <a:solidFill>
                   <a:srgbClr val="2A3F55"/>
                 </a:solidFill>
@@ -4921,9 +4964,53 @@
                 <a:ea typeface="Arial" pitchFamily="34" charset="-122"/>
                 <a:cs typeface="Arial" pitchFamily="34" charset="-120"/>
               </a:rPr>
-              <a:t>Treated as the central testable hypothesis, never a premise. Forsgren et al. validate the metrics; Nord et al. ground the diagnostic reading; the rankings match literature-predicted profiles. Longitudinal tracking would move it from plausible to evidenced.</a:t>
-            </a:r>
-            <a:endParaRPr lang="en-US" sz="1250" dirty="0"/>
+              <a:t>Treated as the central testable hypothesis, never a premise. Forsgren </a:t>
+            </a:r>
+            <a:r>
+              <a:rPr lang="en-US" sz="1500" i="1" dirty="0">
+                <a:solidFill>
+                  <a:srgbClr val="2A3F55"/>
+                </a:solidFill>
+                <a:latin typeface="Arial" pitchFamily="34" charset="0"/>
+                <a:ea typeface="Arial" pitchFamily="34" charset="-122"/>
+                <a:cs typeface="Arial" pitchFamily="34" charset="-120"/>
+              </a:rPr>
+              <a:t>et al. </a:t>
+            </a:r>
+            <a:r>
+              <a:rPr lang="en-US" sz="1500" dirty="0">
+                <a:solidFill>
+                  <a:srgbClr val="2A3F55"/>
+                </a:solidFill>
+                <a:latin typeface="Arial" pitchFamily="34" charset="0"/>
+                <a:ea typeface="Arial" pitchFamily="34" charset="-122"/>
+                <a:cs typeface="Arial" pitchFamily="34" charset="-120"/>
+              </a:rPr>
+              <a:t>(2018) validate the metrics; Nord, </a:t>
+            </a:r>
+            <a:r>
+              <a:rPr lang="en-US" sz="1500" dirty="0" err="1">
+                <a:solidFill>
+                  <a:srgbClr val="2A3F55"/>
+                </a:solidFill>
+                <a:latin typeface="Arial" pitchFamily="34" charset="0"/>
+                <a:ea typeface="Arial" pitchFamily="34" charset="-122"/>
+                <a:cs typeface="Arial" pitchFamily="34" charset="-120"/>
+              </a:rPr>
+              <a:t>Ozkaya</a:t>
+            </a:r>
+            <a:r>
+              <a:rPr lang="en-US" sz="1500" dirty="0">
+                <a:solidFill>
+                  <a:srgbClr val="2A3F55"/>
+                </a:solidFill>
+                <a:latin typeface="Arial" pitchFamily="34" charset="0"/>
+                <a:ea typeface="Arial" pitchFamily="34" charset="-122"/>
+                <a:cs typeface="Arial" pitchFamily="34" charset="-120"/>
+              </a:rPr>
+              <a:t> and Woody (2021) ground the diagnostic reading; the rankings match literature-predicted profiles. Longitudinal tracking would move it from plausible to evidenced.</a:t>
+            </a:r>
+            <a:endParaRPr lang="en-US" sz="1500" dirty="0"/>
           </a:p>
         </p:txBody>
       </p:sp>
@@ -5063,7 +5150,7 @@
               <a:buNone/>
             </a:pPr>
             <a:r>
-              <a:rPr lang="en-US" sz="1500" b="1" dirty="0">
+              <a:rPr lang="en-US" sz="1600" b="1" dirty="0">
                 <a:solidFill>
                   <a:srgbClr val="D98E1F"/>
                 </a:solidFill>
@@ -5074,7 +5161,7 @@
               <a:t>Q  </a:t>
             </a:r>
             <a:r>
-              <a:rPr lang="en-US" sz="1500" b="1" dirty="0">
+              <a:rPr lang="en-US" sz="1600" b="1" dirty="0">
                 <a:solidFill>
                   <a:srgbClr val="14283C"/>
                 </a:solidFill>
@@ -5084,7 +5171,7 @@
               </a:rPr>
               <a:t>Aren't the differential weights arbitrary?</a:t>
             </a:r>
-            <a:endParaRPr lang="en-US" sz="1500" dirty="0"/>
+            <a:endParaRPr lang="en-US" sz="1600" dirty="0"/>
           </a:p>
         </p:txBody>
       </p:sp>
@@ -5096,8 +5183,8 @@
         </p:nvSpPr>
         <p:spPr>
           <a:xfrm>
-            <a:off x="1188720" y="2258568"/>
-            <a:ext cx="10149840" cy="685800"/>
+            <a:off x="1188720" y="2256929"/>
+            <a:ext cx="10149840" cy="749804"/>
           </a:xfrm>
           <a:prstGeom prst="rect">
             <a:avLst/>
@@ -5116,7 +5203,7 @@
               <a:buNone/>
             </a:pPr>
             <a:r>
-              <a:rPr lang="en-US" sz="1250" dirty="0">
+              <a:rPr lang="en-US" sz="1500" dirty="0">
                 <a:solidFill>
                   <a:srgbClr val="2A3F55"/>
                 </a:solidFill>
@@ -5126,7 +5213,7 @@
               </a:rPr>
               <a:t>Yes, and they are declared as a practitioner assumption. That is why the evaluation does not depend on them: across 20,000 Dirichlet-sampled weightings the lowest priority holds in 98.3% of draws and rank 1 stays inside the same three-service cluster in all of them.</a:t>
             </a:r>
-            <a:endParaRPr lang="en-US" sz="1250" dirty="0"/>
+            <a:endParaRPr lang="en-US" sz="1500" dirty="0"/>
           </a:p>
         </p:txBody>
       </p:sp>
@@ -5138,7 +5225,7 @@
         </p:nvSpPr>
         <p:spPr>
           <a:xfrm>
-            <a:off x="685800" y="3145536"/>
+            <a:off x="685800" y="3112006"/>
             <a:ext cx="10789920" cy="347472"/>
           </a:xfrm>
           <a:prstGeom prst="rect">
@@ -5155,7 +5242,7 @@
               <a:buNone/>
             </a:pPr>
             <a:r>
-              <a:rPr lang="en-US" sz="1500" b="1" dirty="0">
+              <a:rPr lang="en-US" sz="1600" b="1" dirty="0">
                 <a:solidFill>
                   <a:srgbClr val="D98E1F"/>
                 </a:solidFill>
@@ -5166,7 +5253,7 @@
               <a:t>Q  </a:t>
             </a:r>
             <a:r>
-              <a:rPr lang="en-US" sz="1500" b="1" dirty="0">
+              <a:rPr lang="en-US" sz="1600" b="1" dirty="0">
                 <a:solidFill>
                   <a:srgbClr val="14283C"/>
                 </a:solidFill>
@@ -5176,7 +5263,7 @@
               </a:rPr>
               <a:t>Could this be misused to judge teams?</a:t>
             </a:r>
-            <a:endParaRPr lang="en-US" sz="1500" dirty="0"/>
+            <a:endParaRPr lang="en-US" sz="1600" dirty="0"/>
           </a:p>
         </p:txBody>
       </p:sp>
@@ -5188,8 +5275,8 @@
         </p:nvSpPr>
         <p:spPr>
           <a:xfrm>
-            <a:off x="1188720" y="3529584"/>
-            <a:ext cx="10149840" cy="914400"/>
+            <a:off x="1188720" y="3494416"/>
+            <a:ext cx="10149840" cy="787438"/>
           </a:xfrm>
           <a:prstGeom prst="rect">
             <a:avLst/>
@@ -5208,7 +5295,7 @@
               <a:buNone/>
             </a:pPr>
             <a:r>
-              <a:rPr lang="en-US" sz="1250" dirty="0">
+              <a:rPr lang="en-US" sz="1500" dirty="0">
                 <a:solidFill>
                   <a:srgbClr val="2A3F55"/>
                 </a:solidFill>
@@ -5216,9 +5303,31 @@
                 <a:ea typeface="Arial" pitchFamily="34" charset="-122"/>
                 <a:cs typeface="Arial" pitchFamily="34" charset="-120"/>
               </a:rPr>
-              <a:t>Governance scope was agreed with the Head of Trading IT at the outset: decision-support for portfolio conversations, not a binding instrument. High-debt profiles typically reflect historical design decisions, not current custodians (Ahmad et al., 2026). No team, vendor or individual identifiers exist in the dataset.</a:t>
-            </a:r>
-            <a:endParaRPr lang="en-US" sz="1250" dirty="0"/>
+              <a:t>Governance scope was agreed with the Head of Trading IT at the outset: decision-support for portfolio conversations, not a binding instrument. High-debt profiles typically reflect historical design decisions, not current custodians (Ahmad </a:t>
+            </a:r>
+            <a:r>
+              <a:rPr lang="en-US" sz="1500" i="1" dirty="0">
+                <a:solidFill>
+                  <a:srgbClr val="2A3F55"/>
+                </a:solidFill>
+                <a:latin typeface="Arial" pitchFamily="34" charset="0"/>
+                <a:ea typeface="Arial" pitchFamily="34" charset="-122"/>
+                <a:cs typeface="Arial" pitchFamily="34" charset="-120"/>
+              </a:rPr>
+              <a:t>et al.</a:t>
+            </a:r>
+            <a:r>
+              <a:rPr lang="en-US" sz="1500" dirty="0">
+                <a:solidFill>
+                  <a:srgbClr val="2A3F55"/>
+                </a:solidFill>
+                <a:latin typeface="Arial" pitchFamily="34" charset="0"/>
+                <a:ea typeface="Arial" pitchFamily="34" charset="-122"/>
+                <a:cs typeface="Arial" pitchFamily="34" charset="-120"/>
+              </a:rPr>
+              <a:t>, 2026). No team, vendor or individual identifiers exist in the dataset.</a:t>
+            </a:r>
+            <a:endParaRPr lang="en-US" sz="1500" dirty="0"/>
           </a:p>
         </p:txBody>
       </p:sp>
@@ -5230,7 +5339,7 @@
         </p:nvSpPr>
         <p:spPr>
           <a:xfrm>
-            <a:off x="685800" y="4690872"/>
+            <a:off x="685800" y="5833868"/>
             <a:ext cx="10789920" cy="713232"/>
           </a:xfrm>
           <a:prstGeom prst="rect">
@@ -5257,7 +5366,7 @@
         </p:nvSpPr>
         <p:spPr>
           <a:xfrm>
-            <a:off x="886968" y="4764024"/>
+            <a:off x="886968" y="5907020"/>
             <a:ext cx="10424160" cy="201168"/>
           </a:xfrm>
           <a:prstGeom prst="rect">
@@ -5296,7 +5405,7 @@
         </p:nvSpPr>
         <p:spPr>
           <a:xfrm>
-            <a:off x="886968" y="4965192"/>
+            <a:off x="886968" y="6108188"/>
             <a:ext cx="10424160" cy="384048"/>
           </a:xfrm>
           <a:prstGeom prst="rect">
@@ -5532,7 +5641,7 @@
               <a:buNone/>
             </a:pPr>
             <a:r>
-              <a:rPr lang="en-US" sz="1400" b="1" dirty="0">
+              <a:rPr lang="en-US" sz="1500" b="1" dirty="0">
                 <a:solidFill>
                   <a:srgbClr val="14283C"/>
                 </a:solidFill>
@@ -5543,7 +5652,7 @@
               <a:t>First application: </a:t>
             </a:r>
             <a:r>
-              <a:rPr lang="en-US" sz="1400" dirty="0">
+              <a:rPr lang="en-US" sz="1500" dirty="0">
                 <a:solidFill>
                   <a:srgbClr val="14283C"/>
                 </a:solidFill>
@@ -5551,9 +5660,31 @@
                 <a:ea typeface="Arial" pitchFamily="34" charset="-122"/>
                 <a:cs typeface="Arial" pitchFamily="34" charset="-120"/>
               </a:rPr>
-              <a:t>(to the best of current knowledge) of TOPSIS to live ITSM/CMDB records for TD prioritisation in financial trading IT, closing the gap Lenarduzzi et al. identify field-wide</a:t>
-            </a:r>
-            <a:endParaRPr lang="en-US" sz="1400" dirty="0"/>
+              <a:t>(to the best of current knowledge) of TOPSIS to live ITSM/CMDB records for TD prioritisation in financial trading IT, closing the gap Lenarduzzi </a:t>
+            </a:r>
+            <a:r>
+              <a:rPr lang="en-US" sz="1500" i="1" dirty="0">
+                <a:solidFill>
+                  <a:srgbClr val="14283C"/>
+                </a:solidFill>
+                <a:latin typeface="Arial" pitchFamily="34" charset="0"/>
+                <a:ea typeface="Arial" pitchFamily="34" charset="-122"/>
+                <a:cs typeface="Arial" pitchFamily="34" charset="-120"/>
+              </a:rPr>
+              <a:t>et al.</a:t>
+            </a:r>
+            <a:r>
+              <a:rPr lang="en-US" sz="1500" dirty="0">
+                <a:solidFill>
+                  <a:srgbClr val="14283C"/>
+                </a:solidFill>
+                <a:latin typeface="Arial" pitchFamily="34" charset="0"/>
+                <a:ea typeface="Arial" pitchFamily="34" charset="-122"/>
+                <a:cs typeface="Arial" pitchFamily="34" charset="-120"/>
+              </a:rPr>
+              <a:t> (2021) identify field-wide</a:t>
+            </a:r>
+            <a:endParaRPr lang="en-US" sz="1500" dirty="0"/>
           </a:p>
         </p:txBody>
       </p:sp>
@@ -5651,7 +5782,7 @@
               <a:buNone/>
             </a:pPr>
             <a:r>
-              <a:rPr lang="en-US" sz="1400" b="1" dirty="0">
+              <a:rPr lang="en-US" sz="1500" b="1" dirty="0">
                 <a:solidFill>
                   <a:srgbClr val="14283C"/>
                 </a:solidFill>
@@ -5662,7 +5793,7 @@
               <a:t>An operationally defined indicator set: </a:t>
             </a:r>
             <a:r>
-              <a:rPr lang="en-US" sz="1400" dirty="0">
+              <a:rPr lang="en-US" sz="1500" dirty="0">
                 <a:solidFill>
                   <a:srgbClr val="14283C"/>
                 </a:solidFill>
@@ -5672,7 +5803,7 @@
               </a:rPr>
               <a:t>with explicit literature mapping to debt dimensions, plus evidence of its behaviour under a four-strand evaluation</a:t>
             </a:r>
-            <a:endParaRPr lang="en-US" sz="1400" dirty="0"/>
+            <a:endParaRPr lang="en-US" sz="1500" dirty="0"/>
           </a:p>
         </p:txBody>
       </p:sp>
@@ -5770,7 +5901,7 @@
               <a:buNone/>
             </a:pPr>
             <a:r>
-              <a:rPr lang="en-US" sz="1400" b="1" dirty="0">
+              <a:rPr lang="en-US" sz="1500" b="1" dirty="0">
                 <a:solidFill>
                   <a:srgbClr val="14283C"/>
                 </a:solidFill>
@@ -5781,7 +5912,7 @@
               <a:t>A methodological finding of independent interest: </a:t>
             </a:r>
             <a:r>
-              <a:rPr lang="en-US" sz="1400" dirty="0">
+              <a:rPr lang="en-US" sz="1500" dirty="0">
                 <a:solidFill>
                   <a:srgbClr val="14283C"/>
                 </a:solidFill>
@@ -5791,7 +5922,7 @@
               </a:rPr>
               <a:t>sample-relative and absolutely anchored methods respond differently to concentrated debt profiles, consequential for the top of a ranking</a:t>
             </a:r>
-            <a:endParaRPr lang="en-US" sz="1400" dirty="0"/>
+            <a:endParaRPr lang="en-US" sz="1500" dirty="0"/>
           </a:p>
         </p:txBody>
       </p:sp>
@@ -5803,7 +5934,7 @@
         </p:nvSpPr>
         <p:spPr>
           <a:xfrm>
-            <a:off x="685800" y="5577840"/>
+            <a:off x="685800" y="5832817"/>
             <a:ext cx="10789920" cy="713232"/>
           </a:xfrm>
           <a:prstGeom prst="rect">
@@ -5830,7 +5961,7 @@
         </p:nvSpPr>
         <p:spPr>
           <a:xfrm>
-            <a:off x="886968" y="5650992"/>
+            <a:off x="886968" y="5905969"/>
             <a:ext cx="10424160" cy="201168"/>
           </a:xfrm>
           <a:prstGeom prst="rect">
@@ -5869,7 +6000,7 @@
         </p:nvSpPr>
         <p:spPr>
           <a:xfrm>
-            <a:off x="886968" y="5852160"/>
+            <a:off x="886968" y="6107137"/>
             <a:ext cx="10424160" cy="384048"/>
           </a:xfrm>
           <a:prstGeom prst="rect">
@@ -6523,7 +6654,7 @@
         <p:spPr>
           <a:xfrm>
             <a:off x="685800" y="1828800"/>
-            <a:ext cx="5303520" cy="649224"/>
+            <a:ext cx="5303520" cy="498348"/>
           </a:xfrm>
           <a:prstGeom prst="rect">
             <a:avLst/>
@@ -6550,7 +6681,29 @@
                 <a:ea typeface="Arial" pitchFamily="34" charset="-122"/>
                 <a:cs typeface="Arial" pitchFamily="34" charset="-120"/>
               </a:rPr>
-              <a:t>Ahmad, M.O., Mandić, V., Taušan, N., Katin, A. and Herath, P. (2026) 'Technical debt is not just technical: An industrial case study in large agile software development', Journal of Systems and Software, 234, p. 112719. Available at: https://doi.org/10.1016/j.jss.2025.112719.</a:t>
+              <a:t>Ahmad, M.O., Mandić, V., Taušan, N., Katin, A. and Herath, P. (2026) 'Technical debt is not just technical: An industrial case study in large agile software development', </a:t>
+            </a:r>
+            <a:r>
+              <a:rPr lang="en-US" sz="950" i="1" dirty="0">
+                <a:solidFill>
+                  <a:srgbClr val="2A3F55"/>
+                </a:solidFill>
+                <a:latin typeface="Arial" pitchFamily="34" charset="0"/>
+                <a:ea typeface="Arial" pitchFamily="34" charset="-122"/>
+                <a:cs typeface="Arial" pitchFamily="34" charset="-120"/>
+              </a:rPr>
+              <a:t>Journal of Systems and Software</a:t>
+            </a:r>
+            <a:r>
+              <a:rPr lang="en-US" sz="950" dirty="0">
+                <a:solidFill>
+                  <a:srgbClr val="2A3F55"/>
+                </a:solidFill>
+                <a:latin typeface="Arial" pitchFamily="34" charset="0"/>
+                <a:ea typeface="Arial" pitchFamily="34" charset="-122"/>
+                <a:cs typeface="Arial" pitchFamily="34" charset="-120"/>
+              </a:rPr>
+              <a:t>, 234, p. 112719. Available at: https://doi.org/10.1016/j.jss.2025.112719.</a:t>
             </a:r>
             <a:endParaRPr lang="en-US" sz="950" dirty="0"/>
           </a:p>
@@ -6564,7 +6717,7 @@
         </p:nvSpPr>
         <p:spPr>
           <a:xfrm>
-            <a:off x="685800" y="2606040"/>
+            <a:off x="685800" y="2549488"/>
             <a:ext cx="5303520" cy="498348"/>
           </a:xfrm>
           <a:prstGeom prst="rect">
@@ -6592,7 +6745,29 @@
                 <a:ea typeface="Arial" pitchFamily="34" charset="-122"/>
                 <a:cs typeface="Arial" pitchFamily="34" charset="-120"/>
               </a:rPr>
-              <a:t>Albarak, M., Bahsoon, R., Ozkaya, I. and Nord, R.L. (2022) 'Managing Technical Debt in Database Normalization', IEEE Transactions on Software Engineering, 48(3), pp. 755–772. Available at: https://doi.org/10.1109/TSE.2020.3001339.</a:t>
+              <a:t>Albarak, M., Bahsoon, R., Ozkaya, I. and Nord, R.L. (2022) 'Managing Technical Debt in Database Normalization', </a:t>
+            </a:r>
+            <a:r>
+              <a:rPr lang="en-US" sz="950" i="1" dirty="0">
+                <a:solidFill>
+                  <a:srgbClr val="2A3F55"/>
+                </a:solidFill>
+                <a:latin typeface="Arial" pitchFamily="34" charset="0"/>
+                <a:ea typeface="Arial" pitchFamily="34" charset="-122"/>
+                <a:cs typeface="Arial" pitchFamily="34" charset="-120"/>
+              </a:rPr>
+              <a:t>IEEE Transactions on Software Engineering</a:t>
+            </a:r>
+            <a:r>
+              <a:rPr lang="en-US" sz="950" dirty="0">
+                <a:solidFill>
+                  <a:srgbClr val="2A3F55"/>
+                </a:solidFill>
+                <a:latin typeface="Arial" pitchFamily="34" charset="0"/>
+                <a:ea typeface="Arial" pitchFamily="34" charset="-122"/>
+                <a:cs typeface="Arial" pitchFamily="34" charset="-120"/>
+              </a:rPr>
+              <a:t>, 48(3), pp. 755–772. Available at: https://doi.org/10.1109/TSE.2020.3001339.</a:t>
             </a:r>
             <a:endParaRPr lang="en-US" sz="950" dirty="0"/>
           </a:p>
@@ -6606,8 +6781,8 @@
         </p:nvSpPr>
         <p:spPr>
           <a:xfrm>
-            <a:off x="685800" y="3232404"/>
-            <a:ext cx="5303520" cy="498348"/>
+            <a:off x="685800" y="3270176"/>
+            <a:ext cx="5303520" cy="328481"/>
           </a:xfrm>
           <a:prstGeom prst="rect">
             <a:avLst/>
@@ -6648,8 +6823,8 @@
         </p:nvSpPr>
         <p:spPr>
           <a:xfrm>
-            <a:off x="685800" y="3858768"/>
-            <a:ext cx="5303520" cy="800100"/>
+            <a:off x="685800" y="3820997"/>
+            <a:ext cx="5303520" cy="649224"/>
           </a:xfrm>
           <a:prstGeom prst="rect">
             <a:avLst/>
@@ -6676,7 +6851,29 @@
                 <a:ea typeface="Arial" pitchFamily="34" charset="-122"/>
                 <a:cs typeface="Arial" pitchFamily="34" charset="-120"/>
               </a:rPr>
-              <a:t>de Toledo, S.S., Martini, A., Sjøberg, D.I.K., Przybyszewska, A. and Frandsen, J.S. (2021) 'Reducing Incidents in Microservices by Repaying Architectural Technical Debt', 2021 47th Euromicro Conference on Software Engineering and Advanced Applications (SEAA). 2021 47th Euromicro Conference on Software Engineering and Advanced Applications (SEAA), pp. 196–205. Available at: https://doi.org/10.1109/SEAA53835.2021.00033.</a:t>
+              <a:t>de Toledo, S.S., Martini, A., Sjøberg, D.I.K., Przybyszewska, A. and Frandsen, J.S. (2021) 'Reducing Incidents in Microservices by Repaying Architectural Technical Debt', </a:t>
+            </a:r>
+            <a:r>
+              <a:rPr lang="en-US" sz="950" i="1" dirty="0">
+                <a:solidFill>
+                  <a:srgbClr val="2A3F55"/>
+                </a:solidFill>
+                <a:latin typeface="Arial" pitchFamily="34" charset="0"/>
+                <a:ea typeface="Arial" pitchFamily="34" charset="-122"/>
+                <a:cs typeface="Arial" pitchFamily="34" charset="-120"/>
+              </a:rPr>
+              <a:t>2021 47th Euromicro Conference on Software Engineering and Advanced Applications (SEAA)</a:t>
+            </a:r>
+            <a:r>
+              <a:rPr lang="en-US" sz="950" dirty="0">
+                <a:solidFill>
+                  <a:srgbClr val="2A3F55"/>
+                </a:solidFill>
+                <a:latin typeface="Arial" pitchFamily="34" charset="0"/>
+                <a:ea typeface="Arial" pitchFamily="34" charset="-122"/>
+                <a:cs typeface="Arial" pitchFamily="34" charset="-120"/>
+              </a:rPr>
+              <a:t>, pp. 196–205. Available at: https://doi.org/10.1109/SEAA53835.2021.00033.</a:t>
             </a:r>
             <a:endParaRPr lang="en-US" sz="950" dirty="0"/>
           </a:p>
@@ -6690,7 +6887,7 @@
         </p:nvSpPr>
         <p:spPr>
           <a:xfrm>
-            <a:off x="685800" y="4786884"/>
+            <a:off x="685800" y="4692561"/>
             <a:ext cx="5303520" cy="498348"/>
           </a:xfrm>
           <a:prstGeom prst="rect">
@@ -6710,6 +6907,17 @@
               <a:buNone/>
             </a:pPr>
             <a:r>
+              <a:rPr lang="en-US" sz="950" i="1" dirty="0">
+                <a:solidFill>
+                  <a:srgbClr val="2A3F55"/>
+                </a:solidFill>
+                <a:latin typeface="Arial" pitchFamily="34" charset="0"/>
+                <a:ea typeface="Arial" pitchFamily="34" charset="-122"/>
+                <a:cs typeface="Arial" pitchFamily="34" charset="-120"/>
+              </a:rPr>
+              <a:t>FINMA Circular 2023/1 - Operational risks and resilience – banks </a:t>
+            </a:r>
+            <a:r>
               <a:rPr lang="en-US" sz="950" dirty="0">
                 <a:solidFill>
                   <a:srgbClr val="2A3F55"/>
@@ -6718,7 +6926,7 @@
                 <a:ea typeface="Arial" pitchFamily="34" charset="-122"/>
                 <a:cs typeface="Arial" pitchFamily="34" charset="-120"/>
               </a:rPr>
-              <a:t>FINMA Circular 2023/1 - Operational risks and resilience – banks (2024). Available at: https://www.finma.ch/en/~/media/finma/dokumente/dokumentencenter/myfinma/rundschreiben/finma-rs-2023-01-20221207.pdf (Accessed: March 29, 2026).</a:t>
+              <a:t>(2024). Available at: https://www.finma.ch/en/~/media/finma/dokumente/dokumentencenter/myfinma/rundschreiben/finma-rs-2023-01-20221207.pdf (Accessed: March 29, 2026).</a:t>
             </a:r>
             <a:endParaRPr lang="en-US" sz="950" dirty="0"/>
           </a:p>
@@ -6760,7 +6968,29 @@
                 <a:ea typeface="Arial" pitchFamily="34" charset="-122"/>
                 <a:cs typeface="Arial" pitchFamily="34" charset="-120"/>
               </a:rPr>
-              <a:t>Forsgren, N., Humble, J. and Kim, G. (2018) Accelerate: The Science of Lean Software and DevOps: Building and Scaling High Performing Technology Organizations. Portland, OR: IT Revolution Press.</a:t>
+              <a:t>Forsgren, N., Humble, J. and Kim, G. (2018) </a:t>
+            </a:r>
+            <a:r>
+              <a:rPr lang="en-US" sz="950" i="1" dirty="0">
+                <a:solidFill>
+                  <a:srgbClr val="2A3F55"/>
+                </a:solidFill>
+                <a:latin typeface="Arial" pitchFamily="34" charset="0"/>
+                <a:ea typeface="Arial" pitchFamily="34" charset="-122"/>
+                <a:cs typeface="Arial" pitchFamily="34" charset="-120"/>
+              </a:rPr>
+              <a:t>Accelerate: The Science of Lean Software and DevOps: Building and Scaling High Performing Technology Organizations</a:t>
+            </a:r>
+            <a:r>
+              <a:rPr lang="en-US" sz="950" dirty="0">
+                <a:solidFill>
+                  <a:srgbClr val="2A3F55"/>
+                </a:solidFill>
+                <a:latin typeface="Arial" pitchFamily="34" charset="0"/>
+                <a:ea typeface="Arial" pitchFamily="34" charset="-122"/>
+                <a:cs typeface="Arial" pitchFamily="34" charset="-120"/>
+              </a:rPr>
+              <a:t>. Portland, OR: IT Revolution Press.</a:t>
             </a:r>
             <a:endParaRPr lang="en-US" sz="950" dirty="0"/>
           </a:p>
@@ -6774,7 +7004,7 @@
         </p:nvSpPr>
         <p:spPr>
           <a:xfrm>
-            <a:off x="6217920" y="1828800"/>
+            <a:off x="6217920" y="1831614"/>
             <a:ext cx="5303520" cy="498348"/>
           </a:xfrm>
           <a:prstGeom prst="rect">
@@ -6802,7 +7032,29 @@
                 <a:ea typeface="Arial" pitchFamily="34" charset="-122"/>
                 <a:cs typeface="Arial" pitchFamily="34" charset="-120"/>
               </a:rPr>
-              <a:t>García-Cascales, M.S. and Lamata, M.T. (2012) 'On rank reversal and TOPSIS method', Mathematical and Computer Modelling, 56(5), pp. 123–132. Available at: https://doi.org/10.1016/j.mcm.2011.12.022.</a:t>
+              <a:t>García-Cascales, M.S. and Lamata, M.T. (2012) 'On rank reversal and TOPSIS method', </a:t>
+            </a:r>
+            <a:r>
+              <a:rPr lang="en-US" sz="950" i="1" dirty="0">
+                <a:solidFill>
+                  <a:srgbClr val="2A3F55"/>
+                </a:solidFill>
+                <a:latin typeface="Arial" pitchFamily="34" charset="0"/>
+                <a:ea typeface="Arial" pitchFamily="34" charset="-122"/>
+                <a:cs typeface="Arial" pitchFamily="34" charset="-120"/>
+              </a:rPr>
+              <a:t>Mathematical and Computer Modelling</a:t>
+            </a:r>
+            <a:r>
+              <a:rPr lang="en-US" sz="950" dirty="0">
+                <a:solidFill>
+                  <a:srgbClr val="2A3F55"/>
+                </a:solidFill>
+                <a:latin typeface="Arial" pitchFamily="34" charset="0"/>
+                <a:ea typeface="Arial" pitchFamily="34" charset="-122"/>
+                <a:cs typeface="Arial" pitchFamily="34" charset="-120"/>
+              </a:rPr>
+              <a:t>, 56(5), pp. 123–132. Available at: https://doi.org/10.1016/j.mcm.2011.12.022.</a:t>
             </a:r>
             <a:endParaRPr lang="en-US" sz="950" dirty="0"/>
           </a:p>
@@ -6816,8 +7068,8 @@
         </p:nvSpPr>
         <p:spPr>
           <a:xfrm>
-            <a:off x="6217920" y="2455164"/>
-            <a:ext cx="5303520" cy="498348"/>
+            <a:off x="6217920" y="2549207"/>
+            <a:ext cx="5303520" cy="331998"/>
           </a:xfrm>
           <a:prstGeom prst="rect">
             <a:avLst/>
@@ -6844,7 +7096,29 @@
                 <a:ea typeface="Arial" pitchFamily="34" charset="-122"/>
                 <a:cs typeface="Arial" pitchFamily="34" charset="-120"/>
               </a:rPr>
-              <a:t>Hevner, A.R., March, S.T., Park, J. and Ram, S. (2004) 'Design Science in Information Systems Research', MIS Quarterly, 28(1), pp. 75–105. Available at: https://doi.org/10.2307/25148625.</a:t>
+              <a:t>Hevner, A.R., March, S.T., Park, J. and Ram, S. (2004) 'Design Science in Information Systems Research', </a:t>
+            </a:r>
+            <a:r>
+              <a:rPr lang="en-US" sz="950" i="1" dirty="0">
+                <a:solidFill>
+                  <a:srgbClr val="2A3F55"/>
+                </a:solidFill>
+                <a:latin typeface="Arial" pitchFamily="34" charset="0"/>
+                <a:ea typeface="Arial" pitchFamily="34" charset="-122"/>
+                <a:cs typeface="Arial" pitchFamily="34" charset="-120"/>
+              </a:rPr>
+              <a:t>MIS Quarterly</a:t>
+            </a:r>
+            <a:r>
+              <a:rPr lang="en-US" sz="950" dirty="0">
+                <a:solidFill>
+                  <a:srgbClr val="2A3F55"/>
+                </a:solidFill>
+                <a:latin typeface="Arial" pitchFamily="34" charset="0"/>
+                <a:ea typeface="Arial" pitchFamily="34" charset="-122"/>
+                <a:cs typeface="Arial" pitchFamily="34" charset="-120"/>
+              </a:rPr>
+              <a:t>, 28(1), pp. 75–105. Available at: https://doi.org/10.2307/25148625.</a:t>
             </a:r>
             <a:endParaRPr lang="en-US" sz="950" dirty="0"/>
           </a:p>
@@ -6858,8 +7132,8 @@
         </p:nvSpPr>
         <p:spPr>
           <a:xfrm>
-            <a:off x="6217920" y="3081528"/>
-            <a:ext cx="5303520" cy="649224"/>
+            <a:off x="6217920" y="3100309"/>
+            <a:ext cx="5303520" cy="498348"/>
           </a:xfrm>
           <a:prstGeom prst="rect">
             <a:avLst/>
@@ -6886,7 +7160,29 @@
                 <a:ea typeface="Arial" pitchFamily="34" charset="-122"/>
                 <a:cs typeface="Arial" pitchFamily="34" charset="-120"/>
               </a:rPr>
-              <a:t>Lenarduzzi, V., Besker, T., Taibi, D., Martini, A. and Arcelli Fontana, F. (2021) 'A systematic literature review on Technical Debt prioritization: Strategies, processes, factors, and tools', Journal of Systems and Software, 171, p. 110827. Available at: https://doi.org/10.1016/j.jss.2020.110827.</a:t>
+              <a:t>Lenarduzzi, V., Besker, T., Taibi, D., Martini, A. and Arcelli Fontana, F. (2021) 'A systematic literature review on Technical Debt prioritization: Strategies, processes, factors, and tools', </a:t>
+            </a:r>
+            <a:r>
+              <a:rPr lang="en-US" sz="950" i="1" dirty="0">
+                <a:solidFill>
+                  <a:srgbClr val="2A3F55"/>
+                </a:solidFill>
+                <a:latin typeface="Arial" pitchFamily="34" charset="0"/>
+                <a:ea typeface="Arial" pitchFamily="34" charset="-122"/>
+                <a:cs typeface="Arial" pitchFamily="34" charset="-120"/>
+              </a:rPr>
+              <a:t>Journal of Systems and Software</a:t>
+            </a:r>
+            <a:r>
+              <a:rPr lang="en-US" sz="950" dirty="0">
+                <a:solidFill>
+                  <a:srgbClr val="2A3F55"/>
+                </a:solidFill>
+                <a:latin typeface="Arial" pitchFamily="34" charset="0"/>
+                <a:ea typeface="Arial" pitchFamily="34" charset="-122"/>
+                <a:cs typeface="Arial" pitchFamily="34" charset="-120"/>
+              </a:rPr>
+              <a:t>, 171, p. 110827. Available at: https://doi.org/10.1016/j.jss.2020.110827.</a:t>
             </a:r>
             <a:endParaRPr lang="en-US" sz="950" dirty="0"/>
           </a:p>
@@ -6900,7 +7196,7 @@
         </p:nvSpPr>
         <p:spPr>
           <a:xfrm>
-            <a:off x="6217920" y="3858768"/>
+            <a:off x="6217920" y="3817761"/>
             <a:ext cx="5303520" cy="498348"/>
           </a:xfrm>
           <a:prstGeom prst="rect">
@@ -6928,7 +7224,29 @@
                 <a:ea typeface="Arial" pitchFamily="34" charset="-122"/>
                 <a:cs typeface="Arial" pitchFamily="34" charset="-120"/>
               </a:rPr>
-              <a:t>Nord, R.L., Ozkaya, I. and Woody, C. (2021) Examples of Technical Debt’s Cybersecurity Impact. Pittsburgh, PA, USA: Carnegie Mellon University, pp. 1–21. Available at: https://apps.dtic.mil/sti/trecms/pdf/AD1144728.pdf (Accessed: April 27, 2026).</a:t>
+              <a:t>Nord, R.L., Ozkaya, I. and Woody, C. (2021) </a:t>
+            </a:r>
+            <a:r>
+              <a:rPr lang="en-US" sz="950" i="1" dirty="0">
+                <a:solidFill>
+                  <a:srgbClr val="2A3F55"/>
+                </a:solidFill>
+                <a:latin typeface="Arial" pitchFamily="34" charset="0"/>
+                <a:ea typeface="Arial" pitchFamily="34" charset="-122"/>
+                <a:cs typeface="Arial" pitchFamily="34" charset="-120"/>
+              </a:rPr>
+              <a:t>Examples of Technical Debt’s Cybersecurity Impact</a:t>
+            </a:r>
+            <a:r>
+              <a:rPr lang="en-US" sz="950" dirty="0">
+                <a:solidFill>
+                  <a:srgbClr val="2A3F55"/>
+                </a:solidFill>
+                <a:latin typeface="Arial" pitchFamily="34" charset="0"/>
+                <a:ea typeface="Arial" pitchFamily="34" charset="-122"/>
+                <a:cs typeface="Arial" pitchFamily="34" charset="-120"/>
+              </a:rPr>
+              <a:t>. Pittsburgh, PA, USA: Carnegie Mellon University, pp. 1–21. Available at: https://apps.dtic.mil/sti/trecms/pdf/AD1144728.pdf (Accessed: April 27, 2026).</a:t>
             </a:r>
             <a:endParaRPr lang="en-US" sz="950" dirty="0"/>
           </a:p>
@@ -6942,8 +7260,8 @@
         </p:nvSpPr>
         <p:spPr>
           <a:xfrm>
-            <a:off x="6217920" y="4485132"/>
-            <a:ext cx="5303520" cy="649224"/>
+            <a:off x="6217920" y="4530149"/>
+            <a:ext cx="5303520" cy="498348"/>
           </a:xfrm>
           <a:prstGeom prst="rect">
             <a:avLst/>
@@ -6970,7 +7288,29 @@
                 <a:ea typeface="Arial" pitchFamily="34" charset="-122"/>
                 <a:cs typeface="Arial" pitchFamily="34" charset="-120"/>
               </a:rPr>
-              <a:t>Tizio, G.D., Armellini, M. and Massacci, F. (2023) 'Software Updates Strategies: A Quantitative Evaluation Against Advanced Persistent Threats', IEEE Transactions on Software Engineering, 49(3), pp. 1359–1373. Available at: https://doi.org/10.1109/TSE.2022.3176674.</a:t>
+              <a:t>Tizio, G.D., Armellini, M. and Massacci, F. (2023) 'Software Updates Strategies: A Quantitative Evaluation Against Advanced Persistent Threats', </a:t>
+            </a:r>
+            <a:r>
+              <a:rPr lang="en-US" sz="950" i="1" dirty="0">
+                <a:solidFill>
+                  <a:srgbClr val="2A3F55"/>
+                </a:solidFill>
+                <a:latin typeface="Arial" pitchFamily="34" charset="0"/>
+                <a:ea typeface="Arial" pitchFamily="34" charset="-122"/>
+                <a:cs typeface="Arial" pitchFamily="34" charset="-120"/>
+              </a:rPr>
+              <a:t>IEEE Transactions on Software Engineering</a:t>
+            </a:r>
+            <a:r>
+              <a:rPr lang="en-US" sz="950" dirty="0">
+                <a:solidFill>
+                  <a:srgbClr val="2A3F55"/>
+                </a:solidFill>
+                <a:latin typeface="Arial" pitchFamily="34" charset="0"/>
+                <a:ea typeface="Arial" pitchFamily="34" charset="-122"/>
+                <a:cs typeface="Arial" pitchFamily="34" charset="-120"/>
+              </a:rPr>
+              <a:t>, 49(3), pp. 1359–1373. Available at: https://doi.org/10.1109/TSE.2022.3176674.</a:t>
             </a:r>
             <a:endParaRPr lang="en-US" sz="950" dirty="0"/>
           </a:p>
@@ -6984,7 +7324,7 @@
         </p:nvSpPr>
         <p:spPr>
           <a:xfrm>
-            <a:off x="6217920" y="5262372"/>
+            <a:off x="6217920" y="5242537"/>
             <a:ext cx="5303520" cy="498348"/>
           </a:xfrm>
           <a:prstGeom prst="rect">
@@ -7012,7 +7352,29 @@
                 <a:ea typeface="Arial" pitchFamily="34" charset="-122"/>
                 <a:cs typeface="Arial" pitchFamily="34" charset="-120"/>
               </a:rPr>
-              <a:t>Yang, W. (2020) 'Ingenious Solution for the Rank Reversal Problem of TOPSIS Method', Mathematical Problems in Engineering, 2020(1), p. 9676518. Available at: https://doi.org/10.1155/2020/9676518.</a:t>
+              <a:t>Yang, W. (2020) 'Ingenious Solution for the Rank Reversal Problem of TOPSIS Method', </a:t>
+            </a:r>
+            <a:r>
+              <a:rPr lang="en-US" sz="950" i="1" dirty="0">
+                <a:solidFill>
+                  <a:srgbClr val="2A3F55"/>
+                </a:solidFill>
+                <a:latin typeface="Arial" pitchFamily="34" charset="0"/>
+                <a:ea typeface="Arial" pitchFamily="34" charset="-122"/>
+                <a:cs typeface="Arial" pitchFamily="34" charset="-120"/>
+              </a:rPr>
+              <a:t>Mathematical Problems in Engineering</a:t>
+            </a:r>
+            <a:r>
+              <a:rPr lang="en-US" sz="950" dirty="0">
+                <a:solidFill>
+                  <a:srgbClr val="2A3F55"/>
+                </a:solidFill>
+                <a:latin typeface="Arial" pitchFamily="34" charset="0"/>
+                <a:ea typeface="Arial" pitchFamily="34" charset="-122"/>
+                <a:cs typeface="Arial" pitchFamily="34" charset="-120"/>
+              </a:rPr>
+              <a:t>, 2020(1), p. 9676518. Available at: https://doi.org/10.1155/2020/9676518.</a:t>
             </a:r>
             <a:endParaRPr lang="en-US" sz="950" dirty="0"/>
           </a:p>
@@ -7329,7 +7691,29 @@
                 <a:ea typeface="Arial" pitchFamily="34" charset="-122"/>
                 <a:cs typeface="Arial" pitchFamily="34" charset="-120"/>
               </a:rPr>
-              <a:t>gross return on assets per 10% more technical debt in COTS platforms (Banker et al., 2020)</a:t>
+              <a:t>gross return on assets per 10% more technical debt in COTS platforms (Banker </a:t>
+            </a:r>
+            <a:r>
+              <a:rPr lang="en-US" sz="1100" i="1" dirty="0">
+                <a:solidFill>
+                  <a:srgbClr val="2A3F55"/>
+                </a:solidFill>
+                <a:latin typeface="Arial" pitchFamily="34" charset="0"/>
+                <a:ea typeface="Arial" pitchFamily="34" charset="-122"/>
+                <a:cs typeface="Arial" pitchFamily="34" charset="-120"/>
+              </a:rPr>
+              <a:t>et al.</a:t>
+            </a:r>
+            <a:r>
+              <a:rPr lang="en-US" sz="1100" dirty="0">
+                <a:solidFill>
+                  <a:srgbClr val="2A3F55"/>
+                </a:solidFill>
+                <a:latin typeface="Arial" pitchFamily="34" charset="0"/>
+                <a:ea typeface="Arial" pitchFamily="34" charset="-122"/>
+                <a:cs typeface="Arial" pitchFamily="34" charset="-120"/>
+              </a:rPr>
+              <a:t>, 2020)</a:t>
             </a:r>
             <a:endParaRPr lang="en-US" sz="1100" dirty="0"/>
           </a:p>
@@ -7377,8 +7761,8 @@
         </p:nvSpPr>
         <p:spPr>
           <a:xfrm>
-            <a:off x="7040879" y="3218688"/>
-            <a:ext cx="2428435" cy="502920"/>
+            <a:off x="7040880" y="3218688"/>
+            <a:ext cx="2375682" cy="502920"/>
           </a:xfrm>
           <a:prstGeom prst="rect">
             <a:avLst/>
@@ -7429,9 +7813,6 @@
           <a:bodyPr wrap="square" lIns="0" tIns="0" rIns="0" bIns="0" rtlCol="0" anchor="t"/>
           <a:lstStyle/>
           <a:p>
-            <a:pPr marL="0" indent="0">
-              <a:buNone/>
-            </a:pPr>
             <a:r>
               <a:rPr lang="en-US" sz="1100" dirty="0">
                 <a:solidFill>
@@ -7441,7 +7822,29 @@
                 <a:ea typeface="Arial" pitchFamily="34" charset="-122"/>
                 <a:cs typeface="Arial" pitchFamily="34" charset="-120"/>
               </a:rPr>
-              <a:t>higher odds of compromise after one / three months of patch delay (Di Tizio et al., 2023)</a:t>
+              <a:t>higher odds of compromise after one / three months of patch delay (Tizio, Armellini, and </a:t>
+            </a:r>
+            <a:r>
+              <a:rPr lang="en-US" sz="1100" dirty="0" err="1">
+                <a:solidFill>
+                  <a:srgbClr val="2A3F55"/>
+                </a:solidFill>
+                <a:latin typeface="Arial" pitchFamily="34" charset="0"/>
+                <a:ea typeface="Arial" pitchFamily="34" charset="-122"/>
+                <a:cs typeface="Arial" pitchFamily="34" charset="-120"/>
+              </a:rPr>
+              <a:t>Massacci</a:t>
+            </a:r>
+            <a:r>
+              <a:rPr lang="en-US" sz="1100" dirty="0">
+                <a:solidFill>
+                  <a:srgbClr val="2A3F55"/>
+                </a:solidFill>
+                <a:latin typeface="Arial" pitchFamily="34" charset="0"/>
+                <a:ea typeface="Arial" pitchFamily="34" charset="-122"/>
+                <a:cs typeface="Arial" pitchFamily="34" charset="-120"/>
+              </a:rPr>
+              <a:t>, 2023)</a:t>
             </a:r>
             <a:endParaRPr lang="en-US" sz="1100" dirty="0"/>
           </a:p>
@@ -7553,7 +7956,29 @@
                 <a:ea typeface="Arial" pitchFamily="34" charset="-122"/>
                 <a:cs typeface="Arial" pitchFamily="34" charset="-120"/>
               </a:rPr>
-              <a:t>incidents after targeted architectural debt repayment (de Toledo et al., 2021)</a:t>
+              <a:t>incidents after targeted architectural debt repayment (de Toledo </a:t>
+            </a:r>
+            <a:r>
+              <a:rPr lang="en-US" sz="1100" i="1" dirty="0">
+                <a:solidFill>
+                  <a:srgbClr val="2A3F55"/>
+                </a:solidFill>
+                <a:latin typeface="Arial" pitchFamily="34" charset="0"/>
+                <a:ea typeface="Arial" pitchFamily="34" charset="-122"/>
+                <a:cs typeface="Arial" pitchFamily="34" charset="-120"/>
+              </a:rPr>
+              <a:t>et al.</a:t>
+            </a:r>
+            <a:r>
+              <a:rPr lang="en-US" sz="1100" dirty="0">
+                <a:solidFill>
+                  <a:srgbClr val="2A3F55"/>
+                </a:solidFill>
+                <a:latin typeface="Arial" pitchFamily="34" charset="0"/>
+                <a:ea typeface="Arial" pitchFamily="34" charset="-122"/>
+                <a:cs typeface="Arial" pitchFamily="34" charset="-120"/>
+              </a:rPr>
+              <a:t>, 2021)</a:t>
             </a:r>
             <a:endParaRPr lang="en-US" sz="1100" dirty="0"/>
           </a:p>
@@ -7567,8 +7992,8 @@
         </p:nvSpPr>
         <p:spPr>
           <a:xfrm>
-            <a:off x="685800" y="5806440"/>
-            <a:ext cx="5760720" cy="713232"/>
+            <a:off x="685799" y="5806440"/>
+            <a:ext cx="10789919" cy="713232"/>
           </a:xfrm>
           <a:prstGeom prst="rect">
             <a:avLst/>
@@ -7634,7 +8059,7 @@
         <p:spPr>
           <a:xfrm>
             <a:off x="886968" y="6080760"/>
-            <a:ext cx="5394960" cy="384048"/>
+            <a:ext cx="10360152" cy="384048"/>
           </a:xfrm>
           <a:prstGeom prst="rect">
             <a:avLst/>
@@ -7811,7 +8236,29 @@
                 <a:ea typeface="Arial" pitchFamily="34" charset="-122"/>
                 <a:cs typeface="Arial" pitchFamily="34" charset="-120"/>
               </a:rPr>
-              <a:t>Across 44 primary studies on TD prioritisation, quantitative multi-criteria approaches are uncommon and industrial validation is rare (Lenarduzzi et al., 2021). </a:t>
+              <a:t>Across 44 primary studies on TD prioritisation, quantitative multi-criteria approaches are uncommon and industrial validation is rare (Lenarduzzi </a:t>
+            </a:r>
+            <a:r>
+              <a:rPr lang="en-US" sz="1500" i="1" dirty="0">
+                <a:solidFill>
+                  <a:srgbClr val="14283C"/>
+                </a:solidFill>
+                <a:latin typeface="Arial" pitchFamily="34" charset="0"/>
+                <a:ea typeface="Arial" pitchFamily="34" charset="-122"/>
+                <a:cs typeface="Arial" pitchFamily="34" charset="-120"/>
+              </a:rPr>
+              <a:t>et al.</a:t>
+            </a:r>
+            <a:r>
+              <a:rPr lang="en-US" sz="1500" dirty="0">
+                <a:solidFill>
+                  <a:srgbClr val="14283C"/>
+                </a:solidFill>
+                <a:latin typeface="Arial" pitchFamily="34" charset="0"/>
+                <a:ea typeface="Arial" pitchFamily="34" charset="-122"/>
+                <a:cs typeface="Arial" pitchFamily="34" charset="-120"/>
+              </a:rPr>
+              <a:t>, 2021). </a:t>
             </a:r>
             <a:r>
               <a:rPr lang="en-US" sz="1500" b="1" dirty="0">
@@ -7930,7 +8377,7 @@
               <a:buNone/>
             </a:pPr>
             <a:r>
-              <a:rPr lang="en-US" sz="1450" dirty="0">
+              <a:rPr lang="en-US" sz="1400" dirty="0">
                 <a:solidFill>
                   <a:srgbClr val="14283C"/>
                 </a:solidFill>
@@ -7940,7 +8387,7 @@
               </a:rPr>
               <a:t>How can technical debt in mission-critical trading systems be prioritised quantitatively at the service level using operational data?</a:t>
             </a:r>
-            <a:endParaRPr lang="en-US" sz="1450" dirty="0"/>
+            <a:endParaRPr lang="en-US" sz="1400" dirty="0"/>
           </a:p>
         </p:txBody>
       </p:sp>
@@ -8035,7 +8482,7 @@
               <a:buNone/>
             </a:pPr>
             <a:r>
-              <a:rPr lang="en-US" sz="1450" dirty="0">
+              <a:rPr lang="en-US" sz="1400" dirty="0">
                 <a:solidFill>
                   <a:srgbClr val="14283C"/>
                 </a:solidFill>
@@ -8045,7 +8492,7 @@
               </a:rPr>
               <a:t>To what extent do operational service management metrics serve as valid proxies for technical debt severity?</a:t>
             </a:r>
-            <a:endParaRPr lang="en-US" sz="1450" dirty="0"/>
+            <a:endParaRPr lang="en-US" sz="1400" dirty="0"/>
           </a:p>
         </p:txBody>
       </p:sp>
@@ -8140,7 +8587,7 @@
               <a:buNone/>
             </a:pPr>
             <a:r>
-              <a:rPr lang="en-US" sz="1450" dirty="0">
+              <a:rPr lang="en-US" sz="1400" dirty="0">
                 <a:solidFill>
                   <a:srgbClr val="14283C"/>
                 </a:solidFill>
@@ -8150,7 +8597,7 @@
               </a:rPr>
               <a:t>How stable are the resulting rankings when criterion weights are perturbed?</a:t>
             </a:r>
-            <a:endParaRPr lang="en-US" sz="1450" dirty="0"/>
+            <a:endParaRPr lang="en-US" sz="1400" dirty="0"/>
           </a:p>
         </p:txBody>
       </p:sp>
@@ -8290,7 +8737,7 @@
               <a:buNone/>
             </a:pPr>
             <a:r>
-              <a:rPr lang="en-US" sz="1350" dirty="0">
+              <a:rPr lang="en-US" sz="1500" dirty="0">
                 <a:solidFill>
                   <a:srgbClr val="2A3F55"/>
                 </a:solidFill>
@@ -8298,9 +8745,31 @@
                 <a:ea typeface="Arial" pitchFamily="34" charset="-122"/>
                 <a:cs typeface="Arial" pitchFamily="34" charset="-120"/>
               </a:rPr>
-              <a:t>DSR (Hevner et al., 2004) · single-organisation embedded case study · unit of analysis: the IT service as a configuration item</a:t>
-            </a:r>
-            <a:endParaRPr lang="en-US" sz="1350" dirty="0"/>
+              <a:t>DSR (Hevner </a:t>
+            </a:r>
+            <a:r>
+              <a:rPr lang="en-US" sz="1500" i="1" dirty="0">
+                <a:solidFill>
+                  <a:srgbClr val="2A3F55"/>
+                </a:solidFill>
+                <a:latin typeface="Arial" pitchFamily="34" charset="0"/>
+                <a:ea typeface="Arial" pitchFamily="34" charset="-122"/>
+                <a:cs typeface="Arial" pitchFamily="34" charset="-120"/>
+              </a:rPr>
+              <a:t>et al.</a:t>
+            </a:r>
+            <a:r>
+              <a:rPr lang="en-US" sz="1500" dirty="0">
+                <a:solidFill>
+                  <a:srgbClr val="2A3F55"/>
+                </a:solidFill>
+                <a:latin typeface="Arial" pitchFamily="34" charset="0"/>
+                <a:ea typeface="Arial" pitchFamily="34" charset="-122"/>
+                <a:cs typeface="Arial" pitchFamily="34" charset="-120"/>
+              </a:rPr>
+              <a:t>, 2004) · single-organisation embedded case study · unit of analysis: the IT service as a configuration item</a:t>
+            </a:r>
+            <a:endParaRPr lang="en-US" sz="1500" dirty="0"/>
           </a:p>
         </p:txBody>
       </p:sp>
@@ -9665,7 +10134,7 @@
               <a:buNone/>
             </a:pPr>
             <a:r>
-              <a:rPr lang="en-US" sz="1350" dirty="0">
+              <a:rPr lang="en-US" sz="1500" dirty="0">
                 <a:solidFill>
                   <a:srgbClr val="14283C"/>
                 </a:solidFill>
@@ -9675,7 +10144,7 @@
               </a:rPr>
               <a:t>Extract indicators from live ITSM / CMDB records</a:t>
             </a:r>
-            <a:endParaRPr lang="en-US" sz="1350" dirty="0"/>
+            <a:endParaRPr lang="en-US" sz="1500" dirty="0"/>
           </a:p>
         </p:txBody>
       </p:sp>
@@ -9770,7 +10239,7 @@
               <a:buNone/>
             </a:pPr>
             <a:r>
-              <a:rPr lang="en-US" sz="1350" dirty="0">
+              <a:rPr lang="en-US" sz="1500" dirty="0">
                 <a:solidFill>
                   <a:srgbClr val="14283C"/>
                 </a:solidFill>
@@ -9780,7 +10249,7 @@
               </a:rPr>
               <a:t>Vector normalisation (preserves extreme observations)</a:t>
             </a:r>
-            <a:endParaRPr lang="en-US" sz="1350" dirty="0"/>
+            <a:endParaRPr lang="en-US" sz="1500" dirty="0"/>
           </a:p>
         </p:txBody>
       </p:sp>
@@ -9875,7 +10344,7 @@
               <a:buNone/>
             </a:pPr>
             <a:r>
-              <a:rPr lang="en-US" sz="1350" dirty="0">
+              <a:rPr lang="en-US" sz="1500" dirty="0">
                 <a:solidFill>
                   <a:srgbClr val="14283C"/>
                 </a:solidFill>
@@ -9885,7 +10354,7 @@
               </a:rPr>
               <a:t>Weighting: equal (0.20 each) and differential (0.30 MTTR &amp; patch recency)</a:t>
             </a:r>
-            <a:endParaRPr lang="en-US" sz="1350" dirty="0"/>
+            <a:endParaRPr lang="en-US" sz="1500" dirty="0"/>
           </a:p>
         </p:txBody>
       </p:sp>
@@ -9980,7 +10449,7 @@
               <a:buNone/>
             </a:pPr>
             <a:r>
-              <a:rPr lang="en-US" sz="1350" dirty="0">
+              <a:rPr lang="en-US" sz="1500" dirty="0">
                 <a:solidFill>
                   <a:srgbClr val="14283C"/>
                 </a:solidFill>
@@ -9990,7 +10459,7 @@
               </a:rPr>
               <a:t>TOPSIS closeness coefficient Ci ∈ [0, 1]</a:t>
             </a:r>
-            <a:endParaRPr lang="en-US" sz="1350" dirty="0"/>
+            <a:endParaRPr lang="en-US" sz="1500" dirty="0"/>
           </a:p>
         </p:txBody>
       </p:sp>
@@ -10085,7 +10554,7 @@
               <a:buNone/>
             </a:pPr>
             <a:r>
-              <a:rPr lang="en-US" sz="1350" dirty="0">
+              <a:rPr lang="en-US" sz="1500" dirty="0">
                 <a:solidFill>
                   <a:srgbClr val="14283C"/>
                 </a:solidFill>
@@ -10095,7 +10564,7 @@
               </a:rPr>
               <a:t>Rank: lowest Ci = highest debt priority</a:t>
             </a:r>
-            <a:endParaRPr lang="en-US" sz="1350" dirty="0"/>
+            <a:endParaRPr lang="en-US" sz="1500" dirty="0"/>
           </a:p>
         </p:txBody>
       </p:sp>
@@ -10170,7 +10639,7 @@
               <a:buChar char="•"/>
             </a:pPr>
             <a:r>
-              <a:rPr lang="en-US" sz="1350" dirty="0">
+              <a:rPr lang="en-US" sz="1500" dirty="0">
                 <a:solidFill>
                   <a:srgbClr val="14283C"/>
                 </a:solidFill>
@@ -10180,7 +10649,7 @@
               </a:rPr>
               <a:t>Handles mixed cost/benefit criteria and different scales in one procedure</a:t>
             </a:r>
-            <a:endParaRPr lang="en-US" sz="1350" dirty="0"/>
+            <a:endParaRPr lang="en-US" sz="1500" dirty="0"/>
           </a:p>
           <a:p>
             <a:pPr marL="177800" indent="-177800">
@@ -10194,7 +10663,7 @@
               <a:buChar char="•"/>
             </a:pPr>
             <a:r>
-              <a:rPr lang="en-US" sz="1350" dirty="0">
+              <a:rPr lang="en-US" sz="1500" dirty="0">
                 <a:solidFill>
                   <a:srgbClr val="14283C"/>
                 </a:solidFill>
@@ -10204,7 +10673,7 @@
               </a:rPr>
               <a:t>Produces a full ranking, unlike VIKOR's compromise set or AHP alone</a:t>
             </a:r>
-            <a:endParaRPr lang="en-US" sz="1350" dirty="0"/>
+            <a:endParaRPr lang="en-US" sz="1500" dirty="0"/>
           </a:p>
           <a:p>
             <a:pPr marL="177800" indent="-177800">
@@ -10218,7 +10687,7 @@
               <a:buChar char="•"/>
             </a:pPr>
             <a:r>
-              <a:rPr lang="en-US" sz="1350" dirty="0">
+              <a:rPr lang="en-US" sz="1500" dirty="0">
                 <a:solidFill>
                   <a:srgbClr val="14283C"/>
                 </a:solidFill>
@@ -10226,9 +10695,53 @@
                 <a:ea typeface="Arial" pitchFamily="34" charset="-122"/>
                 <a:cs typeface="Arial" pitchFamily="34" charset="-120"/>
               </a:rPr>
-              <a:t>Precedent: Albarak &amp; Bahsoon (2022) for TD, but on controlled data</a:t>
-            </a:r>
-            <a:endParaRPr lang="en-US" sz="1350" dirty="0"/>
+              <a:t>Precedent: </a:t>
+            </a:r>
+            <a:r>
+              <a:rPr lang="en-US" sz="1500" dirty="0" err="1">
+                <a:solidFill>
+                  <a:srgbClr val="14283C"/>
+                </a:solidFill>
+                <a:latin typeface="Arial" pitchFamily="34" charset="0"/>
+                <a:ea typeface="Arial" pitchFamily="34" charset="-122"/>
+                <a:cs typeface="Arial" pitchFamily="34" charset="-120"/>
+              </a:rPr>
+              <a:t>Albarak</a:t>
+            </a:r>
+            <a:r>
+              <a:rPr lang="en-US" sz="1500" dirty="0">
+                <a:solidFill>
+                  <a:srgbClr val="14283C"/>
+                </a:solidFill>
+                <a:latin typeface="Arial" pitchFamily="34" charset="0"/>
+                <a:ea typeface="Arial" pitchFamily="34" charset="-122"/>
+                <a:cs typeface="Arial" pitchFamily="34" charset="-120"/>
+              </a:rPr>
+              <a:t> </a:t>
+            </a:r>
+            <a:r>
+              <a:rPr lang="en-US" sz="1500" i="1" dirty="0">
+                <a:solidFill>
+                  <a:srgbClr val="14283C"/>
+                </a:solidFill>
+                <a:latin typeface="Arial" pitchFamily="34" charset="0"/>
+                <a:ea typeface="Arial" pitchFamily="34" charset="-122"/>
+                <a:cs typeface="Arial" pitchFamily="34" charset="-120"/>
+              </a:rPr>
+              <a:t>et al.</a:t>
+            </a:r>
+            <a:r>
+              <a:rPr lang="en-US" sz="1500" dirty="0">
+                <a:solidFill>
+                  <a:srgbClr val="14283C"/>
+                </a:solidFill>
+                <a:latin typeface="Arial" pitchFamily="34" charset="0"/>
+                <a:ea typeface="Arial" pitchFamily="34" charset="-122"/>
+                <a:cs typeface="Arial" pitchFamily="34" charset="-120"/>
+              </a:rPr>
+              <a:t> (2022) for TD, but on controlled data</a:t>
+            </a:r>
+            <a:endParaRPr lang="en-US" sz="1500" dirty="0"/>
           </a:p>
           <a:p>
             <a:pPr marL="177800" indent="-177800">
@@ -10242,7 +10755,7 @@
               <a:buChar char="•"/>
             </a:pPr>
             <a:r>
-              <a:rPr lang="en-US" sz="1350" b="1" dirty="0">
+              <a:rPr lang="en-US" sz="1500" b="1" dirty="0">
                 <a:solidFill>
                   <a:srgbClr val="14283C"/>
                 </a:solidFill>
@@ -10252,7 +10765,7 @@
               </a:rPr>
               <a:t>Method choice treated as a robustness question, tested against SAW and VIKOR</a:t>
             </a:r>
-            <a:endParaRPr lang="en-US" sz="1350" dirty="0"/>
+            <a:endParaRPr lang="en-US" sz="1500" dirty="0"/>
           </a:p>
         </p:txBody>
       </p:sp>
@@ -10543,7 +11056,7 @@
               <a:buChar char="•"/>
             </a:pPr>
             <a:r>
-              <a:rPr lang="en-US" sz="1350" dirty="0">
+              <a:rPr lang="en-US" sz="1500" dirty="0">
                 <a:solidFill>
                   <a:srgbClr val="14283C"/>
                 </a:solidFill>
@@ -10553,7 +11066,7 @@
               </a:rPr>
               <a:t>Portfolio of 108 services; 53 small vendor GUIs excluded; 6 selected for demonstration on data completeness over the full window</a:t>
             </a:r>
-            <a:endParaRPr lang="en-US" sz="1350" dirty="0"/>
+            <a:endParaRPr lang="en-US" sz="1500" dirty="0"/>
           </a:p>
           <a:p>
             <a:pPr marL="177800" indent="-177800">
@@ -10567,7 +11080,7 @@
               <a:buChar char="•"/>
             </a:pPr>
             <a:r>
-              <a:rPr lang="en-US" sz="1350" dirty="0">
+              <a:rPr lang="en-US" sz="1500" dirty="0">
                 <a:solidFill>
                   <a:srgbClr val="14283C"/>
                 </a:solidFill>
@@ -10577,7 +11090,7 @@
               </a:rPr>
               <a:t>Jan 2024 – Dec 2025, production records only, anonymised at source</a:t>
             </a:r>
-            <a:endParaRPr lang="en-US" sz="1350" dirty="0"/>
+            <a:endParaRPr lang="en-US" sz="1500" dirty="0"/>
           </a:p>
           <a:p>
             <a:pPr marL="177800" indent="-177800">
@@ -10591,7 +11104,7 @@
               <a:buChar char="•"/>
             </a:pPr>
             <a:r>
-              <a:rPr lang="en-US" sz="1350" dirty="0">
+              <a:rPr lang="en-US" sz="1500" dirty="0">
                 <a:solidFill>
                   <a:srgbClr val="14283C"/>
                 </a:solidFill>
@@ -10601,7 +11114,7 @@
               </a:rPr>
               <a:t>Quality filters: alarm-storm consolidation, &lt;0.1 h auto-closures removed, 98th percentile MTTR cap</a:t>
             </a:r>
-            <a:endParaRPr lang="en-US" sz="1350" dirty="0"/>
+            <a:endParaRPr lang="en-US" sz="1500" dirty="0"/>
           </a:p>
         </p:txBody>
       </p:sp>
@@ -10676,7 +11189,7 @@
               <a:buChar char="•"/>
             </a:pPr>
             <a:r>
-              <a:rPr lang="en-US" sz="1350" dirty="0">
+              <a:rPr lang="en-US" sz="1500" dirty="0">
                 <a:solidFill>
                   <a:srgbClr val="14283C"/>
                 </a:solidFill>
@@ -10686,7 +11199,7 @@
               </a:rPr>
               <a:t>Recording practices vary by team → scores are ordinal signals, not measurements</a:t>
             </a:r>
-            <a:endParaRPr lang="en-US" sz="1350" dirty="0"/>
+            <a:endParaRPr lang="en-US" sz="1500" dirty="0"/>
           </a:p>
           <a:p>
             <a:pPr marL="177800" indent="-177800">
@@ -10700,7 +11213,7 @@
               <a:buChar char="•"/>
             </a:pPr>
             <a:r>
-              <a:rPr lang="en-US" sz="1350" dirty="0">
+              <a:rPr lang="en-US" sz="1500" dirty="0">
                 <a:solidFill>
                   <a:srgbClr val="14283C"/>
                 </a:solidFill>
@@ -10710,7 +11223,7 @@
               </a:rPr>
               <a:t>CFR shares its numerator with incident frequency (bounded by sensitivity analysis)</a:t>
             </a:r>
-            <a:endParaRPr lang="en-US" sz="1350" dirty="0"/>
+            <a:endParaRPr lang="en-US" sz="1500" dirty="0"/>
           </a:p>
           <a:p>
             <a:pPr marL="177800" indent="-177800">
@@ -10724,7 +11237,7 @@
               <a:buChar char="•"/>
             </a:pPr>
             <a:r>
-              <a:rPr lang="en-US" sz="1350" dirty="0">
+              <a:rPr lang="en-US" sz="1500" dirty="0">
                 <a:solidFill>
                   <a:srgbClr val="14283C"/>
                 </a:solidFill>
@@ -10734,7 +11247,7 @@
               </a:rPr>
               <a:t>Demonstration set, not a portfolio ranking; the contribution is the instrument and its evaluation logic</a:t>
             </a:r>
-            <a:endParaRPr lang="en-US" sz="1350" dirty="0"/>
+            <a:endParaRPr lang="en-US" sz="1500" dirty="0"/>
           </a:p>
         </p:txBody>
       </p:sp>
@@ -11798,7 +12311,7 @@
               <a:buNone/>
             </a:pPr>
             <a:r>
-              <a:rPr lang="en-US" sz="1250" b="1" dirty="0">
+              <a:rPr lang="en-US" sz="1400" b="1" dirty="0">
                 <a:solidFill>
                   <a:srgbClr val="D98E1F"/>
                 </a:solidFill>
@@ -11808,7 +12321,7 @@
               </a:rPr>
               <a:t>SVC-01 · rank 1</a:t>
             </a:r>
-            <a:endParaRPr lang="en-US" sz="1250" dirty="0"/>
+            <a:endParaRPr lang="en-US" sz="1400" dirty="0"/>
           </a:p>
         </p:txBody>
       </p:sp>
@@ -11837,7 +12350,7 @@
               <a:buNone/>
             </a:pPr>
             <a:r>
-              <a:rPr lang="en-US" sz="1100" dirty="0">
+              <a:rPr lang="en-US" sz="1400" dirty="0">
                 <a:solidFill>
                   <a:srgbClr val="2A3F55"/>
                 </a:solidFill>
@@ -11847,7 +12360,7 @@
               </a:rPr>
               <a:t>Only 64 incidents/yr, but 4,210 unsupported component months and patch recency 63.2 → the debt an incident count cannot see</a:t>
             </a:r>
-            <a:endParaRPr lang="en-US" sz="1100" dirty="0"/>
+            <a:endParaRPr lang="en-US" sz="1400" dirty="0"/>
           </a:p>
         </p:txBody>
       </p:sp>
@@ -11903,7 +12416,7 @@
               <a:buNone/>
             </a:pPr>
             <a:r>
-              <a:rPr lang="en-US" sz="1250" b="1" dirty="0">
+              <a:rPr lang="en-US" sz="1400" b="1" dirty="0">
                 <a:solidFill>
                   <a:srgbClr val="14283C"/>
                 </a:solidFill>
@@ -11913,7 +12426,7 @@
               </a:rPr>
               <a:t>SVC-04 · rank 2</a:t>
             </a:r>
-            <a:endParaRPr lang="en-US" sz="1250" dirty="0"/>
+            <a:endParaRPr lang="en-US" sz="1400" dirty="0"/>
           </a:p>
         </p:txBody>
       </p:sp>
@@ -11942,7 +12455,7 @@
               <a:buNone/>
             </a:pPr>
             <a:r>
-              <a:rPr lang="en-US" sz="1100" dirty="0">
+              <a:rPr lang="en-US" sz="1400" dirty="0">
                 <a:solidFill>
                   <a:srgbClr val="2A3F55"/>
                 </a:solidFill>
@@ -11952,7 +12465,7 @@
               </a:rPr>
               <a:t>574 incidents/yr, MTTR 41.9 h, CFR 3.38, yet a clean lifecycle record → architectural &amp; process debt</a:t>
             </a:r>
-            <a:endParaRPr lang="en-US" sz="1100" dirty="0"/>
+            <a:endParaRPr lang="en-US" sz="1400" dirty="0"/>
           </a:p>
         </p:txBody>
       </p:sp>
@@ -12008,7 +12521,7 @@
               <a:buNone/>
             </a:pPr>
             <a:r>
-              <a:rPr lang="en-US" sz="1250" b="1" dirty="0">
+              <a:rPr lang="en-US" sz="1400" b="1" dirty="0">
                 <a:solidFill>
                   <a:srgbClr val="14283C"/>
                 </a:solidFill>
@@ -12018,7 +12531,7 @@
               </a:rPr>
               <a:t>SVC-03 · rank 6</a:t>
             </a:r>
-            <a:endParaRPr lang="en-US" sz="1250" dirty="0"/>
+            <a:endParaRPr lang="en-US" sz="1400" dirty="0"/>
           </a:p>
         </p:txBody>
       </p:sp>
@@ -12047,7 +12560,7 @@
               <a:buNone/>
             </a:pPr>
             <a:r>
-              <a:rPr lang="en-US" sz="1100" dirty="0">
+              <a:rPr lang="en-US" sz="1400" dirty="0">
                 <a:solidFill>
                   <a:srgbClr val="2A3F55"/>
                 </a:solidFill>
@@ -12057,7 +12570,7 @@
               </a:rPr>
               <a:t>The portfolio's reference for a well-maintained service</a:t>
             </a:r>
-            <a:endParaRPr lang="en-US" sz="1100" dirty="0"/>
+            <a:endParaRPr lang="en-US" sz="1400" dirty="0"/>
           </a:p>
         </p:txBody>
       </p:sp>
@@ -12375,7 +12888,7 @@
               <a:buNone/>
             </a:pPr>
             <a:r>
-              <a:rPr lang="en-US" sz="1100" dirty="0">
+              <a:rPr lang="en-US" sz="1400" dirty="0">
                 <a:solidFill>
                   <a:srgbClr val="2A3F55"/>
                 </a:solidFill>
@@ -12385,7 +12898,7 @@
               </a:rPr>
               <a:t>Weight &amp; temporal variation, Kendall's τ, exact p over 720 permutations</a:t>
             </a:r>
-            <a:endParaRPr lang="en-US" sz="1100" dirty="0"/>
+            <a:endParaRPr lang="en-US" sz="1400" dirty="0"/>
           </a:p>
         </p:txBody>
       </p:sp>
@@ -12414,7 +12927,7 @@
               <a:buNone/>
             </a:pPr>
             <a:r>
-              <a:rPr lang="en-US" sz="1200" b="1" dirty="0">
+              <a:rPr lang="en-US" sz="1400" b="1" dirty="0">
                 <a:solidFill>
                   <a:srgbClr val="1E7F82"/>
                 </a:solidFill>
@@ -12424,7 +12937,7 @@
               </a:rPr>
               <a:t>τ = 0.60–1.00</a:t>
             </a:r>
-            <a:endParaRPr lang="en-US" sz="1200" dirty="0"/>
+            <a:endParaRPr lang="en-US" sz="1400" dirty="0"/>
           </a:p>
         </p:txBody>
       </p:sp>
@@ -12526,7 +13039,7 @@
               <a:buNone/>
             </a:pPr>
             <a:r>
-              <a:rPr lang="en-US" sz="1100" dirty="0">
+              <a:rPr lang="en-US" sz="1400" dirty="0">
                 <a:solidFill>
                   <a:srgbClr val="2A3F55"/>
                 </a:solidFill>
@@ -12536,7 +13049,7 @@
               </a:rPr>
               <a:t>20,000 Dirichlet-sampled weightings, rank-acceptability analysis</a:t>
             </a:r>
-            <a:endParaRPr lang="en-US" sz="1100" dirty="0"/>
+            <a:endParaRPr lang="en-US" sz="1400" dirty="0"/>
           </a:p>
         </p:txBody>
       </p:sp>
@@ -12565,7 +13078,7 @@
               <a:buNone/>
             </a:pPr>
             <a:r>
-              <a:rPr lang="en-US" sz="1200" b="1" dirty="0">
+              <a:rPr lang="en-US" sz="1400" b="1" dirty="0">
                 <a:solidFill>
                   <a:srgbClr val="1E7F82"/>
                 </a:solidFill>
@@ -12575,7 +13088,7 @@
               </a:rPr>
               <a:t>extremes robust</a:t>
             </a:r>
-            <a:endParaRPr lang="en-US" sz="1200" dirty="0"/>
+            <a:endParaRPr lang="en-US" sz="1400" dirty="0"/>
           </a:p>
         </p:txBody>
       </p:sp>
@@ -12677,7 +13190,7 @@
               <a:buNone/>
             </a:pPr>
             <a:r>
-              <a:rPr lang="en-US" sz="1100" dirty="0">
+              <a:rPr lang="en-US" sz="1400" dirty="0">
                 <a:solidFill>
                   <a:srgbClr val="2A3F55"/>
                 </a:solidFill>
@@ -12687,7 +13200,7 @@
               </a:rPr>
               <a:t>Re-ranked with SAW &amp; VIKOR</a:t>
             </a:r>
-            <a:endParaRPr lang="en-US" sz="1100" dirty="0"/>
+            <a:endParaRPr lang="en-US" sz="1400" dirty="0"/>
           </a:p>
         </p:txBody>
       </p:sp>
@@ -12716,7 +13229,7 @@
               <a:buNone/>
             </a:pPr>
             <a:r>
-              <a:rPr lang="en-US" sz="1200" b="1" dirty="0">
+              <a:rPr lang="en-US" sz="1400" b="1" dirty="0">
                 <a:solidFill>
                   <a:srgbClr val="1E7F82"/>
                 </a:solidFill>
@@ -12726,7 +13239,7 @@
               </a:rPr>
               <a:t>τ = 0.60–1.00</a:t>
             </a:r>
-            <a:endParaRPr lang="en-US" sz="1200" dirty="0"/>
+            <a:endParaRPr lang="en-US" sz="1400" dirty="0"/>
           </a:p>
         </p:txBody>
       </p:sp>
@@ -12828,7 +13341,7 @@
               <a:buNone/>
             </a:pPr>
             <a:r>
-              <a:rPr lang="en-US" sz="1100" dirty="0">
+              <a:rPr lang="en-US" sz="1400" dirty="0">
                 <a:solidFill>
                   <a:srgbClr val="2A3F55"/>
                 </a:solidFill>
@@ -12838,7 +13351,7 @@
               </a:rPr>
               <a:t>Against an incident-only baseline</a:t>
             </a:r>
-            <a:endParaRPr lang="en-US" sz="1100" dirty="0"/>
+            <a:endParaRPr lang="en-US" sz="1400" dirty="0"/>
           </a:p>
         </p:txBody>
       </p:sp>
@@ -12867,7 +13380,7 @@
               <a:buNone/>
             </a:pPr>
             <a:r>
-              <a:rPr lang="en-US" sz="1200" b="1" dirty="0">
+              <a:rPr lang="en-US" sz="1400" b="1" dirty="0">
                 <a:solidFill>
                   <a:srgbClr val="1E7F82"/>
                 </a:solidFill>
@@ -12877,7 +13390,7 @@
               </a:rPr>
               <a:t>τ = 0.47 / 0.33</a:t>
             </a:r>
-            <a:endParaRPr lang="en-US" sz="1200" dirty="0"/>
+            <a:endParaRPr lang="en-US" sz="1400" dirty="0"/>
           </a:p>
         </p:txBody>
       </p:sp>
@@ -12979,7 +13492,7 @@
               <a:buNone/>
             </a:pPr>
             <a:r>
-              <a:rPr lang="en-US" sz="1100" dirty="0">
+              <a:rPr lang="en-US" sz="1400" dirty="0">
                 <a:solidFill>
                   <a:srgbClr val="2A3F55"/>
                 </a:solidFill>
@@ -12989,7 +13502,7 @@
               </a:rPr>
               <a:t>Leave-one-out rank reversal; absolute-mode variant</a:t>
             </a:r>
-            <a:endParaRPr lang="en-US" sz="1100" dirty="0"/>
+            <a:endParaRPr lang="en-US" sz="1400" dirty="0"/>
           </a:p>
         </p:txBody>
       </p:sp>
@@ -13018,7 +13531,7 @@
               <a:buNone/>
             </a:pPr>
             <a:r>
-              <a:rPr lang="en-US" sz="1200" b="1" dirty="0">
+              <a:rPr lang="en-US" sz="1400" b="1" dirty="0">
                 <a:solidFill>
                   <a:srgbClr val="D98E1F"/>
                 </a:solidFill>
@@ -13028,7 +13541,7 @@
               </a:rPr>
               <a:t>reversal-free by construction</a:t>
             </a:r>
-            <a:endParaRPr lang="en-US" sz="1200" dirty="0"/>
+            <a:endParaRPr lang="en-US" sz="1400" dirty="0"/>
           </a:p>
         </p:txBody>
       </p:sp>
@@ -13319,7 +13832,7 @@
               <a:buChar char="•"/>
             </a:pPr>
             <a:r>
-              <a:rPr lang="en-US" sz="1350" dirty="0">
+              <a:rPr lang="en-US" sz="1500" dirty="0">
                 <a:solidFill>
                   <a:srgbClr val="14283C"/>
                 </a:solidFill>
@@ -13329,7 +13842,7 @@
               </a:rPr>
               <a:t>Weight sensitivity 2025: τ = 1.000 (identical order)</a:t>
             </a:r>
-            <a:endParaRPr lang="en-US" sz="1350" dirty="0"/>
+            <a:endParaRPr lang="en-US" sz="1500" dirty="0"/>
           </a:p>
           <a:p>
             <a:pPr marL="177800" indent="-177800">
@@ -13343,7 +13856,7 @@
               <a:buChar char="•"/>
             </a:pPr>
             <a:r>
-              <a:rPr lang="en-US" sz="1350" dirty="0">
+              <a:rPr lang="en-US" sz="1500" dirty="0">
                 <a:solidFill>
                   <a:srgbClr val="14283C"/>
                 </a:solidFill>
@@ -13353,7 +13866,7 @@
               </a:rPr>
               <a:t>Weight sensitivity 2024: τ = 0.867 (one swap at the top)</a:t>
             </a:r>
-            <a:endParaRPr lang="en-US" sz="1350" dirty="0"/>
+            <a:endParaRPr lang="en-US" sz="1500" dirty="0"/>
           </a:p>
           <a:p>
             <a:pPr marL="177800" indent="-177800">
@@ -13367,7 +13880,7 @@
               <a:buChar char="•"/>
             </a:pPr>
             <a:r>
-              <a:rPr lang="en-US" sz="1350" dirty="0">
+              <a:rPr lang="en-US" sz="1500" dirty="0">
                 <a:solidFill>
                   <a:srgbClr val="14283C"/>
                 </a:solidFill>
@@ -13377,7 +13890,7 @@
               </a:rPr>
               <a:t>Temporal 2025 vs 2024: τ = 0.600 / 0.733, tracking real profile change, above all SVC-06's broad deterioration</a:t>
             </a:r>
-            <a:endParaRPr lang="en-US" sz="1350" dirty="0"/>
+            <a:endParaRPr lang="en-US" sz="1500" dirty="0"/>
           </a:p>
           <a:p>
             <a:pPr marL="177800" indent="-177800">
@@ -13391,7 +13904,7 @@
               <a:buChar char="•"/>
             </a:pPr>
             <a:r>
-              <a:rPr lang="en-US" sz="1350" b="1" dirty="0">
+              <a:rPr lang="en-US" sz="1500" b="1" dirty="0">
                 <a:solidFill>
                   <a:srgbClr val="14283C"/>
                 </a:solidFill>
@@ -13401,7 +13914,7 @@
               </a:rPr>
               <a:t>The lowest-priority position is identical in every run</a:t>
             </a:r>
-            <a:endParaRPr lang="en-US" sz="1350" dirty="0"/>
+            <a:endParaRPr lang="en-US" sz="1500" dirty="0"/>
           </a:p>
         </p:txBody>
       </p:sp>
@@ -13464,7 +13977,7 @@
               <a:buNone/>
             </a:pPr>
             <a:r>
-              <a:rPr lang="en-US" sz="1100" b="1" kern="0" spc="200" dirty="0">
+              <a:rPr lang="en-US" sz="1400" b="1" kern="0" spc="200" dirty="0">
                 <a:solidFill>
                   <a:srgbClr val="5C7186"/>
                 </a:solidFill>
@@ -13474,7 +13987,7 @@
               </a:rPr>
               <a:t>FULL WEIGHT SPACE · 20,000 DRAWS</a:t>
             </a:r>
-            <a:endParaRPr lang="en-US" sz="1100" dirty="0"/>
+            <a:endParaRPr lang="en-US" sz="1400" dirty="0"/>
           </a:p>
         </p:txBody>
       </p:sp>
@@ -13545,7 +14058,7 @@
               <a:buNone/>
             </a:pPr>
             <a:r>
-              <a:rPr lang="en-US" sz="1250" dirty="0">
+              <a:rPr lang="en-US" sz="1400" dirty="0">
                 <a:solidFill>
                   <a:srgbClr val="2A3F55"/>
                 </a:solidFill>
@@ -13555,7 +14068,7 @@
               </a:rPr>
               <a:t>of all admissible weightings place SVC-03 last, and rank 1 falls to SVC-01, SVC-06 or SVC-04 in every single draw (41%, 32%, 27%). The bottom is weight-independent; the single top rank is a property of the cluster.</a:t>
             </a:r>
-            <a:endParaRPr lang="en-US" sz="1250" dirty="0"/>
+            <a:endParaRPr lang="en-US" sz="1400" dirty="0"/>
           </a:p>
         </p:txBody>
       </p:sp>

--- a/presentation/defense.pptx
+++ b/presentation/defense.pptx
@@ -4,9 +4,6 @@
   <p:sldMasterIdLst>
     <p:sldMasterId id="2147483648" r:id="rId1"/>
   </p:sldMasterIdLst>
-  <p:notesMasterIdLst>
-    <p:notesMasterId r:id="rId19"/>
-  </p:notesMasterIdLst>
   <p:sldIdLst>
     <p:sldId id="256" r:id="rId2"/>
     <p:sldId id="257" r:id="rId3"/>
@@ -26,6 +23,9 @@
     <p:sldId id="271" r:id="rId17"/>
     <p:sldId id="272" r:id="rId18"/>
   </p:sldIdLst>
+  <p:notesMasterIdLst>
+    <p:notesMasterId r:id="rId19"/>
+  </p:notesMasterIdLst>
   <p:sldSz cx="12192000" cy="6858000"/>
   <p:notesSz cx="6858000" cy="12192000"/>
   <p:defaultTextStyle>
@@ -120,11 +120,6 @@
       </a:defRPr>
     </a:lvl9pPr>
   </p:defaultTextStyle>
-  <p:extLst>
-    <p:ext uri="{EFAFB233-063F-42B5-8137-9DF3F51BA10A}">
-      <p15:sldGuideLst xmlns:p15="http://schemas.microsoft.com/office/powerpoint/2012/main"/>
-    </p:ext>
-  </p:extLst>
 </p:presentation>
 </file>
 
@@ -150,10 +145,234 @@
           <a:chExt cx="0" cy="0"/>
         </a:xfrm>
       </p:grpSpPr>
+      <p:sp>
+        <p:nvSpPr>
+          <p:cNvPr id="2" name="Header Placeholder 1"/>
+          <p:cNvSpPr>
+            <a:spLocks noGrp="1"/>
+          </p:cNvSpPr>
+          <p:nvPr>
+            <p:ph type="hdr" sz="quarter"/>
+          </p:nvPr>
+        </p:nvSpPr>
+        <p:spPr>
+          <a:xfrm>
+            <a:off x="0" y="0"/>
+            <a:ext cx="2971800" cy="458788"/>
+          </a:xfrm>
+          <a:prstGeom prst="rect">
+            <a:avLst/>
+          </a:prstGeom>
+        </p:spPr>
+        <p:txBody>
+          <a:bodyPr vert="horz" lIns="91440" tIns="45720" rIns="91440" bIns="45720" rtlCol="0"/>
+          <a:lstStyle>
+            <a:lvl1pPr algn="l">
+              <a:defRPr sz="1200"/>
+            </a:lvl1pPr>
+          </a:lstStyle>
+          <a:p>
+            <a:endParaRPr lang="en-US"/>
+          </a:p>
+        </p:txBody>
+      </p:sp>
+      <p:sp>
+        <p:nvSpPr>
+          <p:cNvPr id="3" name="Date Placeholder 2"/>
+          <p:cNvSpPr>
+            <a:spLocks noGrp="1"/>
+          </p:cNvSpPr>
+          <p:nvPr>
+            <p:ph type="dt" idx="1"/>
+          </p:nvPr>
+        </p:nvSpPr>
+        <p:spPr>
+          <a:xfrm>
+            <a:off x="3884613" y="0"/>
+            <a:ext cx="2971800" cy="458788"/>
+          </a:xfrm>
+          <a:prstGeom prst="rect">
+            <a:avLst/>
+          </a:prstGeom>
+        </p:spPr>
+        <p:txBody>
+          <a:bodyPr vert="horz" lIns="91440" tIns="45720" rIns="91440" bIns="45720" rtlCol="0"/>
+          <a:lstStyle>
+            <a:lvl1pPr algn="r">
+              <a:defRPr sz="1200"/>
+            </a:lvl1pPr>
+          </a:lstStyle>
+          <a:p>
+            <a:fld id="{5282F153-3F37-0F45-9E97-73ACFA13230C}" type="datetimeFigureOut">
+              <a:rPr lang="en-US"/>
+              <a:t>7/23/19</a:t>
+            </a:fld>
+            <a:endParaRPr lang="en-US"/>
+          </a:p>
+        </p:txBody>
+      </p:sp>
+      <p:sp>
+        <p:nvSpPr>
+          <p:cNvPr id="4" name="Slide Image Placeholder 3"/>
+          <p:cNvSpPr>
+            <a:spLocks noGrp="1" noRot="1" noChangeAspect="1"/>
+          </p:cNvSpPr>
+          <p:nvPr>
+            <p:ph type="sldImg" idx="2"/>
+          </p:nvPr>
+        </p:nvSpPr>
+        <p:spPr>
+          <a:xfrm>
+            <a:off x="685800" y="1143000"/>
+            <a:ext cx="5486400" cy="3086100"/>
+          </a:xfrm>
+          <a:prstGeom prst="rect">
+            <a:avLst/>
+          </a:prstGeom>
+          <a:noFill/>
+          <a:ln w="12700">
+            <a:solidFill>
+              <a:prstClr val="black"/>
+            </a:solidFill>
+          </a:ln>
+        </p:spPr>
+        <p:txBody>
+          <a:bodyPr vert="horz" lIns="91440" tIns="45720" rIns="91440" bIns="45720" rtlCol="0" anchor="ctr"/>
+          <a:lstStyle/>
+          <a:p>
+            <a:endParaRPr lang="en-US"/>
+          </a:p>
+        </p:txBody>
+      </p:sp>
+      <p:sp>
+        <p:nvSpPr>
+          <p:cNvPr id="5" name="Notes Placeholder 4"/>
+          <p:cNvSpPr>
+            <a:spLocks noGrp="1"/>
+          </p:cNvSpPr>
+          <p:nvPr>
+            <p:ph type="body" sz="quarter" idx="3"/>
+          </p:nvPr>
+        </p:nvSpPr>
+        <p:spPr>
+          <a:xfrm>
+            <a:off x="685800" y="4400550"/>
+            <a:ext cx="5486400" cy="3600450"/>
+          </a:xfrm>
+          <a:prstGeom prst="rect">
+            <a:avLst/>
+          </a:prstGeom>
+        </p:spPr>
+        <p:txBody>
+          <a:bodyPr vert="horz" lIns="91440" tIns="45720" rIns="91440" bIns="45720" rtlCol="0"/>
+          <a:lstStyle/>
+          <a:p>
+            <a:pPr lvl="0"/>
+            <a:r>
+              <a:rPr lang="en-US"/>
+              <a:t>Click to edit Master text styles</a:t>
+            </a:r>
+          </a:p>
+          <a:p>
+            <a:pPr lvl="1"/>
+            <a:r>
+              <a:rPr lang="en-US"/>
+              <a:t>Second level</a:t>
+            </a:r>
+          </a:p>
+          <a:p>
+            <a:pPr lvl="2"/>
+            <a:r>
+              <a:rPr lang="en-US"/>
+              <a:t>Third level</a:t>
+            </a:r>
+          </a:p>
+          <a:p>
+            <a:pPr lvl="3"/>
+            <a:r>
+              <a:rPr lang="en-US"/>
+              <a:t>Fourth level</a:t>
+            </a:r>
+          </a:p>
+          <a:p>
+            <a:pPr lvl="4"/>
+            <a:r>
+              <a:rPr lang="en-US"/>
+              <a:t>Fifth level</a:t>
+            </a:r>
+          </a:p>
+        </p:txBody>
+      </p:sp>
+      <p:sp>
+        <p:nvSpPr>
+          <p:cNvPr id="6" name="Footer Placeholder 5"/>
+          <p:cNvSpPr>
+            <a:spLocks noGrp="1"/>
+          </p:cNvSpPr>
+          <p:nvPr>
+            <p:ph type="ftr" sz="quarter" idx="4"/>
+          </p:nvPr>
+        </p:nvSpPr>
+        <p:spPr>
+          <a:xfrm>
+            <a:off x="0" y="8685213"/>
+            <a:ext cx="2971800" cy="458787"/>
+          </a:xfrm>
+          <a:prstGeom prst="rect">
+            <a:avLst/>
+          </a:prstGeom>
+        </p:spPr>
+        <p:txBody>
+          <a:bodyPr vert="horz" lIns="91440" tIns="45720" rIns="91440" bIns="45720" rtlCol="0" anchor="b"/>
+          <a:lstStyle>
+            <a:lvl1pPr algn="l">
+              <a:defRPr sz="1200"/>
+            </a:lvl1pPr>
+          </a:lstStyle>
+          <a:p>
+            <a:endParaRPr lang="en-US"/>
+          </a:p>
+        </p:txBody>
+      </p:sp>
+      <p:sp>
+        <p:nvSpPr>
+          <p:cNvPr id="7" name="Slide Number Placeholder 6"/>
+          <p:cNvSpPr>
+            <a:spLocks noGrp="1"/>
+          </p:cNvSpPr>
+          <p:nvPr>
+            <p:ph type="sldNum" sz="quarter" idx="5"/>
+          </p:nvPr>
+        </p:nvSpPr>
+        <p:spPr>
+          <a:xfrm>
+            <a:off x="3884613" y="8685213"/>
+            <a:ext cx="2971800" cy="458787"/>
+          </a:xfrm>
+          <a:prstGeom prst="rect">
+            <a:avLst/>
+          </a:prstGeom>
+        </p:spPr>
+        <p:txBody>
+          <a:bodyPr vert="horz" lIns="91440" tIns="45720" rIns="91440" bIns="45720" rtlCol="0" anchor="b"/>
+          <a:lstStyle>
+            <a:lvl1pPr algn="r">
+              <a:defRPr sz="1200"/>
+            </a:lvl1pPr>
+          </a:lstStyle>
+          <a:p>
+            <a:fld id="{CE5E9CC1-C706-0F49-92D6-E571CC5EEA8F}" type="slidenum">
+              <a:rPr lang="en-US"/>
+              <a:t>‹#›</a:t>
+            </a:fld>
+            <a:endParaRPr lang="en-US"/>
+          </a:p>
+        </p:txBody>
+      </p:sp>
     </p:spTree>
     <p:extLst>
       <p:ext uri="{BB962C8B-B14F-4D97-AF65-F5344CB8AC3E}">
-        <p14:creationId xmlns:p14="http://schemas.microsoft.com/office/powerpoint/2010/main" val="2476988986"/>
+        <p14:creationId xmlns:p14="http://schemas.microsoft.com/office/powerpoint/2010/main" val="1024086991"/>
       </p:ext>
     </p:extLst>
   </p:cSld>
@@ -301,6 +520,7 @@
               <a:rPr lang="en-US" dirty="0"/>
               <a:t>0:00-0:45. This chart is the thesis in one image: six production trading services, ranked by technical debt priority, computed entirely from operational records. No source code was read to produce it. The next 15 minutes explain why that matters, how it was built, and why you can trust it.</a:t>
             </a:r>
+            <a:endParaRPr lang="en-US" dirty="0"/>
           </a:p>
         </p:txBody>
       </p:sp>
@@ -388,6 +608,7 @@
               <a:rPr lang="en-US" dirty="0"/>
               <a:t>9:15-10:00. One idea: if the framework merely reproduced the incident count, it would be redundant. It does not, and the two services that move are the ones that should move.</a:t>
             </a:r>
+            <a:endParaRPr lang="en-US" dirty="0"/>
           </a:p>
         </p:txBody>
       </p:sp>
@@ -473,8 +694,9 @@
           <a:p>
             <a:r>
               <a:rPr lang="en-US" dirty="0"/>
-              <a:t>10:00-11:15. The 2024 equal-weight top rank is a photo-finish: classic TOPSIS puts SVC-04 first by 0.004; SAW, VIKOR and the absolute variant put SVC-01 first. Both services are worst on exactly two criteria; SVC-04 is perfect on its other two while SVC-01 is only good, so linear aggregation favours SVC-01 while vector normalisation, which preserves SVC-04's outlying incident count, does not. If pressed: VIKOR's utility term is algebraically 1 minus SAW, so those two are not fully independent; VIKOR adds information only through regret. In 2025 everything agrees on SVC-01.</a:t>
-            </a:r>
+              <a:t>10:00-11:15. The 2024 equal-weight top rank is a photo-finish: classic TOPSIS puts SVC-04 first by 0.0018; SAW, VIKOR and the absolute variant put SVC-01 first. Both services are worst on exactly two criteria; SVC-04 is perfect on its other two while SVC-01 is only good, so linear aggregation favours SVC-01 while vector normalisation, which preserves SVC-04's outlying incident count, does not. If pressed: VIKOR's utility term is algebraically 1 minus SAW, so those two are not fully independent; VIKOR adds information only through regret. In 2025 everything agrees on SVC-01.</a:t>
+            </a:r>
+            <a:endParaRPr lang="en-US" dirty="0"/>
           </a:p>
         </p:txBody>
       </p:sp>
@@ -562,6 +784,7 @@
               <a:rPr lang="en-US" dirty="0"/>
               <a:t>11:15-12:00. Disagreement as diagnostic rather than failure is the transferable design lesson beyond the case. The takeaway doubles as the answer to 'so which service is actually first?'.</a:t>
             </a:r>
+            <a:endParaRPr lang="en-US" dirty="0"/>
           </a:p>
         </p:txBody>
       </p:sp>
@@ -649,6 +872,7 @@
               <a:rPr lang="en-US" dirty="0"/>
               <a:t>12:00-13:15. Deliver these deadpan; each answer is one breath. The move: every hard question already has a stated, chapter-referenced answer in the thesis, so the defence is consistent with the document.</a:t>
             </a:r>
+            <a:endParaRPr lang="en-US" dirty="0"/>
           </a:p>
         </p:txBody>
       </p:sp>
@@ -736,6 +960,7 @@
               <a:rPr lang="en-US" dirty="0"/>
               <a:t>13:15-14:00. The takeaway restates the scope sentence from Chapter 1: 'measuring' means a quantitative, reproducible ordering, not a claim to have quantified the debt itself. Ending the pre-emption block on it shows claim discipline from first page to last.</a:t>
             </a:r>
+            <a:endParaRPr lang="en-US" dirty="0"/>
           </a:p>
         </p:txBody>
       </p:sp>
@@ -823,6 +1048,7 @@
               <a:rPr lang="en-US" dirty="0"/>
               <a:t>14:00-14:40. Three academic contributions, one practical. If pressed on novelty, the four-element combination from the gap table in Chapter 2 is the defensible claim: each element exists separately, no study combines them.</a:t>
             </a:r>
+            <a:endParaRPr lang="en-US" dirty="0"/>
           </a:p>
         </p:txBody>
       </p:sp>
@@ -910,6 +1136,7 @@
               <a:rPr lang="en-US" dirty="0"/>
               <a:t>14:40-15:00. The closing sentence is the final sentence of Chapter 6, so the defence ends exactly where the thesis does. Then stop talking.</a:t>
             </a:r>
+            <a:endParaRPr lang="en-US" dirty="0"/>
           </a:p>
         </p:txBody>
       </p:sp>
@@ -997,6 +1224,7 @@
               <a:rPr lang="en-US" dirty="0"/>
               <a:t>Backup slide; not part of the 15 minutes. Full reference list formatted in Cite Them Right Harvard with all authors listed. If asked for a source mid-defence, jump here, answer, and return.</a:t>
             </a:r>
+            <a:endParaRPr lang="en-US" dirty="0"/>
           </a:p>
         </p:txBody>
       </p:sp>
@@ -1084,6 +1312,7 @@
               <a:rPr lang="en-US" dirty="0"/>
               <a:t>0:45-2:00. Frame the environment: continuous availability, FINMA oversight, vendor platforms that cannot be refactored. Then the three anchor numbers, delivered slowly. The last line sets up the whole design: the symptoms are already recorded, we just need an instrument that reads them.</a:t>
             </a:r>
+            <a:endParaRPr lang="en-US" dirty="0"/>
           </a:p>
         </p:txBody>
       </p:sp>
@@ -1171,6 +1400,7 @@
               <a:rPr lang="en-US" dirty="0"/>
               <a:t>2:00-3:00. Emphasise the four-way combination: each pairwise element exists in the literature, the combination does not. RQ2 is deliberately worded 'to what extent': the proxy link is treated as a testable hypothesis throughout, not a premise.</a:t>
             </a:r>
+            <a:endParaRPr lang="en-US" dirty="0"/>
           </a:p>
         </p:txBody>
       </p:sp>
@@ -1258,6 +1488,7 @@
               <a:rPr lang="en-US" dirty="0"/>
               <a:t>3:00-4:15. Walk one row fully (MTTR: Forsgren et al. validate the metric, Nord et al. ground its diagnostic reading as debt impeding recovery from change). State the exclusions and why: honesty about what could not be measured is part of the audit trail. Pre-empts 'why these five?'.</a:t>
             </a:r>
+            <a:endParaRPr lang="en-US" dirty="0"/>
           </a:p>
         </p:txBody>
       </p:sp>
@@ -1345,6 +1576,7 @@
               <a:rPr lang="en-US" dirty="0"/>
               <a:t>4:15-5:15. Keep this brisk; examiners know TOPSIS. Two points to land: differential weights are a declared practitioner assumption, not literature-derived, and are themselves stress-tested; and method choice is defended empirically, not a priori.</a:t>
             </a:r>
+            <a:endParaRPr lang="en-US" dirty="0"/>
           </a:p>
         </p:txBody>
       </p:sp>
@@ -1432,6 +1664,7 @@
               <a:rPr lang="en-US" dirty="0"/>
               <a:t>5:15-6:15. Say the right column unprompted; every point is a question the examiner would otherwise ask. Framing: n=6 was a completeness criterion, and the consequence is handled with exact permutation p-values read as effect sizes.</a:t>
             </a:r>
+            <a:endParaRPr lang="en-US" dirty="0"/>
           </a:p>
         </p:txBody>
       </p:sp>
@@ -1519,6 +1752,7 @@
               <a:rPr lang="en-US" dirty="0"/>
               <a:t>6:15-7:15. Read the ranking through the three profiles; each maps onto a distinct debt dimension, which is the practical-validity argument for RQ2. SVC-01 is the money case: quiet on incidents, dominant structural exposure, and it tops the ranking.</a:t>
             </a:r>
+            <a:endParaRPr lang="en-US" dirty="0"/>
           </a:p>
         </p:txBody>
       </p:sp>
@@ -1606,6 +1840,7 @@
               <a:rPr lang="en-US" dirty="0"/>
               <a:t>7:15-8:15. The evaluation architecture. Say the takeaway line verbatim: it answers the biggest examiner question (circularity, no ground truth) before it is asked. The next slides unpack the three most interesting strands.</a:t>
             </a:r>
+            <a:endParaRPr lang="en-US" dirty="0"/>
           </a:p>
         </p:txBody>
       </p:sp>
@@ -1693,6 +1928,7 @@
               <a:rPr lang="en-US" dirty="0"/>
               <a:t>8:15-9:15. RQ3 answered: stable at the extremes, sensitive in the middle, and the middle sensitivity is a property of the 2024 data (grouped profiles), not the method, as the flatter 2024 Monte Carlo confirms. The takeaway pre-empts 'isn't temporal instability a flaw?'.</a:t>
             </a:r>
+            <a:endParaRPr lang="en-US" dirty="0"/>
           </a:p>
         </p:txBody>
       </p:sp>
@@ -1765,11 +2001,6 @@
 <file path=ppt/slideMasters/slideMaster1.xml><?xml version="1.0" encoding="utf-8"?>
 <p:sldMaster xmlns:a="http://schemas.openxmlformats.org/drawingml/2006/main" xmlns:r="http://schemas.openxmlformats.org/officeDocument/2006/relationships" xmlns:p="http://schemas.openxmlformats.org/presentationml/2006/main">
   <p:cSld>
-    <p:bg>
-      <p:bgRef idx="1001">
-        <a:schemeClr val="bg1"/>
-      </p:bgRef>
-    </p:bg>
     <p:spTree>
       <p:nvGrpSpPr>
         <p:cNvPr id="1" name=""/>
@@ -2052,7 +2283,6 @@
         <a:solidFill>
           <a:srgbClr val="14283C"/>
         </a:solidFill>
-        <a:effectLst/>
       </p:bgPr>
     </p:bg>
     <p:spTree>
@@ -2071,14 +2301,14 @@
       </p:grpSpPr>
       <p:pic>
         <p:nvPicPr>
-          <p:cNvPr id="2" name="Image 0" descr="logo_white.png"/>
+          <p:cNvPr id="2" name="Image 0" descr="logo_white.png">    </p:cNvPr>
           <p:cNvPicPr>
             <a:picLocks noChangeAspect="1"/>
           </p:cNvPicPr>
           <p:nvPr/>
         </p:nvPicPr>
         <p:blipFill>
-          <a:blip r:embed="rId3"/>
+          <a:blip r:embed="rId1"/>
           <a:stretch>
             <a:fillRect/>
           </a:stretch>
@@ -2114,11 +2344,11 @@
           <a:bodyPr wrap="square" lIns="0" tIns="0" rIns="0" bIns="0" rtlCol="0" anchor="ctr"/>
           <a:lstStyle/>
           <a:p>
-            <a:pPr marL="0" indent="0">
-              <a:buNone/>
-            </a:pPr>
-            <a:r>
-              <a:rPr lang="en-US" sz="1200" b="1" kern="0" spc="300" dirty="0">
+            <a:pPr indent="0" marL="0">
+              <a:buNone/>
+            </a:pPr>
+            <a:r>
+              <a:rPr lang="en-US" sz="1200" b="1" spc="300" kern="0" dirty="0">
                 <a:solidFill>
                   <a:srgbClr val="D98E1F"/>
                 </a:solidFill>
@@ -2153,7 +2383,7 @@
           <a:bodyPr wrap="square" lIns="0" tIns="0" rIns="0" bIns="0" rtlCol="0" anchor="ctr"/>
           <a:lstStyle/>
           <a:p>
-            <a:pPr marL="0" indent="0">
+            <a:pPr indent="0" marL="0">
               <a:buNone/>
             </a:pPr>
             <a:r>
@@ -2192,7 +2422,7 @@
           <a:bodyPr wrap="square" lIns="0" tIns="0" rIns="0" bIns="0" rtlCol="0" anchor="ctr"/>
           <a:lstStyle/>
           <a:p>
-            <a:pPr marL="0" indent="0">
+            <a:pPr indent="0" marL="0">
               <a:buNone/>
             </a:pPr>
             <a:r>
@@ -2231,7 +2461,7 @@
           <a:bodyPr wrap="square" lIns="0" tIns="0" rIns="0" bIns="0" rtlCol="0" anchor="ctr"/>
           <a:lstStyle/>
           <a:p>
-            <a:pPr marL="0" indent="0">
+            <a:pPr indent="0" marL="0">
               <a:buNone/>
             </a:pPr>
             <a:r>
@@ -2245,6 +2475,9 @@
               </a:rPr>
               <a:t>Tobias Zeier</a:t>
             </a:r>
+            <a:pPr indent="0" marL="0">
+              <a:buNone/>
+            </a:pPr>
             <a:r>
               <a:rPr lang="en-US" sz="1500" dirty="0">
                 <a:solidFill>
@@ -2282,13 +2515,6 @@
             <a:prstDash val="solid"/>
           </a:ln>
         </p:spPr>
-        <p:txBody>
-          <a:bodyPr/>
-          <a:lstStyle/>
-          <a:p>
-            <a:endParaRPr lang="en-CH"/>
-          </a:p>
-        </p:txBody>
       </p:sp>
       <p:sp>
         <p:nvSpPr>
@@ -2311,11 +2537,11 @@
           <a:bodyPr wrap="square" lIns="0" tIns="0" rIns="0" bIns="0" rtlCol="0" anchor="ctr"/>
           <a:lstStyle/>
           <a:p>
-            <a:pPr marL="0" indent="0">
-              <a:buNone/>
-            </a:pPr>
-            <a:r>
-              <a:rPr lang="en-US" sz="1000" kern="0" spc="200" dirty="0">
+            <a:pPr indent="0" marL="0">
+              <a:buNone/>
+            </a:pPr>
+            <a:r>
+              <a:rPr lang="en-US" sz="1000" spc="200" kern="0" dirty="0">
                 <a:solidFill>
                   <a:srgbClr val="8FA6BC"/>
                 </a:solidFill>
@@ -2345,7 +2571,6 @@
         <a:solidFill>
           <a:srgbClr val="FFFFFF"/>
         </a:solidFill>
-        <a:effectLst/>
       </p:bgPr>
     </p:bg>
     <p:spTree>
@@ -2383,11 +2608,11 @@
           <a:bodyPr wrap="square" lIns="0" tIns="0" rIns="0" bIns="0" rtlCol="0" anchor="ctr"/>
           <a:lstStyle/>
           <a:p>
-            <a:pPr marL="0" indent="0" algn="l">
-              <a:buNone/>
-            </a:pPr>
-            <a:r>
-              <a:rPr lang="en-US" sz="1100" b="1" kern="0" spc="300" dirty="0">
+            <a:pPr algn="l" indent="0" marL="0">
+              <a:buNone/>
+            </a:pPr>
+            <a:r>
+              <a:rPr lang="en-US" sz="1100" b="1" spc="300" kern="0" dirty="0">
                 <a:solidFill>
                   <a:srgbClr val="5C7186"/>
                 </a:solidFill>
@@ -2422,7 +2647,7 @@
           <a:bodyPr wrap="square" lIns="0" tIns="0" rIns="0" bIns="0" rtlCol="0" anchor="ctr"/>
           <a:lstStyle/>
           <a:p>
-            <a:pPr marL="0" indent="0" algn="l">
+            <a:pPr algn="l" indent="0" marL="0">
               <a:buNone/>
             </a:pPr>
             <a:r>
@@ -2461,7 +2686,7 @@
           <a:bodyPr wrap="square" lIns="0" tIns="0" rIns="0" bIns="0" rtlCol="0" anchor="ctr"/>
           <a:lstStyle/>
           <a:p>
-            <a:pPr marL="0" indent="0">
+            <a:pPr indent="0" marL="0">
               <a:buNone/>
             </a:pPr>
             <a:r>
@@ -2475,6 +2700,9 @@
               </a:rPr>
               <a:t>Against a ranking by incident frequency alone:  </a:t>
             </a:r>
+            <a:pPr indent="0" marL="0">
+              <a:buNone/>
+            </a:pPr>
             <a:r>
               <a:rPr lang="en-US" sz="1500" b="1" dirty="0">
                 <a:solidFill>
@@ -2486,6 +2714,9 @@
               </a:rPr>
               <a:t>τ = 0.467</a:t>
             </a:r>
+            <a:pPr indent="0" marL="0">
+              <a:buNone/>
+            </a:pPr>
             <a:r>
               <a:rPr lang="en-US" sz="1500" dirty="0">
                 <a:solidFill>
@@ -2497,6 +2728,9 @@
               </a:rPr>
               <a:t> (2025),  </a:t>
             </a:r>
+            <a:pPr indent="0" marL="0">
+              <a:buNone/>
+            </a:pPr>
             <a:r>
               <a:rPr lang="en-US" sz="1500" b="1" dirty="0">
                 <a:solidFill>
@@ -2508,6 +2742,9 @@
               </a:rPr>
               <a:t>τ = 0.333</a:t>
             </a:r>
+            <a:pPr indent="0" marL="0">
+              <a:buNone/>
+            </a:pPr>
             <a:r>
               <a:rPr lang="en-US" sz="1500" dirty="0">
                 <a:solidFill>
@@ -2542,20 +2779,13 @@
           </a:solidFill>
           <a:ln/>
           <a:effectLst>
-            <a:outerShdw blurRad="63500" dist="25400" dir="5400000" algn="bl" rotWithShape="0">
+            <a:outerShdw sx="100000" sy="100000" kx="0" ky="0" algn="bl" rotWithShape="0" blurRad="63500" dist="25400" dir="5400000">
               <a:srgbClr val="9AA7B2">
                 <a:alpha val="22000"/>
               </a:srgbClr>
             </a:outerShdw>
           </a:effectLst>
         </p:spPr>
-        <p:txBody>
-          <a:bodyPr/>
-          <a:lstStyle/>
-          <a:p>
-            <a:endParaRPr lang="en-CH"/>
-          </a:p>
-        </p:txBody>
       </p:sp>
       <p:sp>
         <p:nvSpPr>
@@ -2578,11 +2808,11 @@
           <a:bodyPr wrap="square" lIns="0" tIns="0" rIns="0" bIns="0" rtlCol="0" anchor="ctr"/>
           <a:lstStyle/>
           <a:p>
-            <a:pPr marL="0" indent="0">
-              <a:buNone/>
-            </a:pPr>
-            <a:r>
-              <a:rPr lang="en-US" sz="1600" b="1" dirty="0">
+            <a:pPr indent="0" marL="0">
+              <a:buNone/>
+            </a:pPr>
+            <a:r>
+              <a:rPr lang="en-US" sz="1700" b="1" dirty="0">
                 <a:solidFill>
                   <a:srgbClr val="D98E1F"/>
                 </a:solidFill>
@@ -2592,7 +2822,7 @@
               </a:rPr>
               <a:t>SVC-01 rises, fourth to first</a:t>
             </a:r>
-            <a:endParaRPr lang="en-US" sz="1600" dirty="0"/>
+            <a:endParaRPr lang="en-US" sz="1700" dirty="0"/>
           </a:p>
         </p:txBody>
       </p:sp>
@@ -2617,14 +2847,14 @@
           <a:bodyPr wrap="square" lIns="0" tIns="0" rIns="0" bIns="0" rtlCol="0" anchor="t"/>
           <a:lstStyle/>
           <a:p>
-            <a:pPr marL="0" indent="0">
+            <a:pPr indent="0" marL="0">
               <a:lnSpc>
                 <a:spcPct val="115000"/>
               </a:lnSpc>
               <a:buNone/>
             </a:pPr>
             <a:r>
-              <a:rPr lang="en-US" sz="1400" dirty="0">
+              <a:rPr lang="en-US" sz="1300" dirty="0">
                 <a:solidFill>
                   <a:srgbClr val="2A3F55"/>
                 </a:solidFill>
@@ -2632,9 +2862,9 @@
                 <a:ea typeface="Arial" pitchFamily="34" charset="-122"/>
                 <a:cs typeface="Arial" pitchFamily="34" charset="-120"/>
               </a:rPr>
-              <a:t>Infrastructure lifecycle debt (4,210 unsupported component months, patch recency 63.18) is invisible to an incident count. This is precisely the signal the framework was built to surface.</a:t>
-            </a:r>
-            <a:endParaRPr lang="en-US" sz="1400" dirty="0"/>
+              <a:t>Infrastructure lifecycle debt (2,565 unsupported component months, patch recency 53.10) is invisible to an incident count. This is precisely the signal the framework was built to surface.</a:t>
+            </a:r>
+            <a:endParaRPr lang="en-US" sz="1300" dirty="0"/>
           </a:p>
         </p:txBody>
       </p:sp>
@@ -2657,20 +2887,13 @@
           </a:solidFill>
           <a:ln/>
           <a:effectLst>
-            <a:outerShdw blurRad="63500" dist="25400" dir="5400000" algn="bl" rotWithShape="0">
+            <a:outerShdw sx="100000" sy="100000" kx="0" ky="0" algn="bl" rotWithShape="0" blurRad="63500" dist="25400" dir="5400000">
               <a:srgbClr val="9AA7B2">
                 <a:alpha val="22000"/>
               </a:srgbClr>
             </a:outerShdw>
           </a:effectLst>
         </p:spPr>
-        <p:txBody>
-          <a:bodyPr/>
-          <a:lstStyle/>
-          <a:p>
-            <a:endParaRPr lang="en-CH"/>
-          </a:p>
-        </p:txBody>
       </p:sp>
       <p:sp>
         <p:nvSpPr>
@@ -2693,11 +2916,11 @@
           <a:bodyPr wrap="square" lIns="0" tIns="0" rIns="0" bIns="0" rtlCol="0" anchor="ctr"/>
           <a:lstStyle/>
           <a:p>
-            <a:pPr marL="0" indent="0">
-              <a:buNone/>
-            </a:pPr>
-            <a:r>
-              <a:rPr lang="en-US" sz="1600" b="1" dirty="0">
+            <a:pPr indent="0" marL="0">
+              <a:buNone/>
+            </a:pPr>
+            <a:r>
+              <a:rPr lang="en-US" sz="1700" b="1" dirty="0">
                 <a:solidFill>
                   <a:srgbClr val="14283C"/>
                 </a:solidFill>
@@ -2707,7 +2930,7 @@
               </a:rPr>
               <a:t>SVC-05 falls, third to fifth</a:t>
             </a:r>
-            <a:endParaRPr lang="en-US" sz="1600" dirty="0"/>
+            <a:endParaRPr lang="en-US" sz="1700" dirty="0"/>
           </a:p>
         </p:txBody>
       </p:sp>
@@ -2732,14 +2955,14 @@
           <a:bodyPr wrap="square" lIns="0" tIns="0" rIns="0" bIns="0" rtlCol="0" anchor="t"/>
           <a:lstStyle/>
           <a:p>
-            <a:pPr marL="0" indent="0">
+            <a:pPr indent="0" marL="0">
               <a:lnSpc>
                 <a:spcPct val="115000"/>
               </a:lnSpc>
               <a:buNone/>
             </a:pPr>
             <a:r>
-              <a:rPr lang="en-US" sz="1400" dirty="0">
+              <a:rPr lang="en-US" sz="1300" dirty="0">
                 <a:solidFill>
                   <a:srgbClr val="2A3F55"/>
                 </a:solidFill>
@@ -2749,7 +2972,7 @@
               </a:rPr>
               <a:t>High incident volume (171/yr) offset by full patch recency and zero unsupported components: noisy, but structurally sound.</a:t>
             </a:r>
-            <a:endParaRPr lang="en-US" sz="1400" dirty="0"/>
+            <a:endParaRPr lang="en-US" sz="1300" dirty="0"/>
           </a:p>
         </p:txBody>
       </p:sp>
@@ -2761,7 +2984,7 @@
         </p:nvSpPr>
         <p:spPr>
           <a:xfrm>
-            <a:off x="685800" y="5850400"/>
+            <a:off x="685800" y="5120640"/>
             <a:ext cx="10789920" cy="713232"/>
           </a:xfrm>
           <a:prstGeom prst="rect">
@@ -2772,13 +2995,6 @@
           </a:solidFill>
           <a:ln/>
         </p:spPr>
-        <p:txBody>
-          <a:bodyPr/>
-          <a:lstStyle/>
-          <a:p>
-            <a:endParaRPr lang="en-CH"/>
-          </a:p>
-        </p:txBody>
       </p:sp>
       <p:sp>
         <p:nvSpPr>
@@ -2788,7 +3004,7 @@
         </p:nvSpPr>
         <p:spPr>
           <a:xfrm>
-            <a:off x="886968" y="5923552"/>
+            <a:off x="886968" y="5193792"/>
             <a:ext cx="10424160" cy="201168"/>
           </a:xfrm>
           <a:prstGeom prst="rect">
@@ -2801,11 +3017,11 @@
           <a:bodyPr wrap="square" lIns="0" tIns="0" rIns="0" bIns="0" rtlCol="0" anchor="ctr"/>
           <a:lstStyle/>
           <a:p>
-            <a:pPr marL="0" indent="0">
-              <a:buNone/>
-            </a:pPr>
-            <a:r>
-              <a:rPr lang="en-US" sz="950" b="1" kern="0" spc="300" dirty="0">
+            <a:pPr indent="0" marL="0">
+              <a:buNone/>
+            </a:pPr>
+            <a:r>
+              <a:rPr lang="en-US" sz="950" b="1" spc="300" kern="0" dirty="0">
                 <a:solidFill>
                   <a:srgbClr val="1E7F82"/>
                 </a:solidFill>
@@ -2827,7 +3043,7 @@
         </p:nvSpPr>
         <p:spPr>
           <a:xfrm>
-            <a:off x="886968" y="6124720"/>
+            <a:off x="886968" y="5394960"/>
             <a:ext cx="10424160" cy="384048"/>
           </a:xfrm>
           <a:prstGeom prst="rect">
@@ -2840,7 +3056,7 @@
           <a:bodyPr wrap="square" lIns="0" tIns="0" rIns="0" bIns="0" rtlCol="0" anchor="t"/>
           <a:lstStyle/>
           <a:p>
-            <a:pPr marL="0" indent="0">
+            <a:pPr indent="0" marL="0">
               <a:buNone/>
             </a:pPr>
             <a:r>
@@ -2852,51 +3068,7 @@
                 <a:ea typeface="Arial" pitchFamily="34" charset="-122"/>
                 <a:cs typeface="Arial" pitchFamily="34" charset="-120"/>
               </a:rPr>
-              <a:t>The divergence is not noise; it concentrates exactly where multi-criteria measurement should add information over a single signal (</a:t>
-            </a:r>
-            <a:r>
-              <a:rPr lang="en-US" sz="1250" dirty="0" err="1">
-                <a:solidFill>
-                  <a:srgbClr val="14283C"/>
-                </a:solidFill>
-                <a:latin typeface="Arial" pitchFamily="34" charset="0"/>
-                <a:ea typeface="Arial" pitchFamily="34" charset="-122"/>
-                <a:cs typeface="Arial" pitchFamily="34" charset="-120"/>
-              </a:rPr>
-              <a:t>Albarak</a:t>
-            </a:r>
-            <a:r>
-              <a:rPr lang="en-US" sz="1250" dirty="0">
-                <a:solidFill>
-                  <a:srgbClr val="14283C"/>
-                </a:solidFill>
-                <a:latin typeface="Arial" pitchFamily="34" charset="0"/>
-                <a:ea typeface="Arial" pitchFamily="34" charset="-122"/>
-                <a:cs typeface="Arial" pitchFamily="34" charset="-120"/>
-              </a:rPr>
-              <a:t> </a:t>
-            </a:r>
-            <a:r>
-              <a:rPr lang="en-US" sz="1250" i="1" dirty="0">
-                <a:solidFill>
-                  <a:srgbClr val="14283C"/>
-                </a:solidFill>
-                <a:latin typeface="Arial" pitchFamily="34" charset="0"/>
-                <a:ea typeface="Arial" pitchFamily="34" charset="-122"/>
-                <a:cs typeface="Arial" pitchFamily="34" charset="-120"/>
-              </a:rPr>
-              <a:t>et al.</a:t>
-            </a:r>
-            <a:r>
-              <a:rPr lang="en-US" sz="1250" dirty="0">
-                <a:solidFill>
-                  <a:srgbClr val="14283C"/>
-                </a:solidFill>
-                <a:latin typeface="Arial" pitchFamily="34" charset="0"/>
-                <a:ea typeface="Arial" pitchFamily="34" charset="-122"/>
-                <a:cs typeface="Arial" pitchFamily="34" charset="-120"/>
-              </a:rPr>
-              <a:t>, 2022).</a:t>
+              <a:t>The divergence is not noise; it concentrates exactly where multi-criteria measurement should add information over a single signal (Albarak &amp; Bahsoon, 2022).</a:t>
             </a:r>
             <a:endParaRPr lang="en-US" sz="1250" dirty="0"/>
           </a:p>
@@ -2918,7 +3090,6 @@
         <a:solidFill>
           <a:srgbClr val="FFFFFF"/>
         </a:solidFill>
-        <a:effectLst/>
       </p:bgPr>
     </p:bg>
     <p:spTree>
@@ -2956,11 +3127,11 @@
           <a:bodyPr wrap="square" lIns="0" tIns="0" rIns="0" bIns="0" rtlCol="0" anchor="ctr"/>
           <a:lstStyle/>
           <a:p>
-            <a:pPr marL="0" indent="0" algn="l">
-              <a:buNone/>
-            </a:pPr>
-            <a:r>
-              <a:rPr lang="en-US" sz="1100" b="1" kern="0" spc="300" dirty="0">
+            <a:pPr algn="l" indent="0" marL="0">
+              <a:buNone/>
+            </a:pPr>
+            <a:r>
+              <a:rPr lang="en-US" sz="1100" b="1" spc="300" kern="0" dirty="0">
                 <a:solidFill>
                   <a:srgbClr val="5C7186"/>
                 </a:solidFill>
@@ -2995,7 +3166,7 @@
           <a:bodyPr wrap="square" lIns="0" tIns="0" rIns="0" bIns="0" rtlCol="0" anchor="ctr"/>
           <a:lstStyle/>
           <a:p>
-            <a:pPr marL="0" indent="0" algn="l">
+            <a:pPr algn="l" indent="0" marL="0">
               <a:buNone/>
             </a:pPr>
             <a:r>
@@ -3034,11 +3205,11 @@
           <a:bodyPr wrap="square" lIns="0" tIns="0" rIns="0" bIns="0" rtlCol="0" anchor="ctr"/>
           <a:lstStyle/>
           <a:p>
-            <a:pPr marL="0" indent="0">
-              <a:buNone/>
-            </a:pPr>
-            <a:r>
-              <a:rPr lang="en-US" sz="1500" dirty="0">
+            <a:pPr indent="0" marL="0">
+              <a:buNone/>
+            </a:pPr>
+            <a:r>
+              <a:rPr lang="en-US" sz="1450" dirty="0">
                 <a:solidFill>
                   <a:srgbClr val="14283C"/>
                 </a:solidFill>
@@ -3048,8 +3219,11 @@
               </a:rPr>
               <a:t>In 2025 all methods agree exactly under equal weights, with SVC-01 first. The one disagreement is the 2024 equal-weights top rank, and it is a </a:t>
             </a:r>
-            <a:r>
-              <a:rPr lang="en-US" sz="1500" b="1" dirty="0">
+            <a:pPr indent="0" marL="0">
+              <a:buNone/>
+            </a:pPr>
+            <a:r>
+              <a:rPr lang="en-US" sz="1450" b="1" dirty="0">
                 <a:solidFill>
                   <a:srgbClr val="D98E1F"/>
                 </a:solidFill>
@@ -3059,7 +3233,7 @@
               </a:rPr>
               <a:t>photo-finish.</a:t>
             </a:r>
-            <a:endParaRPr lang="en-US" sz="1500" dirty="0"/>
+            <a:endParaRPr lang="en-US" sz="1450" dirty="0"/>
           </a:p>
         </p:txBody>
       </p:sp>
@@ -3072,41 +3246,23 @@
           <p:nvPr>
             <p:extLst>
               <p:ext uri="{D42A27DB-BD31-4B8C-83A1-F6EECF244321}">
-                <p14:modId xmlns:p14="http://schemas.microsoft.com/office/powerpoint/2010/main" val="2674304687"/>
+                <p14:modId xmlns:p14="http://schemas.microsoft.com/office/powerpoint/2010/main" val="1579011935"/>
               </p:ext>
             </p:extLst>
           </p:nvPr>
         </p:nvGraphicFramePr>
         <p:xfrm>
           <a:off x="685800" y="2377440"/>
-          <a:ext cx="7589520" cy="2188464"/>
+          <a:ext cx="7589520" cy="914400"/>
         </p:xfrm>
         <a:graphic>
           <a:graphicData uri="http://schemas.openxmlformats.org/drawingml/2006/table">
             <a:tbl>
               <a:tblPr/>
               <a:tblGrid>
-                <a:gridCol w="2286000">
-                  <a:extLst>
-                    <a:ext uri="{9D8B030D-6E8A-4147-A177-3AD203B41FA5}">
-                      <a16:colId xmlns:a16="http://schemas.microsoft.com/office/drawing/2014/main" val="20000"/>
-                    </a:ext>
-                  </a:extLst>
-                </a:gridCol>
-                <a:gridCol w="2651760">
-                  <a:extLst>
-                    <a:ext uri="{9D8B030D-6E8A-4147-A177-3AD203B41FA5}">
-                      <a16:colId xmlns:a16="http://schemas.microsoft.com/office/drawing/2014/main" val="20001"/>
-                    </a:ext>
-                  </a:extLst>
-                </a:gridCol>
-                <a:gridCol w="2651760">
-                  <a:extLst>
-                    <a:ext uri="{9D8B030D-6E8A-4147-A177-3AD203B41FA5}">
-                      <a16:colId xmlns:a16="http://schemas.microsoft.com/office/drawing/2014/main" val="20002"/>
-                    </a:ext>
-                  </a:extLst>
-                </a:gridCol>
+                <a:gridCol w="2286000"/>
+                <a:gridCol w="2651760"/>
+                <a:gridCol w="2651760"/>
               </a:tblGrid>
               <a:tr h="384048">
                 <a:tc>
@@ -3114,11 +3270,11 @@
                     <a:bodyPr/>
                     <a:lstStyle/>
                     <a:p>
-                      <a:pPr marL="0" indent="0">
+                      <a:pPr indent="0" marL="0">
                         <a:buNone/>
                       </a:pPr>
                       <a:r>
-                        <a:rPr lang="en-US" sz="1400" b="1" dirty="0">
+                        <a:rPr lang="en-US" sz="1250" b="1" dirty="0">
                           <a:solidFill>
                             <a:srgbClr val="14283C"/>
                           </a:solidFill>
@@ -3128,14 +3284,14 @@
                         </a:rPr>
                         <a:t>2024, equal weights</a:t>
                       </a:r>
-                      <a:endParaRPr lang="en-US" sz="1400" dirty="0">
+                      <a:endParaRPr lang="en-US" sz="1250" dirty="0">
                         <a:latin typeface="Arial" charset="0"/>
                         <a:ea typeface="Arial" charset="0"/>
                         <a:cs typeface="Arial" charset="0"/>
                       </a:endParaRPr>
                     </a:p>
                   </a:txBody>
-                  <a:tcPr marL="45720" marR="45720" anchor="ctr">
+                  <a:tcPr marL="45720" marR="45720" marT="45720" marB="45720" anchor="ctr">
                     <a:lnL w="0" cap="flat" cmpd="sng" algn="ctr">
                       <a:noFill/>
                     </a:lnL>
@@ -3161,11 +3317,11 @@
                     <a:bodyPr/>
                     <a:lstStyle/>
                     <a:p>
-                      <a:pPr marL="0" indent="0">
+                      <a:pPr indent="0" marL="0">
                         <a:buNone/>
                       </a:pPr>
                       <a:r>
-                        <a:rPr lang="en-US" sz="1400" b="1" dirty="0">
+                        <a:rPr lang="en-US" sz="1250" b="1" dirty="0">
                           <a:solidFill>
                             <a:srgbClr val="14283C"/>
                           </a:solidFill>
@@ -3175,14 +3331,14 @@
                         </a:rPr>
                         <a:t>TOPSIS classic</a:t>
                       </a:r>
-                      <a:endParaRPr lang="en-US" sz="1400" dirty="0">
+                      <a:endParaRPr lang="en-US" sz="1250" dirty="0">
                         <a:latin typeface="Arial" charset="0"/>
                         <a:ea typeface="Arial" charset="0"/>
                         <a:cs typeface="Arial" charset="0"/>
                       </a:endParaRPr>
                     </a:p>
                   </a:txBody>
-                  <a:tcPr marL="45720" marR="45720" anchor="ctr">
+                  <a:tcPr marL="45720" marR="45720" marT="45720" marB="45720" anchor="ctr">
                     <a:lnL w="0" cap="flat" cmpd="sng" algn="ctr">
                       <a:noFill/>
                     </a:lnL>
@@ -3208,11 +3364,11 @@
                     <a:bodyPr/>
                     <a:lstStyle/>
                     <a:p>
-                      <a:pPr marL="0" indent="0">
+                      <a:pPr indent="0" marL="0">
                         <a:buNone/>
                       </a:pPr>
                       <a:r>
-                        <a:rPr lang="en-US" sz="1400" b="1" dirty="0">
+                        <a:rPr lang="en-US" sz="1250" b="1" dirty="0">
                           <a:solidFill>
                             <a:srgbClr val="14283C"/>
                           </a:solidFill>
@@ -3222,14 +3378,14 @@
                         </a:rPr>
                         <a:t>SAW · VIKOR · TOPSIS absolute</a:t>
                       </a:r>
-                      <a:endParaRPr lang="en-US" sz="1400" dirty="0">
+                      <a:endParaRPr lang="en-US" sz="1250" dirty="0">
                         <a:latin typeface="Arial" charset="0"/>
                         <a:ea typeface="Arial" charset="0"/>
                         <a:cs typeface="Arial" charset="0"/>
                       </a:endParaRPr>
                     </a:p>
                   </a:txBody>
-                  <a:tcPr marL="45720" marR="45720" anchor="ctr">
+                  <a:tcPr marL="45720" marR="45720" marT="45720" marB="45720" anchor="ctr">
                     <a:lnL w="0" cap="flat" cmpd="sng" algn="ctr">
                       <a:noFill/>
                     </a:lnL>
@@ -3250,11 +3406,6 @@
                     </a:lnB>
                   </a:tcPr>
                 </a:tc>
-                <a:extLst>
-                  <a:ext uri="{0D108BD9-81ED-4DB2-BD59-A6C34878D82A}">
-                    <a16:rowId xmlns:a16="http://schemas.microsoft.com/office/drawing/2014/main" val="10000"/>
-                  </a:ext>
-                </a:extLst>
               </a:tr>
               <a:tr h="384048">
                 <a:tc>
@@ -3262,11 +3413,11 @@
                     <a:bodyPr/>
                     <a:lstStyle/>
                     <a:p>
-                      <a:pPr marL="0" indent="0">
+                      <a:pPr indent="0" marL="0">
                         <a:buNone/>
                       </a:pPr>
                       <a:r>
-                        <a:rPr lang="en-US" sz="1400" dirty="0">
+                        <a:rPr lang="en-US" sz="1250" dirty="0">
                           <a:solidFill>
                             <a:srgbClr val="14283C"/>
                           </a:solidFill>
@@ -3276,28 +3427,22 @@
                         </a:rPr>
                         <a:t>Top-ranked service</a:t>
                       </a:r>
-                      <a:endParaRPr lang="en-US" sz="1400" dirty="0">
+                      <a:endParaRPr lang="en-US" sz="1250" dirty="0">
                         <a:latin typeface="Arial" charset="0"/>
                         <a:ea typeface="Arial" charset="0"/>
                         <a:cs typeface="Arial" charset="0"/>
                       </a:endParaRPr>
                     </a:p>
                   </a:txBody>
-                  <a:tcPr marL="45720" marR="45720" anchor="ctr">
+                  <a:tcPr marL="45720" marR="45720" marT="45720" marB="45720" anchor="ctr">
                     <a:lnL w="0" cap="flat" cmpd="sng" algn="ctr">
                       <a:noFill/>
                     </a:lnL>
                     <a:lnR w="0" cap="flat" cmpd="sng" algn="ctr">
                       <a:noFill/>
                     </a:lnR>
-                    <a:lnT w="9525" cap="flat" cmpd="sng" algn="ctr">
-                      <a:solidFill>
-                        <a:srgbClr val="D8DFE5"/>
-                      </a:solidFill>
-                      <a:prstDash val="solid"/>
-                      <a:round/>
-                      <a:headEnd type="none" w="med" len="med"/>
-                      <a:tailEnd type="none" w="med" len="med"/>
+                    <a:lnT w="0" cap="flat" cmpd="sng" algn="ctr">
+                      <a:noFill/>
                     </a:lnT>
                     <a:lnB w="9525" cap="flat" cmpd="sng" algn="ctr">
                       <a:solidFill>
@@ -3315,11 +3460,11 @@
                     <a:bodyPr/>
                     <a:lstStyle/>
                     <a:p>
-                      <a:pPr marL="0" indent="0">
+                      <a:pPr indent="0" marL="0">
                         <a:buNone/>
                       </a:pPr>
                       <a:r>
-                        <a:rPr lang="en-US" sz="1400" dirty="0">
+                        <a:rPr lang="en-US" sz="1250" dirty="0">
                           <a:solidFill>
                             <a:srgbClr val="14283C"/>
                           </a:solidFill>
@@ -3327,30 +3472,24 @@
                           <a:ea typeface="Arial" pitchFamily="34" charset="-122"/>
                           <a:cs typeface="Arial" pitchFamily="34" charset="-120"/>
                         </a:rPr>
-                        <a:t>SVC-04 (C* = 0.4847)</a:t>
+                        <a:t>SVC-04 (C* = 0.4858)</a:t>
                       </a:r>
-                      <a:endParaRPr lang="en-US" sz="1400" dirty="0">
+                      <a:endParaRPr lang="en-US" sz="1250" dirty="0">
                         <a:latin typeface="Arial" charset="0"/>
                         <a:ea typeface="Arial" charset="0"/>
                         <a:cs typeface="Arial" charset="0"/>
                       </a:endParaRPr>
                     </a:p>
                   </a:txBody>
-                  <a:tcPr marL="45720" marR="45720" anchor="ctr">
+                  <a:tcPr marL="45720" marR="45720" marT="45720" marB="45720" anchor="ctr">
                     <a:lnL w="0" cap="flat" cmpd="sng" algn="ctr">
                       <a:noFill/>
                     </a:lnL>
                     <a:lnR w="0" cap="flat" cmpd="sng" algn="ctr">
                       <a:noFill/>
                     </a:lnR>
-                    <a:lnT w="9525" cap="flat" cmpd="sng" algn="ctr">
-                      <a:solidFill>
-                        <a:srgbClr val="D8DFE5"/>
-                      </a:solidFill>
-                      <a:prstDash val="solid"/>
-                      <a:round/>
-                      <a:headEnd type="none" w="med" len="med"/>
-                      <a:tailEnd type="none" w="med" len="med"/>
+                    <a:lnT w="0" cap="flat" cmpd="sng" algn="ctr">
+                      <a:noFill/>
                     </a:lnT>
                     <a:lnB w="9525" cap="flat" cmpd="sng" algn="ctr">
                       <a:solidFill>
@@ -3368,11 +3507,11 @@
                     <a:bodyPr/>
                     <a:lstStyle/>
                     <a:p>
-                      <a:pPr marL="0" indent="0">
+                      <a:pPr indent="0" marL="0">
                         <a:buNone/>
                       </a:pPr>
                       <a:r>
-                        <a:rPr lang="en-US" sz="1400" dirty="0">
+                        <a:rPr lang="en-US" sz="1250" dirty="0">
                           <a:solidFill>
                             <a:srgbClr val="14283C"/>
                           </a:solidFill>
@@ -3382,28 +3521,22 @@
                         </a:rPr>
                         <a:t>SVC-01</a:t>
                       </a:r>
-                      <a:endParaRPr lang="en-US" sz="1400" dirty="0">
+                      <a:endParaRPr lang="en-US" sz="1250" dirty="0">
                         <a:latin typeface="Arial" charset="0"/>
                         <a:ea typeface="Arial" charset="0"/>
                         <a:cs typeface="Arial" charset="0"/>
                       </a:endParaRPr>
                     </a:p>
                   </a:txBody>
-                  <a:tcPr marL="45720" marR="45720" anchor="ctr">
+                  <a:tcPr marL="45720" marR="45720" marT="45720" marB="45720" anchor="ctr">
                     <a:lnL w="0" cap="flat" cmpd="sng" algn="ctr">
                       <a:noFill/>
                     </a:lnL>
                     <a:lnR w="0" cap="flat" cmpd="sng" algn="ctr">
                       <a:noFill/>
                     </a:lnR>
-                    <a:lnT w="9525" cap="flat" cmpd="sng" algn="ctr">
-                      <a:solidFill>
-                        <a:srgbClr val="D8DFE5"/>
-                      </a:solidFill>
-                      <a:prstDash val="solid"/>
-                      <a:round/>
-                      <a:headEnd type="none" w="med" len="med"/>
-                      <a:tailEnd type="none" w="med" len="med"/>
+                    <a:lnT w="0" cap="flat" cmpd="sng" algn="ctr">
+                      <a:noFill/>
                     </a:lnT>
                     <a:lnB w="9525" cap="flat" cmpd="sng" algn="ctr">
                       <a:solidFill>
@@ -3416,11 +3549,6 @@
                     </a:lnB>
                   </a:tcPr>
                 </a:tc>
-                <a:extLst>
-                  <a:ext uri="{0D108BD9-81ED-4DB2-BD59-A6C34878D82A}">
-                    <a16:rowId xmlns:a16="http://schemas.microsoft.com/office/drawing/2014/main" val="10001"/>
-                  </a:ext>
-                </a:extLst>
               </a:tr>
               <a:tr h="384048">
                 <a:tc>
@@ -3428,11 +3556,11 @@
                     <a:bodyPr/>
                     <a:lstStyle/>
                     <a:p>
-                      <a:pPr marL="0" indent="0">
+                      <a:pPr indent="0" marL="0">
                         <a:buNone/>
                       </a:pPr>
                       <a:r>
-                        <a:rPr lang="en-US" sz="1400" dirty="0">
+                        <a:rPr lang="en-US" sz="1250" dirty="0">
                           <a:solidFill>
                             <a:srgbClr val="14283C"/>
                           </a:solidFill>
@@ -3442,28 +3570,22 @@
                         </a:rPr>
                         <a:t>Margin</a:t>
                       </a:r>
-                      <a:endParaRPr lang="en-US" sz="1400" dirty="0">
+                      <a:endParaRPr lang="en-US" sz="1250" dirty="0">
                         <a:latin typeface="Arial" charset="0"/>
                         <a:ea typeface="Arial" charset="0"/>
                         <a:cs typeface="Arial" charset="0"/>
                       </a:endParaRPr>
                     </a:p>
                   </a:txBody>
-                  <a:tcPr marL="45720" marR="45720" anchor="ctr">
+                  <a:tcPr marL="45720" marR="45720" marT="45720" marB="45720" anchor="ctr">
                     <a:lnL w="0" cap="flat" cmpd="sng" algn="ctr">
                       <a:noFill/>
                     </a:lnL>
                     <a:lnR w="0" cap="flat" cmpd="sng" algn="ctr">
                       <a:noFill/>
                     </a:lnR>
-                    <a:lnT w="9525" cap="flat" cmpd="sng" algn="ctr">
-                      <a:solidFill>
-                        <a:srgbClr val="D8DFE5"/>
-                      </a:solidFill>
-                      <a:prstDash val="solid"/>
-                      <a:round/>
-                      <a:headEnd type="none" w="med" len="med"/>
-                      <a:tailEnd type="none" w="med" len="med"/>
+                    <a:lnT w="0" cap="flat" cmpd="sng" algn="ctr">
+                      <a:noFill/>
                     </a:lnT>
                     <a:lnB w="9525" cap="flat" cmpd="sng" algn="ctr">
                       <a:solidFill>
@@ -3481,11 +3603,11 @@
                     <a:bodyPr/>
                     <a:lstStyle/>
                     <a:p>
-                      <a:pPr marL="0" indent="0">
+                      <a:pPr indent="0" marL="0">
                         <a:buNone/>
                       </a:pPr>
                       <a:r>
-                        <a:rPr lang="en-US" sz="1400" dirty="0">
+                        <a:rPr lang="en-US" sz="1250" dirty="0">
                           <a:solidFill>
                             <a:srgbClr val="14283C"/>
                           </a:solidFill>
@@ -3493,30 +3615,24 @@
                           <a:ea typeface="Arial" pitchFamily="34" charset="-122"/>
                           <a:cs typeface="Arial" pitchFamily="34" charset="-120"/>
                         </a:rPr>
-                        <a:t>ΔC* = 0.004 to SVC-01 (0.4886)</a:t>
+                        <a:t>ΔC* = 0.0018 to SVC-01 (0.4876)</a:t>
                       </a:r>
-                      <a:endParaRPr lang="en-US" sz="1400" dirty="0">
+                      <a:endParaRPr lang="en-US" sz="1250" dirty="0">
                         <a:latin typeface="Arial" charset="0"/>
                         <a:ea typeface="Arial" charset="0"/>
                         <a:cs typeface="Arial" charset="0"/>
                       </a:endParaRPr>
                     </a:p>
                   </a:txBody>
-                  <a:tcPr marL="45720" marR="45720" anchor="ctr">
+                  <a:tcPr marL="45720" marR="45720" marT="45720" marB="45720" anchor="ctr">
                     <a:lnL w="0" cap="flat" cmpd="sng" algn="ctr">
                       <a:noFill/>
                     </a:lnL>
                     <a:lnR w="0" cap="flat" cmpd="sng" algn="ctr">
                       <a:noFill/>
                     </a:lnR>
-                    <a:lnT w="9525" cap="flat" cmpd="sng" algn="ctr">
-                      <a:solidFill>
-                        <a:srgbClr val="D8DFE5"/>
-                      </a:solidFill>
-                      <a:prstDash val="solid"/>
-                      <a:round/>
-                      <a:headEnd type="none" w="med" len="med"/>
-                      <a:tailEnd type="none" w="med" len="med"/>
+                    <a:lnT w="0" cap="flat" cmpd="sng" algn="ctr">
+                      <a:noFill/>
                     </a:lnT>
                     <a:lnB w="9525" cap="flat" cmpd="sng" algn="ctr">
                       <a:solidFill>
@@ -3534,11 +3650,11 @@
                     <a:bodyPr/>
                     <a:lstStyle/>
                     <a:p>
-                      <a:pPr marL="0" indent="0">
+                      <a:pPr indent="0" marL="0">
                         <a:buNone/>
                       </a:pPr>
                       <a:r>
-                        <a:rPr lang="en-US" sz="1400" dirty="0">
+                        <a:rPr lang="en-US" sz="1250" dirty="0">
                           <a:solidFill>
                             <a:srgbClr val="14283C"/>
                           </a:solidFill>
@@ -3548,28 +3664,22 @@
                         </a:rPr>
                         <a:t>Each worst on exactly 2 criteria</a:t>
                       </a:r>
-                      <a:endParaRPr lang="en-US" sz="1400" dirty="0">
+                      <a:endParaRPr lang="en-US" sz="1250" dirty="0">
                         <a:latin typeface="Arial" charset="0"/>
                         <a:ea typeface="Arial" charset="0"/>
                         <a:cs typeface="Arial" charset="0"/>
                       </a:endParaRPr>
                     </a:p>
                   </a:txBody>
-                  <a:tcPr marL="45720" marR="45720" anchor="ctr">
+                  <a:tcPr marL="45720" marR="45720" marT="45720" marB="45720" anchor="ctr">
                     <a:lnL w="0" cap="flat" cmpd="sng" algn="ctr">
                       <a:noFill/>
                     </a:lnL>
                     <a:lnR w="0" cap="flat" cmpd="sng" algn="ctr">
                       <a:noFill/>
                     </a:lnR>
-                    <a:lnT w="9525" cap="flat" cmpd="sng" algn="ctr">
-                      <a:solidFill>
-                        <a:srgbClr val="D8DFE5"/>
-                      </a:solidFill>
-                      <a:prstDash val="solid"/>
-                      <a:round/>
-                      <a:headEnd type="none" w="med" len="med"/>
-                      <a:tailEnd type="none" w="med" len="med"/>
+                    <a:lnT w="0" cap="flat" cmpd="sng" algn="ctr">
+                      <a:noFill/>
                     </a:lnT>
                     <a:lnB w="9525" cap="flat" cmpd="sng" algn="ctr">
                       <a:solidFill>
@@ -3582,11 +3692,6 @@
                     </a:lnB>
                   </a:tcPr>
                 </a:tc>
-                <a:extLst>
-                  <a:ext uri="{0D108BD9-81ED-4DB2-BD59-A6C34878D82A}">
-                    <a16:rowId xmlns:a16="http://schemas.microsoft.com/office/drawing/2014/main" val="10002"/>
-                  </a:ext>
-                </a:extLst>
               </a:tr>
               <a:tr h="384048">
                 <a:tc>
@@ -3594,11 +3699,11 @@
                     <a:bodyPr/>
                     <a:lstStyle/>
                     <a:p>
-                      <a:pPr marL="0" indent="0">
+                      <a:pPr indent="0" marL="0">
                         <a:buNone/>
                       </a:pPr>
                       <a:r>
-                        <a:rPr lang="en-US" sz="1400" dirty="0">
+                        <a:rPr lang="en-US" sz="1250" dirty="0">
                           <a:solidFill>
                             <a:srgbClr val="14283C"/>
                           </a:solidFill>
@@ -3608,28 +3713,22 @@
                         </a:rPr>
                         <a:t>Agreement</a:t>
                       </a:r>
-                      <a:endParaRPr lang="en-US" sz="1400" dirty="0">
+                      <a:endParaRPr lang="en-US" sz="1250" dirty="0">
                         <a:latin typeface="Arial" charset="0"/>
                         <a:ea typeface="Arial" charset="0"/>
                         <a:cs typeface="Arial" charset="0"/>
                       </a:endParaRPr>
                     </a:p>
                   </a:txBody>
-                  <a:tcPr marL="45720" marR="45720" anchor="ctr">
+                  <a:tcPr marL="45720" marR="45720" marT="45720" marB="45720" anchor="ctr">
                     <a:lnL w="0" cap="flat" cmpd="sng" algn="ctr">
                       <a:noFill/>
                     </a:lnL>
                     <a:lnR w="0" cap="flat" cmpd="sng" algn="ctr">
                       <a:noFill/>
                     </a:lnR>
-                    <a:lnT w="9525" cap="flat" cmpd="sng" algn="ctr">
-                      <a:solidFill>
-                        <a:srgbClr val="D8DFE5"/>
-                      </a:solidFill>
-                      <a:prstDash val="solid"/>
-                      <a:round/>
-                      <a:headEnd type="none" w="med" len="med"/>
-                      <a:tailEnd type="none" w="med" len="med"/>
+                    <a:lnT w="0" cap="flat" cmpd="sng" algn="ctr">
+                      <a:noFill/>
                     </a:lnT>
                     <a:lnB w="9525" cap="flat" cmpd="sng" algn="ctr">
                       <a:solidFill>
@@ -3647,11 +3746,11 @@
                     <a:bodyPr/>
                     <a:lstStyle/>
                     <a:p>
-                      <a:pPr marL="0" indent="0">
+                      <a:pPr indent="0" marL="0">
                         <a:buNone/>
                       </a:pPr>
                       <a:r>
-                        <a:rPr lang="en-US" sz="1400" dirty="0">
+                        <a:rPr lang="en-US" sz="1250" dirty="0">
                           <a:solidFill>
                             <a:srgbClr val="14283C"/>
                           </a:solidFill>
@@ -3659,30 +3758,24 @@
                           <a:ea typeface="Arial" pitchFamily="34" charset="-122"/>
                           <a:cs typeface="Arial" pitchFamily="34" charset="-120"/>
                         </a:rPr>
-                        <a:t>vs SAW τ = 0.600</a:t>
+                        <a:t>vs SAW τ = 0.733</a:t>
                       </a:r>
-                      <a:endParaRPr lang="en-US" sz="1400" dirty="0">
+                      <a:endParaRPr lang="en-US" sz="1250" dirty="0">
                         <a:latin typeface="Arial" charset="0"/>
                         <a:ea typeface="Arial" charset="0"/>
                         <a:cs typeface="Arial" charset="0"/>
                       </a:endParaRPr>
                     </a:p>
                   </a:txBody>
-                  <a:tcPr marL="45720" marR="45720" anchor="ctr">
+                  <a:tcPr marL="45720" marR="45720" marT="45720" marB="45720" anchor="ctr">
                     <a:lnL w="0" cap="flat" cmpd="sng" algn="ctr">
                       <a:noFill/>
                     </a:lnL>
                     <a:lnR w="0" cap="flat" cmpd="sng" algn="ctr">
                       <a:noFill/>
                     </a:lnR>
-                    <a:lnT w="9525" cap="flat" cmpd="sng" algn="ctr">
-                      <a:solidFill>
-                        <a:srgbClr val="D8DFE5"/>
-                      </a:solidFill>
-                      <a:prstDash val="solid"/>
-                      <a:round/>
-                      <a:headEnd type="none" w="med" len="med"/>
-                      <a:tailEnd type="none" w="med" len="med"/>
+                    <a:lnT w="0" cap="flat" cmpd="sng" algn="ctr">
+                      <a:noFill/>
                     </a:lnT>
                     <a:lnB w="9525" cap="flat" cmpd="sng" algn="ctr">
                       <a:solidFill>
@@ -3700,11 +3793,11 @@
                     <a:bodyPr/>
                     <a:lstStyle/>
                     <a:p>
-                      <a:pPr marL="0" indent="0">
+                      <a:pPr indent="0" marL="0">
                         <a:buNone/>
                       </a:pPr>
                       <a:r>
-                        <a:rPr lang="en-US" sz="1400" dirty="0">
+                        <a:rPr lang="en-US" sz="1250" dirty="0">
                           <a:solidFill>
                             <a:srgbClr val="14283C"/>
                           </a:solidFill>
@@ -3714,28 +3807,22 @@
                         </a:rPr>
                         <a:t>absolute vs VIKOR τ = 1.000</a:t>
                       </a:r>
-                      <a:endParaRPr lang="en-US" sz="1400" dirty="0">
+                      <a:endParaRPr lang="en-US" sz="1250" dirty="0">
                         <a:latin typeface="Arial" charset="0"/>
                         <a:ea typeface="Arial" charset="0"/>
                         <a:cs typeface="Arial" charset="0"/>
                       </a:endParaRPr>
                     </a:p>
                   </a:txBody>
-                  <a:tcPr marL="45720" marR="45720" anchor="ctr">
+                  <a:tcPr marL="45720" marR="45720" marT="45720" marB="45720" anchor="ctr">
                     <a:lnL w="0" cap="flat" cmpd="sng" algn="ctr">
                       <a:noFill/>
                     </a:lnL>
                     <a:lnR w="0" cap="flat" cmpd="sng" algn="ctr">
                       <a:noFill/>
                     </a:lnR>
-                    <a:lnT w="9525" cap="flat" cmpd="sng" algn="ctr">
-                      <a:solidFill>
-                        <a:srgbClr val="D8DFE5"/>
-                      </a:solidFill>
-                      <a:prstDash val="solid"/>
-                      <a:round/>
-                      <a:headEnd type="none" w="med" len="med"/>
-                      <a:tailEnd type="none" w="med" len="med"/>
+                    <a:lnT w="0" cap="flat" cmpd="sng" algn="ctr">
+                      <a:noFill/>
                     </a:lnT>
                     <a:lnB w="9525" cap="flat" cmpd="sng" algn="ctr">
                       <a:solidFill>
@@ -3748,11 +3835,6 @@
                     </a:lnB>
                   </a:tcPr>
                 </a:tc>
-                <a:extLst>
-                  <a:ext uri="{0D108BD9-81ED-4DB2-BD59-A6C34878D82A}">
-                    <a16:rowId xmlns:a16="http://schemas.microsoft.com/office/drawing/2014/main" val="10003"/>
-                  </a:ext>
-                </a:extLst>
               </a:tr>
               <a:tr h="384048">
                 <a:tc>
@@ -3760,11 +3842,11 @@
                     <a:bodyPr/>
                     <a:lstStyle/>
                     <a:p>
-                      <a:pPr marL="0" indent="0">
+                      <a:pPr indent="0" marL="0">
                         <a:buNone/>
                       </a:pPr>
                       <a:r>
-                        <a:rPr lang="en-US" sz="1400" dirty="0">
+                        <a:rPr lang="en-US" sz="1250" dirty="0">
                           <a:solidFill>
                             <a:srgbClr val="14283C"/>
                           </a:solidFill>
@@ -3774,28 +3856,22 @@
                         </a:rPr>
                         <a:t>2025 and 2024 adjusted</a:t>
                       </a:r>
-                      <a:endParaRPr lang="en-US" sz="1400" dirty="0">
+                      <a:endParaRPr lang="en-US" sz="1250" dirty="0">
                         <a:latin typeface="Arial" charset="0"/>
                         <a:ea typeface="Arial" charset="0"/>
                         <a:cs typeface="Arial" charset="0"/>
                       </a:endParaRPr>
                     </a:p>
                   </a:txBody>
-                  <a:tcPr marL="45720" marR="45720" anchor="ctr">
+                  <a:tcPr marL="45720" marR="45720" marT="45720" marB="45720" anchor="ctr">
                     <a:lnL w="0" cap="flat" cmpd="sng" algn="ctr">
                       <a:noFill/>
                     </a:lnL>
                     <a:lnR w="0" cap="flat" cmpd="sng" algn="ctr">
                       <a:noFill/>
                     </a:lnR>
-                    <a:lnT w="9525" cap="flat" cmpd="sng" algn="ctr">
-                      <a:solidFill>
-                        <a:srgbClr val="D8DFE5"/>
-                      </a:solidFill>
-                      <a:prstDash val="solid"/>
-                      <a:round/>
-                      <a:headEnd type="none" w="med" len="med"/>
-                      <a:tailEnd type="none" w="med" len="med"/>
+                    <a:lnT w="0" cap="flat" cmpd="sng" algn="ctr">
+                      <a:noFill/>
                     </a:lnT>
                     <a:lnB w="9525" cap="flat" cmpd="sng" algn="ctr">
                       <a:solidFill>
@@ -3813,11 +3889,11 @@
                     <a:bodyPr/>
                     <a:lstStyle/>
                     <a:p>
-                      <a:pPr marL="0" indent="0">
+                      <a:pPr indent="0" marL="0">
                         <a:buNone/>
                       </a:pPr>
                       <a:r>
-                        <a:rPr lang="en-US" sz="1400" dirty="0">
+                        <a:rPr lang="en-US" sz="1250" dirty="0">
                           <a:solidFill>
                             <a:srgbClr val="14283C"/>
                           </a:solidFill>
@@ -3827,28 +3903,22 @@
                         </a:rPr>
                         <a:t>SVC-01 first under every method</a:t>
                       </a:r>
-                      <a:endParaRPr lang="en-US" sz="1400" dirty="0">
+                      <a:endParaRPr lang="en-US" sz="1250" dirty="0">
                         <a:latin typeface="Arial" charset="0"/>
                         <a:ea typeface="Arial" charset="0"/>
                         <a:cs typeface="Arial" charset="0"/>
                       </a:endParaRPr>
                     </a:p>
                   </a:txBody>
-                  <a:tcPr marL="45720" marR="45720" anchor="ctr">
+                  <a:tcPr marL="45720" marR="45720" marT="45720" marB="45720" anchor="ctr">
                     <a:lnL w="0" cap="flat" cmpd="sng" algn="ctr">
                       <a:noFill/>
                     </a:lnL>
                     <a:lnR w="0" cap="flat" cmpd="sng" algn="ctr">
                       <a:noFill/>
                     </a:lnR>
-                    <a:lnT w="9525" cap="flat" cmpd="sng" algn="ctr">
-                      <a:solidFill>
-                        <a:srgbClr val="D8DFE5"/>
-                      </a:solidFill>
-                      <a:prstDash val="solid"/>
-                      <a:round/>
-                      <a:headEnd type="none" w="med" len="med"/>
-                      <a:tailEnd type="none" w="med" len="med"/>
+                    <a:lnT w="0" cap="flat" cmpd="sng" algn="ctr">
+                      <a:noFill/>
                     </a:lnT>
                     <a:lnB w="9525" cap="flat" cmpd="sng" algn="ctr">
                       <a:solidFill>
@@ -3866,31 +3936,25 @@
                     <a:bodyPr/>
                     <a:lstStyle/>
                     <a:p>
-                      <a:pPr marL="0" indent="0">
+                      <a:pPr indent="0" marL="0">
                         <a:buNone/>
                       </a:pPr>
-                      <a:endParaRPr lang="en-US" sz="1400" dirty="0">
+                      <a:endParaRPr lang="en-US" sz="1250" dirty="0">
                         <a:latin typeface="Arial" charset="0"/>
                         <a:ea typeface="Arial" charset="0"/>
                         <a:cs typeface="Arial" charset="0"/>
                       </a:endParaRPr>
                     </a:p>
                   </a:txBody>
-                  <a:tcPr marL="45720" marR="45720" anchor="ctr">
+                  <a:tcPr marL="45720" marR="45720" marT="45720" marB="45720" anchor="ctr">
                     <a:lnL w="0" cap="flat" cmpd="sng" algn="ctr">
                       <a:noFill/>
                     </a:lnL>
                     <a:lnR w="0" cap="flat" cmpd="sng" algn="ctr">
                       <a:noFill/>
                     </a:lnR>
-                    <a:lnT w="9525" cap="flat" cmpd="sng" algn="ctr">
-                      <a:solidFill>
-                        <a:srgbClr val="D8DFE5"/>
-                      </a:solidFill>
-                      <a:prstDash val="solid"/>
-                      <a:round/>
-                      <a:headEnd type="none" w="med" len="med"/>
-                      <a:tailEnd type="none" w="med" len="med"/>
+                    <a:lnT w="0" cap="flat" cmpd="sng" algn="ctr">
+                      <a:noFill/>
                     </a:lnT>
                     <a:lnB w="9525" cap="flat" cmpd="sng" algn="ctr">
                       <a:solidFill>
@@ -3903,11 +3967,6 @@
                     </a:lnB>
                   </a:tcPr>
                 </a:tc>
-                <a:extLst>
-                  <a:ext uri="{0D108BD9-81ED-4DB2-BD59-A6C34878D82A}">
-                    <a16:rowId xmlns:a16="http://schemas.microsoft.com/office/drawing/2014/main" val="10004"/>
-                  </a:ext>
-                </a:extLst>
               </a:tr>
             </a:tbl>
           </a:graphicData>
@@ -3921,8 +3980,8 @@
         </p:nvSpPr>
         <p:spPr>
           <a:xfrm>
-            <a:off x="8549640" y="2377439"/>
-            <a:ext cx="2926080" cy="2458329"/>
+            <a:off x="8549640" y="2377440"/>
+            <a:ext cx="2926080" cy="2377440"/>
           </a:xfrm>
           <a:prstGeom prst="rect">
             <a:avLst/>
@@ -3932,13 +3991,6 @@
           </a:solidFill>
           <a:ln/>
         </p:spPr>
-        <p:txBody>
-          <a:bodyPr/>
-          <a:lstStyle/>
-          <a:p>
-            <a:endParaRPr lang="en-CH"/>
-          </a:p>
-        </p:txBody>
       </p:sp>
       <p:sp>
         <p:nvSpPr>
@@ -3961,11 +4013,11 @@
           <a:bodyPr wrap="square" lIns="0" tIns="0" rIns="0" bIns="0" rtlCol="0" anchor="ctr"/>
           <a:lstStyle/>
           <a:p>
-            <a:pPr marL="0" indent="0">
-              <a:buNone/>
-            </a:pPr>
-            <a:r>
-              <a:rPr lang="en-US" sz="1400" b="1" kern="0" spc="200" dirty="0">
+            <a:pPr indent="0" marL="0">
+              <a:buNone/>
+            </a:pPr>
+            <a:r>
+              <a:rPr lang="en-US" sz="1000" b="1" spc="200" kern="0" dirty="0">
                 <a:solidFill>
                   <a:srgbClr val="D98E1F"/>
                 </a:solidFill>
@@ -3975,7 +4027,7 @@
               </a:rPr>
               <a:t>MECHANISM</a:t>
             </a:r>
-            <a:endParaRPr lang="en-US" sz="1400" dirty="0"/>
+            <a:endParaRPr lang="en-US" sz="1000" dirty="0"/>
           </a:p>
         </p:txBody>
       </p:sp>
@@ -4000,14 +4052,14 @@
           <a:bodyPr wrap="square" lIns="0" tIns="0" rIns="0" bIns="0" rtlCol="0" anchor="t"/>
           <a:lstStyle/>
           <a:p>
-            <a:pPr marL="0" indent="0">
+            <a:pPr indent="0" marL="0">
               <a:lnSpc>
                 <a:spcPct val="112000"/>
               </a:lnSpc>
               <a:buNone/>
             </a:pPr>
             <a:r>
-              <a:rPr lang="en-US" sz="1400" dirty="0">
+              <a:rPr lang="en-US" sz="1050" dirty="0">
                 <a:solidFill>
                   <a:srgbClr val="2A3F55"/>
                 </a:solidFill>
@@ -4017,7 +4069,7 @@
               </a:rPr>
               <a:t>Both are worst on exactly two criteria. SVC-04 is perfect on the other two; SVC-01 is only good. Linear aggregation puts SVC-01 first; vector normalisation, preserving SVC-04’s outlying 410 incidents, reverses the pair by 0.004.</a:t>
             </a:r>
-            <a:endParaRPr lang="en-US" sz="1400" dirty="0"/>
+            <a:endParaRPr lang="en-US" sz="1050" dirty="0"/>
           </a:p>
         </p:txBody>
       </p:sp>
@@ -4029,7 +4081,7 @@
         </p:nvSpPr>
         <p:spPr>
           <a:xfrm>
-            <a:off x="685800" y="5822267"/>
+            <a:off x="685800" y="5074920"/>
             <a:ext cx="10789920" cy="713232"/>
           </a:xfrm>
           <a:prstGeom prst="rect">
@@ -4040,13 +4092,6 @@
           </a:solidFill>
           <a:ln/>
         </p:spPr>
-        <p:txBody>
-          <a:bodyPr/>
-          <a:lstStyle/>
-          <a:p>
-            <a:endParaRPr lang="en-CH"/>
-          </a:p>
-        </p:txBody>
       </p:sp>
       <p:sp>
         <p:nvSpPr>
@@ -4056,7 +4101,7 @@
         </p:nvSpPr>
         <p:spPr>
           <a:xfrm>
-            <a:off x="886968" y="5895419"/>
+            <a:off x="886968" y="5148072"/>
             <a:ext cx="10424160" cy="201168"/>
           </a:xfrm>
           <a:prstGeom prst="rect">
@@ -4069,11 +4114,11 @@
           <a:bodyPr wrap="square" lIns="0" tIns="0" rIns="0" bIns="0" rtlCol="0" anchor="ctr"/>
           <a:lstStyle/>
           <a:p>
-            <a:pPr marL="0" indent="0">
-              <a:buNone/>
-            </a:pPr>
-            <a:r>
-              <a:rPr lang="en-US" sz="950" b="1" kern="0" spc="300" dirty="0">
+            <a:pPr indent="0" marL="0">
+              <a:buNone/>
+            </a:pPr>
+            <a:r>
+              <a:rPr lang="en-US" sz="950" b="1" spc="300" kern="0" dirty="0">
                 <a:solidFill>
                   <a:srgbClr val="1E7F82"/>
                 </a:solidFill>
@@ -4095,7 +4140,7 @@
         </p:nvSpPr>
         <p:spPr>
           <a:xfrm>
-            <a:off x="886968" y="6096587"/>
+            <a:off x="886968" y="5349240"/>
             <a:ext cx="10424160" cy="384048"/>
           </a:xfrm>
           <a:prstGeom prst="rect">
@@ -4108,7 +4153,7 @@
           <a:bodyPr wrap="square" lIns="0" tIns="0" rIns="0" bIns="0" rtlCol="0" anchor="t"/>
           <a:lstStyle/>
           <a:p>
-            <a:pPr marL="0" indent="0">
+            <a:pPr indent="0" marL="0">
               <a:buNone/>
             </a:pPr>
             <a:r>
@@ -4120,7 +4165,7 @@
                 <a:ea typeface="Arial" pitchFamily="34" charset="-122"/>
                 <a:cs typeface="Arial" pitchFamily="34" charset="-120"/>
               </a:rPr>
-              <a:t>A 0.004 margin decided by normalisation, not by a real gap. Three of four scorers say SVC-01. The framework reports the photo-finish rather than hiding it; by 2025 every method agrees.</a:t>
+              <a:t>A 0.0018 margin decided by normalisation, not by a real gap. Three of four scorers say SVC-01. The framework reports the photo-finish rather than hiding it; by 2025 every method agrees.</a:t>
             </a:r>
             <a:endParaRPr lang="en-US" sz="1250" dirty="0"/>
           </a:p>
@@ -4142,7 +4187,6 @@
         <a:solidFill>
           <a:srgbClr val="FFFFFF"/>
         </a:solidFill>
-        <a:effectLst/>
       </p:bgPr>
     </p:bg>
     <p:spTree>
@@ -4180,11 +4224,11 @@
           <a:bodyPr wrap="square" lIns="0" tIns="0" rIns="0" bIns="0" rtlCol="0" anchor="ctr"/>
           <a:lstStyle/>
           <a:p>
-            <a:pPr marL="0" indent="0" algn="l">
-              <a:buNone/>
-            </a:pPr>
-            <a:r>
-              <a:rPr lang="en-US" sz="1100" b="1" kern="0" spc="300" dirty="0">
+            <a:pPr algn="l" indent="0" marL="0">
+              <a:buNone/>
+            </a:pPr>
+            <a:r>
+              <a:rPr lang="en-US" sz="1100" b="1" spc="300" kern="0" dirty="0">
                 <a:solidFill>
                   <a:srgbClr val="5C7186"/>
                 </a:solidFill>
@@ -4219,7 +4263,7 @@
           <a:bodyPr wrap="square" lIns="0" tIns="0" rIns="0" bIns="0" rtlCol="0" anchor="ctr"/>
           <a:lstStyle/>
           <a:p>
-            <a:pPr marL="0" indent="0" algn="l">
+            <a:pPr algn="l" indent="0" marL="0">
               <a:buNone/>
             </a:pPr>
             <a:r>
@@ -4258,7 +4302,7 @@
           <a:bodyPr wrap="square" lIns="0" tIns="0" rIns="0" bIns="0" rtlCol="0" anchor="ctr"/>
           <a:lstStyle/>
           <a:p>
-            <a:pPr marL="0" indent="0">
+            <a:pPr indent="0" marL="0">
               <a:buNone/>
             </a:pPr>
             <a:r>
@@ -4308,7 +4352,7 @@
               <a:buChar char="•"/>
             </a:pPr>
             <a:r>
-              <a:rPr lang="en-US" sz="1500" dirty="0">
+              <a:rPr lang="en-US" sz="1350" dirty="0">
                 <a:solidFill>
                   <a:srgbClr val="14283C"/>
                 </a:solidFill>
@@ -4318,7 +4362,7 @@
               </a:rPr>
               <a:t>Primary prioritisation signal</a:t>
             </a:r>
-            <a:endParaRPr lang="en-US" sz="1500" dirty="0"/>
+            <a:endParaRPr lang="en-US" sz="1350" dirty="0"/>
           </a:p>
           <a:p>
             <a:pPr marL="177800" indent="-177800">
@@ -4332,7 +4376,7 @@
               <a:buChar char="•"/>
             </a:pPr>
             <a:r>
-              <a:rPr lang="en-US" sz="1500" dirty="0">
+              <a:rPr lang="en-US" sz="1350" dirty="0">
                 <a:solidFill>
                   <a:srgbClr val="14283C"/>
                 </a:solidFill>
@@ -4340,9 +4384,9 @@
                 <a:ea typeface="Arial" pitchFamily="34" charset="-122"/>
                 <a:cs typeface="Arial" pitchFamily="34" charset="-120"/>
               </a:rPr>
-              <a:t>Triangulation, not a single number: where scorers split by 0.004, the margin is too small to carry a remediation decision</a:t>
-            </a:r>
-            <a:endParaRPr lang="en-US" sz="1500" dirty="0"/>
+              <a:t>Triangulation, not a single number: where scorers split by 0.0018, the margin is too small to carry a remediation decision</a:t>
+            </a:r>
+            <a:endParaRPr lang="en-US" sz="1350" dirty="0"/>
           </a:p>
         </p:txBody>
       </p:sp>
@@ -4367,7 +4411,7 @@
           <a:bodyPr wrap="square" lIns="0" tIns="0" rIns="0" bIns="0" rtlCol="0" anchor="ctr"/>
           <a:lstStyle/>
           <a:p>
-            <a:pPr marL="0" indent="0">
+            <a:pPr indent="0" marL="0">
               <a:buNone/>
             </a:pPr>
             <a:r>
@@ -4417,7 +4461,7 @@
               <a:buChar char="•"/>
             </a:pPr>
             <a:r>
-              <a:rPr lang="en-US" sz="1500" dirty="0">
+              <a:rPr lang="en-US" sz="1350" dirty="0">
                 <a:solidFill>
                   <a:srgbClr val="14283C"/>
                 </a:solidFill>
@@ -4427,7 +4471,7 @@
               </a:rPr>
               <a:t>Rank-reversal free by construction: every leave-one-out removal preserved, where the classic top rank flips (García-Cascales &amp; Lamata 2012; Yang 2020)</a:t>
             </a:r>
-            <a:endParaRPr lang="en-US" sz="1500" dirty="0"/>
+            <a:endParaRPr lang="en-US" sz="1350" dirty="0"/>
           </a:p>
           <a:p>
             <a:pPr marL="177800" indent="-177800">
@@ -4441,7 +4485,7 @@
               <a:buChar char="•"/>
             </a:pPr>
             <a:r>
-              <a:rPr lang="en-US" sz="1500" dirty="0">
+              <a:rPr lang="en-US" sz="1350" dirty="0">
                 <a:solidFill>
                   <a:srgbClr val="14283C"/>
                 </a:solidFill>
@@ -4451,7 +4495,7 @@
               </a:rPr>
               <a:t>Scores comparable across observation periods, uniquely among the methods used</a:t>
             </a:r>
-            <a:endParaRPr lang="en-US" sz="1500" dirty="0"/>
+            <a:endParaRPr lang="en-US" sz="1350" dirty="0"/>
           </a:p>
           <a:p>
             <a:pPr marL="177800" indent="-177800">
@@ -4465,7 +4509,7 @@
               <a:buChar char="•"/>
             </a:pPr>
             <a:r>
-              <a:rPr lang="en-US" sz="1500" dirty="0">
+              <a:rPr lang="en-US" sz="1350" dirty="0">
                 <a:solidFill>
                   <a:srgbClr val="14283C"/>
                 </a:solidFill>
@@ -4475,7 +4519,7 @@
               </a:rPr>
               <a:t>Complementary perspective; also powers the Monte Carlo cleanly</a:t>
             </a:r>
-            <a:endParaRPr lang="en-US" sz="1500" dirty="0"/>
+            <a:endParaRPr lang="en-US" sz="1350" dirty="0"/>
           </a:p>
         </p:txBody>
       </p:sp>
@@ -4487,7 +4531,7 @@
         </p:nvSpPr>
         <p:spPr>
           <a:xfrm>
-            <a:off x="685800" y="5822265"/>
+            <a:off x="685800" y="5532120"/>
             <a:ext cx="10789920" cy="713232"/>
           </a:xfrm>
           <a:prstGeom prst="rect">
@@ -4498,13 +4542,6 @@
           </a:solidFill>
           <a:ln/>
         </p:spPr>
-        <p:txBody>
-          <a:bodyPr/>
-          <a:lstStyle/>
-          <a:p>
-            <a:endParaRPr lang="en-CH"/>
-          </a:p>
-        </p:txBody>
       </p:sp>
       <p:sp>
         <p:nvSpPr>
@@ -4514,7 +4551,7 @@
         </p:nvSpPr>
         <p:spPr>
           <a:xfrm>
-            <a:off x="886968" y="5895417"/>
+            <a:off x="886968" y="5605272"/>
             <a:ext cx="10424160" cy="201168"/>
           </a:xfrm>
           <a:prstGeom prst="rect">
@@ -4527,11 +4564,11 @@
           <a:bodyPr wrap="square" lIns="0" tIns="0" rIns="0" bIns="0" rtlCol="0" anchor="ctr"/>
           <a:lstStyle/>
           <a:p>
-            <a:pPr marL="0" indent="0">
-              <a:buNone/>
-            </a:pPr>
-            <a:r>
-              <a:rPr lang="en-US" sz="950" b="1" kern="0" spc="300" dirty="0">
+            <a:pPr indent="0" marL="0">
+              <a:buNone/>
+            </a:pPr>
+            <a:r>
+              <a:rPr lang="en-US" sz="950" b="1" spc="300" kern="0" dirty="0">
                 <a:solidFill>
                   <a:srgbClr val="1E7F82"/>
                 </a:solidFill>
@@ -4553,7 +4590,7 @@
         </p:nvSpPr>
         <p:spPr>
           <a:xfrm>
-            <a:off x="886968" y="6096585"/>
+            <a:off x="886968" y="5806440"/>
             <a:ext cx="10424160" cy="384048"/>
           </a:xfrm>
           <a:prstGeom prst="rect">
@@ -4566,7 +4603,7 @@
           <a:bodyPr wrap="square" lIns="0" tIns="0" rIns="0" bIns="0" rtlCol="0" anchor="t"/>
           <a:lstStyle/>
           <a:p>
-            <a:pPr marL="0" indent="0">
+            <a:pPr indent="0" marL="0">
               <a:buNone/>
             </a:pPr>
             <a:r>
@@ -4600,7 +4637,6 @@
         <a:solidFill>
           <a:srgbClr val="FFFFFF"/>
         </a:solidFill>
-        <a:effectLst/>
       </p:bgPr>
     </p:bg>
     <p:spTree>
@@ -4638,11 +4674,11 @@
           <a:bodyPr wrap="square" lIns="0" tIns="0" rIns="0" bIns="0" rtlCol="0" anchor="ctr"/>
           <a:lstStyle/>
           <a:p>
-            <a:pPr marL="0" indent="0" algn="l">
-              <a:buNone/>
-            </a:pPr>
-            <a:r>
-              <a:rPr lang="en-US" sz="1100" b="1" kern="0" spc="300" dirty="0">
+            <a:pPr algn="l" indent="0" marL="0">
+              <a:buNone/>
+            </a:pPr>
+            <a:r>
+              <a:rPr lang="en-US" sz="1100" b="1" spc="300" kern="0" dirty="0">
                 <a:solidFill>
                   <a:srgbClr val="5C7186"/>
                 </a:solidFill>
@@ -4677,7 +4713,7 @@
           <a:bodyPr wrap="square" lIns="0" tIns="0" rIns="0" bIns="0" rtlCol="0" anchor="ctr"/>
           <a:lstStyle/>
           <a:p>
-            <a:pPr marL="0" indent="0" algn="l">
+            <a:pPr algn="l" indent="0" marL="0">
               <a:buNone/>
             </a:pPr>
             <a:r>
@@ -4716,11 +4752,11 @@
           <a:bodyPr wrap="square" lIns="0" tIns="0" rIns="0" bIns="0" rtlCol="0" anchor="ctr"/>
           <a:lstStyle/>
           <a:p>
-            <a:pPr marL="0" indent="0">
-              <a:buNone/>
-            </a:pPr>
-            <a:r>
-              <a:rPr lang="en-US" sz="1600" b="1" dirty="0">
+            <a:pPr indent="0" marL="0">
+              <a:buNone/>
+            </a:pPr>
+            <a:r>
+              <a:rPr lang="en-US" sz="1500" b="1" dirty="0">
                 <a:solidFill>
                   <a:srgbClr val="D98E1F"/>
                 </a:solidFill>
@@ -4730,8 +4766,11 @@
               </a:rPr>
               <a:t>Q  </a:t>
             </a:r>
-            <a:r>
-              <a:rPr lang="en-US" sz="1600" b="1" dirty="0">
+            <a:pPr indent="0" marL="0">
+              <a:buNone/>
+            </a:pPr>
+            <a:r>
+              <a:rPr lang="en-US" sz="1500" b="1" dirty="0">
                 <a:solidFill>
                   <a:srgbClr val="14283C"/>
                 </a:solidFill>
@@ -4741,7 +4780,7 @@
               </a:rPr>
               <a:t>Only six services: what can that prove?</a:t>
             </a:r>
-            <a:endParaRPr lang="en-US" sz="1600" dirty="0"/>
+            <a:endParaRPr lang="en-US" sz="1500" dirty="0"/>
           </a:p>
         </p:txBody>
       </p:sp>
@@ -4753,8 +4792,8 @@
         </p:nvSpPr>
         <p:spPr>
           <a:xfrm>
-            <a:off x="1188720" y="2315473"/>
-            <a:ext cx="10149840" cy="563763"/>
+            <a:off x="1188720" y="2258568"/>
+            <a:ext cx="10149840" cy="731520"/>
           </a:xfrm>
           <a:prstGeom prst="rect">
             <a:avLst/>
@@ -4766,14 +4805,14 @@
           <a:bodyPr wrap="square" lIns="0" tIns="0" rIns="0" bIns="0" rtlCol="0" anchor="t"/>
           <a:lstStyle/>
           <a:p>
-            <a:pPr marL="0" indent="0">
+            <a:pPr indent="0" marL="0">
               <a:lnSpc>
                 <a:spcPct val="112000"/>
               </a:lnSpc>
               <a:buNone/>
             </a:pPr>
             <a:r>
-              <a:rPr lang="en-US" sz="1500" dirty="0">
+              <a:rPr lang="en-US" sz="1250" dirty="0">
                 <a:solidFill>
                   <a:srgbClr val="2A3F55"/>
                 </a:solidFill>
@@ -4783,7 +4822,7 @@
               </a:rPr>
               <a:t>The contribution is the instrument and evaluation logic, not a portfolio ranking. Selection was by data completeness; p-values are exact over all 720 permutations and read as effect sizes; portfolio-wide deployment is stated future work.</a:t>
             </a:r>
-            <a:endParaRPr lang="en-US" sz="1500" dirty="0"/>
+            <a:endParaRPr lang="en-US" sz="1250" dirty="0"/>
           </a:p>
         </p:txBody>
       </p:sp>
@@ -4795,7 +4834,7 @@
         </p:nvSpPr>
         <p:spPr>
           <a:xfrm>
-            <a:off x="685800" y="3043053"/>
+            <a:off x="685800" y="3191256"/>
             <a:ext cx="10789920" cy="347472"/>
           </a:xfrm>
           <a:prstGeom prst="rect">
@@ -4808,11 +4847,11 @@
           <a:bodyPr wrap="square" lIns="0" tIns="0" rIns="0" bIns="0" rtlCol="0" anchor="ctr"/>
           <a:lstStyle/>
           <a:p>
-            <a:pPr marL="0" indent="0">
-              <a:buNone/>
-            </a:pPr>
-            <a:r>
-              <a:rPr lang="en-US" sz="1600" b="1" dirty="0">
+            <a:pPr indent="0" marL="0">
+              <a:buNone/>
+            </a:pPr>
+            <a:r>
+              <a:rPr lang="en-US" sz="1500" b="1" dirty="0">
                 <a:solidFill>
                   <a:srgbClr val="D98E1F"/>
                 </a:solidFill>
@@ -4822,8 +4861,11 @@
               </a:rPr>
               <a:t>Q  </a:t>
             </a:r>
-            <a:r>
-              <a:rPr lang="en-US" sz="1600" b="1" dirty="0">
+            <a:pPr indent="0" marL="0">
+              <a:buNone/>
+            </a:pPr>
+            <a:r>
+              <a:rPr lang="en-US" sz="1500" b="1" dirty="0">
                 <a:solidFill>
                   <a:srgbClr val="14283C"/>
                 </a:solidFill>
@@ -4833,7 +4875,7 @@
               </a:rPr>
               <a:t>You built and evaluated on the same data. Circular?</a:t>
             </a:r>
-            <a:endParaRPr lang="en-US" sz="1600" dirty="0"/>
+            <a:endParaRPr lang="en-US" sz="1500" dirty="0"/>
           </a:p>
         </p:txBody>
       </p:sp>
@@ -4845,8 +4887,8 @@
         </p:nvSpPr>
         <p:spPr>
           <a:xfrm>
-            <a:off x="1188720" y="3484006"/>
-            <a:ext cx="10149840" cy="768096"/>
+            <a:off x="1188720" y="3575304"/>
+            <a:ext cx="10149840" cy="731520"/>
           </a:xfrm>
           <a:prstGeom prst="rect">
             <a:avLst/>
@@ -4858,14 +4900,14 @@
           <a:bodyPr wrap="square" lIns="0" tIns="0" rIns="0" bIns="0" rtlCol="0" anchor="t"/>
           <a:lstStyle/>
           <a:p>
-            <a:pPr marL="0" indent="0">
+            <a:pPr indent="0" marL="0">
               <a:lnSpc>
                 <a:spcPct val="112000"/>
               </a:lnSpc>
               <a:buNone/>
             </a:pPr>
             <a:r>
-              <a:rPr lang="en-US" sz="1500" dirty="0">
+              <a:rPr lang="en-US" sz="1250" dirty="0">
                 <a:solidFill>
                   <a:srgbClr val="2A3F55"/>
                 </a:solidFill>
@@ -4875,7 +4917,7 @@
               </a:rPr>
               <a:t>Declared openly: the evaluation establishes robustness, method-independence and discriminant value, not criterion validity, because no independent measure of non-code debt exists. External validation is the primary future-work avenue.</a:t>
             </a:r>
-            <a:endParaRPr lang="en-US" sz="1500" dirty="0"/>
+            <a:endParaRPr lang="en-US" sz="1250" dirty="0"/>
           </a:p>
         </p:txBody>
       </p:sp>
@@ -4887,7 +4929,7 @@
         </p:nvSpPr>
         <p:spPr>
           <a:xfrm>
-            <a:off x="685800" y="4415919"/>
+            <a:off x="685800" y="4507992"/>
             <a:ext cx="10789920" cy="347472"/>
           </a:xfrm>
           <a:prstGeom prst="rect">
@@ -4900,11 +4942,11 @@
           <a:bodyPr wrap="square" lIns="0" tIns="0" rIns="0" bIns="0" rtlCol="0" anchor="ctr"/>
           <a:lstStyle/>
           <a:p>
-            <a:pPr marL="0" indent="0">
-              <a:buNone/>
-            </a:pPr>
-            <a:r>
-              <a:rPr lang="en-US" sz="1600" b="1" dirty="0">
+            <a:pPr indent="0" marL="0">
+              <a:buNone/>
+            </a:pPr>
+            <a:r>
+              <a:rPr lang="en-US" sz="1500" b="1" dirty="0">
                 <a:solidFill>
                   <a:srgbClr val="D98E1F"/>
                 </a:solidFill>
@@ -4914,8 +4956,11 @@
               </a:rPr>
               <a:t>Q  </a:t>
             </a:r>
-            <a:r>
-              <a:rPr lang="en-US" sz="1600" b="1" dirty="0">
+            <a:pPr indent="0" marL="0">
+              <a:buNone/>
+            </a:pPr>
+            <a:r>
+              <a:rPr lang="en-US" sz="1500" b="1" dirty="0">
                 <a:solidFill>
                   <a:srgbClr val="14283C"/>
                 </a:solidFill>
@@ -4925,7 +4970,7 @@
               </a:rPr>
               <a:t>Are DORA metrics really debt proxies?</a:t>
             </a:r>
-            <a:endParaRPr lang="en-US" sz="1600" dirty="0"/>
+            <a:endParaRPr lang="en-US" sz="1500" dirty="0"/>
           </a:p>
         </p:txBody>
       </p:sp>
@@ -4937,8 +4982,8 @@
         </p:nvSpPr>
         <p:spPr>
           <a:xfrm>
-            <a:off x="1188720" y="4856871"/>
-            <a:ext cx="10149840" cy="805375"/>
+            <a:off x="1188720" y="4892040"/>
+            <a:ext cx="10149840" cy="731520"/>
           </a:xfrm>
           <a:prstGeom prst="rect">
             <a:avLst/>
@@ -4950,13 +4995,14 @@
           <a:bodyPr wrap="square" lIns="0" tIns="0" rIns="0" bIns="0" rtlCol="0" anchor="t"/>
           <a:lstStyle/>
           <a:p>
-            <a:pPr>
+            <a:pPr indent="0" marL="0">
               <a:lnSpc>
                 <a:spcPct val="112000"/>
               </a:lnSpc>
-            </a:pPr>
-            <a:r>
-              <a:rPr lang="en-US" sz="1500" dirty="0">
+              <a:buNone/>
+            </a:pPr>
+            <a:r>
+              <a:rPr lang="en-US" sz="1250" dirty="0">
                 <a:solidFill>
                   <a:srgbClr val="2A3F55"/>
                 </a:solidFill>
@@ -4964,53 +5010,9 @@
                 <a:ea typeface="Arial" pitchFamily="34" charset="-122"/>
                 <a:cs typeface="Arial" pitchFamily="34" charset="-120"/>
               </a:rPr>
-              <a:t>Treated as the central testable hypothesis, never a premise. Forsgren </a:t>
-            </a:r>
-            <a:r>
-              <a:rPr lang="en-US" sz="1500" i="1" dirty="0">
-                <a:solidFill>
-                  <a:srgbClr val="2A3F55"/>
-                </a:solidFill>
-                <a:latin typeface="Arial" pitchFamily="34" charset="0"/>
-                <a:ea typeface="Arial" pitchFamily="34" charset="-122"/>
-                <a:cs typeface="Arial" pitchFamily="34" charset="-120"/>
-              </a:rPr>
-              <a:t>et al. </a:t>
-            </a:r>
-            <a:r>
-              <a:rPr lang="en-US" sz="1500" dirty="0">
-                <a:solidFill>
-                  <a:srgbClr val="2A3F55"/>
-                </a:solidFill>
-                <a:latin typeface="Arial" pitchFamily="34" charset="0"/>
-                <a:ea typeface="Arial" pitchFamily="34" charset="-122"/>
-                <a:cs typeface="Arial" pitchFamily="34" charset="-120"/>
-              </a:rPr>
-              <a:t>(2018) validate the metrics; Nord, </a:t>
-            </a:r>
-            <a:r>
-              <a:rPr lang="en-US" sz="1500" dirty="0" err="1">
-                <a:solidFill>
-                  <a:srgbClr val="2A3F55"/>
-                </a:solidFill>
-                <a:latin typeface="Arial" pitchFamily="34" charset="0"/>
-                <a:ea typeface="Arial" pitchFamily="34" charset="-122"/>
-                <a:cs typeface="Arial" pitchFamily="34" charset="-120"/>
-              </a:rPr>
-              <a:t>Ozkaya</a:t>
-            </a:r>
-            <a:r>
-              <a:rPr lang="en-US" sz="1500" dirty="0">
-                <a:solidFill>
-                  <a:srgbClr val="2A3F55"/>
-                </a:solidFill>
-                <a:latin typeface="Arial" pitchFamily="34" charset="0"/>
-                <a:ea typeface="Arial" pitchFamily="34" charset="-122"/>
-                <a:cs typeface="Arial" pitchFamily="34" charset="-120"/>
-              </a:rPr>
-              <a:t> and Woody (2021) ground the diagnostic reading; the rankings match literature-predicted profiles. Longitudinal tracking would move it from plausible to evidenced.</a:t>
-            </a:r>
-            <a:endParaRPr lang="en-US" sz="1500" dirty="0"/>
+              <a:t>Treated as the central testable hypothesis, never a premise. Forsgren et al. validate the metrics; Nord et al. ground the diagnostic reading; the rankings match literature-predicted profiles. Longitudinal tracking would move it from plausible to evidenced.</a:t>
+            </a:r>
+            <a:endParaRPr lang="en-US" sz="1250" dirty="0"/>
           </a:p>
         </p:txBody>
       </p:sp>
@@ -5030,7 +5032,6 @@
         <a:solidFill>
           <a:srgbClr val="FFFFFF"/>
         </a:solidFill>
-        <a:effectLst/>
       </p:bgPr>
     </p:bg>
     <p:spTree>
@@ -5068,11 +5069,11 @@
           <a:bodyPr wrap="square" lIns="0" tIns="0" rIns="0" bIns="0" rtlCol="0" anchor="ctr"/>
           <a:lstStyle/>
           <a:p>
-            <a:pPr marL="0" indent="0" algn="l">
-              <a:buNone/>
-            </a:pPr>
-            <a:r>
-              <a:rPr lang="en-US" sz="1100" b="1" kern="0" spc="300" dirty="0">
+            <a:pPr algn="l" indent="0" marL="0">
+              <a:buNone/>
+            </a:pPr>
+            <a:r>
+              <a:rPr lang="en-US" sz="1100" b="1" spc="300" kern="0" dirty="0">
                 <a:solidFill>
                   <a:srgbClr val="5C7186"/>
                 </a:solidFill>
@@ -5107,7 +5108,7 @@
           <a:bodyPr wrap="square" lIns="0" tIns="0" rIns="0" bIns="0" rtlCol="0" anchor="ctr"/>
           <a:lstStyle/>
           <a:p>
-            <a:pPr marL="0" indent="0" algn="l">
+            <a:pPr algn="l" indent="0" marL="0">
               <a:buNone/>
             </a:pPr>
             <a:r>
@@ -5146,11 +5147,11 @@
           <a:bodyPr wrap="square" lIns="0" tIns="0" rIns="0" bIns="0" rtlCol="0" anchor="ctr"/>
           <a:lstStyle/>
           <a:p>
-            <a:pPr marL="0" indent="0">
-              <a:buNone/>
-            </a:pPr>
-            <a:r>
-              <a:rPr lang="en-US" sz="1600" b="1" dirty="0">
+            <a:pPr indent="0" marL="0">
+              <a:buNone/>
+            </a:pPr>
+            <a:r>
+              <a:rPr lang="en-US" sz="1500" b="1" dirty="0">
                 <a:solidFill>
                   <a:srgbClr val="D98E1F"/>
                 </a:solidFill>
@@ -5160,8 +5161,11 @@
               </a:rPr>
               <a:t>Q  </a:t>
             </a:r>
-            <a:r>
-              <a:rPr lang="en-US" sz="1600" b="1" dirty="0">
+            <a:pPr indent="0" marL="0">
+              <a:buNone/>
+            </a:pPr>
+            <a:r>
+              <a:rPr lang="en-US" sz="1500" b="1" dirty="0">
                 <a:solidFill>
                   <a:srgbClr val="14283C"/>
                 </a:solidFill>
@@ -5171,7 +5175,7 @@
               </a:rPr>
               <a:t>Aren't the differential weights arbitrary?</a:t>
             </a:r>
-            <a:endParaRPr lang="en-US" sz="1600" dirty="0"/>
+            <a:endParaRPr lang="en-US" sz="1500" dirty="0"/>
           </a:p>
         </p:txBody>
       </p:sp>
@@ -5183,8 +5187,8 @@
         </p:nvSpPr>
         <p:spPr>
           <a:xfrm>
-            <a:off x="1188720" y="2256929"/>
-            <a:ext cx="10149840" cy="749804"/>
+            <a:off x="1188720" y="2258568"/>
+            <a:ext cx="10149840" cy="685800"/>
           </a:xfrm>
           <a:prstGeom prst="rect">
             <a:avLst/>
@@ -5196,14 +5200,14 @@
           <a:bodyPr wrap="square" lIns="0" tIns="0" rIns="0" bIns="0" rtlCol="0" anchor="t"/>
           <a:lstStyle/>
           <a:p>
-            <a:pPr marL="0" indent="0">
+            <a:pPr indent="0" marL="0">
               <a:lnSpc>
                 <a:spcPct val="112000"/>
               </a:lnSpc>
               <a:buNone/>
             </a:pPr>
             <a:r>
-              <a:rPr lang="en-US" sz="1500" dirty="0">
+              <a:rPr lang="en-US" sz="1250" dirty="0">
                 <a:solidFill>
                   <a:srgbClr val="2A3F55"/>
                 </a:solidFill>
@@ -5211,9 +5215,9 @@
                 <a:ea typeface="Arial" pitchFamily="34" charset="-122"/>
                 <a:cs typeface="Arial" pitchFamily="34" charset="-120"/>
               </a:rPr>
-              <a:t>Yes, and they are declared as a practitioner assumption. That is why the evaluation does not depend on them: across 20,000 Dirichlet-sampled weightings the lowest priority holds in 98.3% of draws and rank 1 stays inside the same three-service cluster in all of them.</a:t>
-            </a:r>
-            <a:endParaRPr lang="en-US" sz="1500" dirty="0"/>
+              <a:t>Yes, and they are declared as a practitioner assumption. That is why the evaluation does not depend on them: across 20,000 Dirichlet-sampled weightings the lowest priority holds in 98.1% of draws and rank 1 stays inside the same three-service cluster in all of them.</a:t>
+            </a:r>
+            <a:endParaRPr lang="en-US" sz="1250" dirty="0"/>
           </a:p>
         </p:txBody>
       </p:sp>
@@ -5225,7 +5229,7 @@
         </p:nvSpPr>
         <p:spPr>
           <a:xfrm>
-            <a:off x="685800" y="3112006"/>
+            <a:off x="685800" y="3145536"/>
             <a:ext cx="10789920" cy="347472"/>
           </a:xfrm>
           <a:prstGeom prst="rect">
@@ -5238,11 +5242,11 @@
           <a:bodyPr wrap="square" lIns="0" tIns="0" rIns="0" bIns="0" rtlCol="0" anchor="ctr"/>
           <a:lstStyle/>
           <a:p>
-            <a:pPr marL="0" indent="0">
-              <a:buNone/>
-            </a:pPr>
-            <a:r>
-              <a:rPr lang="en-US" sz="1600" b="1" dirty="0">
+            <a:pPr indent="0" marL="0">
+              <a:buNone/>
+            </a:pPr>
+            <a:r>
+              <a:rPr lang="en-US" sz="1500" b="1" dirty="0">
                 <a:solidFill>
                   <a:srgbClr val="D98E1F"/>
                 </a:solidFill>
@@ -5252,8 +5256,11 @@
               </a:rPr>
               <a:t>Q  </a:t>
             </a:r>
-            <a:r>
-              <a:rPr lang="en-US" sz="1600" b="1" dirty="0">
+            <a:pPr indent="0" marL="0">
+              <a:buNone/>
+            </a:pPr>
+            <a:r>
+              <a:rPr lang="en-US" sz="1500" b="1" dirty="0">
                 <a:solidFill>
                   <a:srgbClr val="14283C"/>
                 </a:solidFill>
@@ -5263,7 +5270,7 @@
               </a:rPr>
               <a:t>Could this be misused to judge teams?</a:t>
             </a:r>
-            <a:endParaRPr lang="en-US" sz="1600" dirty="0"/>
+            <a:endParaRPr lang="en-US" sz="1500" dirty="0"/>
           </a:p>
         </p:txBody>
       </p:sp>
@@ -5275,8 +5282,8 @@
         </p:nvSpPr>
         <p:spPr>
           <a:xfrm>
-            <a:off x="1188720" y="3494416"/>
-            <a:ext cx="10149840" cy="787438"/>
+            <a:off x="1188720" y="3529584"/>
+            <a:ext cx="10149840" cy="914400"/>
           </a:xfrm>
           <a:prstGeom prst="rect">
             <a:avLst/>
@@ -5288,14 +5295,14 @@
           <a:bodyPr wrap="square" lIns="0" tIns="0" rIns="0" bIns="0" rtlCol="0" anchor="t"/>
           <a:lstStyle/>
           <a:p>
-            <a:pPr marL="0" indent="0">
+            <a:pPr indent="0" marL="0">
               <a:lnSpc>
                 <a:spcPct val="112000"/>
               </a:lnSpc>
               <a:buNone/>
             </a:pPr>
             <a:r>
-              <a:rPr lang="en-US" sz="1500" dirty="0">
+              <a:rPr lang="en-US" sz="1250" dirty="0">
                 <a:solidFill>
                   <a:srgbClr val="2A3F55"/>
                 </a:solidFill>
@@ -5303,31 +5310,9 @@
                 <a:ea typeface="Arial" pitchFamily="34" charset="-122"/>
                 <a:cs typeface="Arial" pitchFamily="34" charset="-120"/>
               </a:rPr>
-              <a:t>Governance scope was agreed with the Head of Trading IT at the outset: decision-support for portfolio conversations, not a binding instrument. High-debt profiles typically reflect historical design decisions, not current custodians (Ahmad </a:t>
-            </a:r>
-            <a:r>
-              <a:rPr lang="en-US" sz="1500" i="1" dirty="0">
-                <a:solidFill>
-                  <a:srgbClr val="2A3F55"/>
-                </a:solidFill>
-                <a:latin typeface="Arial" pitchFamily="34" charset="0"/>
-                <a:ea typeface="Arial" pitchFamily="34" charset="-122"/>
-                <a:cs typeface="Arial" pitchFamily="34" charset="-120"/>
-              </a:rPr>
-              <a:t>et al.</a:t>
-            </a:r>
-            <a:r>
-              <a:rPr lang="en-US" sz="1500" dirty="0">
-                <a:solidFill>
-                  <a:srgbClr val="2A3F55"/>
-                </a:solidFill>
-                <a:latin typeface="Arial" pitchFamily="34" charset="0"/>
-                <a:ea typeface="Arial" pitchFamily="34" charset="-122"/>
-                <a:cs typeface="Arial" pitchFamily="34" charset="-120"/>
-              </a:rPr>
-              <a:t>, 2026). No team, vendor or individual identifiers exist in the dataset.</a:t>
-            </a:r>
-            <a:endParaRPr lang="en-US" sz="1500" dirty="0"/>
+              <a:t>Governance scope was agreed with the Head of Trading IT at the outset: decision-support for portfolio conversations, not a binding instrument. High-debt profiles typically reflect historical design decisions, not current custodians (Ahmad et al., 2026). No team, vendor or individual identifiers exist in the dataset.</a:t>
+            </a:r>
+            <a:endParaRPr lang="en-US" sz="1250" dirty="0"/>
           </a:p>
         </p:txBody>
       </p:sp>
@@ -5339,7 +5324,7 @@
         </p:nvSpPr>
         <p:spPr>
           <a:xfrm>
-            <a:off x="685800" y="5833868"/>
+            <a:off x="685800" y="4690872"/>
             <a:ext cx="10789920" cy="713232"/>
           </a:xfrm>
           <a:prstGeom prst="rect">
@@ -5350,13 +5335,6 @@
           </a:solidFill>
           <a:ln/>
         </p:spPr>
-        <p:txBody>
-          <a:bodyPr/>
-          <a:lstStyle/>
-          <a:p>
-            <a:endParaRPr lang="en-CH"/>
-          </a:p>
-        </p:txBody>
       </p:sp>
       <p:sp>
         <p:nvSpPr>
@@ -5366,7 +5344,7 @@
         </p:nvSpPr>
         <p:spPr>
           <a:xfrm>
-            <a:off x="886968" y="5907020"/>
+            <a:off x="886968" y="4764024"/>
             <a:ext cx="10424160" cy="201168"/>
           </a:xfrm>
           <a:prstGeom prst="rect">
@@ -5379,11 +5357,11 @@
           <a:bodyPr wrap="square" lIns="0" tIns="0" rIns="0" bIns="0" rtlCol="0" anchor="ctr"/>
           <a:lstStyle/>
           <a:p>
-            <a:pPr marL="0" indent="0">
-              <a:buNone/>
-            </a:pPr>
-            <a:r>
-              <a:rPr lang="en-US" sz="950" b="1" kern="0" spc="300" dirty="0">
+            <a:pPr indent="0" marL="0">
+              <a:buNone/>
+            </a:pPr>
+            <a:r>
+              <a:rPr lang="en-US" sz="950" b="1" spc="300" kern="0" dirty="0">
                 <a:solidFill>
                   <a:srgbClr val="1E7F82"/>
                 </a:solidFill>
@@ -5405,7 +5383,7 @@
         </p:nvSpPr>
         <p:spPr>
           <a:xfrm>
-            <a:off x="886968" y="6108188"/>
+            <a:off x="886968" y="4965192"/>
             <a:ext cx="10424160" cy="384048"/>
           </a:xfrm>
           <a:prstGeom prst="rect">
@@ -5418,7 +5396,7 @@
           <a:bodyPr wrap="square" lIns="0" tIns="0" rIns="0" bIns="0" rtlCol="0" anchor="t"/>
           <a:lstStyle/>
           <a:p>
-            <a:pPr marL="0" indent="0">
+            <a:pPr indent="0" marL="0">
               <a:buNone/>
             </a:pPr>
             <a:r>
@@ -5452,7 +5430,6 @@
         <a:solidFill>
           <a:srgbClr val="FFFFFF"/>
         </a:solidFill>
-        <a:effectLst/>
       </p:bgPr>
     </p:bg>
     <p:spTree>
@@ -5490,11 +5467,11 @@
           <a:bodyPr wrap="square" lIns="0" tIns="0" rIns="0" bIns="0" rtlCol="0" anchor="ctr"/>
           <a:lstStyle/>
           <a:p>
-            <a:pPr marL="0" indent="0" algn="l">
-              <a:buNone/>
-            </a:pPr>
-            <a:r>
-              <a:rPr lang="en-US" sz="1100" b="1" kern="0" spc="300" dirty="0">
+            <a:pPr algn="l" indent="0" marL="0">
+              <a:buNone/>
+            </a:pPr>
+            <a:r>
+              <a:rPr lang="en-US" sz="1100" b="1" spc="300" kern="0" dirty="0">
                 <a:solidFill>
                   <a:srgbClr val="5C7186"/>
                 </a:solidFill>
@@ -5529,7 +5506,7 @@
           <a:bodyPr wrap="square" lIns="0" tIns="0" rIns="0" bIns="0" rtlCol="0" anchor="ctr"/>
           <a:lstStyle/>
           <a:p>
-            <a:pPr marL="0" indent="0" algn="l">
+            <a:pPr algn="l" indent="0" marL="0">
               <a:buNone/>
             </a:pPr>
             <a:r>
@@ -5566,13 +5543,6 @@
           </a:solidFill>
           <a:ln/>
         </p:spPr>
-        <p:txBody>
-          <a:bodyPr/>
-          <a:lstStyle/>
-          <a:p>
-            <a:endParaRPr lang="en-CH"/>
-          </a:p>
-        </p:txBody>
       </p:sp>
       <p:sp>
         <p:nvSpPr>
@@ -5595,7 +5565,7 @@
           <a:bodyPr wrap="square" lIns="0" tIns="0" rIns="0" bIns="0" rtlCol="0" anchor="ctr"/>
           <a:lstStyle/>
           <a:p>
-            <a:pPr marL="0" indent="0" algn="ctr">
+            <a:pPr algn="ctr" indent="0" marL="0">
               <a:buNone/>
             </a:pPr>
             <a:r>
@@ -5634,14 +5604,14 @@
           <a:bodyPr wrap="square" lIns="0" tIns="0" rIns="0" bIns="0" rtlCol="0" anchor="t"/>
           <a:lstStyle/>
           <a:p>
-            <a:pPr marL="0" indent="0">
+            <a:pPr indent="0" marL="0">
               <a:lnSpc>
                 <a:spcPct val="112000"/>
               </a:lnSpc>
               <a:buNone/>
             </a:pPr>
             <a:r>
-              <a:rPr lang="en-US" sz="1500" b="1" dirty="0">
+              <a:rPr lang="en-US" sz="1400" b="1" dirty="0">
                 <a:solidFill>
                   <a:srgbClr val="14283C"/>
                 </a:solidFill>
@@ -5651,8 +5621,14 @@
               </a:rPr>
               <a:t>First application: </a:t>
             </a:r>
-            <a:r>
-              <a:rPr lang="en-US" sz="1500" dirty="0">
+            <a:pPr indent="0" marL="0">
+              <a:lnSpc>
+                <a:spcPct val="112000"/>
+              </a:lnSpc>
+              <a:buNone/>
+            </a:pPr>
+            <a:r>
+              <a:rPr lang="en-US" sz="1400" dirty="0">
                 <a:solidFill>
                   <a:srgbClr val="14283C"/>
                 </a:solidFill>
@@ -5660,10 +5636,100 @@
                 <a:ea typeface="Arial" pitchFamily="34" charset="-122"/>
                 <a:cs typeface="Arial" pitchFamily="34" charset="-120"/>
               </a:rPr>
-              <a:t>(to the best of current knowledge) of TOPSIS to live ITSM/CMDB records for TD prioritisation in financial trading IT, closing the gap Lenarduzzi </a:t>
-            </a:r>
-            <a:r>
-              <a:rPr lang="en-US" sz="1500" i="1" dirty="0">
+              <a:t>(to the best of current knowledge) of TOPSIS to live ITSM/CMDB records for TD prioritisation in financial trading IT, closing the gap Lenarduzzi et al. identify field-wide</a:t>
+            </a:r>
+            <a:endParaRPr lang="en-US" sz="1400" dirty="0"/>
+          </a:p>
+        </p:txBody>
+      </p:sp>
+      <p:sp>
+        <p:nvSpPr>
+          <p:cNvPr id="7" name="Shape 5"/>
+          <p:cNvSpPr/>
+          <p:nvPr/>
+        </p:nvSpPr>
+        <p:spPr>
+          <a:xfrm>
+            <a:off x="685800" y="3099816"/>
+            <a:ext cx="457200" cy="457200"/>
+          </a:xfrm>
+          <a:prstGeom prst="ellipse">
+            <a:avLst/>
+          </a:prstGeom>
+          <a:solidFill>
+            <a:srgbClr val="14283C"/>
+          </a:solidFill>
+          <a:ln/>
+        </p:spPr>
+      </p:sp>
+      <p:sp>
+        <p:nvSpPr>
+          <p:cNvPr id="8" name="Text 6"/>
+          <p:cNvSpPr/>
+          <p:nvPr/>
+        </p:nvSpPr>
+        <p:spPr>
+          <a:xfrm>
+            <a:off x="685800" y="3099816"/>
+            <a:ext cx="457200" cy="457200"/>
+          </a:xfrm>
+          <a:prstGeom prst="rect">
+            <a:avLst/>
+          </a:prstGeom>
+          <a:noFill/>
+          <a:ln/>
+        </p:spPr>
+        <p:txBody>
+          <a:bodyPr wrap="square" lIns="0" tIns="0" rIns="0" bIns="0" rtlCol="0" anchor="ctr"/>
+          <a:lstStyle/>
+          <a:p>
+            <a:pPr algn="ctr" indent="0" marL="0">
+              <a:buNone/>
+            </a:pPr>
+            <a:r>
+              <a:rPr lang="en-US" sz="1700" b="1" dirty="0">
+                <a:solidFill>
+                  <a:srgbClr val="FFFFFF"/>
+                </a:solidFill>
+                <a:latin typeface="Courier New" pitchFamily="34" charset="0"/>
+                <a:ea typeface="Courier New" pitchFamily="34" charset="-122"/>
+                <a:cs typeface="Courier New" pitchFamily="34" charset="-120"/>
+              </a:rPr>
+              <a:t>2</a:t>
+            </a:r>
+            <a:endParaRPr lang="en-US" sz="1700" dirty="0"/>
+          </a:p>
+        </p:txBody>
+      </p:sp>
+      <p:sp>
+        <p:nvSpPr>
+          <p:cNvPr id="9" name="Text 7"/>
+          <p:cNvSpPr/>
+          <p:nvPr/>
+        </p:nvSpPr>
+        <p:spPr>
+          <a:xfrm>
+            <a:off x="1371600" y="3044952"/>
+            <a:ext cx="9966960" cy="1005840"/>
+          </a:xfrm>
+          <a:prstGeom prst="rect">
+            <a:avLst/>
+          </a:prstGeom>
+          <a:noFill/>
+          <a:ln/>
+        </p:spPr>
+        <p:txBody>
+          <a:bodyPr wrap="square" lIns="0" tIns="0" rIns="0" bIns="0" rtlCol="0" anchor="t"/>
+          <a:lstStyle/>
+          <a:p>
+            <a:pPr indent="0" marL="0">
+              <a:lnSpc>
+                <a:spcPct val="112000"/>
+              </a:lnSpc>
+              <a:buNone/>
+            </a:pPr>
+            <a:r>
+              <a:rPr lang="en-US" sz="1400" b="1" dirty="0">
                 <a:solidFill>
                   <a:srgbClr val="14283C"/>
                 </a:solidFill>
@@ -5671,10 +5737,16 @@
                 <a:ea typeface="Arial" pitchFamily="34" charset="-122"/>
                 <a:cs typeface="Arial" pitchFamily="34" charset="-120"/>
               </a:rPr>
-              <a:t>et al.</a:t>
-            </a:r>
-            <a:r>
-              <a:rPr lang="en-US" sz="1500" dirty="0">
+              <a:t>An operationally defined indicator set: </a:t>
+            </a:r>
+            <a:pPr indent="0" marL="0">
+              <a:lnSpc>
+                <a:spcPct val="112000"/>
+              </a:lnSpc>
+              <a:buNone/>
+            </a:pPr>
+            <a:r>
+              <a:rPr lang="en-US" sz="1400" dirty="0">
                 <a:solidFill>
                   <a:srgbClr val="14283C"/>
                 </a:solidFill>
@@ -5682,48 +5754,41 @@
                 <a:ea typeface="Arial" pitchFamily="34" charset="-122"/>
                 <a:cs typeface="Arial" pitchFamily="34" charset="-120"/>
               </a:rPr>
-              <a:t> (2021) identify field-wide</a:t>
-            </a:r>
-            <a:endParaRPr lang="en-US" sz="1500" dirty="0"/>
-          </a:p>
-        </p:txBody>
-      </p:sp>
-      <p:sp>
-        <p:nvSpPr>
-          <p:cNvPr id="7" name="Shape 5"/>
-          <p:cNvSpPr/>
-          <p:nvPr/>
-        </p:nvSpPr>
-        <p:spPr>
-          <a:xfrm>
-            <a:off x="685800" y="3099816"/>
+              <a:t>with explicit literature mapping to debt dimensions, plus evidence of its behaviour under a four-strand evaluation</a:t>
+            </a:r>
+            <a:endParaRPr lang="en-US" sz="1400" dirty="0"/>
+          </a:p>
+        </p:txBody>
+      </p:sp>
+      <p:sp>
+        <p:nvSpPr>
+          <p:cNvPr id="10" name="Shape 8"/>
+          <p:cNvSpPr/>
+          <p:nvPr/>
+        </p:nvSpPr>
+        <p:spPr>
+          <a:xfrm>
+            <a:off x="685800" y="4270248"/>
             <a:ext cx="457200" cy="457200"/>
           </a:xfrm>
           <a:prstGeom prst="ellipse">
             <a:avLst/>
           </a:prstGeom>
           <a:solidFill>
-            <a:srgbClr val="14283C"/>
+            <a:srgbClr val="D98E1F"/>
           </a:solidFill>
           <a:ln/>
         </p:spPr>
-        <p:txBody>
-          <a:bodyPr/>
-          <a:lstStyle/>
-          <a:p>
-            <a:endParaRPr lang="en-CH"/>
-          </a:p>
-        </p:txBody>
-      </p:sp>
-      <p:sp>
-        <p:nvSpPr>
-          <p:cNvPr id="8" name="Text 6"/>
-          <p:cNvSpPr/>
-          <p:nvPr/>
-        </p:nvSpPr>
-        <p:spPr>
-          <a:xfrm>
-            <a:off x="685800" y="3099816"/>
+      </p:sp>
+      <p:sp>
+        <p:nvSpPr>
+          <p:cNvPr id="11" name="Text 9"/>
+          <p:cNvSpPr/>
+          <p:nvPr/>
+        </p:nvSpPr>
+        <p:spPr>
+          <a:xfrm>
+            <a:off x="685800" y="4270248"/>
             <a:ext cx="457200" cy="457200"/>
           </a:xfrm>
           <a:prstGeom prst="rect">
@@ -5736,7 +5801,7 @@
           <a:bodyPr wrap="square" lIns="0" tIns="0" rIns="0" bIns="0" rtlCol="0" anchor="ctr"/>
           <a:lstStyle/>
           <a:p>
-            <a:pPr marL="0" indent="0" algn="ctr">
+            <a:pPr algn="ctr" indent="0" marL="0">
               <a:buNone/>
             </a:pPr>
             <a:r>
@@ -5748,7 +5813,7 @@
                 <a:ea typeface="Courier New" pitchFamily="34" charset="-122"/>
                 <a:cs typeface="Courier New" pitchFamily="34" charset="-120"/>
               </a:rPr>
-              <a:t>2</a:t>
+              <a:t>3</a:t>
             </a:r>
             <a:endParaRPr lang="en-US" sz="1700" dirty="0"/>
           </a:p>
@@ -5756,13 +5821,13 @@
       </p:sp>
       <p:sp>
         <p:nvSpPr>
-          <p:cNvPr id="9" name="Text 7"/>
-          <p:cNvSpPr/>
-          <p:nvPr/>
-        </p:nvSpPr>
-        <p:spPr>
-          <a:xfrm>
-            <a:off x="1371600" y="3044952"/>
+          <p:cNvPr id="12" name="Text 10"/>
+          <p:cNvSpPr/>
+          <p:nvPr/>
+        </p:nvSpPr>
+        <p:spPr>
+          <a:xfrm>
+            <a:off x="1371600" y="4215384"/>
             <a:ext cx="9966960" cy="1005840"/>
           </a:xfrm>
           <a:prstGeom prst="rect">
@@ -5775,14 +5840,14 @@
           <a:bodyPr wrap="square" lIns="0" tIns="0" rIns="0" bIns="0" rtlCol="0" anchor="t"/>
           <a:lstStyle/>
           <a:p>
-            <a:pPr marL="0" indent="0">
+            <a:pPr indent="0" marL="0">
               <a:lnSpc>
                 <a:spcPct val="112000"/>
               </a:lnSpc>
               <a:buNone/>
             </a:pPr>
             <a:r>
-              <a:rPr lang="en-US" sz="1500" b="1" dirty="0">
+              <a:rPr lang="en-US" sz="1400" b="1" dirty="0">
                 <a:solidFill>
                   <a:srgbClr val="14283C"/>
                 </a:solidFill>
@@ -5790,10 +5855,16 @@
                 <a:ea typeface="Arial" pitchFamily="34" charset="-122"/>
                 <a:cs typeface="Arial" pitchFamily="34" charset="-120"/>
               </a:rPr>
-              <a:t>An operationally defined indicator set: </a:t>
-            </a:r>
-            <a:r>
-              <a:rPr lang="en-US" sz="1500" dirty="0">
+              <a:t>A methodological finding of independent interest: </a:t>
+            </a:r>
+            <a:pPr indent="0" marL="0">
+              <a:lnSpc>
+                <a:spcPct val="112000"/>
+              </a:lnSpc>
+              <a:buNone/>
+            </a:pPr>
+            <a:r>
+              <a:rPr lang="en-US" sz="1400" dirty="0">
                 <a:solidFill>
                   <a:srgbClr val="14283C"/>
                 </a:solidFill>
@@ -5801,49 +5872,42 @@
                 <a:ea typeface="Arial" pitchFamily="34" charset="-122"/>
                 <a:cs typeface="Arial" pitchFamily="34" charset="-120"/>
               </a:rPr>
-              <a:t>with explicit literature mapping to debt dimensions, plus evidence of its behaviour under a four-strand evaluation</a:t>
-            </a:r>
-            <a:endParaRPr lang="en-US" sz="1500" dirty="0"/>
-          </a:p>
-        </p:txBody>
-      </p:sp>
-      <p:sp>
-        <p:nvSpPr>
-          <p:cNvPr id="10" name="Shape 8"/>
-          <p:cNvSpPr/>
-          <p:nvPr/>
-        </p:nvSpPr>
-        <p:spPr>
-          <a:xfrm>
-            <a:off x="685800" y="4270248"/>
-            <a:ext cx="457200" cy="457200"/>
-          </a:xfrm>
-          <a:prstGeom prst="ellipse">
+              <a:t>sample-relative and absolutely anchored methods respond differently to concentrated debt profiles, consequential for the top of a ranking</a:t>
+            </a:r>
+            <a:endParaRPr lang="en-US" sz="1400" dirty="0"/>
+          </a:p>
+        </p:txBody>
+      </p:sp>
+      <p:sp>
+        <p:nvSpPr>
+          <p:cNvPr id="13" name="Shape 11"/>
+          <p:cNvSpPr/>
+          <p:nvPr/>
+        </p:nvSpPr>
+        <p:spPr>
+          <a:xfrm>
+            <a:off x="685800" y="5577840"/>
+            <a:ext cx="10789920" cy="713232"/>
+          </a:xfrm>
+          <a:prstGeom prst="rect">
             <a:avLst/>
           </a:prstGeom>
           <a:solidFill>
-            <a:srgbClr val="D98E1F"/>
+            <a:srgbClr val="F2F7F6"/>
           </a:solidFill>
           <a:ln/>
         </p:spPr>
-        <p:txBody>
-          <a:bodyPr/>
-          <a:lstStyle/>
-          <a:p>
-            <a:endParaRPr lang="en-CH"/>
-          </a:p>
-        </p:txBody>
-      </p:sp>
-      <p:sp>
-        <p:nvSpPr>
-          <p:cNvPr id="11" name="Text 9"/>
-          <p:cNvSpPr/>
-          <p:nvPr/>
-        </p:nvSpPr>
-        <p:spPr>
-          <a:xfrm>
-            <a:off x="685800" y="4270248"/>
-            <a:ext cx="457200" cy="457200"/>
+      </p:sp>
+      <p:sp>
+        <p:nvSpPr>
+          <p:cNvPr id="14" name="Text 12"/>
+          <p:cNvSpPr/>
+          <p:nvPr/>
+        </p:nvSpPr>
+        <p:spPr>
+          <a:xfrm>
+            <a:off x="886968" y="5650992"/>
+            <a:ext cx="10424160" cy="201168"/>
           </a:xfrm>
           <a:prstGeom prst="rect">
             <a:avLst/>
@@ -5855,34 +5919,34 @@
           <a:bodyPr wrap="square" lIns="0" tIns="0" rIns="0" bIns="0" rtlCol="0" anchor="ctr"/>
           <a:lstStyle/>
           <a:p>
-            <a:pPr marL="0" indent="0" algn="ctr">
-              <a:buNone/>
-            </a:pPr>
-            <a:r>
-              <a:rPr lang="en-US" sz="1700" b="1" dirty="0">
-                <a:solidFill>
-                  <a:srgbClr val="FFFFFF"/>
+            <a:pPr indent="0" marL="0">
+              <a:buNone/>
+            </a:pPr>
+            <a:r>
+              <a:rPr lang="en-US" sz="950" b="1" spc="300" kern="0" dirty="0">
+                <a:solidFill>
+                  <a:srgbClr val="1E7F82"/>
                 </a:solidFill>
                 <a:latin typeface="Courier New" pitchFamily="34" charset="0"/>
                 <a:ea typeface="Courier New" pitchFamily="34" charset="-122"/>
                 <a:cs typeface="Courier New" pitchFamily="34" charset="-120"/>
               </a:rPr>
-              <a:t>3</a:t>
-            </a:r>
-            <a:endParaRPr lang="en-US" sz="1700" dirty="0"/>
-          </a:p>
-        </p:txBody>
-      </p:sp>
-      <p:sp>
-        <p:nvSpPr>
-          <p:cNvPr id="12" name="Text 10"/>
-          <p:cNvSpPr/>
-          <p:nvPr/>
-        </p:nvSpPr>
-        <p:spPr>
-          <a:xfrm>
-            <a:off x="1371600" y="4215384"/>
-            <a:ext cx="9966960" cy="1005840"/>
+              <a:t>TAKEAWAY</a:t>
+            </a:r>
+            <a:endParaRPr lang="en-US" sz="950" dirty="0"/>
+          </a:p>
+        </p:txBody>
+      </p:sp>
+      <p:sp>
+        <p:nvSpPr>
+          <p:cNvPr id="15" name="Text 13"/>
+          <p:cNvSpPr/>
+          <p:nvPr/>
+        </p:nvSpPr>
+        <p:spPr>
+          <a:xfrm>
+            <a:off x="886968" y="5852160"/>
+            <a:ext cx="10424160" cy="384048"/>
           </a:xfrm>
           <a:prstGeom prst="rect">
             <a:avLst/>
@@ -5894,126 +5958,7 @@
           <a:bodyPr wrap="square" lIns="0" tIns="0" rIns="0" bIns="0" rtlCol="0" anchor="t"/>
           <a:lstStyle/>
           <a:p>
-            <a:pPr marL="0" indent="0">
-              <a:lnSpc>
-                <a:spcPct val="112000"/>
-              </a:lnSpc>
-              <a:buNone/>
-            </a:pPr>
-            <a:r>
-              <a:rPr lang="en-US" sz="1500" b="1" dirty="0">
-                <a:solidFill>
-                  <a:srgbClr val="14283C"/>
-                </a:solidFill>
-                <a:latin typeface="Arial" pitchFamily="34" charset="0"/>
-                <a:ea typeface="Arial" pitchFamily="34" charset="-122"/>
-                <a:cs typeface="Arial" pitchFamily="34" charset="-120"/>
-              </a:rPr>
-              <a:t>A methodological finding of independent interest: </a:t>
-            </a:r>
-            <a:r>
-              <a:rPr lang="en-US" sz="1500" dirty="0">
-                <a:solidFill>
-                  <a:srgbClr val="14283C"/>
-                </a:solidFill>
-                <a:latin typeface="Arial" pitchFamily="34" charset="0"/>
-                <a:ea typeface="Arial" pitchFamily="34" charset="-122"/>
-                <a:cs typeface="Arial" pitchFamily="34" charset="-120"/>
-              </a:rPr>
-              <a:t>sample-relative and absolutely anchored methods respond differently to concentrated debt profiles, consequential for the top of a ranking</a:t>
-            </a:r>
-            <a:endParaRPr lang="en-US" sz="1500" dirty="0"/>
-          </a:p>
-        </p:txBody>
-      </p:sp>
-      <p:sp>
-        <p:nvSpPr>
-          <p:cNvPr id="13" name="Shape 11"/>
-          <p:cNvSpPr/>
-          <p:nvPr/>
-        </p:nvSpPr>
-        <p:spPr>
-          <a:xfrm>
-            <a:off x="685800" y="5832817"/>
-            <a:ext cx="10789920" cy="713232"/>
-          </a:xfrm>
-          <a:prstGeom prst="rect">
-            <a:avLst/>
-          </a:prstGeom>
-          <a:solidFill>
-            <a:srgbClr val="F2F7F6"/>
-          </a:solidFill>
-          <a:ln/>
-        </p:spPr>
-        <p:txBody>
-          <a:bodyPr/>
-          <a:lstStyle/>
-          <a:p>
-            <a:endParaRPr lang="en-CH"/>
-          </a:p>
-        </p:txBody>
-      </p:sp>
-      <p:sp>
-        <p:nvSpPr>
-          <p:cNvPr id="14" name="Text 12"/>
-          <p:cNvSpPr/>
-          <p:nvPr/>
-        </p:nvSpPr>
-        <p:spPr>
-          <a:xfrm>
-            <a:off x="886968" y="5905969"/>
-            <a:ext cx="10424160" cy="201168"/>
-          </a:xfrm>
-          <a:prstGeom prst="rect">
-            <a:avLst/>
-          </a:prstGeom>
-          <a:noFill/>
-          <a:ln/>
-        </p:spPr>
-        <p:txBody>
-          <a:bodyPr wrap="square" lIns="0" tIns="0" rIns="0" bIns="0" rtlCol="0" anchor="ctr"/>
-          <a:lstStyle/>
-          <a:p>
-            <a:pPr marL="0" indent="0">
-              <a:buNone/>
-            </a:pPr>
-            <a:r>
-              <a:rPr lang="en-US" sz="950" b="1" kern="0" spc="300" dirty="0">
-                <a:solidFill>
-                  <a:srgbClr val="1E7F82"/>
-                </a:solidFill>
-                <a:latin typeface="Courier New" pitchFamily="34" charset="0"/>
-                <a:ea typeface="Courier New" pitchFamily="34" charset="-122"/>
-                <a:cs typeface="Courier New" pitchFamily="34" charset="-120"/>
-              </a:rPr>
-              <a:t>TAKEAWAY</a:t>
-            </a:r>
-            <a:endParaRPr lang="en-US" sz="950" dirty="0"/>
-          </a:p>
-        </p:txBody>
-      </p:sp>
-      <p:sp>
-        <p:nvSpPr>
-          <p:cNvPr id="15" name="Text 13"/>
-          <p:cNvSpPr/>
-          <p:nvPr/>
-        </p:nvSpPr>
-        <p:spPr>
-          <a:xfrm>
-            <a:off x="886968" y="6107137"/>
-            <a:ext cx="10424160" cy="384048"/>
-          </a:xfrm>
-          <a:prstGeom prst="rect">
-            <a:avLst/>
-          </a:prstGeom>
-          <a:noFill/>
-          <a:ln/>
-        </p:spPr>
-        <p:txBody>
-          <a:bodyPr wrap="square" lIns="0" tIns="0" rIns="0" bIns="0" rtlCol="0" anchor="t"/>
-          <a:lstStyle/>
-          <a:p>
-            <a:pPr marL="0" indent="0">
+            <a:pPr indent="0" marL="0">
               <a:buNone/>
             </a:pPr>
             <a:r>
@@ -6047,7 +5992,6 @@
         <a:solidFill>
           <a:srgbClr val="14283C"/>
         </a:solidFill>
-        <a:effectLst/>
       </p:bgPr>
     </p:bg>
     <p:spTree>
@@ -6085,11 +6029,11 @@
           <a:bodyPr wrap="square" lIns="0" tIns="0" rIns="0" bIns="0" rtlCol="0" anchor="ctr"/>
           <a:lstStyle/>
           <a:p>
-            <a:pPr marL="0" indent="0">
-              <a:buNone/>
-            </a:pPr>
-            <a:r>
-              <a:rPr lang="en-US" sz="1100" b="1" kern="0" spc="300" dirty="0">
+            <a:pPr indent="0" marL="0">
+              <a:buNone/>
+            </a:pPr>
+            <a:r>
+              <a:rPr lang="en-US" sz="1100" b="1" spc="300" kern="0" dirty="0">
                 <a:solidFill>
                   <a:srgbClr val="D98E1F"/>
                 </a:solidFill>
@@ -6124,7 +6068,7 @@
           <a:bodyPr wrap="square" lIns="0" tIns="0" rIns="0" bIns="0" rtlCol="0" anchor="t"/>
           <a:lstStyle/>
           <a:p>
-            <a:pPr marL="0" indent="0">
+            <a:pPr indent="0" marL="0">
               <a:lnSpc>
                 <a:spcPct val="125000"/>
               </a:lnSpc>
@@ -6140,28 +6084,57 @@
                 <a:cs typeface="Arial" pitchFamily="34" charset="-120"/>
               </a:rPr>
               <a:t>The framework does not measure technical debt.
-It orders services by the </a:t>
-            </a:r>
-            <a:r>
-              <a:rPr lang="en-US" sz="2500" b="1" dirty="0">
-                <a:solidFill>
-                  <a:srgbClr val="F0C67A"/>
+</a:t>
+            </a:r>
+            <a:pPr indent="0" marL="0">
+              <a:lnSpc>
+                <a:spcPct val="125000"/>
+              </a:lnSpc>
+              <a:buNone/>
+            </a:pPr>
+            <a:r>
+              <a:rPr lang="en-US" sz="2500" dirty="0">
+                <a:solidFill>
+                  <a:srgbClr val="FFFFFF"/>
                 </a:solidFill>
                 <a:latin typeface="Arial" pitchFamily="34" charset="0"/>
                 <a:ea typeface="Arial" pitchFamily="34" charset="-122"/>
                 <a:cs typeface="Arial" pitchFamily="34" charset="-120"/>
               </a:rPr>
-              <a:t>operational shadow debt casts</a:t>
-            </a:r>
-            <a:r>
-              <a:rPr lang="en-US" sz="2500" dirty="0">
-                <a:solidFill>
-                  <a:srgbClr val="FFFFFF"/>
+              <a:t>It orders services by the </a:t>
+            </a:r>
+            <a:pPr indent="0" marL="0">
+              <a:lnSpc>
+                <a:spcPct val="125000"/>
+              </a:lnSpc>
+              <a:buNone/>
+            </a:pPr>
+            <a:r>
+              <a:rPr lang="en-US" sz="2500" b="1" dirty="0">
+                <a:solidFill>
+                  <a:srgbClr val="F0C67A"/>
                 </a:solidFill>
                 <a:latin typeface="Arial" pitchFamily="34" charset="0"/>
                 <a:ea typeface="Arial" pitchFamily="34" charset="-122"/>
                 <a:cs typeface="Arial" pitchFamily="34" charset="-120"/>
               </a:rPr>
+              <a:t>operational shadow debt casts</a:t>
+            </a:r>
+            <a:pPr indent="0" marL="0">
+              <a:lnSpc>
+                <a:spcPct val="125000"/>
+              </a:lnSpc>
+              <a:buNone/>
+            </a:pPr>
+            <a:r>
+              <a:rPr lang="en-US" sz="2500" dirty="0">
+                <a:solidFill>
+                  <a:srgbClr val="FFFFFF"/>
+                </a:solidFill>
+                <a:latin typeface="Arial" pitchFamily="34" charset="0"/>
+                <a:ea typeface="Arial" pitchFamily="34" charset="-122"/>
+                <a:cs typeface="Arial" pitchFamily="34" charset="-120"/>
+              </a:rPr>
               <a:t>, and within stated limits it does so reproducibly, defensibly and in a form a regulated institution can act on.</a:t>
             </a:r>
             <a:endParaRPr lang="en-US" sz="2500" dirty="0"/>
@@ -6189,7 +6162,7 @@
           <a:bodyPr wrap="square" lIns="0" tIns="0" rIns="0" bIns="0" rtlCol="0" anchor="ctr"/>
           <a:lstStyle/>
           <a:p>
-            <a:pPr marL="0" indent="0">
+            <a:pPr indent="0" marL="0">
               <a:buNone/>
             </a:pPr>
             <a:r>
@@ -6226,13 +6199,6 @@
           </a:solidFill>
           <a:ln/>
         </p:spPr>
-        <p:txBody>
-          <a:bodyPr/>
-          <a:lstStyle/>
-          <a:p>
-            <a:endParaRPr lang="en-CH"/>
-          </a:p>
-        </p:txBody>
       </p:sp>
       <p:sp>
         <p:nvSpPr>
@@ -6253,13 +6219,6 @@
           </a:solidFill>
           <a:ln/>
         </p:spPr>
-        <p:txBody>
-          <a:bodyPr/>
-          <a:lstStyle/>
-          <a:p>
-            <a:endParaRPr lang="en-CH"/>
-          </a:p>
-        </p:txBody>
       </p:sp>
       <p:sp>
         <p:nvSpPr>
@@ -6282,7 +6241,7 @@
           <a:bodyPr wrap="square" lIns="0" tIns="0" rIns="0" bIns="0" rtlCol="0" anchor="ctr"/>
           <a:lstStyle/>
           <a:p>
-            <a:pPr marL="0" indent="0" algn="r">
+            <a:pPr algn="r" indent="0" marL="0">
               <a:buNone/>
             </a:pPr>
             <a:r>
@@ -6321,7 +6280,7 @@
           <a:bodyPr wrap="square" lIns="0" tIns="0" rIns="0" bIns="0" rtlCol="0" anchor="ctr"/>
           <a:lstStyle/>
           <a:p>
-            <a:pPr marL="0" indent="0">
+            <a:pPr indent="0" marL="0">
               <a:buNone/>
             </a:pPr>
             <a:r>
@@ -6358,13 +6317,6 @@
           </a:solidFill>
           <a:ln/>
         </p:spPr>
-        <p:txBody>
-          <a:bodyPr/>
-          <a:lstStyle/>
-          <a:p>
-            <a:endParaRPr lang="en-CH"/>
-          </a:p>
-        </p:txBody>
       </p:sp>
       <p:sp>
         <p:nvSpPr>
@@ -6385,13 +6337,6 @@
           </a:solidFill>
           <a:ln/>
         </p:spPr>
-        <p:txBody>
-          <a:bodyPr/>
-          <a:lstStyle/>
-          <a:p>
-            <a:endParaRPr lang="en-CH"/>
-          </a:p>
-        </p:txBody>
       </p:sp>
       <p:sp>
         <p:nvSpPr>
@@ -6414,7 +6359,7 @@
           <a:bodyPr wrap="square" lIns="0" tIns="0" rIns="0" bIns="0" rtlCol="0" anchor="ctr"/>
           <a:lstStyle/>
           <a:p>
-            <a:pPr marL="0" indent="0" algn="r">
+            <a:pPr algn="r" indent="0" marL="0">
               <a:buNone/>
             </a:pPr>
             <a:r>
@@ -6453,7 +6398,7 @@
           <a:bodyPr wrap="square" lIns="0" tIns="0" rIns="0" bIns="0" rtlCol="0" anchor="ctr"/>
           <a:lstStyle/>
           <a:p>
-            <a:pPr marL="0" indent="0">
+            <a:pPr indent="0" marL="0">
               <a:buNone/>
             </a:pPr>
             <a:r>
@@ -6473,14 +6418,14 @@
       </p:sp>
       <p:pic>
         <p:nvPicPr>
-          <p:cNvPr id="13" name="Image 0" descr="logo_white.png"/>
+          <p:cNvPr id="13" name="Image 0" descr="logo_white.png">    </p:cNvPr>
           <p:cNvPicPr>
             <a:picLocks noChangeAspect="1"/>
           </p:cNvPicPr>
           <p:nvPr/>
         </p:nvPicPr>
         <p:blipFill>
-          <a:blip r:embed="rId3"/>
+          <a:blip r:embed="rId1"/>
           <a:stretch>
             <a:fillRect/>
           </a:stretch>
@@ -6516,11 +6461,11 @@
           <a:bodyPr wrap="square" lIns="0" tIns="0" rIns="0" bIns="0" rtlCol="0" anchor="ctr"/>
           <a:lstStyle/>
           <a:p>
-            <a:pPr marL="0" indent="0">
-              <a:buNone/>
-            </a:pPr>
-            <a:r>
-              <a:rPr lang="en-US" sz="1000" kern="0" spc="200" dirty="0">
+            <a:pPr indent="0" marL="0">
+              <a:buNone/>
+            </a:pPr>
+            <a:r>
+              <a:rPr lang="en-US" sz="1000" spc="200" kern="0" dirty="0">
                 <a:solidFill>
                   <a:srgbClr val="8FA6BC"/>
                 </a:solidFill>
@@ -6550,7 +6495,6 @@
         <a:solidFill>
           <a:srgbClr val="FFFFFF"/>
         </a:solidFill>
-        <a:effectLst/>
       </p:bgPr>
     </p:bg>
     <p:spTree>
@@ -6588,11 +6532,11 @@
           <a:bodyPr wrap="square" lIns="0" tIns="0" rIns="0" bIns="0" rtlCol="0" anchor="ctr"/>
           <a:lstStyle/>
           <a:p>
-            <a:pPr marL="0" indent="0" algn="l">
-              <a:buNone/>
-            </a:pPr>
-            <a:r>
-              <a:rPr lang="en-US" sz="1100" b="1" kern="0" spc="300" dirty="0">
+            <a:pPr algn="l" indent="0" marL="0">
+              <a:buNone/>
+            </a:pPr>
+            <a:r>
+              <a:rPr lang="en-US" sz="1100" b="1" spc="300" kern="0" dirty="0">
                 <a:solidFill>
                   <a:srgbClr val="5C7186"/>
                 </a:solidFill>
@@ -6627,7 +6571,7 @@
           <a:bodyPr wrap="square" lIns="0" tIns="0" rIns="0" bIns="0" rtlCol="0" anchor="ctr"/>
           <a:lstStyle/>
           <a:p>
-            <a:pPr marL="0" indent="0" algn="l">
+            <a:pPr algn="l" indent="0" marL="0">
               <a:buNone/>
             </a:pPr>
             <a:r>
@@ -6654,7 +6598,7 @@
         <p:spPr>
           <a:xfrm>
             <a:off x="685800" y="1828800"/>
-            <a:ext cx="5303520" cy="498348"/>
+            <a:ext cx="5303520" cy="649224"/>
           </a:xfrm>
           <a:prstGeom prst="rect">
             <a:avLst/>
@@ -6666,7 +6610,7 @@
           <a:bodyPr wrap="square" lIns="0" tIns="0" rIns="0" bIns="0" rtlCol="0" anchor="t"/>
           <a:lstStyle/>
           <a:p>
-            <a:pPr marL="0" indent="0">
+            <a:pPr indent="0" marL="0">
               <a:lnSpc>
                 <a:spcPct val="105000"/>
               </a:lnSpc>
@@ -6681,10 +6625,41 @@
                 <a:ea typeface="Arial" pitchFamily="34" charset="-122"/>
                 <a:cs typeface="Arial" pitchFamily="34" charset="-120"/>
               </a:rPr>
-              <a:t>Ahmad, M.O., Mandić, V., Taušan, N., Katin, A. and Herath, P. (2026) 'Technical debt is not just technical: An industrial case study in large agile software development', </a:t>
-            </a:r>
-            <a:r>
-              <a:rPr lang="en-US" sz="950" i="1" dirty="0">
+              <a:t>Ahmad, M.O., Mandić, V., Taušan, N., Katin, A. and Herath, P. (2026) 'Technical debt is not just technical: An industrial case study in large agile software development', Journal of Systems and Software, 234, p. 112719. Available at: https://doi.org/10.1016/j.jss.2025.112719.</a:t>
+            </a:r>
+            <a:endParaRPr lang="en-US" sz="950" dirty="0"/>
+          </a:p>
+        </p:txBody>
+      </p:sp>
+      <p:sp>
+        <p:nvSpPr>
+          <p:cNvPr id="5" name="Text 3"/>
+          <p:cNvSpPr/>
+          <p:nvPr/>
+        </p:nvSpPr>
+        <p:spPr>
+          <a:xfrm>
+            <a:off x="685800" y="2606040"/>
+            <a:ext cx="5303520" cy="498348"/>
+          </a:xfrm>
+          <a:prstGeom prst="rect">
+            <a:avLst/>
+          </a:prstGeom>
+          <a:noFill/>
+          <a:ln/>
+        </p:spPr>
+        <p:txBody>
+          <a:bodyPr wrap="square" lIns="0" tIns="0" rIns="0" bIns="0" rtlCol="0" anchor="t"/>
+          <a:lstStyle/>
+          <a:p>
+            <a:pPr indent="0" marL="0">
+              <a:lnSpc>
+                <a:spcPct val="105000"/>
+              </a:lnSpc>
+              <a:buNone/>
+            </a:pPr>
+            <a:r>
+              <a:rPr lang="en-US" sz="950" dirty="0">
                 <a:solidFill>
                   <a:srgbClr val="2A3F55"/>
                 </a:solidFill>
@@ -6692,8 +6667,39 @@
                 <a:ea typeface="Arial" pitchFamily="34" charset="-122"/>
                 <a:cs typeface="Arial" pitchFamily="34" charset="-120"/>
               </a:rPr>
-              <a:t>Journal of Systems and Software</a:t>
-            </a:r>
+              <a:t>Albarak, M., Bahsoon, R., Ozkaya, I. and Nord, R.L. (2022) 'Managing Technical Debt in Database Normalization', IEEE Transactions on Software Engineering, 48(3), pp. 755–772. Available at: https://doi.org/10.1109/TSE.2020.3001339.</a:t>
+            </a:r>
+            <a:endParaRPr lang="en-US" sz="950" dirty="0"/>
+          </a:p>
+        </p:txBody>
+      </p:sp>
+      <p:sp>
+        <p:nvSpPr>
+          <p:cNvPr id="6" name="Text 4"/>
+          <p:cNvSpPr/>
+          <p:nvPr/>
+        </p:nvSpPr>
+        <p:spPr>
+          <a:xfrm>
+            <a:off x="685800" y="3232404"/>
+            <a:ext cx="5303520" cy="498348"/>
+          </a:xfrm>
+          <a:prstGeom prst="rect">
+            <a:avLst/>
+          </a:prstGeom>
+          <a:noFill/>
+          <a:ln/>
+        </p:spPr>
+        <p:txBody>
+          <a:bodyPr wrap="square" lIns="0" tIns="0" rIns="0" bIns="0" rtlCol="0" anchor="t"/>
+          <a:lstStyle/>
+          <a:p>
+            <a:pPr indent="0" marL="0">
+              <a:lnSpc>
+                <a:spcPct val="105000"/>
+              </a:lnSpc>
+              <a:buNone/>
+            </a:pPr>
             <a:r>
               <a:rPr lang="en-US" sz="950" dirty="0">
                 <a:solidFill>
@@ -6703,7 +6709,7 @@
                 <a:ea typeface="Arial" pitchFamily="34" charset="-122"/>
                 <a:cs typeface="Arial" pitchFamily="34" charset="-120"/>
               </a:rPr>
-              <a:t>, 234, p. 112719. Available at: https://doi.org/10.1016/j.jss.2025.112719.</a:t>
+              <a:t>Banker, R., Liang, Y. and Ramasubbu, N. (2020) 'Technical Debt and Firm Performance', Management Science, 67(5), pp. 3174–3194. Available at: https://doi.org/10.1287/mnsc.2019.3542.</a:t>
             </a:r>
             <a:endParaRPr lang="en-US" sz="950" dirty="0"/>
           </a:p>
@@ -6711,14 +6717,14 @@
       </p:sp>
       <p:sp>
         <p:nvSpPr>
-          <p:cNvPr id="5" name="Text 3"/>
-          <p:cNvSpPr/>
-          <p:nvPr/>
-        </p:nvSpPr>
-        <p:spPr>
-          <a:xfrm>
-            <a:off x="685800" y="2549488"/>
-            <a:ext cx="5303520" cy="498348"/>
+          <p:cNvPr id="7" name="Text 5"/>
+          <p:cNvSpPr/>
+          <p:nvPr/>
+        </p:nvSpPr>
+        <p:spPr>
+          <a:xfrm>
+            <a:off x="685800" y="3858768"/>
+            <a:ext cx="5303520" cy="800100"/>
           </a:xfrm>
           <a:prstGeom prst="rect">
             <a:avLst/>
@@ -6730,7 +6736,7 @@
           <a:bodyPr wrap="square" lIns="0" tIns="0" rIns="0" bIns="0" rtlCol="0" anchor="t"/>
           <a:lstStyle/>
           <a:p>
-            <a:pPr marL="0" indent="0">
+            <a:pPr indent="0" marL="0">
               <a:lnSpc>
                 <a:spcPct val="105000"/>
               </a:lnSpc>
@@ -6745,10 +6751,41 @@
                 <a:ea typeface="Arial" pitchFamily="34" charset="-122"/>
                 <a:cs typeface="Arial" pitchFamily="34" charset="-120"/>
               </a:rPr>
-              <a:t>Albarak, M., Bahsoon, R., Ozkaya, I. and Nord, R.L. (2022) 'Managing Technical Debt in Database Normalization', </a:t>
-            </a:r>
-            <a:r>
-              <a:rPr lang="en-US" sz="950" i="1" dirty="0">
+              <a:t>de Toledo, S.S., Martini, A., Sjøberg, D.I.K., Przybyszewska, A. and Frandsen, J.S. (2021) 'Reducing Incidents in Microservices by Repaying Architectural Technical Debt', 2021 47th Euromicro Conference on Software Engineering and Advanced Applications (SEAA). 2021 47th Euromicro Conference on Software Engineering and Advanced Applications (SEAA), pp. 196–205. Available at: https://doi.org/10.1109/SEAA53835.2021.00033.</a:t>
+            </a:r>
+            <a:endParaRPr lang="en-US" sz="950" dirty="0"/>
+          </a:p>
+        </p:txBody>
+      </p:sp>
+      <p:sp>
+        <p:nvSpPr>
+          <p:cNvPr id="8" name="Text 6"/>
+          <p:cNvSpPr/>
+          <p:nvPr/>
+        </p:nvSpPr>
+        <p:spPr>
+          <a:xfrm>
+            <a:off x="685800" y="4786884"/>
+            <a:ext cx="5303520" cy="498348"/>
+          </a:xfrm>
+          <a:prstGeom prst="rect">
+            <a:avLst/>
+          </a:prstGeom>
+          <a:noFill/>
+          <a:ln/>
+        </p:spPr>
+        <p:txBody>
+          <a:bodyPr wrap="square" lIns="0" tIns="0" rIns="0" bIns="0" rtlCol="0" anchor="t"/>
+          <a:lstStyle/>
+          <a:p>
+            <a:pPr indent="0" marL="0">
+              <a:lnSpc>
+                <a:spcPct val="105000"/>
+              </a:lnSpc>
+              <a:buNone/>
+            </a:pPr>
+            <a:r>
+              <a:rPr lang="en-US" sz="950" dirty="0">
                 <a:solidFill>
                   <a:srgbClr val="2A3F55"/>
                 </a:solidFill>
@@ -6756,8 +6793,39 @@
                 <a:ea typeface="Arial" pitchFamily="34" charset="-122"/>
                 <a:cs typeface="Arial" pitchFamily="34" charset="-120"/>
               </a:rPr>
-              <a:t>IEEE Transactions on Software Engineering</a:t>
-            </a:r>
+              <a:t>FINMA Circular 2023/1 - Operational risks and resilience – banks (2024). Available at: https://www.finma.ch/en/~/media/finma/dokumente/dokumentencenter/myfinma/rundschreiben/finma-rs-2023-01-20221207.pdf (Accessed: March 29, 2026).</a:t>
+            </a:r>
+            <a:endParaRPr lang="en-US" sz="950" dirty="0"/>
+          </a:p>
+        </p:txBody>
+      </p:sp>
+      <p:sp>
+        <p:nvSpPr>
+          <p:cNvPr id="9" name="Text 7"/>
+          <p:cNvSpPr/>
+          <p:nvPr/>
+        </p:nvSpPr>
+        <p:spPr>
+          <a:xfrm>
+            <a:off x="685800" y="5413248"/>
+            <a:ext cx="5303520" cy="498348"/>
+          </a:xfrm>
+          <a:prstGeom prst="rect">
+            <a:avLst/>
+          </a:prstGeom>
+          <a:noFill/>
+          <a:ln/>
+        </p:spPr>
+        <p:txBody>
+          <a:bodyPr wrap="square" lIns="0" tIns="0" rIns="0" bIns="0" rtlCol="0" anchor="t"/>
+          <a:lstStyle/>
+          <a:p>
+            <a:pPr indent="0" marL="0">
+              <a:lnSpc>
+                <a:spcPct val="105000"/>
+              </a:lnSpc>
+              <a:buNone/>
+            </a:pPr>
             <a:r>
               <a:rPr lang="en-US" sz="950" dirty="0">
                 <a:solidFill>
@@ -6767,7 +6835,7 @@
                 <a:ea typeface="Arial" pitchFamily="34" charset="-122"/>
                 <a:cs typeface="Arial" pitchFamily="34" charset="-120"/>
               </a:rPr>
-              <a:t>, 48(3), pp. 755–772. Available at: https://doi.org/10.1109/TSE.2020.3001339.</a:t>
+              <a:t>Forsgren, N., Humble, J. and Kim, G. (2018) Accelerate: The Science of Lean Software and DevOps: Building and Scaling High Performing Technology Organizations. Portland, OR: IT Revolution Press.</a:t>
             </a:r>
             <a:endParaRPr lang="en-US" sz="950" dirty="0"/>
           </a:p>
@@ -6775,14 +6843,14 @@
       </p:sp>
       <p:sp>
         <p:nvSpPr>
-          <p:cNvPr id="6" name="Text 4"/>
-          <p:cNvSpPr/>
-          <p:nvPr/>
-        </p:nvSpPr>
-        <p:spPr>
-          <a:xfrm>
-            <a:off x="685800" y="3270176"/>
-            <a:ext cx="5303520" cy="328481"/>
+          <p:cNvPr id="10" name="Text 8"/>
+          <p:cNvSpPr/>
+          <p:nvPr/>
+        </p:nvSpPr>
+        <p:spPr>
+          <a:xfrm>
+            <a:off x="6217920" y="1828800"/>
+            <a:ext cx="5303520" cy="498348"/>
           </a:xfrm>
           <a:prstGeom prst="rect">
             <a:avLst/>
@@ -6794,7 +6862,7 @@
           <a:bodyPr wrap="square" lIns="0" tIns="0" rIns="0" bIns="0" rtlCol="0" anchor="t"/>
           <a:lstStyle/>
           <a:p>
-            <a:pPr marL="0" indent="0">
+            <a:pPr indent="0" marL="0">
               <a:lnSpc>
                 <a:spcPct val="105000"/>
               </a:lnSpc>
@@ -6809,7 +6877,7 @@
                 <a:ea typeface="Arial" pitchFamily="34" charset="-122"/>
                 <a:cs typeface="Arial" pitchFamily="34" charset="-120"/>
               </a:rPr>
-              <a:t>Banker, R., Liang, Y. and Ramasubbu, N. (2020) 'Technical Debt and Firm Performance', Management Science, 67(5), pp. 3174–3194. Available at: https://doi.org/10.1287/mnsc.2019.3542.</a:t>
+              <a:t>García-Cascales, M.S. and Lamata, M.T. (2012) 'On rank reversal and TOPSIS method', Mathematical and Computer Modelling, 56(5), pp. 123–132. Available at: https://doi.org/10.1016/j.mcm.2011.12.022.</a:t>
             </a:r>
             <a:endParaRPr lang="en-US" sz="950" dirty="0"/>
           </a:p>
@@ -6817,14 +6885,14 @@
       </p:sp>
       <p:sp>
         <p:nvSpPr>
-          <p:cNvPr id="7" name="Text 5"/>
-          <p:cNvSpPr/>
-          <p:nvPr/>
-        </p:nvSpPr>
-        <p:spPr>
-          <a:xfrm>
-            <a:off x="685800" y="3820997"/>
-            <a:ext cx="5303520" cy="649224"/>
+          <p:cNvPr id="11" name="Text 9"/>
+          <p:cNvSpPr/>
+          <p:nvPr/>
+        </p:nvSpPr>
+        <p:spPr>
+          <a:xfrm>
+            <a:off x="6217920" y="2455164"/>
+            <a:ext cx="5303520" cy="498348"/>
           </a:xfrm>
           <a:prstGeom prst="rect">
             <a:avLst/>
@@ -6836,7 +6904,7 @@
           <a:bodyPr wrap="square" lIns="0" tIns="0" rIns="0" bIns="0" rtlCol="0" anchor="t"/>
           <a:lstStyle/>
           <a:p>
-            <a:pPr marL="0" indent="0">
+            <a:pPr indent="0" marL="0">
               <a:lnSpc>
                 <a:spcPct val="105000"/>
               </a:lnSpc>
@@ -6851,10 +6919,41 @@
                 <a:ea typeface="Arial" pitchFamily="34" charset="-122"/>
                 <a:cs typeface="Arial" pitchFamily="34" charset="-120"/>
               </a:rPr>
-              <a:t>de Toledo, S.S., Martini, A., Sjøberg, D.I.K., Przybyszewska, A. and Frandsen, J.S. (2021) 'Reducing Incidents in Microservices by Repaying Architectural Technical Debt', </a:t>
-            </a:r>
-            <a:r>
-              <a:rPr lang="en-US" sz="950" i="1" dirty="0">
+              <a:t>Hevner, A.R., March, S.T., Park, J. and Ram, S. (2004) 'Design Science in Information Systems Research', MIS Quarterly, 28(1), pp. 75–105. Available at: https://doi.org/10.2307/25148625.</a:t>
+            </a:r>
+            <a:endParaRPr lang="en-US" sz="950" dirty="0"/>
+          </a:p>
+        </p:txBody>
+      </p:sp>
+      <p:sp>
+        <p:nvSpPr>
+          <p:cNvPr id="12" name="Text 10"/>
+          <p:cNvSpPr/>
+          <p:nvPr/>
+        </p:nvSpPr>
+        <p:spPr>
+          <a:xfrm>
+            <a:off x="6217920" y="3081528"/>
+            <a:ext cx="5303520" cy="649224"/>
+          </a:xfrm>
+          <a:prstGeom prst="rect">
+            <a:avLst/>
+          </a:prstGeom>
+          <a:noFill/>
+          <a:ln/>
+        </p:spPr>
+        <p:txBody>
+          <a:bodyPr wrap="square" lIns="0" tIns="0" rIns="0" bIns="0" rtlCol="0" anchor="t"/>
+          <a:lstStyle/>
+          <a:p>
+            <a:pPr indent="0" marL="0">
+              <a:lnSpc>
+                <a:spcPct val="105000"/>
+              </a:lnSpc>
+              <a:buNone/>
+            </a:pPr>
+            <a:r>
+              <a:rPr lang="en-US" sz="950" dirty="0">
                 <a:solidFill>
                   <a:srgbClr val="2A3F55"/>
                 </a:solidFill>
@@ -6862,8 +6961,39 @@
                 <a:ea typeface="Arial" pitchFamily="34" charset="-122"/>
                 <a:cs typeface="Arial" pitchFamily="34" charset="-120"/>
               </a:rPr>
-              <a:t>2021 47th Euromicro Conference on Software Engineering and Advanced Applications (SEAA)</a:t>
-            </a:r>
+              <a:t>Lenarduzzi, V., Besker, T., Taibi, D., Martini, A. and Arcelli Fontana, F. (2021) 'A systematic literature review on Technical Debt prioritization: Strategies, processes, factors, and tools', Journal of Systems and Software, 171, p. 110827. Available at: https://doi.org/10.1016/j.jss.2020.110827.</a:t>
+            </a:r>
+            <a:endParaRPr lang="en-US" sz="950" dirty="0"/>
+          </a:p>
+        </p:txBody>
+      </p:sp>
+      <p:sp>
+        <p:nvSpPr>
+          <p:cNvPr id="13" name="Text 11"/>
+          <p:cNvSpPr/>
+          <p:nvPr/>
+        </p:nvSpPr>
+        <p:spPr>
+          <a:xfrm>
+            <a:off x="6217920" y="3858768"/>
+            <a:ext cx="5303520" cy="498348"/>
+          </a:xfrm>
+          <a:prstGeom prst="rect">
+            <a:avLst/>
+          </a:prstGeom>
+          <a:noFill/>
+          <a:ln/>
+        </p:spPr>
+        <p:txBody>
+          <a:bodyPr wrap="square" lIns="0" tIns="0" rIns="0" bIns="0" rtlCol="0" anchor="t"/>
+          <a:lstStyle/>
+          <a:p>
+            <a:pPr indent="0" marL="0">
+              <a:lnSpc>
+                <a:spcPct val="105000"/>
+              </a:lnSpc>
+              <a:buNone/>
+            </a:pPr>
             <a:r>
               <a:rPr lang="en-US" sz="950" dirty="0">
                 <a:solidFill>
@@ -6873,7 +7003,7 @@
                 <a:ea typeface="Arial" pitchFamily="34" charset="-122"/>
                 <a:cs typeface="Arial" pitchFamily="34" charset="-120"/>
               </a:rPr>
-              <a:t>, pp. 196–205. Available at: https://doi.org/10.1109/SEAA53835.2021.00033.</a:t>
+              <a:t>Nord, R.L., Ozkaya, I. and Woody, C. (2021) Examples of Technical Debt’s Cybersecurity Impact. Pittsburgh, PA, USA: Carnegie Mellon University, pp. 1–21. Available at: https://apps.dtic.mil/sti/trecms/pdf/AD1144728.pdf (Accessed: April 27, 2026).</a:t>
             </a:r>
             <a:endParaRPr lang="en-US" sz="950" dirty="0"/>
           </a:p>
@@ -6881,14 +7011,14 @@
       </p:sp>
       <p:sp>
         <p:nvSpPr>
-          <p:cNvPr id="8" name="Text 6"/>
-          <p:cNvSpPr/>
-          <p:nvPr/>
-        </p:nvSpPr>
-        <p:spPr>
-          <a:xfrm>
-            <a:off x="685800" y="4692561"/>
-            <a:ext cx="5303520" cy="498348"/>
+          <p:cNvPr id="14" name="Text 12"/>
+          <p:cNvSpPr/>
+          <p:nvPr/>
+        </p:nvSpPr>
+        <p:spPr>
+          <a:xfrm>
+            <a:off x="6217920" y="4485132"/>
+            <a:ext cx="5303520" cy="649224"/>
           </a:xfrm>
           <a:prstGeom prst="rect">
             <a:avLst/>
@@ -6900,14 +7030,14 @@
           <a:bodyPr wrap="square" lIns="0" tIns="0" rIns="0" bIns="0" rtlCol="0" anchor="t"/>
           <a:lstStyle/>
           <a:p>
-            <a:pPr marL="0" indent="0">
+            <a:pPr indent="0" marL="0">
               <a:lnSpc>
                 <a:spcPct val="105000"/>
               </a:lnSpc>
               <a:buNone/>
             </a:pPr>
             <a:r>
-              <a:rPr lang="en-US" sz="950" i="1" dirty="0">
+              <a:rPr lang="en-US" sz="950" dirty="0">
                 <a:solidFill>
                   <a:srgbClr val="2A3F55"/>
                 </a:solidFill>
@@ -6915,8 +7045,39 @@
                 <a:ea typeface="Arial" pitchFamily="34" charset="-122"/>
                 <a:cs typeface="Arial" pitchFamily="34" charset="-120"/>
               </a:rPr>
-              <a:t>FINMA Circular 2023/1 - Operational risks and resilience – banks </a:t>
-            </a:r>
+              <a:t>Tizio, G.D., Armellini, M. and Massacci, F. (2023) 'Software Updates Strategies: A Quantitative Evaluation Against Advanced Persistent Threats', IEEE Transactions on Software Engineering, 49(3), pp. 1359–1373. Available at: https://doi.org/10.1109/TSE.2022.3176674.</a:t>
+            </a:r>
+            <a:endParaRPr lang="en-US" sz="950" dirty="0"/>
+          </a:p>
+        </p:txBody>
+      </p:sp>
+      <p:sp>
+        <p:nvSpPr>
+          <p:cNvPr id="15" name="Text 13"/>
+          <p:cNvSpPr/>
+          <p:nvPr/>
+        </p:nvSpPr>
+        <p:spPr>
+          <a:xfrm>
+            <a:off x="6217920" y="5262372"/>
+            <a:ext cx="5303520" cy="498348"/>
+          </a:xfrm>
+          <a:prstGeom prst="rect">
+            <a:avLst/>
+          </a:prstGeom>
+          <a:noFill/>
+          <a:ln/>
+        </p:spPr>
+        <p:txBody>
+          <a:bodyPr wrap="square" lIns="0" tIns="0" rIns="0" bIns="0" rtlCol="0" anchor="t"/>
+          <a:lstStyle/>
+          <a:p>
+            <a:pPr indent="0" marL="0">
+              <a:lnSpc>
+                <a:spcPct val="105000"/>
+              </a:lnSpc>
+              <a:buNone/>
+            </a:pPr>
             <a:r>
               <a:rPr lang="en-US" sz="950" dirty="0">
                 <a:solidFill>
@@ -6926,455 +7087,7 @@
                 <a:ea typeface="Arial" pitchFamily="34" charset="-122"/>
                 <a:cs typeface="Arial" pitchFamily="34" charset="-120"/>
               </a:rPr>
-              <a:t>(2024). Available at: https://www.finma.ch/en/~/media/finma/dokumente/dokumentencenter/myfinma/rundschreiben/finma-rs-2023-01-20221207.pdf (Accessed: March 29, 2026).</a:t>
-            </a:r>
-            <a:endParaRPr lang="en-US" sz="950" dirty="0"/>
-          </a:p>
-        </p:txBody>
-      </p:sp>
-      <p:sp>
-        <p:nvSpPr>
-          <p:cNvPr id="9" name="Text 7"/>
-          <p:cNvSpPr/>
-          <p:nvPr/>
-        </p:nvSpPr>
-        <p:spPr>
-          <a:xfrm>
-            <a:off x="685800" y="5413248"/>
-            <a:ext cx="5303520" cy="498348"/>
-          </a:xfrm>
-          <a:prstGeom prst="rect">
-            <a:avLst/>
-          </a:prstGeom>
-          <a:noFill/>
-          <a:ln/>
-        </p:spPr>
-        <p:txBody>
-          <a:bodyPr wrap="square" lIns="0" tIns="0" rIns="0" bIns="0" rtlCol="0" anchor="t"/>
-          <a:lstStyle/>
-          <a:p>
-            <a:pPr marL="0" indent="0">
-              <a:lnSpc>
-                <a:spcPct val="105000"/>
-              </a:lnSpc>
-              <a:buNone/>
-            </a:pPr>
-            <a:r>
-              <a:rPr lang="en-US" sz="950" dirty="0">
-                <a:solidFill>
-                  <a:srgbClr val="2A3F55"/>
-                </a:solidFill>
-                <a:latin typeface="Arial" pitchFamily="34" charset="0"/>
-                <a:ea typeface="Arial" pitchFamily="34" charset="-122"/>
-                <a:cs typeface="Arial" pitchFamily="34" charset="-120"/>
-              </a:rPr>
-              <a:t>Forsgren, N., Humble, J. and Kim, G. (2018) </a:t>
-            </a:r>
-            <a:r>
-              <a:rPr lang="en-US" sz="950" i="1" dirty="0">
-                <a:solidFill>
-                  <a:srgbClr val="2A3F55"/>
-                </a:solidFill>
-                <a:latin typeface="Arial" pitchFamily="34" charset="0"/>
-                <a:ea typeface="Arial" pitchFamily="34" charset="-122"/>
-                <a:cs typeface="Arial" pitchFamily="34" charset="-120"/>
-              </a:rPr>
-              <a:t>Accelerate: The Science of Lean Software and DevOps: Building and Scaling High Performing Technology Organizations</a:t>
-            </a:r>
-            <a:r>
-              <a:rPr lang="en-US" sz="950" dirty="0">
-                <a:solidFill>
-                  <a:srgbClr val="2A3F55"/>
-                </a:solidFill>
-                <a:latin typeface="Arial" pitchFamily="34" charset="0"/>
-                <a:ea typeface="Arial" pitchFamily="34" charset="-122"/>
-                <a:cs typeface="Arial" pitchFamily="34" charset="-120"/>
-              </a:rPr>
-              <a:t>. Portland, OR: IT Revolution Press.</a:t>
-            </a:r>
-            <a:endParaRPr lang="en-US" sz="950" dirty="0"/>
-          </a:p>
-        </p:txBody>
-      </p:sp>
-      <p:sp>
-        <p:nvSpPr>
-          <p:cNvPr id="10" name="Text 8"/>
-          <p:cNvSpPr/>
-          <p:nvPr/>
-        </p:nvSpPr>
-        <p:spPr>
-          <a:xfrm>
-            <a:off x="6217920" y="1831614"/>
-            <a:ext cx="5303520" cy="498348"/>
-          </a:xfrm>
-          <a:prstGeom prst="rect">
-            <a:avLst/>
-          </a:prstGeom>
-          <a:noFill/>
-          <a:ln/>
-        </p:spPr>
-        <p:txBody>
-          <a:bodyPr wrap="square" lIns="0" tIns="0" rIns="0" bIns="0" rtlCol="0" anchor="t"/>
-          <a:lstStyle/>
-          <a:p>
-            <a:pPr marL="0" indent="0">
-              <a:lnSpc>
-                <a:spcPct val="105000"/>
-              </a:lnSpc>
-              <a:buNone/>
-            </a:pPr>
-            <a:r>
-              <a:rPr lang="en-US" sz="950" dirty="0">
-                <a:solidFill>
-                  <a:srgbClr val="2A3F55"/>
-                </a:solidFill>
-                <a:latin typeface="Arial" pitchFamily="34" charset="0"/>
-                <a:ea typeface="Arial" pitchFamily="34" charset="-122"/>
-                <a:cs typeface="Arial" pitchFamily="34" charset="-120"/>
-              </a:rPr>
-              <a:t>García-Cascales, M.S. and Lamata, M.T. (2012) 'On rank reversal and TOPSIS method', </a:t>
-            </a:r>
-            <a:r>
-              <a:rPr lang="en-US" sz="950" i="1" dirty="0">
-                <a:solidFill>
-                  <a:srgbClr val="2A3F55"/>
-                </a:solidFill>
-                <a:latin typeface="Arial" pitchFamily="34" charset="0"/>
-                <a:ea typeface="Arial" pitchFamily="34" charset="-122"/>
-                <a:cs typeface="Arial" pitchFamily="34" charset="-120"/>
-              </a:rPr>
-              <a:t>Mathematical and Computer Modelling</a:t>
-            </a:r>
-            <a:r>
-              <a:rPr lang="en-US" sz="950" dirty="0">
-                <a:solidFill>
-                  <a:srgbClr val="2A3F55"/>
-                </a:solidFill>
-                <a:latin typeface="Arial" pitchFamily="34" charset="0"/>
-                <a:ea typeface="Arial" pitchFamily="34" charset="-122"/>
-                <a:cs typeface="Arial" pitchFamily="34" charset="-120"/>
-              </a:rPr>
-              <a:t>, 56(5), pp. 123–132. Available at: https://doi.org/10.1016/j.mcm.2011.12.022.</a:t>
-            </a:r>
-            <a:endParaRPr lang="en-US" sz="950" dirty="0"/>
-          </a:p>
-        </p:txBody>
-      </p:sp>
-      <p:sp>
-        <p:nvSpPr>
-          <p:cNvPr id="11" name="Text 9"/>
-          <p:cNvSpPr/>
-          <p:nvPr/>
-        </p:nvSpPr>
-        <p:spPr>
-          <a:xfrm>
-            <a:off x="6217920" y="2549207"/>
-            <a:ext cx="5303520" cy="331998"/>
-          </a:xfrm>
-          <a:prstGeom prst="rect">
-            <a:avLst/>
-          </a:prstGeom>
-          <a:noFill/>
-          <a:ln/>
-        </p:spPr>
-        <p:txBody>
-          <a:bodyPr wrap="square" lIns="0" tIns="0" rIns="0" bIns="0" rtlCol="0" anchor="t"/>
-          <a:lstStyle/>
-          <a:p>
-            <a:pPr marL="0" indent="0">
-              <a:lnSpc>
-                <a:spcPct val="105000"/>
-              </a:lnSpc>
-              <a:buNone/>
-            </a:pPr>
-            <a:r>
-              <a:rPr lang="en-US" sz="950" dirty="0">
-                <a:solidFill>
-                  <a:srgbClr val="2A3F55"/>
-                </a:solidFill>
-                <a:latin typeface="Arial" pitchFamily="34" charset="0"/>
-                <a:ea typeface="Arial" pitchFamily="34" charset="-122"/>
-                <a:cs typeface="Arial" pitchFamily="34" charset="-120"/>
-              </a:rPr>
-              <a:t>Hevner, A.R., March, S.T., Park, J. and Ram, S. (2004) 'Design Science in Information Systems Research', </a:t>
-            </a:r>
-            <a:r>
-              <a:rPr lang="en-US" sz="950" i="1" dirty="0">
-                <a:solidFill>
-                  <a:srgbClr val="2A3F55"/>
-                </a:solidFill>
-                <a:latin typeface="Arial" pitchFamily="34" charset="0"/>
-                <a:ea typeface="Arial" pitchFamily="34" charset="-122"/>
-                <a:cs typeface="Arial" pitchFamily="34" charset="-120"/>
-              </a:rPr>
-              <a:t>MIS Quarterly</a:t>
-            </a:r>
-            <a:r>
-              <a:rPr lang="en-US" sz="950" dirty="0">
-                <a:solidFill>
-                  <a:srgbClr val="2A3F55"/>
-                </a:solidFill>
-                <a:latin typeface="Arial" pitchFamily="34" charset="0"/>
-                <a:ea typeface="Arial" pitchFamily="34" charset="-122"/>
-                <a:cs typeface="Arial" pitchFamily="34" charset="-120"/>
-              </a:rPr>
-              <a:t>, 28(1), pp. 75–105. Available at: https://doi.org/10.2307/25148625.</a:t>
-            </a:r>
-            <a:endParaRPr lang="en-US" sz="950" dirty="0"/>
-          </a:p>
-        </p:txBody>
-      </p:sp>
-      <p:sp>
-        <p:nvSpPr>
-          <p:cNvPr id="12" name="Text 10"/>
-          <p:cNvSpPr/>
-          <p:nvPr/>
-        </p:nvSpPr>
-        <p:spPr>
-          <a:xfrm>
-            <a:off x="6217920" y="3100309"/>
-            <a:ext cx="5303520" cy="498348"/>
-          </a:xfrm>
-          <a:prstGeom prst="rect">
-            <a:avLst/>
-          </a:prstGeom>
-          <a:noFill/>
-          <a:ln/>
-        </p:spPr>
-        <p:txBody>
-          <a:bodyPr wrap="square" lIns="0" tIns="0" rIns="0" bIns="0" rtlCol="0" anchor="t"/>
-          <a:lstStyle/>
-          <a:p>
-            <a:pPr marL="0" indent="0">
-              <a:lnSpc>
-                <a:spcPct val="105000"/>
-              </a:lnSpc>
-              <a:buNone/>
-            </a:pPr>
-            <a:r>
-              <a:rPr lang="en-US" sz="950" dirty="0">
-                <a:solidFill>
-                  <a:srgbClr val="2A3F55"/>
-                </a:solidFill>
-                <a:latin typeface="Arial" pitchFamily="34" charset="0"/>
-                <a:ea typeface="Arial" pitchFamily="34" charset="-122"/>
-                <a:cs typeface="Arial" pitchFamily="34" charset="-120"/>
-              </a:rPr>
-              <a:t>Lenarduzzi, V., Besker, T., Taibi, D., Martini, A. and Arcelli Fontana, F. (2021) 'A systematic literature review on Technical Debt prioritization: Strategies, processes, factors, and tools', </a:t>
-            </a:r>
-            <a:r>
-              <a:rPr lang="en-US" sz="950" i="1" dirty="0">
-                <a:solidFill>
-                  <a:srgbClr val="2A3F55"/>
-                </a:solidFill>
-                <a:latin typeface="Arial" pitchFamily="34" charset="0"/>
-                <a:ea typeface="Arial" pitchFamily="34" charset="-122"/>
-                <a:cs typeface="Arial" pitchFamily="34" charset="-120"/>
-              </a:rPr>
-              <a:t>Journal of Systems and Software</a:t>
-            </a:r>
-            <a:r>
-              <a:rPr lang="en-US" sz="950" dirty="0">
-                <a:solidFill>
-                  <a:srgbClr val="2A3F55"/>
-                </a:solidFill>
-                <a:latin typeface="Arial" pitchFamily="34" charset="0"/>
-                <a:ea typeface="Arial" pitchFamily="34" charset="-122"/>
-                <a:cs typeface="Arial" pitchFamily="34" charset="-120"/>
-              </a:rPr>
-              <a:t>, 171, p. 110827. Available at: https://doi.org/10.1016/j.jss.2020.110827.</a:t>
-            </a:r>
-            <a:endParaRPr lang="en-US" sz="950" dirty="0"/>
-          </a:p>
-        </p:txBody>
-      </p:sp>
-      <p:sp>
-        <p:nvSpPr>
-          <p:cNvPr id="13" name="Text 11"/>
-          <p:cNvSpPr/>
-          <p:nvPr/>
-        </p:nvSpPr>
-        <p:spPr>
-          <a:xfrm>
-            <a:off x="6217920" y="3817761"/>
-            <a:ext cx="5303520" cy="498348"/>
-          </a:xfrm>
-          <a:prstGeom prst="rect">
-            <a:avLst/>
-          </a:prstGeom>
-          <a:noFill/>
-          <a:ln/>
-        </p:spPr>
-        <p:txBody>
-          <a:bodyPr wrap="square" lIns="0" tIns="0" rIns="0" bIns="0" rtlCol="0" anchor="t"/>
-          <a:lstStyle/>
-          <a:p>
-            <a:pPr marL="0" indent="0">
-              <a:lnSpc>
-                <a:spcPct val="105000"/>
-              </a:lnSpc>
-              <a:buNone/>
-            </a:pPr>
-            <a:r>
-              <a:rPr lang="en-US" sz="950" dirty="0">
-                <a:solidFill>
-                  <a:srgbClr val="2A3F55"/>
-                </a:solidFill>
-                <a:latin typeface="Arial" pitchFamily="34" charset="0"/>
-                <a:ea typeface="Arial" pitchFamily="34" charset="-122"/>
-                <a:cs typeface="Arial" pitchFamily="34" charset="-120"/>
-              </a:rPr>
-              <a:t>Nord, R.L., Ozkaya, I. and Woody, C. (2021) </a:t>
-            </a:r>
-            <a:r>
-              <a:rPr lang="en-US" sz="950" i="1" dirty="0">
-                <a:solidFill>
-                  <a:srgbClr val="2A3F55"/>
-                </a:solidFill>
-                <a:latin typeface="Arial" pitchFamily="34" charset="0"/>
-                <a:ea typeface="Arial" pitchFamily="34" charset="-122"/>
-                <a:cs typeface="Arial" pitchFamily="34" charset="-120"/>
-              </a:rPr>
-              <a:t>Examples of Technical Debt’s Cybersecurity Impact</a:t>
-            </a:r>
-            <a:r>
-              <a:rPr lang="en-US" sz="950" dirty="0">
-                <a:solidFill>
-                  <a:srgbClr val="2A3F55"/>
-                </a:solidFill>
-                <a:latin typeface="Arial" pitchFamily="34" charset="0"/>
-                <a:ea typeface="Arial" pitchFamily="34" charset="-122"/>
-                <a:cs typeface="Arial" pitchFamily="34" charset="-120"/>
-              </a:rPr>
-              <a:t>. Pittsburgh, PA, USA: Carnegie Mellon University, pp. 1–21. Available at: https://apps.dtic.mil/sti/trecms/pdf/AD1144728.pdf (Accessed: April 27, 2026).</a:t>
-            </a:r>
-            <a:endParaRPr lang="en-US" sz="950" dirty="0"/>
-          </a:p>
-        </p:txBody>
-      </p:sp>
-      <p:sp>
-        <p:nvSpPr>
-          <p:cNvPr id="14" name="Text 12"/>
-          <p:cNvSpPr/>
-          <p:nvPr/>
-        </p:nvSpPr>
-        <p:spPr>
-          <a:xfrm>
-            <a:off x="6217920" y="4530149"/>
-            <a:ext cx="5303520" cy="498348"/>
-          </a:xfrm>
-          <a:prstGeom prst="rect">
-            <a:avLst/>
-          </a:prstGeom>
-          <a:noFill/>
-          <a:ln/>
-        </p:spPr>
-        <p:txBody>
-          <a:bodyPr wrap="square" lIns="0" tIns="0" rIns="0" bIns="0" rtlCol="0" anchor="t"/>
-          <a:lstStyle/>
-          <a:p>
-            <a:pPr marL="0" indent="0">
-              <a:lnSpc>
-                <a:spcPct val="105000"/>
-              </a:lnSpc>
-              <a:buNone/>
-            </a:pPr>
-            <a:r>
-              <a:rPr lang="en-US" sz="950" dirty="0">
-                <a:solidFill>
-                  <a:srgbClr val="2A3F55"/>
-                </a:solidFill>
-                <a:latin typeface="Arial" pitchFamily="34" charset="0"/>
-                <a:ea typeface="Arial" pitchFamily="34" charset="-122"/>
-                <a:cs typeface="Arial" pitchFamily="34" charset="-120"/>
-              </a:rPr>
-              <a:t>Tizio, G.D., Armellini, M. and Massacci, F. (2023) 'Software Updates Strategies: A Quantitative Evaluation Against Advanced Persistent Threats', </a:t>
-            </a:r>
-            <a:r>
-              <a:rPr lang="en-US" sz="950" i="1" dirty="0">
-                <a:solidFill>
-                  <a:srgbClr val="2A3F55"/>
-                </a:solidFill>
-                <a:latin typeface="Arial" pitchFamily="34" charset="0"/>
-                <a:ea typeface="Arial" pitchFamily="34" charset="-122"/>
-                <a:cs typeface="Arial" pitchFamily="34" charset="-120"/>
-              </a:rPr>
-              <a:t>IEEE Transactions on Software Engineering</a:t>
-            </a:r>
-            <a:r>
-              <a:rPr lang="en-US" sz="950" dirty="0">
-                <a:solidFill>
-                  <a:srgbClr val="2A3F55"/>
-                </a:solidFill>
-                <a:latin typeface="Arial" pitchFamily="34" charset="0"/>
-                <a:ea typeface="Arial" pitchFamily="34" charset="-122"/>
-                <a:cs typeface="Arial" pitchFamily="34" charset="-120"/>
-              </a:rPr>
-              <a:t>, 49(3), pp. 1359–1373. Available at: https://doi.org/10.1109/TSE.2022.3176674.</a:t>
-            </a:r>
-            <a:endParaRPr lang="en-US" sz="950" dirty="0"/>
-          </a:p>
-        </p:txBody>
-      </p:sp>
-      <p:sp>
-        <p:nvSpPr>
-          <p:cNvPr id="15" name="Text 13"/>
-          <p:cNvSpPr/>
-          <p:nvPr/>
-        </p:nvSpPr>
-        <p:spPr>
-          <a:xfrm>
-            <a:off x="6217920" y="5242537"/>
-            <a:ext cx="5303520" cy="498348"/>
-          </a:xfrm>
-          <a:prstGeom prst="rect">
-            <a:avLst/>
-          </a:prstGeom>
-          <a:noFill/>
-          <a:ln/>
-        </p:spPr>
-        <p:txBody>
-          <a:bodyPr wrap="square" lIns="0" tIns="0" rIns="0" bIns="0" rtlCol="0" anchor="t"/>
-          <a:lstStyle/>
-          <a:p>
-            <a:pPr marL="0" indent="0">
-              <a:lnSpc>
-                <a:spcPct val="105000"/>
-              </a:lnSpc>
-              <a:buNone/>
-            </a:pPr>
-            <a:r>
-              <a:rPr lang="en-US" sz="950" dirty="0">
-                <a:solidFill>
-                  <a:srgbClr val="2A3F55"/>
-                </a:solidFill>
-                <a:latin typeface="Arial" pitchFamily="34" charset="0"/>
-                <a:ea typeface="Arial" pitchFamily="34" charset="-122"/>
-                <a:cs typeface="Arial" pitchFamily="34" charset="-120"/>
-              </a:rPr>
-              <a:t>Yang, W. (2020) 'Ingenious Solution for the Rank Reversal Problem of TOPSIS Method', </a:t>
-            </a:r>
-            <a:r>
-              <a:rPr lang="en-US" sz="950" i="1" dirty="0">
-                <a:solidFill>
-                  <a:srgbClr val="2A3F55"/>
-                </a:solidFill>
-                <a:latin typeface="Arial" pitchFamily="34" charset="0"/>
-                <a:ea typeface="Arial" pitchFamily="34" charset="-122"/>
-                <a:cs typeface="Arial" pitchFamily="34" charset="-120"/>
-              </a:rPr>
-              <a:t>Mathematical Problems in Engineering</a:t>
-            </a:r>
-            <a:r>
-              <a:rPr lang="en-US" sz="950" dirty="0">
-                <a:solidFill>
-                  <a:srgbClr val="2A3F55"/>
-                </a:solidFill>
-                <a:latin typeface="Arial" pitchFamily="34" charset="0"/>
-                <a:ea typeface="Arial" pitchFamily="34" charset="-122"/>
-                <a:cs typeface="Arial" pitchFamily="34" charset="-120"/>
-              </a:rPr>
-              <a:t>, 2020(1), p. 9676518. Available at: https://doi.org/10.1155/2020/9676518.</a:t>
+              <a:t>Yang, W. (2020) 'Ingenious Solution for the Rank Reversal Problem of TOPSIS Method', Mathematical Problems in Engineering, 2020(1), p. 9676518. Available at: https://doi.org/10.1155/2020/9676518.</a:t>
             </a:r>
             <a:endParaRPr lang="en-US" sz="950" dirty="0"/>
           </a:p>
@@ -7396,7 +7109,6 @@
         <a:solidFill>
           <a:srgbClr val="FFFFFF"/>
         </a:solidFill>
-        <a:effectLst/>
       </p:bgPr>
     </p:bg>
     <p:spTree>
@@ -7434,11 +7146,11 @@
           <a:bodyPr wrap="square" lIns="0" tIns="0" rIns="0" bIns="0" rtlCol="0" anchor="ctr"/>
           <a:lstStyle/>
           <a:p>
-            <a:pPr marL="0" indent="0" algn="l">
-              <a:buNone/>
-            </a:pPr>
-            <a:r>
-              <a:rPr lang="en-US" sz="1100" b="1" kern="0" spc="300" dirty="0">
+            <a:pPr algn="l" indent="0" marL="0">
+              <a:buNone/>
+            </a:pPr>
+            <a:r>
+              <a:rPr lang="en-US" sz="1100" b="1" spc="300" kern="0" dirty="0">
                 <a:solidFill>
                   <a:srgbClr val="5C7186"/>
                 </a:solidFill>
@@ -7473,7 +7185,7 @@
           <a:bodyPr wrap="square" lIns="0" tIns="0" rIns="0" bIns="0" rtlCol="0" anchor="ctr"/>
           <a:lstStyle/>
           <a:p>
-            <a:pPr marL="0" indent="0" algn="l">
+            <a:pPr algn="l" indent="0" marL="0">
               <a:buNone/>
             </a:pPr>
             <a:r>
@@ -7604,20 +7316,13 @@
           </a:solidFill>
           <a:ln/>
           <a:effectLst>
-            <a:outerShdw blurRad="76200" dist="25400" dir="5400000" algn="bl" rotWithShape="0">
+            <a:outerShdw sx="100000" sy="100000" kx="0" ky="0" algn="bl" rotWithShape="0" blurRad="76200" dist="25400" dir="5400000">
               <a:srgbClr val="9AA7B2">
                 <a:alpha val="25000"/>
               </a:srgbClr>
             </a:outerShdw>
           </a:effectLst>
         </p:spPr>
-        <p:txBody>
-          <a:bodyPr/>
-          <a:lstStyle/>
-          <a:p>
-            <a:endParaRPr lang="en-CH"/>
-          </a:p>
-        </p:txBody>
       </p:sp>
       <p:sp>
         <p:nvSpPr>
@@ -7640,7 +7345,7 @@
           <a:bodyPr wrap="square" lIns="0" tIns="0" rIns="0" bIns="0" rtlCol="0" anchor="ctr"/>
           <a:lstStyle/>
           <a:p>
-            <a:pPr marL="0" indent="0">
+            <a:pPr indent="0" marL="0">
               <a:buNone/>
             </a:pPr>
             <a:r>
@@ -7679,7 +7384,7 @@
           <a:bodyPr wrap="square" lIns="0" tIns="0" rIns="0" bIns="0" rtlCol="0" anchor="t"/>
           <a:lstStyle/>
           <a:p>
-            <a:pPr marL="0" indent="0">
+            <a:pPr indent="0" marL="0">
               <a:buNone/>
             </a:pPr>
             <a:r>
@@ -7691,29 +7396,7 @@
                 <a:ea typeface="Arial" pitchFamily="34" charset="-122"/>
                 <a:cs typeface="Arial" pitchFamily="34" charset="-120"/>
               </a:rPr>
-              <a:t>gross return on assets per 10% more technical debt in COTS platforms (Banker </a:t>
-            </a:r>
-            <a:r>
-              <a:rPr lang="en-US" sz="1100" i="1" dirty="0">
-                <a:solidFill>
-                  <a:srgbClr val="2A3F55"/>
-                </a:solidFill>
-                <a:latin typeface="Arial" pitchFamily="34" charset="0"/>
-                <a:ea typeface="Arial" pitchFamily="34" charset="-122"/>
-                <a:cs typeface="Arial" pitchFamily="34" charset="-120"/>
-              </a:rPr>
-              <a:t>et al.</a:t>
-            </a:r>
-            <a:r>
-              <a:rPr lang="en-US" sz="1100" dirty="0">
-                <a:solidFill>
-                  <a:srgbClr val="2A3F55"/>
-                </a:solidFill>
-                <a:latin typeface="Arial" pitchFamily="34" charset="0"/>
-                <a:ea typeface="Arial" pitchFamily="34" charset="-122"/>
-                <a:cs typeface="Arial" pitchFamily="34" charset="-120"/>
-              </a:rPr>
-              <a:t>, 2020)</a:t>
+              <a:t>gross return on assets per 10% more technical debt in COTS platforms (Banker et al., 2020)</a:t>
             </a:r>
             <a:endParaRPr lang="en-US" sz="1100" dirty="0"/>
           </a:p>
@@ -7738,20 +7421,13 @@
           </a:solidFill>
           <a:ln/>
           <a:effectLst>
-            <a:outerShdw blurRad="76200" dist="25400" dir="5400000" algn="bl" rotWithShape="0">
+            <a:outerShdw sx="100000" sy="100000" kx="0" ky="0" algn="bl" rotWithShape="0" blurRad="76200" dist="25400" dir="5400000">
               <a:srgbClr val="9AA7B2">
                 <a:alpha val="25000"/>
               </a:srgbClr>
             </a:outerShdw>
           </a:effectLst>
         </p:spPr>
-        <p:txBody>
-          <a:bodyPr/>
-          <a:lstStyle/>
-          <a:p>
-            <a:endParaRPr lang="en-CH"/>
-          </a:p>
-        </p:txBody>
       </p:sp>
       <p:sp>
         <p:nvSpPr>
@@ -7762,7 +7438,7 @@
         <p:spPr>
           <a:xfrm>
             <a:off x="7040880" y="3218688"/>
-            <a:ext cx="2375682" cy="502920"/>
+            <a:ext cx="2103120" cy="502920"/>
           </a:xfrm>
           <a:prstGeom prst="rect">
             <a:avLst/>
@@ -7774,7 +7450,7 @@
           <a:bodyPr wrap="square" lIns="0" tIns="0" rIns="0" bIns="0" rtlCol="0" anchor="ctr"/>
           <a:lstStyle/>
           <a:p>
-            <a:pPr marL="0" indent="0">
+            <a:pPr indent="0" marL="0">
               <a:buNone/>
             </a:pPr>
             <a:r>
@@ -7813,6 +7489,9 @@
           <a:bodyPr wrap="square" lIns="0" tIns="0" rIns="0" bIns="0" rtlCol="0" anchor="t"/>
           <a:lstStyle/>
           <a:p>
+            <a:pPr indent="0" marL="0">
+              <a:buNone/>
+            </a:pPr>
             <a:r>
               <a:rPr lang="en-US" sz="1100" dirty="0">
                 <a:solidFill>
@@ -7822,29 +7501,7 @@
                 <a:ea typeface="Arial" pitchFamily="34" charset="-122"/>
                 <a:cs typeface="Arial" pitchFamily="34" charset="-120"/>
               </a:rPr>
-              <a:t>higher odds of compromise after one / three months of patch delay (Tizio, Armellini, and </a:t>
-            </a:r>
-            <a:r>
-              <a:rPr lang="en-US" sz="1100" dirty="0" err="1">
-                <a:solidFill>
-                  <a:srgbClr val="2A3F55"/>
-                </a:solidFill>
-                <a:latin typeface="Arial" pitchFamily="34" charset="0"/>
-                <a:ea typeface="Arial" pitchFamily="34" charset="-122"/>
-                <a:cs typeface="Arial" pitchFamily="34" charset="-120"/>
-              </a:rPr>
-              <a:t>Massacci</a:t>
-            </a:r>
-            <a:r>
-              <a:rPr lang="en-US" sz="1100" dirty="0">
-                <a:solidFill>
-                  <a:srgbClr val="2A3F55"/>
-                </a:solidFill>
-                <a:latin typeface="Arial" pitchFamily="34" charset="0"/>
-                <a:ea typeface="Arial" pitchFamily="34" charset="-122"/>
-                <a:cs typeface="Arial" pitchFamily="34" charset="-120"/>
-              </a:rPr>
-              <a:t>, 2023)</a:t>
+              <a:t>higher odds of compromise after one / three months of patch delay (Di Tizio et al., 2023)</a:t>
             </a:r>
             <a:endParaRPr lang="en-US" sz="1100" dirty="0"/>
           </a:p>
@@ -7869,20 +7526,13 @@
           </a:solidFill>
           <a:ln/>
           <a:effectLst>
-            <a:outerShdw blurRad="76200" dist="25400" dir="5400000" algn="bl" rotWithShape="0">
+            <a:outerShdw sx="100000" sy="100000" kx="0" ky="0" algn="bl" rotWithShape="0" blurRad="76200" dist="25400" dir="5400000">
               <a:srgbClr val="9AA7B2">
                 <a:alpha val="25000"/>
               </a:srgbClr>
             </a:outerShdw>
           </a:effectLst>
         </p:spPr>
-        <p:txBody>
-          <a:bodyPr/>
-          <a:lstStyle/>
-          <a:p>
-            <a:endParaRPr lang="en-CH"/>
-          </a:p>
-        </p:txBody>
       </p:sp>
       <p:sp>
         <p:nvSpPr>
@@ -7905,7 +7555,7 @@
           <a:bodyPr wrap="square" lIns="0" tIns="0" rIns="0" bIns="0" rtlCol="0" anchor="ctr"/>
           <a:lstStyle/>
           <a:p>
-            <a:pPr marL="0" indent="0">
+            <a:pPr indent="0" marL="0">
               <a:buNone/>
             </a:pPr>
             <a:r>
@@ -7944,7 +7594,7 @@
           <a:bodyPr wrap="square" lIns="0" tIns="0" rIns="0" bIns="0" rtlCol="0" anchor="t"/>
           <a:lstStyle/>
           <a:p>
-            <a:pPr marL="0" indent="0">
+            <a:pPr indent="0" marL="0">
               <a:buNone/>
             </a:pPr>
             <a:r>
@@ -7956,29 +7606,7 @@
                 <a:ea typeface="Arial" pitchFamily="34" charset="-122"/>
                 <a:cs typeface="Arial" pitchFamily="34" charset="-120"/>
               </a:rPr>
-              <a:t>incidents after targeted architectural debt repayment (de Toledo </a:t>
-            </a:r>
-            <a:r>
-              <a:rPr lang="en-US" sz="1100" i="1" dirty="0">
-                <a:solidFill>
-                  <a:srgbClr val="2A3F55"/>
-                </a:solidFill>
-                <a:latin typeface="Arial" pitchFamily="34" charset="0"/>
-                <a:ea typeface="Arial" pitchFamily="34" charset="-122"/>
-                <a:cs typeface="Arial" pitchFamily="34" charset="-120"/>
-              </a:rPr>
-              <a:t>et al.</a:t>
-            </a:r>
-            <a:r>
-              <a:rPr lang="en-US" sz="1100" dirty="0">
-                <a:solidFill>
-                  <a:srgbClr val="2A3F55"/>
-                </a:solidFill>
-                <a:latin typeface="Arial" pitchFamily="34" charset="0"/>
-                <a:ea typeface="Arial" pitchFamily="34" charset="-122"/>
-                <a:cs typeface="Arial" pitchFamily="34" charset="-120"/>
-              </a:rPr>
-              <a:t>, 2021)</a:t>
+              <a:t>incidents after targeted architectural debt repayment (de Toledo et al., 2021)</a:t>
             </a:r>
             <a:endParaRPr lang="en-US" sz="1100" dirty="0"/>
           </a:p>
@@ -7992,8 +7620,8 @@
         </p:nvSpPr>
         <p:spPr>
           <a:xfrm>
-            <a:off x="685799" y="5806440"/>
-            <a:ext cx="10789919" cy="713232"/>
+            <a:off x="685800" y="5806440"/>
+            <a:ext cx="5760720" cy="713232"/>
           </a:xfrm>
           <a:prstGeom prst="rect">
             <a:avLst/>
@@ -8003,13 +7631,6 @@
           </a:solidFill>
           <a:ln/>
         </p:spPr>
-        <p:txBody>
-          <a:bodyPr/>
-          <a:lstStyle/>
-          <a:p>
-            <a:endParaRPr lang="en-CH"/>
-          </a:p>
-        </p:txBody>
       </p:sp>
       <p:sp>
         <p:nvSpPr>
@@ -8032,11 +7653,11 @@
           <a:bodyPr wrap="square" lIns="0" tIns="0" rIns="0" bIns="0" rtlCol="0" anchor="ctr"/>
           <a:lstStyle/>
           <a:p>
-            <a:pPr marL="0" indent="0">
-              <a:buNone/>
-            </a:pPr>
-            <a:r>
-              <a:rPr lang="en-US" sz="950" b="1" kern="0" spc="300" dirty="0">
+            <a:pPr indent="0" marL="0">
+              <a:buNone/>
+            </a:pPr>
+            <a:r>
+              <a:rPr lang="en-US" sz="950" b="1" spc="300" kern="0" dirty="0">
                 <a:solidFill>
                   <a:srgbClr val="1E7F82"/>
                 </a:solidFill>
@@ -8059,7 +7680,7 @@
         <p:spPr>
           <a:xfrm>
             <a:off x="886968" y="6080760"/>
-            <a:ext cx="10360152" cy="384048"/>
+            <a:ext cx="5394960" cy="384048"/>
           </a:xfrm>
           <a:prstGeom prst="rect">
             <a:avLst/>
@@ -8071,7 +7692,7 @@
           <a:bodyPr wrap="square" lIns="0" tIns="0" rIns="0" bIns="0" rtlCol="0" anchor="t"/>
           <a:lstStyle/>
           <a:p>
-            <a:pPr marL="0" indent="0">
+            <a:pPr indent="0" marL="0">
               <a:buNone/>
             </a:pPr>
             <a:r>
@@ -8105,7 +7726,6 @@
         <a:solidFill>
           <a:srgbClr val="FFFFFF"/>
         </a:solidFill>
-        <a:effectLst/>
       </p:bgPr>
     </p:bg>
     <p:spTree>
@@ -8143,11 +7763,11 @@
           <a:bodyPr wrap="square" lIns="0" tIns="0" rIns="0" bIns="0" rtlCol="0" anchor="ctr"/>
           <a:lstStyle/>
           <a:p>
-            <a:pPr marL="0" indent="0" algn="l">
-              <a:buNone/>
-            </a:pPr>
-            <a:r>
-              <a:rPr lang="en-US" sz="1100" b="1" kern="0" spc="300" dirty="0">
+            <a:pPr algn="l" indent="0" marL="0">
+              <a:buNone/>
+            </a:pPr>
+            <a:r>
+              <a:rPr lang="en-US" sz="1100" b="1" spc="300" kern="0" dirty="0">
                 <a:solidFill>
                   <a:srgbClr val="5C7186"/>
                 </a:solidFill>
@@ -8182,7 +7802,7 @@
           <a:bodyPr wrap="square" lIns="0" tIns="0" rIns="0" bIns="0" rtlCol="0" anchor="ctr"/>
           <a:lstStyle/>
           <a:p>
-            <a:pPr marL="0" indent="0" algn="l">
+            <a:pPr algn="l" indent="0" marL="0">
               <a:buNone/>
             </a:pPr>
             <a:r>
@@ -8221,7 +7841,7 @@
           <a:bodyPr wrap="square" lIns="0" tIns="0" rIns="0" bIns="0" rtlCol="0" anchor="t"/>
           <a:lstStyle/>
           <a:p>
-            <a:pPr marL="0" indent="0">
+            <a:pPr indent="0" marL="0">
               <a:lnSpc>
                 <a:spcPct val="115000"/>
               </a:lnSpc>
@@ -8236,10 +7856,16 @@
                 <a:ea typeface="Arial" pitchFamily="34" charset="-122"/>
                 <a:cs typeface="Arial" pitchFamily="34" charset="-120"/>
               </a:rPr>
-              <a:t>Across 44 primary studies on TD prioritisation, quantitative multi-criteria approaches are uncommon and industrial validation is rare (Lenarduzzi </a:t>
-            </a:r>
-            <a:r>
-              <a:rPr lang="en-US" sz="1500" i="1" dirty="0">
+              <a:t>Across 44 primary studies on TD prioritisation, quantitative multi-criteria approaches are uncommon and industrial validation is rare (Lenarduzzi et al., 2021). </a:t>
+            </a:r>
+            <a:pPr indent="0" marL="0">
+              <a:lnSpc>
+                <a:spcPct val="115000"/>
+              </a:lnSpc>
+              <a:buNone/>
+            </a:pPr>
+            <a:r>
+              <a:rPr lang="en-US" sz="1500" b="1" dirty="0">
                 <a:solidFill>
                   <a:srgbClr val="14283C"/>
                 </a:solidFill>
@@ -8247,8 +7873,14 @@
                 <a:ea typeface="Arial" pitchFamily="34" charset="-122"/>
                 <a:cs typeface="Arial" pitchFamily="34" charset="-120"/>
               </a:rPr>
-              <a:t>et al.</a:t>
-            </a:r>
+              <a:t>No reviewed study combines</a:t>
+            </a:r>
+            <a:pPr indent="0" marL="0">
+              <a:lnSpc>
+                <a:spcPct val="115000"/>
+              </a:lnSpc>
+              <a:buNone/>
+            </a:pPr>
             <a:r>
               <a:rPr lang="en-US" sz="1500" dirty="0">
                 <a:solidFill>
@@ -8258,10 +7890,97 @@
                 <a:ea typeface="Arial" pitchFamily="34" charset="-122"/>
                 <a:cs typeface="Arial" pitchFamily="34" charset="-120"/>
               </a:rPr>
-              <a:t>, 2021). </a:t>
-            </a:r>
-            <a:r>
-              <a:rPr lang="en-US" sz="1500" b="1" dirty="0">
+              <a:t> service-level indicators, multi-criteria prioritisation, live operational data and a trading IT context.</a:t>
+            </a:r>
+            <a:endParaRPr lang="en-US" sz="1500" dirty="0"/>
+          </a:p>
+        </p:txBody>
+      </p:sp>
+      <p:sp>
+        <p:nvSpPr>
+          <p:cNvPr id="5" name="Shape 3"/>
+          <p:cNvSpPr/>
+          <p:nvPr/>
+        </p:nvSpPr>
+        <p:spPr>
+          <a:xfrm>
+            <a:off x="685800" y="2880360"/>
+            <a:ext cx="10789920" cy="868680"/>
+          </a:xfrm>
+          <a:prstGeom prst="rect">
+            <a:avLst/>
+          </a:prstGeom>
+          <a:solidFill>
+            <a:srgbClr val="F7F9FA"/>
+          </a:solidFill>
+          <a:ln/>
+        </p:spPr>
+      </p:sp>
+      <p:sp>
+        <p:nvSpPr>
+          <p:cNvPr id="6" name="Text 4"/>
+          <p:cNvSpPr/>
+          <p:nvPr/>
+        </p:nvSpPr>
+        <p:spPr>
+          <a:xfrm>
+            <a:off x="914400" y="3044952"/>
+            <a:ext cx="822960" cy="548640"/>
+          </a:xfrm>
+          <a:prstGeom prst="rect">
+            <a:avLst/>
+          </a:prstGeom>
+          <a:noFill/>
+          <a:ln/>
+        </p:spPr>
+        <p:txBody>
+          <a:bodyPr wrap="square" lIns="0" tIns="0" rIns="0" bIns="0" rtlCol="0" anchor="ctr"/>
+          <a:lstStyle/>
+          <a:p>
+            <a:pPr indent="0" marL="0">
+              <a:buNone/>
+            </a:pPr>
+            <a:r>
+              <a:rPr lang="en-US" sz="1800" b="1" dirty="0">
+                <a:solidFill>
+                  <a:srgbClr val="D98E1F"/>
+                </a:solidFill>
+                <a:latin typeface="Courier New" pitchFamily="34" charset="0"/>
+                <a:ea typeface="Courier New" pitchFamily="34" charset="-122"/>
+                <a:cs typeface="Courier New" pitchFamily="34" charset="-120"/>
+              </a:rPr>
+              <a:t>RQ1</a:t>
+            </a:r>
+            <a:endParaRPr lang="en-US" sz="1800" dirty="0"/>
+          </a:p>
+        </p:txBody>
+      </p:sp>
+      <p:sp>
+        <p:nvSpPr>
+          <p:cNvPr id="7" name="Text 5"/>
+          <p:cNvSpPr/>
+          <p:nvPr/>
+        </p:nvSpPr>
+        <p:spPr>
+          <a:xfrm>
+            <a:off x="1874520" y="2990088"/>
+            <a:ext cx="9326880" cy="658368"/>
+          </a:xfrm>
+          <a:prstGeom prst="rect">
+            <a:avLst/>
+          </a:prstGeom>
+          <a:noFill/>
+          <a:ln/>
+        </p:spPr>
+        <p:txBody>
+          <a:bodyPr wrap="square" lIns="0" tIns="0" rIns="0" bIns="0" rtlCol="0" anchor="ctr"/>
+          <a:lstStyle/>
+          <a:p>
+            <a:pPr indent="0" marL="0">
+              <a:buNone/>
+            </a:pPr>
+            <a:r>
+              <a:rPr lang="en-US" sz="1450" dirty="0">
                 <a:solidFill>
                   <a:srgbClr val="14283C"/>
                 </a:solidFill>
@@ -8269,10 +7988,97 @@
                 <a:ea typeface="Arial" pitchFamily="34" charset="-122"/>
                 <a:cs typeface="Arial" pitchFamily="34" charset="-120"/>
               </a:rPr>
-              <a:t>No reviewed study combines</a:t>
-            </a:r>
-            <a:r>
-              <a:rPr lang="en-US" sz="1500" dirty="0">
+              <a:t>How can technical debt in mission-critical trading systems be prioritised quantitatively at the service level using operational data?</a:t>
+            </a:r>
+            <a:endParaRPr lang="en-US" sz="1450" dirty="0"/>
+          </a:p>
+        </p:txBody>
+      </p:sp>
+      <p:sp>
+        <p:nvSpPr>
+          <p:cNvPr id="8" name="Shape 6"/>
+          <p:cNvSpPr/>
+          <p:nvPr/>
+        </p:nvSpPr>
+        <p:spPr>
+          <a:xfrm>
+            <a:off x="685800" y="3904488"/>
+            <a:ext cx="10789920" cy="868680"/>
+          </a:xfrm>
+          <a:prstGeom prst="rect">
+            <a:avLst/>
+          </a:prstGeom>
+          <a:solidFill>
+            <a:srgbClr val="FBF4E8"/>
+          </a:solidFill>
+          <a:ln/>
+        </p:spPr>
+      </p:sp>
+      <p:sp>
+        <p:nvSpPr>
+          <p:cNvPr id="9" name="Text 7"/>
+          <p:cNvSpPr/>
+          <p:nvPr/>
+        </p:nvSpPr>
+        <p:spPr>
+          <a:xfrm>
+            <a:off x="914400" y="4069080"/>
+            <a:ext cx="822960" cy="548640"/>
+          </a:xfrm>
+          <a:prstGeom prst="rect">
+            <a:avLst/>
+          </a:prstGeom>
+          <a:noFill/>
+          <a:ln/>
+        </p:spPr>
+        <p:txBody>
+          <a:bodyPr wrap="square" lIns="0" tIns="0" rIns="0" bIns="0" rtlCol="0" anchor="ctr"/>
+          <a:lstStyle/>
+          <a:p>
+            <a:pPr indent="0" marL="0">
+              <a:buNone/>
+            </a:pPr>
+            <a:r>
+              <a:rPr lang="en-US" sz="1800" b="1" dirty="0">
+                <a:solidFill>
+                  <a:srgbClr val="D98E1F"/>
+                </a:solidFill>
+                <a:latin typeface="Courier New" pitchFamily="34" charset="0"/>
+                <a:ea typeface="Courier New" pitchFamily="34" charset="-122"/>
+                <a:cs typeface="Courier New" pitchFamily="34" charset="-120"/>
+              </a:rPr>
+              <a:t>RQ2</a:t>
+            </a:r>
+            <a:endParaRPr lang="en-US" sz="1800" dirty="0"/>
+          </a:p>
+        </p:txBody>
+      </p:sp>
+      <p:sp>
+        <p:nvSpPr>
+          <p:cNvPr id="10" name="Text 8"/>
+          <p:cNvSpPr/>
+          <p:nvPr/>
+        </p:nvSpPr>
+        <p:spPr>
+          <a:xfrm>
+            <a:off x="1874520" y="4014216"/>
+            <a:ext cx="9326880" cy="658368"/>
+          </a:xfrm>
+          <a:prstGeom prst="rect">
+            <a:avLst/>
+          </a:prstGeom>
+          <a:noFill/>
+          <a:ln/>
+        </p:spPr>
+        <p:txBody>
+          <a:bodyPr wrap="square" lIns="0" tIns="0" rIns="0" bIns="0" rtlCol="0" anchor="ctr"/>
+          <a:lstStyle/>
+          <a:p>
+            <a:pPr indent="0" marL="0">
+              <a:buNone/>
+            </a:pPr>
+            <a:r>
+              <a:rPr lang="en-US" sz="1450" dirty="0">
                 <a:solidFill>
                   <a:srgbClr val="14283C"/>
                 </a:solidFill>
@@ -8280,21 +8086,21 @@
                 <a:ea typeface="Arial" pitchFamily="34" charset="-122"/>
                 <a:cs typeface="Arial" pitchFamily="34" charset="-120"/>
               </a:rPr>
-              <a:t> service-level indicators, multi-criteria prioritisation, live operational data and a trading IT context.</a:t>
-            </a:r>
-            <a:endParaRPr lang="en-US" sz="1500" dirty="0"/>
-          </a:p>
-        </p:txBody>
-      </p:sp>
-      <p:sp>
-        <p:nvSpPr>
-          <p:cNvPr id="5" name="Shape 3"/>
-          <p:cNvSpPr/>
-          <p:nvPr/>
-        </p:nvSpPr>
-        <p:spPr>
-          <a:xfrm>
-            <a:off x="685800" y="2880360"/>
+              <a:t>To what extent do operational service management metrics serve as valid proxies for technical debt severity?</a:t>
+            </a:r>
+            <a:endParaRPr lang="en-US" sz="1450" dirty="0"/>
+          </a:p>
+        </p:txBody>
+      </p:sp>
+      <p:sp>
+        <p:nvSpPr>
+          <p:cNvPr id="11" name="Shape 9"/>
+          <p:cNvSpPr/>
+          <p:nvPr/>
+        </p:nvSpPr>
+        <p:spPr>
+          <a:xfrm>
+            <a:off x="685800" y="4928616"/>
             <a:ext cx="10789920" cy="868680"/>
           </a:xfrm>
           <a:prstGeom prst="rect">
@@ -8305,23 +8111,16 @@
           </a:solidFill>
           <a:ln/>
         </p:spPr>
-        <p:txBody>
-          <a:bodyPr/>
-          <a:lstStyle/>
-          <a:p>
-            <a:endParaRPr lang="en-CH"/>
-          </a:p>
-        </p:txBody>
-      </p:sp>
-      <p:sp>
-        <p:nvSpPr>
-          <p:cNvPr id="6" name="Text 4"/>
-          <p:cNvSpPr/>
-          <p:nvPr/>
-        </p:nvSpPr>
-        <p:spPr>
-          <a:xfrm>
-            <a:off x="914400" y="3044952"/>
+      </p:sp>
+      <p:sp>
+        <p:nvSpPr>
+          <p:cNvPr id="12" name="Text 10"/>
+          <p:cNvSpPr/>
+          <p:nvPr/>
+        </p:nvSpPr>
+        <p:spPr>
+          <a:xfrm>
+            <a:off x="914400" y="5093208"/>
             <a:ext cx="822960" cy="548640"/>
           </a:xfrm>
           <a:prstGeom prst="rect">
@@ -8334,7 +8133,7 @@
           <a:bodyPr wrap="square" lIns="0" tIns="0" rIns="0" bIns="0" rtlCol="0" anchor="ctr"/>
           <a:lstStyle/>
           <a:p>
-            <a:pPr marL="0" indent="0">
+            <a:pPr indent="0" marL="0">
               <a:buNone/>
             </a:pPr>
             <a:r>
@@ -8346,7 +8145,7 @@
                 <a:ea typeface="Courier New" pitchFamily="34" charset="-122"/>
                 <a:cs typeface="Courier New" pitchFamily="34" charset="-120"/>
               </a:rPr>
-              <a:t>RQ1</a:t>
+              <a:t>RQ3</a:t>
             </a:r>
             <a:endParaRPr lang="en-US" sz="1800" dirty="0"/>
           </a:p>
@@ -8354,13 +8153,13 @@
       </p:sp>
       <p:sp>
         <p:nvSpPr>
-          <p:cNvPr id="7" name="Text 5"/>
-          <p:cNvSpPr/>
-          <p:nvPr/>
-        </p:nvSpPr>
-        <p:spPr>
-          <a:xfrm>
-            <a:off x="1874520" y="2990088"/>
+          <p:cNvPr id="13" name="Text 11"/>
+          <p:cNvSpPr/>
+          <p:nvPr/>
+        </p:nvSpPr>
+        <p:spPr>
+          <a:xfrm>
+            <a:off x="1874520" y="5038344"/>
             <a:ext cx="9326880" cy="658368"/>
           </a:xfrm>
           <a:prstGeom prst="rect">
@@ -8373,11 +8172,11 @@
           <a:bodyPr wrap="square" lIns="0" tIns="0" rIns="0" bIns="0" rtlCol="0" anchor="ctr"/>
           <a:lstStyle/>
           <a:p>
-            <a:pPr marL="0" indent="0">
-              <a:buNone/>
-            </a:pPr>
-            <a:r>
-              <a:rPr lang="en-US" sz="1400" dirty="0">
+            <a:pPr indent="0" marL="0">
+              <a:buNone/>
+            </a:pPr>
+            <a:r>
+              <a:rPr lang="en-US" sz="1450" dirty="0">
                 <a:solidFill>
                   <a:srgbClr val="14283C"/>
                 </a:solidFill>
@@ -8385,219 +8184,9 @@
                 <a:ea typeface="Arial" pitchFamily="34" charset="-122"/>
                 <a:cs typeface="Arial" pitchFamily="34" charset="-120"/>
               </a:rPr>
-              <a:t>How can technical debt in mission-critical trading systems be prioritised quantitatively at the service level using operational data?</a:t>
-            </a:r>
-            <a:endParaRPr lang="en-US" sz="1400" dirty="0"/>
-          </a:p>
-        </p:txBody>
-      </p:sp>
-      <p:sp>
-        <p:nvSpPr>
-          <p:cNvPr id="8" name="Shape 6"/>
-          <p:cNvSpPr/>
-          <p:nvPr/>
-        </p:nvSpPr>
-        <p:spPr>
-          <a:xfrm>
-            <a:off x="685800" y="3904488"/>
-            <a:ext cx="10789920" cy="868680"/>
-          </a:xfrm>
-          <a:prstGeom prst="rect">
-            <a:avLst/>
-          </a:prstGeom>
-          <a:solidFill>
-            <a:srgbClr val="FBF4E8"/>
-          </a:solidFill>
-          <a:ln/>
-        </p:spPr>
-        <p:txBody>
-          <a:bodyPr/>
-          <a:lstStyle/>
-          <a:p>
-            <a:endParaRPr lang="en-CH"/>
-          </a:p>
-        </p:txBody>
-      </p:sp>
-      <p:sp>
-        <p:nvSpPr>
-          <p:cNvPr id="9" name="Text 7"/>
-          <p:cNvSpPr/>
-          <p:nvPr/>
-        </p:nvSpPr>
-        <p:spPr>
-          <a:xfrm>
-            <a:off x="914400" y="4069080"/>
-            <a:ext cx="822960" cy="548640"/>
-          </a:xfrm>
-          <a:prstGeom prst="rect">
-            <a:avLst/>
-          </a:prstGeom>
-          <a:noFill/>
-          <a:ln/>
-        </p:spPr>
-        <p:txBody>
-          <a:bodyPr wrap="square" lIns="0" tIns="0" rIns="0" bIns="0" rtlCol="0" anchor="ctr"/>
-          <a:lstStyle/>
-          <a:p>
-            <a:pPr marL="0" indent="0">
-              <a:buNone/>
-            </a:pPr>
-            <a:r>
-              <a:rPr lang="en-US" sz="1800" b="1" dirty="0">
-                <a:solidFill>
-                  <a:srgbClr val="D98E1F"/>
-                </a:solidFill>
-                <a:latin typeface="Courier New" pitchFamily="34" charset="0"/>
-                <a:ea typeface="Courier New" pitchFamily="34" charset="-122"/>
-                <a:cs typeface="Courier New" pitchFamily="34" charset="-120"/>
-              </a:rPr>
-              <a:t>RQ2</a:t>
-            </a:r>
-            <a:endParaRPr lang="en-US" sz="1800" dirty="0"/>
-          </a:p>
-        </p:txBody>
-      </p:sp>
-      <p:sp>
-        <p:nvSpPr>
-          <p:cNvPr id="10" name="Text 8"/>
-          <p:cNvSpPr/>
-          <p:nvPr/>
-        </p:nvSpPr>
-        <p:spPr>
-          <a:xfrm>
-            <a:off x="1874520" y="4014216"/>
-            <a:ext cx="9326880" cy="658368"/>
-          </a:xfrm>
-          <a:prstGeom prst="rect">
-            <a:avLst/>
-          </a:prstGeom>
-          <a:noFill/>
-          <a:ln/>
-        </p:spPr>
-        <p:txBody>
-          <a:bodyPr wrap="square" lIns="0" tIns="0" rIns="0" bIns="0" rtlCol="0" anchor="ctr"/>
-          <a:lstStyle/>
-          <a:p>
-            <a:pPr marL="0" indent="0">
-              <a:buNone/>
-            </a:pPr>
-            <a:r>
-              <a:rPr lang="en-US" sz="1400" dirty="0">
-                <a:solidFill>
-                  <a:srgbClr val="14283C"/>
-                </a:solidFill>
-                <a:latin typeface="Arial" pitchFamily="34" charset="0"/>
-                <a:ea typeface="Arial" pitchFamily="34" charset="-122"/>
-                <a:cs typeface="Arial" pitchFamily="34" charset="-120"/>
-              </a:rPr>
-              <a:t>To what extent do operational service management metrics serve as valid proxies for technical debt severity?</a:t>
-            </a:r>
-            <a:endParaRPr lang="en-US" sz="1400" dirty="0"/>
-          </a:p>
-        </p:txBody>
-      </p:sp>
-      <p:sp>
-        <p:nvSpPr>
-          <p:cNvPr id="11" name="Shape 9"/>
-          <p:cNvSpPr/>
-          <p:nvPr/>
-        </p:nvSpPr>
-        <p:spPr>
-          <a:xfrm>
-            <a:off x="685800" y="4928616"/>
-            <a:ext cx="10789920" cy="868680"/>
-          </a:xfrm>
-          <a:prstGeom prst="rect">
-            <a:avLst/>
-          </a:prstGeom>
-          <a:solidFill>
-            <a:srgbClr val="F7F9FA"/>
-          </a:solidFill>
-          <a:ln/>
-        </p:spPr>
-        <p:txBody>
-          <a:bodyPr/>
-          <a:lstStyle/>
-          <a:p>
-            <a:endParaRPr lang="en-CH"/>
-          </a:p>
-        </p:txBody>
-      </p:sp>
-      <p:sp>
-        <p:nvSpPr>
-          <p:cNvPr id="12" name="Text 10"/>
-          <p:cNvSpPr/>
-          <p:nvPr/>
-        </p:nvSpPr>
-        <p:spPr>
-          <a:xfrm>
-            <a:off x="914400" y="5093208"/>
-            <a:ext cx="822960" cy="548640"/>
-          </a:xfrm>
-          <a:prstGeom prst="rect">
-            <a:avLst/>
-          </a:prstGeom>
-          <a:noFill/>
-          <a:ln/>
-        </p:spPr>
-        <p:txBody>
-          <a:bodyPr wrap="square" lIns="0" tIns="0" rIns="0" bIns="0" rtlCol="0" anchor="ctr"/>
-          <a:lstStyle/>
-          <a:p>
-            <a:pPr marL="0" indent="0">
-              <a:buNone/>
-            </a:pPr>
-            <a:r>
-              <a:rPr lang="en-US" sz="1800" b="1" dirty="0">
-                <a:solidFill>
-                  <a:srgbClr val="D98E1F"/>
-                </a:solidFill>
-                <a:latin typeface="Courier New" pitchFamily="34" charset="0"/>
-                <a:ea typeface="Courier New" pitchFamily="34" charset="-122"/>
-                <a:cs typeface="Courier New" pitchFamily="34" charset="-120"/>
-              </a:rPr>
-              <a:t>RQ3</a:t>
-            </a:r>
-            <a:endParaRPr lang="en-US" sz="1800" dirty="0"/>
-          </a:p>
-        </p:txBody>
-      </p:sp>
-      <p:sp>
-        <p:nvSpPr>
-          <p:cNvPr id="13" name="Text 11"/>
-          <p:cNvSpPr/>
-          <p:nvPr/>
-        </p:nvSpPr>
-        <p:spPr>
-          <a:xfrm>
-            <a:off x="1874520" y="5038344"/>
-            <a:ext cx="9326880" cy="658368"/>
-          </a:xfrm>
-          <a:prstGeom prst="rect">
-            <a:avLst/>
-          </a:prstGeom>
-          <a:noFill/>
-          <a:ln/>
-        </p:spPr>
-        <p:txBody>
-          <a:bodyPr wrap="square" lIns="0" tIns="0" rIns="0" bIns="0" rtlCol="0" anchor="ctr"/>
-          <a:lstStyle/>
-          <a:p>
-            <a:pPr marL="0" indent="0">
-              <a:buNone/>
-            </a:pPr>
-            <a:r>
-              <a:rPr lang="en-US" sz="1400" dirty="0">
-                <a:solidFill>
-                  <a:srgbClr val="14283C"/>
-                </a:solidFill>
-                <a:latin typeface="Arial" pitchFamily="34" charset="0"/>
-                <a:ea typeface="Arial" pitchFamily="34" charset="-122"/>
-                <a:cs typeface="Arial" pitchFamily="34" charset="-120"/>
-              </a:rPr>
               <a:t>How stable are the resulting rankings when criterion weights are perturbed?</a:t>
             </a:r>
-            <a:endParaRPr lang="en-US" sz="1400" dirty="0"/>
+            <a:endParaRPr lang="en-US" sz="1450" dirty="0"/>
           </a:p>
         </p:txBody>
       </p:sp>
@@ -8617,7 +8206,6 @@
         <a:solidFill>
           <a:srgbClr val="FFFFFF"/>
         </a:solidFill>
-        <a:effectLst/>
       </p:bgPr>
     </p:bg>
     <p:spTree>
@@ -8655,11 +8243,11 @@
           <a:bodyPr wrap="square" lIns="0" tIns="0" rIns="0" bIns="0" rtlCol="0" anchor="ctr"/>
           <a:lstStyle/>
           <a:p>
-            <a:pPr marL="0" indent="0" algn="l">
-              <a:buNone/>
-            </a:pPr>
-            <a:r>
-              <a:rPr lang="en-US" sz="1100" b="1" kern="0" spc="300" dirty="0">
+            <a:pPr algn="l" indent="0" marL="0">
+              <a:buNone/>
+            </a:pPr>
+            <a:r>
+              <a:rPr lang="en-US" sz="1100" b="1" spc="300" kern="0" dirty="0">
                 <a:solidFill>
                   <a:srgbClr val="5C7186"/>
                 </a:solidFill>
@@ -8694,7 +8282,7 @@
           <a:bodyPr wrap="square" lIns="0" tIns="0" rIns="0" bIns="0" rtlCol="0" anchor="ctr"/>
           <a:lstStyle/>
           <a:p>
-            <a:pPr marL="0" indent="0" algn="l">
+            <a:pPr algn="l" indent="0" marL="0">
               <a:buNone/>
             </a:pPr>
             <a:r>
@@ -8733,11 +8321,11 @@
           <a:bodyPr wrap="square" lIns="0" tIns="0" rIns="0" bIns="0" rtlCol="0" anchor="ctr"/>
           <a:lstStyle/>
           <a:p>
-            <a:pPr marL="0" indent="0">
-              <a:buNone/>
-            </a:pPr>
-            <a:r>
-              <a:rPr lang="en-US" sz="1500" dirty="0">
+            <a:pPr indent="0" marL="0">
+              <a:buNone/>
+            </a:pPr>
+            <a:r>
+              <a:rPr lang="en-US" sz="1350" dirty="0">
                 <a:solidFill>
                   <a:srgbClr val="2A3F55"/>
                 </a:solidFill>
@@ -8745,31 +8333,9 @@
                 <a:ea typeface="Arial" pitchFamily="34" charset="-122"/>
                 <a:cs typeface="Arial" pitchFamily="34" charset="-120"/>
               </a:rPr>
-              <a:t>DSR (Hevner </a:t>
-            </a:r>
-            <a:r>
-              <a:rPr lang="en-US" sz="1500" i="1" dirty="0">
-                <a:solidFill>
-                  <a:srgbClr val="2A3F55"/>
-                </a:solidFill>
-                <a:latin typeface="Arial" pitchFamily="34" charset="0"/>
-                <a:ea typeface="Arial" pitchFamily="34" charset="-122"/>
-                <a:cs typeface="Arial" pitchFamily="34" charset="-120"/>
-              </a:rPr>
-              <a:t>et al.</a:t>
-            </a:r>
-            <a:r>
-              <a:rPr lang="en-US" sz="1500" dirty="0">
-                <a:solidFill>
-                  <a:srgbClr val="2A3F55"/>
-                </a:solidFill>
-                <a:latin typeface="Arial" pitchFamily="34" charset="0"/>
-                <a:ea typeface="Arial" pitchFamily="34" charset="-122"/>
-                <a:cs typeface="Arial" pitchFamily="34" charset="-120"/>
-              </a:rPr>
-              <a:t>, 2004) · single-organisation embedded case study · unit of analysis: the IT service as a configuration item</a:t>
-            </a:r>
-            <a:endParaRPr lang="en-US" sz="1500" dirty="0"/>
+              <a:t>DSR (Hevner et al., 2004) · single-organisation embedded case study · unit of analysis: the IT service as a configuration item</a:t>
+            </a:r>
+            <a:endParaRPr lang="en-US" sz="1350" dirty="0"/>
           </a:p>
         </p:txBody>
       </p:sp>
@@ -8789,34 +8355,16 @@
         </p:nvGraphicFramePr>
         <p:xfrm>
           <a:off x="685800" y="2286000"/>
-          <a:ext cx="10789920" cy="2743200"/>
+          <a:ext cx="10789920" cy="914400"/>
         </p:xfrm>
         <a:graphic>
           <a:graphicData uri="http://schemas.openxmlformats.org/drawingml/2006/table">
             <a:tbl>
               <a:tblPr/>
               <a:tblGrid>
-                <a:gridCol w="4206240">
-                  <a:extLst>
-                    <a:ext uri="{9D8B030D-6E8A-4147-A177-3AD203B41FA5}">
-                      <a16:colId xmlns:a16="http://schemas.microsoft.com/office/drawing/2014/main" val="20000"/>
-                    </a:ext>
-                  </a:extLst>
-                </a:gridCol>
-                <a:gridCol w="1737360">
-                  <a:extLst>
-                    <a:ext uri="{9D8B030D-6E8A-4147-A177-3AD203B41FA5}">
-                      <a16:colId xmlns:a16="http://schemas.microsoft.com/office/drawing/2014/main" val="20001"/>
-                    </a:ext>
-                  </a:extLst>
-                </a:gridCol>
-                <a:gridCol w="4846320">
-                  <a:extLst>
-                    <a:ext uri="{9D8B030D-6E8A-4147-A177-3AD203B41FA5}">
-                      <a16:colId xmlns:a16="http://schemas.microsoft.com/office/drawing/2014/main" val="20002"/>
-                    </a:ext>
-                  </a:extLst>
-                </a:gridCol>
+                <a:gridCol w="4206240"/>
+                <a:gridCol w="1737360"/>
+                <a:gridCol w="4846320"/>
               </a:tblGrid>
               <a:tr h="457200">
                 <a:tc>
@@ -8824,7 +8372,7 @@
                     <a:bodyPr/>
                     <a:lstStyle/>
                     <a:p>
-                      <a:pPr marL="0" indent="0">
+                      <a:pPr indent="0" marL="0">
                         <a:buNone/>
                       </a:pPr>
                       <a:r>
@@ -8874,7 +8422,7 @@
                     <a:bodyPr/>
                     <a:lstStyle/>
                     <a:p>
-                      <a:pPr marL="0" indent="0">
+                      <a:pPr indent="0" marL="0">
                         <a:buNone/>
                       </a:pPr>
                       <a:r>
@@ -8924,7 +8472,7 @@
                     <a:bodyPr/>
                     <a:lstStyle/>
                     <a:p>
-                      <a:pPr marL="0" indent="0">
+                      <a:pPr indent="0" marL="0">
                         <a:buNone/>
                       </a:pPr>
                       <a:r>
@@ -8969,11 +8517,6 @@
                     </a:solidFill>
                   </a:tcPr>
                 </a:tc>
-                <a:extLst>
-                  <a:ext uri="{0D108BD9-81ED-4DB2-BD59-A6C34878D82A}">
-                    <a16:rowId xmlns:a16="http://schemas.microsoft.com/office/drawing/2014/main" val="10000"/>
-                  </a:ext>
-                </a:extLst>
               </a:tr>
               <a:tr h="457200">
                 <a:tc>
@@ -8981,7 +8524,7 @@
                     <a:bodyPr/>
                     <a:lstStyle/>
                     <a:p>
-                      <a:pPr marL="0" indent="0">
+                      <a:pPr indent="0" marL="0">
                         <a:buNone/>
                       </a:pPr>
                       <a:r>
@@ -9009,14 +8552,8 @@
                     <a:lnR w="0" cap="flat" cmpd="sng" algn="ctr">
                       <a:noFill/>
                     </a:lnR>
-                    <a:lnT w="9525" cap="flat" cmpd="sng" algn="ctr">
-                      <a:solidFill>
-                        <a:srgbClr val="D8DFE5"/>
-                      </a:solidFill>
-                      <a:prstDash val="solid"/>
-                      <a:round/>
-                      <a:headEnd type="none" w="med" len="med"/>
-                      <a:tailEnd type="none" w="med" len="med"/>
+                    <a:lnT w="0" cap="flat" cmpd="sng" algn="ctr">
+                      <a:noFill/>
                     </a:lnT>
                     <a:lnB w="9525" cap="flat" cmpd="sng" algn="ctr">
                       <a:solidFill>
@@ -9037,7 +8574,7 @@
                     <a:bodyPr/>
                     <a:lstStyle/>
                     <a:p>
-                      <a:pPr marL="0" indent="0">
+                      <a:pPr indent="0" marL="0">
                         <a:buNone/>
                       </a:pPr>
                       <a:r>
@@ -9065,14 +8602,8 @@
                     <a:lnR w="0" cap="flat" cmpd="sng" algn="ctr">
                       <a:noFill/>
                     </a:lnR>
-                    <a:lnT w="9525" cap="flat" cmpd="sng" algn="ctr">
-                      <a:solidFill>
-                        <a:srgbClr val="D8DFE5"/>
-                      </a:solidFill>
-                      <a:prstDash val="solid"/>
-                      <a:round/>
-                      <a:headEnd type="none" w="med" len="med"/>
-                      <a:tailEnd type="none" w="med" len="med"/>
+                    <a:lnT w="0" cap="flat" cmpd="sng" algn="ctr">
+                      <a:noFill/>
                     </a:lnT>
                     <a:lnB w="9525" cap="flat" cmpd="sng" algn="ctr">
                       <a:solidFill>
@@ -9093,7 +8624,7 @@
                     <a:bodyPr/>
                     <a:lstStyle/>
                     <a:p>
-                      <a:pPr marL="0" indent="0">
+                      <a:pPr indent="0" marL="0">
                         <a:buNone/>
                       </a:pPr>
                       <a:r>
@@ -9121,14 +8652,8 @@
                     <a:lnR w="0" cap="flat" cmpd="sng" algn="ctr">
                       <a:noFill/>
                     </a:lnR>
-                    <a:lnT w="9525" cap="flat" cmpd="sng" algn="ctr">
-                      <a:solidFill>
-                        <a:srgbClr val="D8DFE5"/>
-                      </a:solidFill>
-                      <a:prstDash val="solid"/>
-                      <a:round/>
-                      <a:headEnd type="none" w="med" len="med"/>
-                      <a:tailEnd type="none" w="med" len="med"/>
+                    <a:lnT w="0" cap="flat" cmpd="sng" algn="ctr">
+                      <a:noFill/>
                     </a:lnT>
                     <a:lnB w="9525" cap="flat" cmpd="sng" algn="ctr">
                       <a:solidFill>
@@ -9144,11 +8669,6 @@
                     </a:solidFill>
                   </a:tcPr>
                 </a:tc>
-                <a:extLst>
-                  <a:ext uri="{0D108BD9-81ED-4DB2-BD59-A6C34878D82A}">
-                    <a16:rowId xmlns:a16="http://schemas.microsoft.com/office/drawing/2014/main" val="10001"/>
-                  </a:ext>
-                </a:extLst>
               </a:tr>
               <a:tr h="457200">
                 <a:tc>
@@ -9156,7 +8676,7 @@
                     <a:bodyPr/>
                     <a:lstStyle/>
                     <a:p>
-                      <a:pPr marL="0" indent="0">
+                      <a:pPr indent="0" marL="0">
                         <a:buNone/>
                       </a:pPr>
                       <a:r>
@@ -9184,14 +8704,8 @@
                     <a:lnR w="0" cap="flat" cmpd="sng" algn="ctr">
                       <a:noFill/>
                     </a:lnR>
-                    <a:lnT w="9525" cap="flat" cmpd="sng" algn="ctr">
-                      <a:solidFill>
-                        <a:srgbClr val="D8DFE5"/>
-                      </a:solidFill>
-                      <a:prstDash val="solid"/>
-                      <a:round/>
-                      <a:headEnd type="none" w="med" len="med"/>
-                      <a:tailEnd type="none" w="med" len="med"/>
+                    <a:lnT w="0" cap="flat" cmpd="sng" algn="ctr">
+                      <a:noFill/>
                     </a:lnT>
                     <a:lnB w="9525" cap="flat" cmpd="sng" algn="ctr">
                       <a:solidFill>
@@ -9212,7 +8726,7 @@
                     <a:bodyPr/>
                     <a:lstStyle/>
                     <a:p>
-                      <a:pPr marL="0" indent="0">
+                      <a:pPr indent="0" marL="0">
                         <a:buNone/>
                       </a:pPr>
                       <a:r>
@@ -9240,14 +8754,8 @@
                     <a:lnR w="0" cap="flat" cmpd="sng" algn="ctr">
                       <a:noFill/>
                     </a:lnR>
-                    <a:lnT w="9525" cap="flat" cmpd="sng" algn="ctr">
-                      <a:solidFill>
-                        <a:srgbClr val="D8DFE5"/>
-                      </a:solidFill>
-                      <a:prstDash val="solid"/>
-                      <a:round/>
-                      <a:headEnd type="none" w="med" len="med"/>
-                      <a:tailEnd type="none" w="med" len="med"/>
+                    <a:lnT w="0" cap="flat" cmpd="sng" algn="ctr">
+                      <a:noFill/>
                     </a:lnT>
                     <a:lnB w="9525" cap="flat" cmpd="sng" algn="ctr">
                       <a:solidFill>
@@ -9268,7 +8776,7 @@
                     <a:bodyPr/>
                     <a:lstStyle/>
                     <a:p>
-                      <a:pPr marL="0" indent="0">
+                      <a:pPr indent="0" marL="0">
                         <a:buNone/>
                       </a:pPr>
                       <a:r>
@@ -9296,14 +8804,8 @@
                     <a:lnR w="0" cap="flat" cmpd="sng" algn="ctr">
                       <a:noFill/>
                     </a:lnR>
-                    <a:lnT w="9525" cap="flat" cmpd="sng" algn="ctr">
-                      <a:solidFill>
-                        <a:srgbClr val="D8DFE5"/>
-                      </a:solidFill>
-                      <a:prstDash val="solid"/>
-                      <a:round/>
-                      <a:headEnd type="none" w="med" len="med"/>
-                      <a:tailEnd type="none" w="med" len="med"/>
+                    <a:lnT w="0" cap="flat" cmpd="sng" algn="ctr">
+                      <a:noFill/>
                     </a:lnT>
                     <a:lnB w="9525" cap="flat" cmpd="sng" algn="ctr">
                       <a:solidFill>
@@ -9319,11 +8821,6 @@
                     </a:solidFill>
                   </a:tcPr>
                 </a:tc>
-                <a:extLst>
-                  <a:ext uri="{0D108BD9-81ED-4DB2-BD59-A6C34878D82A}">
-                    <a16:rowId xmlns:a16="http://schemas.microsoft.com/office/drawing/2014/main" val="10002"/>
-                  </a:ext>
-                </a:extLst>
               </a:tr>
               <a:tr h="457200">
                 <a:tc>
@@ -9331,7 +8828,7 @@
                     <a:bodyPr/>
                     <a:lstStyle/>
                     <a:p>
-                      <a:pPr marL="0" indent="0">
+                      <a:pPr indent="0" marL="0">
                         <a:buNone/>
                       </a:pPr>
                       <a:r>
@@ -9359,14 +8856,8 @@
                     <a:lnR w="0" cap="flat" cmpd="sng" algn="ctr">
                       <a:noFill/>
                     </a:lnR>
-                    <a:lnT w="9525" cap="flat" cmpd="sng" algn="ctr">
-                      <a:solidFill>
-                        <a:srgbClr val="D8DFE5"/>
-                      </a:solidFill>
-                      <a:prstDash val="solid"/>
-                      <a:round/>
-                      <a:headEnd type="none" w="med" len="med"/>
-                      <a:tailEnd type="none" w="med" len="med"/>
+                    <a:lnT w="0" cap="flat" cmpd="sng" algn="ctr">
+                      <a:noFill/>
                     </a:lnT>
                     <a:lnB w="9525" cap="flat" cmpd="sng" algn="ctr">
                       <a:solidFill>
@@ -9387,7 +8878,7 @@
                     <a:bodyPr/>
                     <a:lstStyle/>
                     <a:p>
-                      <a:pPr marL="0" indent="0">
+                      <a:pPr indent="0" marL="0">
                         <a:buNone/>
                       </a:pPr>
                       <a:r>
@@ -9415,14 +8906,8 @@
                     <a:lnR w="0" cap="flat" cmpd="sng" algn="ctr">
                       <a:noFill/>
                     </a:lnR>
-                    <a:lnT w="9525" cap="flat" cmpd="sng" algn="ctr">
-                      <a:solidFill>
-                        <a:srgbClr val="D8DFE5"/>
-                      </a:solidFill>
-                      <a:prstDash val="solid"/>
-                      <a:round/>
-                      <a:headEnd type="none" w="med" len="med"/>
-                      <a:tailEnd type="none" w="med" len="med"/>
+                    <a:lnT w="0" cap="flat" cmpd="sng" algn="ctr">
+                      <a:noFill/>
                     </a:lnT>
                     <a:lnB w="9525" cap="flat" cmpd="sng" algn="ctr">
                       <a:solidFill>
@@ -9443,7 +8928,7 @@
                     <a:bodyPr/>
                     <a:lstStyle/>
                     <a:p>
-                      <a:pPr marL="0" indent="0">
+                      <a:pPr indent="0" marL="0">
                         <a:buNone/>
                       </a:pPr>
                       <a:r>
@@ -9471,14 +8956,8 @@
                     <a:lnR w="0" cap="flat" cmpd="sng" algn="ctr">
                       <a:noFill/>
                     </a:lnR>
-                    <a:lnT w="9525" cap="flat" cmpd="sng" algn="ctr">
-                      <a:solidFill>
-                        <a:srgbClr val="D8DFE5"/>
-                      </a:solidFill>
-                      <a:prstDash val="solid"/>
-                      <a:round/>
-                      <a:headEnd type="none" w="med" len="med"/>
-                      <a:tailEnd type="none" w="med" len="med"/>
+                    <a:lnT w="0" cap="flat" cmpd="sng" algn="ctr">
+                      <a:noFill/>
                     </a:lnT>
                     <a:lnB w="9525" cap="flat" cmpd="sng" algn="ctr">
                       <a:solidFill>
@@ -9494,11 +8973,6 @@
                     </a:solidFill>
                   </a:tcPr>
                 </a:tc>
-                <a:extLst>
-                  <a:ext uri="{0D108BD9-81ED-4DB2-BD59-A6C34878D82A}">
-                    <a16:rowId xmlns:a16="http://schemas.microsoft.com/office/drawing/2014/main" val="10003"/>
-                  </a:ext>
-                </a:extLst>
               </a:tr>
               <a:tr h="457200">
                 <a:tc>
@@ -9506,7 +8980,7 @@
                     <a:bodyPr/>
                     <a:lstStyle/>
                     <a:p>
-                      <a:pPr marL="0" indent="0">
+                      <a:pPr indent="0" marL="0">
                         <a:buNone/>
                       </a:pPr>
                       <a:r>
@@ -9534,14 +9008,8 @@
                     <a:lnR w="0" cap="flat" cmpd="sng" algn="ctr">
                       <a:noFill/>
                     </a:lnR>
-                    <a:lnT w="9525" cap="flat" cmpd="sng" algn="ctr">
-                      <a:solidFill>
-                        <a:srgbClr val="D8DFE5"/>
-                      </a:solidFill>
-                      <a:prstDash val="solid"/>
-                      <a:round/>
-                      <a:headEnd type="none" w="med" len="med"/>
-                      <a:tailEnd type="none" w="med" len="med"/>
+                    <a:lnT w="0" cap="flat" cmpd="sng" algn="ctr">
+                      <a:noFill/>
                     </a:lnT>
                     <a:lnB w="9525" cap="flat" cmpd="sng" algn="ctr">
                       <a:solidFill>
@@ -9562,7 +9030,7 @@
                     <a:bodyPr/>
                     <a:lstStyle/>
                     <a:p>
-                      <a:pPr marL="0" indent="0">
+                      <a:pPr indent="0" marL="0">
                         <a:buNone/>
                       </a:pPr>
                       <a:r>
@@ -9590,14 +9058,8 @@
                     <a:lnR w="0" cap="flat" cmpd="sng" algn="ctr">
                       <a:noFill/>
                     </a:lnR>
-                    <a:lnT w="9525" cap="flat" cmpd="sng" algn="ctr">
-                      <a:solidFill>
-                        <a:srgbClr val="D8DFE5"/>
-                      </a:solidFill>
-                      <a:prstDash val="solid"/>
-                      <a:round/>
-                      <a:headEnd type="none" w="med" len="med"/>
-                      <a:tailEnd type="none" w="med" len="med"/>
+                    <a:lnT w="0" cap="flat" cmpd="sng" algn="ctr">
+                      <a:noFill/>
                     </a:lnT>
                     <a:lnB w="9525" cap="flat" cmpd="sng" algn="ctr">
                       <a:solidFill>
@@ -9618,7 +9080,7 @@
                     <a:bodyPr/>
                     <a:lstStyle/>
                     <a:p>
-                      <a:pPr marL="0" indent="0">
+                      <a:pPr indent="0" marL="0">
                         <a:buNone/>
                       </a:pPr>
                       <a:r>
@@ -9646,14 +9108,8 @@
                     <a:lnR w="0" cap="flat" cmpd="sng" algn="ctr">
                       <a:noFill/>
                     </a:lnR>
-                    <a:lnT w="9525" cap="flat" cmpd="sng" algn="ctr">
-                      <a:solidFill>
-                        <a:srgbClr val="D8DFE5"/>
-                      </a:solidFill>
-                      <a:prstDash val="solid"/>
-                      <a:round/>
-                      <a:headEnd type="none" w="med" len="med"/>
-                      <a:tailEnd type="none" w="med" len="med"/>
+                    <a:lnT w="0" cap="flat" cmpd="sng" algn="ctr">
+                      <a:noFill/>
                     </a:lnT>
                     <a:lnB w="9525" cap="flat" cmpd="sng" algn="ctr">
                       <a:solidFill>
@@ -9669,11 +9125,6 @@
                     </a:solidFill>
                   </a:tcPr>
                 </a:tc>
-                <a:extLst>
-                  <a:ext uri="{0D108BD9-81ED-4DB2-BD59-A6C34878D82A}">
-                    <a16:rowId xmlns:a16="http://schemas.microsoft.com/office/drawing/2014/main" val="10004"/>
-                  </a:ext>
-                </a:extLst>
               </a:tr>
               <a:tr h="457200">
                 <a:tc>
@@ -9681,7 +9132,7 @@
                     <a:bodyPr/>
                     <a:lstStyle/>
                     <a:p>
-                      <a:pPr marL="0" indent="0">
+                      <a:pPr indent="0" marL="0">
                         <a:buNone/>
                       </a:pPr>
                       <a:r>
@@ -9709,14 +9160,8 @@
                     <a:lnR w="0" cap="flat" cmpd="sng" algn="ctr">
                       <a:noFill/>
                     </a:lnR>
-                    <a:lnT w="9525" cap="flat" cmpd="sng" algn="ctr">
-                      <a:solidFill>
-                        <a:srgbClr val="D8DFE5"/>
-                      </a:solidFill>
-                      <a:prstDash val="solid"/>
-                      <a:round/>
-                      <a:headEnd type="none" w="med" len="med"/>
-                      <a:tailEnd type="none" w="med" len="med"/>
+                    <a:lnT w="0" cap="flat" cmpd="sng" algn="ctr">
+                      <a:noFill/>
                     </a:lnT>
                     <a:lnB w="9525" cap="flat" cmpd="sng" algn="ctr">
                       <a:solidFill>
@@ -9737,7 +9182,7 @@
                     <a:bodyPr/>
                     <a:lstStyle/>
                     <a:p>
-                      <a:pPr marL="0" indent="0">
+                      <a:pPr indent="0" marL="0">
                         <a:buNone/>
                       </a:pPr>
                       <a:r>
@@ -9765,14 +9210,8 @@
                     <a:lnR w="0" cap="flat" cmpd="sng" algn="ctr">
                       <a:noFill/>
                     </a:lnR>
-                    <a:lnT w="9525" cap="flat" cmpd="sng" algn="ctr">
-                      <a:solidFill>
-                        <a:srgbClr val="D8DFE5"/>
-                      </a:solidFill>
-                      <a:prstDash val="solid"/>
-                      <a:round/>
-                      <a:headEnd type="none" w="med" len="med"/>
-                      <a:tailEnd type="none" w="med" len="med"/>
+                    <a:lnT w="0" cap="flat" cmpd="sng" algn="ctr">
+                      <a:noFill/>
                     </a:lnT>
                     <a:lnB w="9525" cap="flat" cmpd="sng" algn="ctr">
                       <a:solidFill>
@@ -9793,7 +9232,7 @@
                     <a:bodyPr/>
                     <a:lstStyle/>
                     <a:p>
-                      <a:pPr marL="0" indent="0">
+                      <a:pPr indent="0" marL="0">
                         <a:buNone/>
                       </a:pPr>
                       <a:r>
@@ -9821,14 +9260,8 @@
                     <a:lnR w="0" cap="flat" cmpd="sng" algn="ctr">
                       <a:noFill/>
                     </a:lnR>
-                    <a:lnT w="9525" cap="flat" cmpd="sng" algn="ctr">
-                      <a:solidFill>
-                        <a:srgbClr val="D8DFE5"/>
-                      </a:solidFill>
-                      <a:prstDash val="solid"/>
-                      <a:round/>
-                      <a:headEnd type="none" w="med" len="med"/>
-                      <a:tailEnd type="none" w="med" len="med"/>
+                    <a:lnT w="0" cap="flat" cmpd="sng" algn="ctr">
+                      <a:noFill/>
                     </a:lnT>
                     <a:lnB w="9525" cap="flat" cmpd="sng" algn="ctr">
                       <a:solidFill>
@@ -9844,11 +9277,6 @@
                     </a:solidFill>
                   </a:tcPr>
                 </a:tc>
-                <a:extLst>
-                  <a:ext uri="{0D108BD9-81ED-4DB2-BD59-A6C34878D82A}">
-                    <a16:rowId xmlns:a16="http://schemas.microsoft.com/office/drawing/2014/main" val="10005"/>
-                  </a:ext>
-                </a:extLst>
               </a:tr>
             </a:tbl>
           </a:graphicData>
@@ -9875,7 +9303,7 @@
           <a:bodyPr wrap="square" lIns="0" tIns="0" rIns="0" bIns="0" rtlCol="0" anchor="ctr"/>
           <a:lstStyle/>
           <a:p>
-            <a:pPr marL="0" indent="0">
+            <a:pPr indent="0" marL="0">
               <a:buNone/>
             </a:pPr>
             <a:r>
@@ -9909,7 +9337,6 @@
         <a:solidFill>
           <a:srgbClr val="FFFFFF"/>
         </a:solidFill>
-        <a:effectLst/>
       </p:bgPr>
     </p:bg>
     <p:spTree>
@@ -9947,11 +9374,11 @@
           <a:bodyPr wrap="square" lIns="0" tIns="0" rIns="0" bIns="0" rtlCol="0" anchor="ctr"/>
           <a:lstStyle/>
           <a:p>
-            <a:pPr marL="0" indent="0" algn="l">
-              <a:buNone/>
-            </a:pPr>
-            <a:r>
-              <a:rPr lang="en-US" sz="1100" b="1" kern="0" spc="300" dirty="0">
+            <a:pPr algn="l" indent="0" marL="0">
+              <a:buNone/>
+            </a:pPr>
+            <a:r>
+              <a:rPr lang="en-US" sz="1100" b="1" spc="300" kern="0" dirty="0">
                 <a:solidFill>
                   <a:srgbClr val="5C7186"/>
                 </a:solidFill>
@@ -9986,7 +9413,7 @@
           <a:bodyPr wrap="square" lIns="0" tIns="0" rIns="0" bIns="0" rtlCol="0" anchor="ctr"/>
           <a:lstStyle/>
           <a:p>
-            <a:pPr marL="0" indent="0" algn="l">
+            <a:pPr algn="l" indent="0" marL="0">
               <a:buNone/>
             </a:pPr>
             <a:r>
@@ -10025,7 +9452,7 @@
           <a:bodyPr wrap="square" lIns="0" tIns="0" rIns="0" bIns="0" rtlCol="0" anchor="ctr"/>
           <a:lstStyle/>
           <a:p>
-            <a:pPr marL="0" indent="0">
+            <a:pPr indent="0" marL="0">
               <a:buNone/>
             </a:pPr>
             <a:r>
@@ -10062,13 +9489,6 @@
           </a:solidFill>
           <a:ln/>
         </p:spPr>
-        <p:txBody>
-          <a:bodyPr/>
-          <a:lstStyle/>
-          <a:p>
-            <a:endParaRPr lang="en-CH"/>
-          </a:p>
-        </p:txBody>
       </p:sp>
       <p:sp>
         <p:nvSpPr>
@@ -10091,7 +9511,7 @@
           <a:bodyPr wrap="square" lIns="0" tIns="0" rIns="0" bIns="0" rtlCol="0" anchor="ctr"/>
           <a:lstStyle/>
           <a:p>
-            <a:pPr marL="0" indent="0" algn="ctr">
+            <a:pPr algn="ctr" indent="0" marL="0">
               <a:buNone/>
             </a:pPr>
             <a:r>
@@ -10130,11 +9550,11 @@
           <a:bodyPr wrap="square" lIns="0" tIns="0" rIns="0" bIns="0" rtlCol="0" anchor="ctr"/>
           <a:lstStyle/>
           <a:p>
-            <a:pPr marL="0" indent="0">
-              <a:buNone/>
-            </a:pPr>
-            <a:r>
-              <a:rPr lang="en-US" sz="1500" dirty="0">
+            <a:pPr indent="0" marL="0">
+              <a:buNone/>
+            </a:pPr>
+            <a:r>
+              <a:rPr lang="en-US" sz="1350" dirty="0">
                 <a:solidFill>
                   <a:srgbClr val="14283C"/>
                 </a:solidFill>
@@ -10144,7 +9564,7 @@
               </a:rPr>
               <a:t>Extract indicators from live ITSM / CMDB records</a:t>
             </a:r>
-            <a:endParaRPr lang="en-US" sz="1500" dirty="0"/>
+            <a:endParaRPr lang="en-US" sz="1350" dirty="0"/>
           </a:p>
         </p:txBody>
       </p:sp>
@@ -10167,13 +9587,6 @@
           </a:solidFill>
           <a:ln/>
         </p:spPr>
-        <p:txBody>
-          <a:bodyPr/>
-          <a:lstStyle/>
-          <a:p>
-            <a:endParaRPr lang="en-CH"/>
-          </a:p>
-        </p:txBody>
       </p:sp>
       <p:sp>
         <p:nvSpPr>
@@ -10196,7 +9609,7 @@
           <a:bodyPr wrap="square" lIns="0" tIns="0" rIns="0" bIns="0" rtlCol="0" anchor="ctr"/>
           <a:lstStyle/>
           <a:p>
-            <a:pPr marL="0" indent="0" algn="ctr">
+            <a:pPr algn="ctr" indent="0" marL="0">
               <a:buNone/>
             </a:pPr>
             <a:r>
@@ -10235,11 +9648,11 @@
           <a:bodyPr wrap="square" lIns="0" tIns="0" rIns="0" bIns="0" rtlCol="0" anchor="ctr"/>
           <a:lstStyle/>
           <a:p>
-            <a:pPr marL="0" indent="0">
-              <a:buNone/>
-            </a:pPr>
-            <a:r>
-              <a:rPr lang="en-US" sz="1500" dirty="0">
+            <a:pPr indent="0" marL="0">
+              <a:buNone/>
+            </a:pPr>
+            <a:r>
+              <a:rPr lang="en-US" sz="1350" dirty="0">
                 <a:solidFill>
                   <a:srgbClr val="14283C"/>
                 </a:solidFill>
@@ -10249,7 +9662,7 @@
               </a:rPr>
               <a:t>Vector normalisation (preserves extreme observations)</a:t>
             </a:r>
-            <a:endParaRPr lang="en-US" sz="1500" dirty="0"/>
+            <a:endParaRPr lang="en-US" sz="1350" dirty="0"/>
           </a:p>
         </p:txBody>
       </p:sp>
@@ -10272,13 +9685,6 @@
           </a:solidFill>
           <a:ln/>
         </p:spPr>
-        <p:txBody>
-          <a:bodyPr/>
-          <a:lstStyle/>
-          <a:p>
-            <a:endParaRPr lang="en-CH"/>
-          </a:p>
-        </p:txBody>
       </p:sp>
       <p:sp>
         <p:nvSpPr>
@@ -10301,7 +9707,7 @@
           <a:bodyPr wrap="square" lIns="0" tIns="0" rIns="0" bIns="0" rtlCol="0" anchor="ctr"/>
           <a:lstStyle/>
           <a:p>
-            <a:pPr marL="0" indent="0" algn="ctr">
+            <a:pPr algn="ctr" indent="0" marL="0">
               <a:buNone/>
             </a:pPr>
             <a:r>
@@ -10340,11 +9746,11 @@
           <a:bodyPr wrap="square" lIns="0" tIns="0" rIns="0" bIns="0" rtlCol="0" anchor="ctr"/>
           <a:lstStyle/>
           <a:p>
-            <a:pPr marL="0" indent="0">
-              <a:buNone/>
-            </a:pPr>
-            <a:r>
-              <a:rPr lang="en-US" sz="1500" dirty="0">
+            <a:pPr indent="0" marL="0">
+              <a:buNone/>
+            </a:pPr>
+            <a:r>
+              <a:rPr lang="en-US" sz="1350" dirty="0">
                 <a:solidFill>
                   <a:srgbClr val="14283C"/>
                 </a:solidFill>
@@ -10354,7 +9760,7 @@
               </a:rPr>
               <a:t>Weighting: equal (0.20 each) and differential (0.30 MTTR &amp; patch recency)</a:t>
             </a:r>
-            <a:endParaRPr lang="en-US" sz="1500" dirty="0"/>
+            <a:endParaRPr lang="en-US" sz="1350" dirty="0"/>
           </a:p>
         </p:txBody>
       </p:sp>
@@ -10377,13 +9783,6 @@
           </a:solidFill>
           <a:ln/>
         </p:spPr>
-        <p:txBody>
-          <a:bodyPr/>
-          <a:lstStyle/>
-          <a:p>
-            <a:endParaRPr lang="en-CH"/>
-          </a:p>
-        </p:txBody>
       </p:sp>
       <p:sp>
         <p:nvSpPr>
@@ -10406,7 +9805,7 @@
           <a:bodyPr wrap="square" lIns="0" tIns="0" rIns="0" bIns="0" rtlCol="0" anchor="ctr"/>
           <a:lstStyle/>
           <a:p>
-            <a:pPr marL="0" indent="0" algn="ctr">
+            <a:pPr algn="ctr" indent="0" marL="0">
               <a:buNone/>
             </a:pPr>
             <a:r>
@@ -10445,11 +9844,11 @@
           <a:bodyPr wrap="square" lIns="0" tIns="0" rIns="0" bIns="0" rtlCol="0" anchor="ctr"/>
           <a:lstStyle/>
           <a:p>
-            <a:pPr marL="0" indent="0">
-              <a:buNone/>
-            </a:pPr>
-            <a:r>
-              <a:rPr lang="en-US" sz="1500" dirty="0">
+            <a:pPr indent="0" marL="0">
+              <a:buNone/>
+            </a:pPr>
+            <a:r>
+              <a:rPr lang="en-US" sz="1350" dirty="0">
                 <a:solidFill>
                   <a:srgbClr val="14283C"/>
                 </a:solidFill>
@@ -10459,7 +9858,7 @@
               </a:rPr>
               <a:t>TOPSIS closeness coefficient Ci ∈ [0, 1]</a:t>
             </a:r>
-            <a:endParaRPr lang="en-US" sz="1500" dirty="0"/>
+            <a:endParaRPr lang="en-US" sz="1350" dirty="0"/>
           </a:p>
         </p:txBody>
       </p:sp>
@@ -10482,13 +9881,6 @@
           </a:solidFill>
           <a:ln/>
         </p:spPr>
-        <p:txBody>
-          <a:bodyPr/>
-          <a:lstStyle/>
-          <a:p>
-            <a:endParaRPr lang="en-CH"/>
-          </a:p>
-        </p:txBody>
       </p:sp>
       <p:sp>
         <p:nvSpPr>
@@ -10511,7 +9903,7 @@
           <a:bodyPr wrap="square" lIns="0" tIns="0" rIns="0" bIns="0" rtlCol="0" anchor="ctr"/>
           <a:lstStyle/>
           <a:p>
-            <a:pPr marL="0" indent="0" algn="ctr">
+            <a:pPr algn="ctr" indent="0" marL="0">
               <a:buNone/>
             </a:pPr>
             <a:r>
@@ -10550,11 +9942,11 @@
           <a:bodyPr wrap="square" lIns="0" tIns="0" rIns="0" bIns="0" rtlCol="0" anchor="ctr"/>
           <a:lstStyle/>
           <a:p>
-            <a:pPr marL="0" indent="0">
-              <a:buNone/>
-            </a:pPr>
-            <a:r>
-              <a:rPr lang="en-US" sz="1500" dirty="0">
+            <a:pPr indent="0" marL="0">
+              <a:buNone/>
+            </a:pPr>
+            <a:r>
+              <a:rPr lang="en-US" sz="1350" dirty="0">
                 <a:solidFill>
                   <a:srgbClr val="14283C"/>
                 </a:solidFill>
@@ -10564,7 +9956,7 @@
               </a:rPr>
               <a:t>Rank: lowest Ci = highest debt priority</a:t>
             </a:r>
-            <a:endParaRPr lang="en-US" sz="1500" dirty="0"/>
+            <a:endParaRPr lang="en-US" sz="1350" dirty="0"/>
           </a:p>
         </p:txBody>
       </p:sp>
@@ -10589,7 +9981,7 @@
           <a:bodyPr wrap="square" lIns="0" tIns="0" rIns="0" bIns="0" rtlCol="0" anchor="ctr"/>
           <a:lstStyle/>
           <a:p>
-            <a:pPr marL="0" indent="0">
+            <a:pPr indent="0" marL="0">
               <a:buNone/>
             </a:pPr>
             <a:r>
@@ -10639,7 +10031,7 @@
               <a:buChar char="•"/>
             </a:pPr>
             <a:r>
-              <a:rPr lang="en-US" sz="1500" dirty="0">
+              <a:rPr lang="en-US" sz="1350" dirty="0">
                 <a:solidFill>
                   <a:srgbClr val="14283C"/>
                 </a:solidFill>
@@ -10649,7 +10041,7 @@
               </a:rPr>
               <a:t>Handles mixed cost/benefit criteria and different scales in one procedure</a:t>
             </a:r>
-            <a:endParaRPr lang="en-US" sz="1500" dirty="0"/>
+            <a:endParaRPr lang="en-US" sz="1350" dirty="0"/>
           </a:p>
           <a:p>
             <a:pPr marL="177800" indent="-177800">
@@ -10663,7 +10055,7 @@
               <a:buChar char="•"/>
             </a:pPr>
             <a:r>
-              <a:rPr lang="en-US" sz="1500" dirty="0">
+              <a:rPr lang="en-US" sz="1350" dirty="0">
                 <a:solidFill>
                   <a:srgbClr val="14283C"/>
                 </a:solidFill>
@@ -10673,7 +10065,7 @@
               </a:rPr>
               <a:t>Produces a full ranking, unlike VIKOR's compromise set or AHP alone</a:t>
             </a:r>
-            <a:endParaRPr lang="en-US" sz="1500" dirty="0"/>
+            <a:endParaRPr lang="en-US" sz="1350" dirty="0"/>
           </a:p>
           <a:p>
             <a:pPr marL="177800" indent="-177800">
@@ -10687,7 +10079,7 @@
               <a:buChar char="•"/>
             </a:pPr>
             <a:r>
-              <a:rPr lang="en-US" sz="1500" dirty="0">
+              <a:rPr lang="en-US" sz="1350" dirty="0">
                 <a:solidFill>
                   <a:srgbClr val="14283C"/>
                 </a:solidFill>
@@ -10695,53 +10087,9 @@
                 <a:ea typeface="Arial" pitchFamily="34" charset="-122"/>
                 <a:cs typeface="Arial" pitchFamily="34" charset="-120"/>
               </a:rPr>
-              <a:t>Precedent: </a:t>
-            </a:r>
-            <a:r>
-              <a:rPr lang="en-US" sz="1500" dirty="0" err="1">
-                <a:solidFill>
-                  <a:srgbClr val="14283C"/>
-                </a:solidFill>
-                <a:latin typeface="Arial" pitchFamily="34" charset="0"/>
-                <a:ea typeface="Arial" pitchFamily="34" charset="-122"/>
-                <a:cs typeface="Arial" pitchFamily="34" charset="-120"/>
-              </a:rPr>
-              <a:t>Albarak</a:t>
-            </a:r>
-            <a:r>
-              <a:rPr lang="en-US" sz="1500" dirty="0">
-                <a:solidFill>
-                  <a:srgbClr val="14283C"/>
-                </a:solidFill>
-                <a:latin typeface="Arial" pitchFamily="34" charset="0"/>
-                <a:ea typeface="Arial" pitchFamily="34" charset="-122"/>
-                <a:cs typeface="Arial" pitchFamily="34" charset="-120"/>
-              </a:rPr>
-              <a:t> </a:t>
-            </a:r>
-            <a:r>
-              <a:rPr lang="en-US" sz="1500" i="1" dirty="0">
-                <a:solidFill>
-                  <a:srgbClr val="14283C"/>
-                </a:solidFill>
-                <a:latin typeface="Arial" pitchFamily="34" charset="0"/>
-                <a:ea typeface="Arial" pitchFamily="34" charset="-122"/>
-                <a:cs typeface="Arial" pitchFamily="34" charset="-120"/>
-              </a:rPr>
-              <a:t>et al.</a:t>
-            </a:r>
-            <a:r>
-              <a:rPr lang="en-US" sz="1500" dirty="0">
-                <a:solidFill>
-                  <a:srgbClr val="14283C"/>
-                </a:solidFill>
-                <a:latin typeface="Arial" pitchFamily="34" charset="0"/>
-                <a:ea typeface="Arial" pitchFamily="34" charset="-122"/>
-                <a:cs typeface="Arial" pitchFamily="34" charset="-120"/>
-              </a:rPr>
-              <a:t> (2022) for TD, but on controlled data</a:t>
-            </a:r>
-            <a:endParaRPr lang="en-US" sz="1500" dirty="0"/>
+              <a:t>Precedent: Albarak &amp; Bahsoon (2022) for TD, but on controlled data</a:t>
+            </a:r>
+            <a:endParaRPr lang="en-US" sz="1350" dirty="0"/>
           </a:p>
           <a:p>
             <a:pPr marL="177800" indent="-177800">
@@ -10755,7 +10103,7 @@
               <a:buChar char="•"/>
             </a:pPr>
             <a:r>
-              <a:rPr lang="en-US" sz="1500" b="1" dirty="0">
+              <a:rPr lang="en-US" sz="1350" b="1" dirty="0">
                 <a:solidFill>
                   <a:srgbClr val="14283C"/>
                 </a:solidFill>
@@ -10765,7 +10113,7 @@
               </a:rPr>
               <a:t>Method choice treated as a robustness question, tested against SAW and VIKOR</a:t>
             </a:r>
-            <a:endParaRPr lang="en-US" sz="1500" dirty="0"/>
+            <a:endParaRPr lang="en-US" sz="1350" dirty="0"/>
           </a:p>
         </p:txBody>
       </p:sp>
@@ -10788,13 +10136,6 @@
           </a:solidFill>
           <a:ln/>
         </p:spPr>
-        <p:txBody>
-          <a:bodyPr/>
-          <a:lstStyle/>
-          <a:p>
-            <a:endParaRPr lang="en-CH"/>
-          </a:p>
-        </p:txBody>
       </p:sp>
       <p:sp>
         <p:nvSpPr>
@@ -10817,11 +10158,11 @@
           <a:bodyPr wrap="square" lIns="0" tIns="0" rIns="0" bIns="0" rtlCol="0" anchor="ctr"/>
           <a:lstStyle/>
           <a:p>
-            <a:pPr marL="0" indent="0">
-              <a:buNone/>
-            </a:pPr>
-            <a:r>
-              <a:rPr lang="en-US" sz="950" b="1" kern="0" spc="300" dirty="0">
+            <a:pPr indent="0" marL="0">
+              <a:buNone/>
+            </a:pPr>
+            <a:r>
+              <a:rPr lang="en-US" sz="950" b="1" spc="300" kern="0" dirty="0">
                 <a:solidFill>
                   <a:srgbClr val="1E7F82"/>
                 </a:solidFill>
@@ -10856,7 +10197,7 @@
           <a:bodyPr wrap="square" lIns="0" tIns="0" rIns="0" bIns="0" rtlCol="0" anchor="t"/>
           <a:lstStyle/>
           <a:p>
-            <a:pPr marL="0" indent="0">
+            <a:pPr indent="0" marL="0">
               <a:buNone/>
             </a:pPr>
             <a:r>
@@ -10890,7 +10231,6 @@
         <a:solidFill>
           <a:srgbClr val="FFFFFF"/>
         </a:solidFill>
-        <a:effectLst/>
       </p:bgPr>
     </p:bg>
     <p:spTree>
@@ -10928,11 +10268,11 @@
           <a:bodyPr wrap="square" lIns="0" tIns="0" rIns="0" bIns="0" rtlCol="0" anchor="ctr"/>
           <a:lstStyle/>
           <a:p>
-            <a:pPr marL="0" indent="0" algn="l">
-              <a:buNone/>
-            </a:pPr>
-            <a:r>
-              <a:rPr lang="en-US" sz="1100" b="1" kern="0" spc="300" dirty="0">
+            <a:pPr algn="l" indent="0" marL="0">
+              <a:buNone/>
+            </a:pPr>
+            <a:r>
+              <a:rPr lang="en-US" sz="1100" b="1" spc="300" kern="0" dirty="0">
                 <a:solidFill>
                   <a:srgbClr val="5C7186"/>
                 </a:solidFill>
@@ -10967,7 +10307,7 @@
           <a:bodyPr wrap="square" lIns="0" tIns="0" rIns="0" bIns="0" rtlCol="0" anchor="ctr"/>
           <a:lstStyle/>
           <a:p>
-            <a:pPr marL="0" indent="0" algn="l">
+            <a:pPr algn="l" indent="0" marL="0">
               <a:buNone/>
             </a:pPr>
             <a:r>
@@ -11006,7 +10346,7 @@
           <a:bodyPr wrap="square" lIns="0" tIns="0" rIns="0" bIns="0" rtlCol="0" anchor="ctr"/>
           <a:lstStyle/>
           <a:p>
-            <a:pPr marL="0" indent="0">
+            <a:pPr indent="0" marL="0">
               <a:buNone/>
             </a:pPr>
             <a:r>
@@ -11056,7 +10396,7 @@
               <a:buChar char="•"/>
             </a:pPr>
             <a:r>
-              <a:rPr lang="en-US" sz="1500" dirty="0">
+              <a:rPr lang="en-US" sz="1350" dirty="0">
                 <a:solidFill>
                   <a:srgbClr val="14283C"/>
                 </a:solidFill>
@@ -11066,7 +10406,7 @@
               </a:rPr>
               <a:t>Portfolio of 108 services; 53 small vendor GUIs excluded; 6 selected for demonstration on data completeness over the full window</a:t>
             </a:r>
-            <a:endParaRPr lang="en-US" sz="1500" dirty="0"/>
+            <a:endParaRPr lang="en-US" sz="1350" dirty="0"/>
           </a:p>
           <a:p>
             <a:pPr marL="177800" indent="-177800">
@@ -11080,7 +10420,7 @@
               <a:buChar char="•"/>
             </a:pPr>
             <a:r>
-              <a:rPr lang="en-US" sz="1500" dirty="0">
+              <a:rPr lang="en-US" sz="1350" dirty="0">
                 <a:solidFill>
                   <a:srgbClr val="14283C"/>
                 </a:solidFill>
@@ -11090,7 +10430,7 @@
               </a:rPr>
               <a:t>Jan 2024 – Dec 2025, production records only, anonymised at source</a:t>
             </a:r>
-            <a:endParaRPr lang="en-US" sz="1500" dirty="0"/>
+            <a:endParaRPr lang="en-US" sz="1350" dirty="0"/>
           </a:p>
           <a:p>
             <a:pPr marL="177800" indent="-177800">
@@ -11104,7 +10444,7 @@
               <a:buChar char="•"/>
             </a:pPr>
             <a:r>
-              <a:rPr lang="en-US" sz="1500" dirty="0">
+              <a:rPr lang="en-US" sz="1350" dirty="0">
                 <a:solidFill>
                   <a:srgbClr val="14283C"/>
                 </a:solidFill>
@@ -11114,7 +10454,7 @@
               </a:rPr>
               <a:t>Quality filters: alarm-storm consolidation, &lt;0.1 h auto-closures removed, 98th percentile MTTR cap</a:t>
             </a:r>
-            <a:endParaRPr lang="en-US" sz="1500" dirty="0"/>
+            <a:endParaRPr lang="en-US" sz="1350" dirty="0"/>
           </a:p>
         </p:txBody>
       </p:sp>
@@ -11139,7 +10479,7 @@
           <a:bodyPr wrap="square" lIns="0" tIns="0" rIns="0" bIns="0" rtlCol="0" anchor="ctr"/>
           <a:lstStyle/>
           <a:p>
-            <a:pPr marL="0" indent="0">
+            <a:pPr indent="0" marL="0">
               <a:buNone/>
             </a:pPr>
             <a:r>
@@ -11189,7 +10529,7 @@
               <a:buChar char="•"/>
             </a:pPr>
             <a:r>
-              <a:rPr lang="en-US" sz="1500" dirty="0">
+              <a:rPr lang="en-US" sz="1350" dirty="0">
                 <a:solidFill>
                   <a:srgbClr val="14283C"/>
                 </a:solidFill>
@@ -11199,7 +10539,7 @@
               </a:rPr>
               <a:t>Recording practices vary by team → scores are ordinal signals, not measurements</a:t>
             </a:r>
-            <a:endParaRPr lang="en-US" sz="1500" dirty="0"/>
+            <a:endParaRPr lang="en-US" sz="1350" dirty="0"/>
           </a:p>
           <a:p>
             <a:pPr marL="177800" indent="-177800">
@@ -11213,7 +10553,7 @@
               <a:buChar char="•"/>
             </a:pPr>
             <a:r>
-              <a:rPr lang="en-US" sz="1500" dirty="0">
+              <a:rPr lang="en-US" sz="1350" dirty="0">
                 <a:solidFill>
                   <a:srgbClr val="14283C"/>
                 </a:solidFill>
@@ -11223,7 +10563,7 @@
               </a:rPr>
               <a:t>CFR shares its numerator with incident frequency (bounded by sensitivity analysis)</a:t>
             </a:r>
-            <a:endParaRPr lang="en-US" sz="1500" dirty="0"/>
+            <a:endParaRPr lang="en-US" sz="1350" dirty="0"/>
           </a:p>
           <a:p>
             <a:pPr marL="177800" indent="-177800">
@@ -11237,7 +10577,7 @@
               <a:buChar char="•"/>
             </a:pPr>
             <a:r>
-              <a:rPr lang="en-US" sz="1500" dirty="0">
+              <a:rPr lang="en-US" sz="1350" dirty="0">
                 <a:solidFill>
                   <a:srgbClr val="14283C"/>
                 </a:solidFill>
@@ -11247,7 +10587,7 @@
               </a:rPr>
               <a:t>Demonstration set, not a portfolio ranking; the contribution is the instrument and its evaluation logic</a:t>
             </a:r>
-            <a:endParaRPr lang="en-US" sz="1500" dirty="0"/>
+            <a:endParaRPr lang="en-US" sz="1350" dirty="0"/>
           </a:p>
         </p:txBody>
       </p:sp>
@@ -11270,13 +10610,6 @@
           </a:solidFill>
           <a:ln/>
         </p:spPr>
-        <p:txBody>
-          <a:bodyPr/>
-          <a:lstStyle/>
-          <a:p>
-            <a:endParaRPr lang="en-CH"/>
-          </a:p>
-        </p:txBody>
       </p:sp>
       <p:sp>
         <p:nvSpPr>
@@ -11299,11 +10632,11 @@
           <a:bodyPr wrap="square" lIns="0" tIns="0" rIns="0" bIns="0" rtlCol="0" anchor="ctr"/>
           <a:lstStyle/>
           <a:p>
-            <a:pPr marL="0" indent="0">
-              <a:buNone/>
-            </a:pPr>
-            <a:r>
-              <a:rPr lang="en-US" sz="950" b="1" kern="0" spc="300" dirty="0">
+            <a:pPr indent="0" marL="0">
+              <a:buNone/>
+            </a:pPr>
+            <a:r>
+              <a:rPr lang="en-US" sz="950" b="1" spc="300" kern="0" dirty="0">
                 <a:solidFill>
                   <a:srgbClr val="1E7F82"/>
                 </a:solidFill>
@@ -11338,7 +10671,7 @@
           <a:bodyPr wrap="square" lIns="0" tIns="0" rIns="0" bIns="0" rtlCol="0" anchor="t"/>
           <a:lstStyle/>
           <a:p>
-            <a:pPr marL="0" indent="0">
+            <a:pPr indent="0" marL="0">
               <a:buNone/>
             </a:pPr>
             <a:r>
@@ -11372,7 +10705,6 @@
         <a:solidFill>
           <a:srgbClr val="FFFFFF"/>
         </a:solidFill>
-        <a:effectLst/>
       </p:bgPr>
     </p:bg>
     <p:spTree>
@@ -11410,11 +10742,11 @@
           <a:bodyPr wrap="square" lIns="0" tIns="0" rIns="0" bIns="0" rtlCol="0" anchor="ctr"/>
           <a:lstStyle/>
           <a:p>
-            <a:pPr marL="0" indent="0" algn="l">
-              <a:buNone/>
-            </a:pPr>
-            <a:r>
-              <a:rPr lang="en-US" sz="1100" b="1" kern="0" spc="300" dirty="0">
+            <a:pPr algn="l" indent="0" marL="0">
+              <a:buNone/>
+            </a:pPr>
+            <a:r>
+              <a:rPr lang="en-US" sz="1100" b="1" spc="300" kern="0" dirty="0">
                 <a:solidFill>
                   <a:srgbClr val="5C7186"/>
                 </a:solidFill>
@@ -11449,7 +10781,7 @@
           <a:bodyPr wrap="square" lIns="0" tIns="0" rIns="0" bIns="0" rtlCol="0" anchor="ctr"/>
           <a:lstStyle/>
           <a:p>
-            <a:pPr marL="0" indent="0" algn="l">
+            <a:pPr algn="l" indent="0" marL="0">
               <a:buNone/>
             </a:pPr>
             <a:r>
@@ -11488,7 +10820,7 @@
           <a:bodyPr wrap="square" lIns="0" tIns="0" rIns="0" bIns="0" rtlCol="0" anchor="ctr"/>
           <a:lstStyle/>
           <a:p>
-            <a:pPr marL="0" indent="0">
+            <a:pPr indent="0" marL="0">
               <a:buNone/>
             </a:pPr>
             <a:r>
@@ -11525,13 +10857,6 @@
           </a:solidFill>
           <a:ln/>
         </p:spPr>
-        <p:txBody>
-          <a:bodyPr/>
-          <a:lstStyle/>
-          <a:p>
-            <a:endParaRPr lang="en-CH"/>
-          </a:p>
-        </p:txBody>
       </p:sp>
       <p:sp>
         <p:nvSpPr>
@@ -11552,13 +10877,6 @@
           </a:solidFill>
           <a:ln/>
         </p:spPr>
-        <p:txBody>
-          <a:bodyPr/>
-          <a:lstStyle/>
-          <a:p>
-            <a:endParaRPr lang="en-CH"/>
-          </a:p>
-        </p:txBody>
       </p:sp>
       <p:sp>
         <p:nvSpPr>
@@ -11581,7 +10899,7 @@
           <a:bodyPr wrap="square" lIns="0" tIns="0" rIns="0" bIns="0" rtlCol="0" anchor="ctr"/>
           <a:lstStyle/>
           <a:p>
-            <a:pPr marL="0" indent="0" algn="r">
+            <a:pPr algn="r" indent="0" marL="0">
               <a:buNone/>
             </a:pPr>
             <a:r>
@@ -11593,7 +10911,7 @@
                 <a:ea typeface="Courier New" pitchFamily="34" charset="-122"/>
                 <a:cs typeface="Courier New" pitchFamily="34" charset="-120"/>
               </a:rPr>
-              <a:t>0.470</a:t>
+              <a:t>0.465</a:t>
             </a:r>
             <a:endParaRPr lang="en-US" sz="1100" dirty="0"/>
           </a:p>
@@ -11620,7 +10938,7 @@
           <a:bodyPr wrap="square" lIns="0" tIns="0" rIns="0" bIns="0" rtlCol="0" anchor="ctr"/>
           <a:lstStyle/>
           <a:p>
-            <a:pPr marL="0" indent="0">
+            <a:pPr indent="0" marL="0">
               <a:buNone/>
             </a:pPr>
             <a:r>
@@ -11657,13 +10975,6 @@
           </a:solidFill>
           <a:ln/>
         </p:spPr>
-        <p:txBody>
-          <a:bodyPr/>
-          <a:lstStyle/>
-          <a:p>
-            <a:endParaRPr lang="en-CH"/>
-          </a:p>
-        </p:txBody>
       </p:sp>
       <p:sp>
         <p:nvSpPr>
@@ -11684,13 +10995,6 @@
           </a:solidFill>
           <a:ln/>
         </p:spPr>
-        <p:txBody>
-          <a:bodyPr/>
-          <a:lstStyle/>
-          <a:p>
-            <a:endParaRPr lang="en-CH"/>
-          </a:p>
-        </p:txBody>
       </p:sp>
       <p:sp>
         <p:nvSpPr>
@@ -11713,7 +11017,7 @@
           <a:bodyPr wrap="square" lIns="0" tIns="0" rIns="0" bIns="0" rtlCol="0" anchor="ctr"/>
           <a:lstStyle/>
           <a:p>
-            <a:pPr marL="0" indent="0" algn="r">
+            <a:pPr algn="r" indent="0" marL="0">
               <a:buNone/>
             </a:pPr>
             <a:r>
@@ -11725,7 +11029,7 @@
                 <a:ea typeface="Courier New" pitchFamily="34" charset="-122"/>
                 <a:cs typeface="Courier New" pitchFamily="34" charset="-120"/>
               </a:rPr>
-              <a:t>0.478</a:t>
+              <a:t>0.479</a:t>
             </a:r>
             <a:endParaRPr lang="en-US" sz="1100" dirty="0"/>
           </a:p>
@@ -11752,7 +11056,7 @@
           <a:bodyPr wrap="square" lIns="0" tIns="0" rIns="0" bIns="0" rtlCol="0" anchor="ctr"/>
           <a:lstStyle/>
           <a:p>
-            <a:pPr marL="0" indent="0">
+            <a:pPr indent="0" marL="0">
               <a:buNone/>
             </a:pPr>
             <a:r>
@@ -11789,13 +11093,6 @@
           </a:solidFill>
           <a:ln/>
         </p:spPr>
-        <p:txBody>
-          <a:bodyPr/>
-          <a:lstStyle/>
-          <a:p>
-            <a:endParaRPr lang="en-CH"/>
-          </a:p>
-        </p:txBody>
       </p:sp>
       <p:sp>
         <p:nvSpPr>
@@ -11816,13 +11113,6 @@
           </a:solidFill>
           <a:ln/>
         </p:spPr>
-        <p:txBody>
-          <a:bodyPr/>
-          <a:lstStyle/>
-          <a:p>
-            <a:endParaRPr lang="en-CH"/>
-          </a:p>
-        </p:txBody>
       </p:sp>
       <p:sp>
         <p:nvSpPr>
@@ -11845,7 +11135,7 @@
           <a:bodyPr wrap="square" lIns="0" tIns="0" rIns="0" bIns="0" rtlCol="0" anchor="ctr"/>
           <a:lstStyle/>
           <a:p>
-            <a:pPr marL="0" indent="0" algn="r">
+            <a:pPr algn="r" indent="0" marL="0">
               <a:buNone/>
             </a:pPr>
             <a:r>
@@ -11857,7 +11147,7 @@
                 <a:ea typeface="Courier New" pitchFamily="34" charset="-122"/>
                 <a:cs typeface="Courier New" pitchFamily="34" charset="-120"/>
               </a:rPr>
-              <a:t>0.554</a:t>
+              <a:t>0.549</a:t>
             </a:r>
             <a:endParaRPr lang="en-US" sz="1100" dirty="0"/>
           </a:p>
@@ -11884,7 +11174,7 @@
           <a:bodyPr wrap="square" lIns="0" tIns="0" rIns="0" bIns="0" rtlCol="0" anchor="ctr"/>
           <a:lstStyle/>
           <a:p>
-            <a:pPr marL="0" indent="0">
+            <a:pPr indent="0" marL="0">
               <a:buNone/>
             </a:pPr>
             <a:r>
@@ -11921,13 +11211,6 @@
           </a:solidFill>
           <a:ln/>
         </p:spPr>
-        <p:txBody>
-          <a:bodyPr/>
-          <a:lstStyle/>
-          <a:p>
-            <a:endParaRPr lang="en-CH"/>
-          </a:p>
-        </p:txBody>
       </p:sp>
       <p:sp>
         <p:nvSpPr>
@@ -11938,7 +11221,7 @@
         <p:spPr>
           <a:xfrm>
             <a:off x="1737360" y="3081528"/>
-            <a:ext cx="1072591" cy="182880"/>
+            <a:ext cx="1025957" cy="182880"/>
           </a:xfrm>
           <a:prstGeom prst="rect">
             <a:avLst/>
@@ -11948,13 +11231,6 @@
           </a:solidFill>
           <a:ln/>
         </p:spPr>
-        <p:txBody>
-          <a:bodyPr/>
-          <a:lstStyle/>
-          <a:p>
-            <a:endParaRPr lang="en-CH"/>
-          </a:p>
-        </p:txBody>
       </p:sp>
       <p:sp>
         <p:nvSpPr>
@@ -11977,7 +11253,7 @@
           <a:bodyPr wrap="square" lIns="0" tIns="0" rIns="0" bIns="0" rtlCol="0" anchor="ctr"/>
           <a:lstStyle/>
           <a:p>
-            <a:pPr marL="0" indent="0" algn="r">
+            <a:pPr algn="r" indent="0" marL="0">
               <a:buNone/>
             </a:pPr>
             <a:r>
@@ -11989,7 +11265,7 @@
                 <a:ea typeface="Courier New" pitchFamily="34" charset="-122"/>
                 <a:cs typeface="Courier New" pitchFamily="34" charset="-120"/>
               </a:rPr>
-              <a:t>0.768</a:t>
+              <a:t>0.779</a:t>
             </a:r>
             <a:endParaRPr lang="en-US" sz="1100" dirty="0"/>
           </a:p>
@@ -12016,7 +11292,7 @@
           <a:bodyPr wrap="square" lIns="0" tIns="0" rIns="0" bIns="0" rtlCol="0" anchor="ctr"/>
           <a:lstStyle/>
           <a:p>
-            <a:pPr marL="0" indent="0">
+            <a:pPr indent="0" marL="0">
               <a:buNone/>
             </a:pPr>
             <a:r>
@@ -12053,13 +11329,6 @@
           </a:solidFill>
           <a:ln/>
         </p:spPr>
-        <p:txBody>
-          <a:bodyPr/>
-          <a:lstStyle/>
-          <a:p>
-            <a:endParaRPr lang="en-CH"/>
-          </a:p>
-        </p:txBody>
       </p:sp>
       <p:sp>
         <p:nvSpPr>
@@ -12080,13 +11349,6 @@
           </a:solidFill>
           <a:ln/>
         </p:spPr>
-        <p:txBody>
-          <a:bodyPr/>
-          <a:lstStyle/>
-          <a:p>
-            <a:endParaRPr lang="en-CH"/>
-          </a:p>
-        </p:txBody>
       </p:sp>
       <p:sp>
         <p:nvSpPr>
@@ -12109,7 +11371,7 @@
           <a:bodyPr wrap="square" lIns="0" tIns="0" rIns="0" bIns="0" rtlCol="0" anchor="ctr"/>
           <a:lstStyle/>
           <a:p>
-            <a:pPr marL="0" indent="0" algn="r">
+            <a:pPr algn="r" indent="0" marL="0">
               <a:buNone/>
             </a:pPr>
             <a:r>
@@ -12121,7 +11383,7 @@
                 <a:ea typeface="Courier New" pitchFamily="34" charset="-122"/>
                 <a:cs typeface="Courier New" pitchFamily="34" charset="-120"/>
               </a:rPr>
-              <a:t>0.779</a:t>
+              <a:t>0.780</a:t>
             </a:r>
             <a:endParaRPr lang="en-US" sz="1100" dirty="0"/>
           </a:p>
@@ -12148,7 +11410,7 @@
           <a:bodyPr wrap="square" lIns="0" tIns="0" rIns="0" bIns="0" rtlCol="0" anchor="ctr"/>
           <a:lstStyle/>
           <a:p>
-            <a:pPr marL="0" indent="0">
+            <a:pPr indent="0" marL="0">
               <a:buNone/>
             </a:pPr>
             <a:r>
@@ -12185,13 +11447,6 @@
           </a:solidFill>
           <a:ln/>
         </p:spPr>
-        <p:txBody>
-          <a:bodyPr/>
-          <a:lstStyle/>
-          <a:p>
-            <a:endParaRPr lang="en-CH"/>
-          </a:p>
-        </p:txBody>
       </p:sp>
       <p:sp>
         <p:nvSpPr>
@@ -12212,13 +11467,6 @@
           </a:solidFill>
           <a:ln/>
         </p:spPr>
-        <p:txBody>
-          <a:bodyPr/>
-          <a:lstStyle/>
-          <a:p>
-            <a:endParaRPr lang="en-CH"/>
-          </a:p>
-        </p:txBody>
       </p:sp>
       <p:sp>
         <p:nvSpPr>
@@ -12241,7 +11489,7 @@
           <a:bodyPr wrap="square" lIns="0" tIns="0" rIns="0" bIns="0" rtlCol="0" anchor="ctr"/>
           <a:lstStyle/>
           <a:p>
-            <a:pPr marL="0" indent="0" algn="r">
+            <a:pPr algn="r" indent="0" marL="0">
               <a:buNone/>
             </a:pPr>
             <a:r>
@@ -12278,13 +11526,6 @@
           </a:solidFill>
           <a:ln/>
         </p:spPr>
-        <p:txBody>
-          <a:bodyPr/>
-          <a:lstStyle/>
-          <a:p>
-            <a:endParaRPr lang="en-CH"/>
-          </a:p>
-        </p:txBody>
       </p:sp>
       <p:sp>
         <p:nvSpPr>
@@ -12307,11 +11548,11 @@
           <a:bodyPr wrap="square" lIns="0" tIns="0" rIns="0" bIns="0" rtlCol="0" anchor="ctr"/>
           <a:lstStyle/>
           <a:p>
-            <a:pPr marL="0" indent="0">
-              <a:buNone/>
-            </a:pPr>
-            <a:r>
-              <a:rPr lang="en-US" sz="1400" b="1" dirty="0">
+            <a:pPr indent="0" marL="0">
+              <a:buNone/>
+            </a:pPr>
+            <a:r>
+              <a:rPr lang="en-US" sz="1250" b="1" dirty="0">
                 <a:solidFill>
                   <a:srgbClr val="D98E1F"/>
                 </a:solidFill>
@@ -12321,7 +11562,7 @@
               </a:rPr>
               <a:t>SVC-01 · rank 1</a:t>
             </a:r>
-            <a:endParaRPr lang="en-US" sz="1400" dirty="0"/>
+            <a:endParaRPr lang="en-US" sz="1250" dirty="0"/>
           </a:p>
         </p:txBody>
       </p:sp>
@@ -12346,11 +11587,11 @@
           <a:bodyPr wrap="square" lIns="0" tIns="0" rIns="0" bIns="0" rtlCol="0" anchor="t"/>
           <a:lstStyle/>
           <a:p>
-            <a:pPr marL="0" indent="0">
-              <a:buNone/>
-            </a:pPr>
-            <a:r>
-              <a:rPr lang="en-US" sz="1400" dirty="0">
+            <a:pPr indent="0" marL="0">
+              <a:buNone/>
+            </a:pPr>
+            <a:r>
+              <a:rPr lang="en-US" sz="1100" dirty="0">
                 <a:solidFill>
                   <a:srgbClr val="2A3F55"/>
                 </a:solidFill>
@@ -12358,9 +11599,9 @@
                 <a:ea typeface="Arial" pitchFamily="34" charset="-122"/>
                 <a:cs typeface="Arial" pitchFamily="34" charset="-120"/>
               </a:rPr>
-              <a:t>Only 64 incidents/yr, but 4,210 unsupported component months and patch recency 63.2 → the debt an incident count cannot see</a:t>
-            </a:r>
-            <a:endParaRPr lang="en-US" sz="1400" dirty="0"/>
+              <a:t>Only 64 incidents/yr, but 2,565 unsupported component months and patch recency 53.1 → the debt an incident count cannot see</a:t>
+            </a:r>
+            <a:endParaRPr lang="en-US" sz="1100" dirty="0"/>
           </a:p>
         </p:txBody>
       </p:sp>
@@ -12383,13 +11624,6 @@
           </a:solidFill>
           <a:ln/>
         </p:spPr>
-        <p:txBody>
-          <a:bodyPr/>
-          <a:lstStyle/>
-          <a:p>
-            <a:endParaRPr lang="en-CH"/>
-          </a:p>
-        </p:txBody>
       </p:sp>
       <p:sp>
         <p:nvSpPr>
@@ -12412,11 +11646,11 @@
           <a:bodyPr wrap="square" lIns="0" tIns="0" rIns="0" bIns="0" rtlCol="0" anchor="ctr"/>
           <a:lstStyle/>
           <a:p>
-            <a:pPr marL="0" indent="0">
-              <a:buNone/>
-            </a:pPr>
-            <a:r>
-              <a:rPr lang="en-US" sz="1400" b="1" dirty="0">
+            <a:pPr indent="0" marL="0">
+              <a:buNone/>
+            </a:pPr>
+            <a:r>
+              <a:rPr lang="en-US" sz="1250" b="1" dirty="0">
                 <a:solidFill>
                   <a:srgbClr val="14283C"/>
                 </a:solidFill>
@@ -12426,7 +11660,7 @@
               </a:rPr>
               <a:t>SVC-04 · rank 2</a:t>
             </a:r>
-            <a:endParaRPr lang="en-US" sz="1400" dirty="0"/>
+            <a:endParaRPr lang="en-US" sz="1250" dirty="0"/>
           </a:p>
         </p:txBody>
       </p:sp>
@@ -12451,11 +11685,11 @@
           <a:bodyPr wrap="square" lIns="0" tIns="0" rIns="0" bIns="0" rtlCol="0" anchor="t"/>
           <a:lstStyle/>
           <a:p>
-            <a:pPr marL="0" indent="0">
-              <a:buNone/>
-            </a:pPr>
-            <a:r>
-              <a:rPr lang="en-US" sz="1400" dirty="0">
+            <a:pPr indent="0" marL="0">
+              <a:buNone/>
+            </a:pPr>
+            <a:r>
+              <a:rPr lang="en-US" sz="1100" dirty="0">
                 <a:solidFill>
                   <a:srgbClr val="2A3F55"/>
                 </a:solidFill>
@@ -12465,7 +11699,7 @@
               </a:rPr>
               <a:t>574 incidents/yr, MTTR 41.9 h, CFR 3.38, yet a clean lifecycle record → architectural &amp; process debt</a:t>
             </a:r>
-            <a:endParaRPr lang="en-US" sz="1400" dirty="0"/>
+            <a:endParaRPr lang="en-US" sz="1100" dirty="0"/>
           </a:p>
         </p:txBody>
       </p:sp>
@@ -12488,13 +11722,6 @@
           </a:solidFill>
           <a:ln/>
         </p:spPr>
-        <p:txBody>
-          <a:bodyPr/>
-          <a:lstStyle/>
-          <a:p>
-            <a:endParaRPr lang="en-CH"/>
-          </a:p>
-        </p:txBody>
       </p:sp>
       <p:sp>
         <p:nvSpPr>
@@ -12517,11 +11744,11 @@
           <a:bodyPr wrap="square" lIns="0" tIns="0" rIns="0" bIns="0" rtlCol="0" anchor="ctr"/>
           <a:lstStyle/>
           <a:p>
-            <a:pPr marL="0" indent="0">
-              <a:buNone/>
-            </a:pPr>
-            <a:r>
-              <a:rPr lang="en-US" sz="1400" b="1" dirty="0">
+            <a:pPr indent="0" marL="0">
+              <a:buNone/>
+            </a:pPr>
+            <a:r>
+              <a:rPr lang="en-US" sz="1250" b="1" dirty="0">
                 <a:solidFill>
                   <a:srgbClr val="14283C"/>
                 </a:solidFill>
@@ -12531,7 +11758,7 @@
               </a:rPr>
               <a:t>SVC-03 · rank 6</a:t>
             </a:r>
-            <a:endParaRPr lang="en-US" sz="1400" dirty="0"/>
+            <a:endParaRPr lang="en-US" sz="1250" dirty="0"/>
           </a:p>
         </p:txBody>
       </p:sp>
@@ -12556,11 +11783,11 @@
           <a:bodyPr wrap="square" lIns="0" tIns="0" rIns="0" bIns="0" rtlCol="0" anchor="t"/>
           <a:lstStyle/>
           <a:p>
-            <a:pPr marL="0" indent="0">
-              <a:buNone/>
-            </a:pPr>
-            <a:r>
-              <a:rPr lang="en-US" sz="1400" dirty="0">
+            <a:pPr indent="0" marL="0">
+              <a:buNone/>
+            </a:pPr>
+            <a:r>
+              <a:rPr lang="en-US" sz="1100" dirty="0">
                 <a:solidFill>
                   <a:srgbClr val="2A3F55"/>
                 </a:solidFill>
@@ -12570,7 +11797,7 @@
               </a:rPr>
               <a:t>The portfolio's reference for a well-maintained service</a:t>
             </a:r>
-            <a:endParaRPr lang="en-US" sz="1400" dirty="0"/>
+            <a:endParaRPr lang="en-US" sz="1100" dirty="0"/>
           </a:p>
         </p:txBody>
       </p:sp>
@@ -12593,13 +11820,6 @@
           </a:solidFill>
           <a:ln/>
         </p:spPr>
-        <p:txBody>
-          <a:bodyPr/>
-          <a:lstStyle/>
-          <a:p>
-            <a:endParaRPr lang="en-CH"/>
-          </a:p>
-        </p:txBody>
       </p:sp>
       <p:sp>
         <p:nvSpPr>
@@ -12622,11 +11842,11 @@
           <a:bodyPr wrap="square" lIns="0" tIns="0" rIns="0" bIns="0" rtlCol="0" anchor="ctr"/>
           <a:lstStyle/>
           <a:p>
-            <a:pPr marL="0" indent="0">
-              <a:buNone/>
-            </a:pPr>
-            <a:r>
-              <a:rPr lang="en-US" sz="950" b="1" kern="0" spc="300" dirty="0">
+            <a:pPr indent="0" marL="0">
+              <a:buNone/>
+            </a:pPr>
+            <a:r>
+              <a:rPr lang="en-US" sz="950" b="1" spc="300" kern="0" dirty="0">
                 <a:solidFill>
                   <a:srgbClr val="1E7F82"/>
                 </a:solidFill>
@@ -12661,7 +11881,7 @@
           <a:bodyPr wrap="square" lIns="0" tIns="0" rIns="0" bIns="0" rtlCol="0" anchor="t"/>
           <a:lstStyle/>
           <a:p>
-            <a:pPr marL="0" indent="0">
+            <a:pPr indent="0" marL="0">
               <a:buNone/>
             </a:pPr>
             <a:r>
@@ -12695,7 +11915,6 @@
         <a:solidFill>
           <a:srgbClr val="FFFFFF"/>
         </a:solidFill>
-        <a:effectLst/>
       </p:bgPr>
     </p:bg>
     <p:spTree>
@@ -12733,11 +11952,11 @@
           <a:bodyPr wrap="square" lIns="0" tIns="0" rIns="0" bIns="0" rtlCol="0" anchor="ctr"/>
           <a:lstStyle/>
           <a:p>
-            <a:pPr marL="0" indent="0" algn="l">
-              <a:buNone/>
-            </a:pPr>
-            <a:r>
-              <a:rPr lang="en-US" sz="1100" b="1" kern="0" spc="300" dirty="0">
+            <a:pPr algn="l" indent="0" marL="0">
+              <a:buNone/>
+            </a:pPr>
+            <a:r>
+              <a:rPr lang="en-US" sz="1100" b="1" spc="300" kern="0" dirty="0">
                 <a:solidFill>
                   <a:srgbClr val="5C7186"/>
                 </a:solidFill>
@@ -12772,7 +11991,7 @@
           <a:bodyPr wrap="square" lIns="0" tIns="0" rIns="0" bIns="0" rtlCol="0" anchor="ctr"/>
           <a:lstStyle/>
           <a:p>
-            <a:pPr marL="0" indent="0" algn="l">
+            <a:pPr algn="l" indent="0" marL="0">
               <a:buNone/>
             </a:pPr>
             <a:r>
@@ -12809,20 +12028,13 @@
           </a:solidFill>
           <a:ln/>
           <a:effectLst>
-            <a:outerShdw blurRad="63500" dist="25400" dir="5400000" algn="bl" rotWithShape="0">
+            <a:outerShdw sx="100000" sy="100000" kx="0" ky="0" algn="bl" rotWithShape="0" blurRad="63500" dist="25400" dir="5400000">
               <a:srgbClr val="9AA7B2">
                 <a:alpha val="22000"/>
               </a:srgbClr>
             </a:outerShdw>
           </a:effectLst>
         </p:spPr>
-        <p:txBody>
-          <a:bodyPr/>
-          <a:lstStyle/>
-          <a:p>
-            <a:endParaRPr lang="en-CH"/>
-          </a:p>
-        </p:txBody>
       </p:sp>
       <p:sp>
         <p:nvSpPr>
@@ -12845,7 +12057,7 @@
           <a:bodyPr wrap="square" lIns="0" tIns="0" rIns="0" bIns="0" rtlCol="0" anchor="ctr"/>
           <a:lstStyle/>
           <a:p>
-            <a:pPr marL="0" indent="0">
+            <a:pPr indent="0" marL="0">
               <a:buNone/>
             </a:pPr>
             <a:r>
@@ -12884,11 +12096,11 @@
           <a:bodyPr wrap="square" lIns="0" tIns="0" rIns="0" bIns="0" rtlCol="0" anchor="t"/>
           <a:lstStyle/>
           <a:p>
-            <a:pPr marL="0" indent="0">
-              <a:buNone/>
-            </a:pPr>
-            <a:r>
-              <a:rPr lang="en-US" sz="1400" dirty="0">
+            <a:pPr indent="0" marL="0">
+              <a:buNone/>
+            </a:pPr>
+            <a:r>
+              <a:rPr lang="en-US" sz="1100" dirty="0">
                 <a:solidFill>
                   <a:srgbClr val="2A3F55"/>
                 </a:solidFill>
@@ -12898,7 +12110,7 @@
               </a:rPr>
               <a:t>Weight &amp; temporal variation, Kendall's τ, exact p over 720 permutations</a:t>
             </a:r>
-            <a:endParaRPr lang="en-US" sz="1400" dirty="0"/>
+            <a:endParaRPr lang="en-US" sz="1100" dirty="0"/>
           </a:p>
         </p:txBody>
       </p:sp>
@@ -12923,11 +12135,11 @@
           <a:bodyPr wrap="square" lIns="0" tIns="0" rIns="0" bIns="0" rtlCol="0" anchor="ctr"/>
           <a:lstStyle/>
           <a:p>
-            <a:pPr marL="0" indent="0">
-              <a:buNone/>
-            </a:pPr>
-            <a:r>
-              <a:rPr lang="en-US" sz="1400" b="1" dirty="0">
+            <a:pPr indent="0" marL="0">
+              <a:buNone/>
+            </a:pPr>
+            <a:r>
+              <a:rPr lang="en-US" sz="1200" b="1" dirty="0">
                 <a:solidFill>
                   <a:srgbClr val="1E7F82"/>
                 </a:solidFill>
@@ -12937,7 +12149,7 @@
               </a:rPr>
               <a:t>τ = 0.60–1.00</a:t>
             </a:r>
-            <a:endParaRPr lang="en-US" sz="1400" dirty="0"/>
+            <a:endParaRPr lang="en-US" sz="1200" dirty="0"/>
           </a:p>
         </p:txBody>
       </p:sp>
@@ -12960,20 +12172,13 @@
           </a:solidFill>
           <a:ln/>
           <a:effectLst>
-            <a:outerShdw blurRad="63500" dist="25400" dir="5400000" algn="bl" rotWithShape="0">
+            <a:outerShdw sx="100000" sy="100000" kx="0" ky="0" algn="bl" rotWithShape="0" blurRad="63500" dist="25400" dir="5400000">
               <a:srgbClr val="9AA7B2">
                 <a:alpha val="22000"/>
               </a:srgbClr>
             </a:outerShdw>
           </a:effectLst>
         </p:spPr>
-        <p:txBody>
-          <a:bodyPr/>
-          <a:lstStyle/>
-          <a:p>
-            <a:endParaRPr lang="en-CH"/>
-          </a:p>
-        </p:txBody>
       </p:sp>
       <p:sp>
         <p:nvSpPr>
@@ -12996,7 +12201,7 @@
           <a:bodyPr wrap="square" lIns="0" tIns="0" rIns="0" bIns="0" rtlCol="0" anchor="ctr"/>
           <a:lstStyle/>
           <a:p>
-            <a:pPr marL="0" indent="0">
+            <a:pPr indent="0" marL="0">
               <a:buNone/>
             </a:pPr>
             <a:r>
@@ -13035,11 +12240,11 @@
           <a:bodyPr wrap="square" lIns="0" tIns="0" rIns="0" bIns="0" rtlCol="0" anchor="t"/>
           <a:lstStyle/>
           <a:p>
-            <a:pPr marL="0" indent="0">
-              <a:buNone/>
-            </a:pPr>
-            <a:r>
-              <a:rPr lang="en-US" sz="1400" dirty="0">
+            <a:pPr indent="0" marL="0">
+              <a:buNone/>
+            </a:pPr>
+            <a:r>
+              <a:rPr lang="en-US" sz="1100" dirty="0">
                 <a:solidFill>
                   <a:srgbClr val="2A3F55"/>
                 </a:solidFill>
@@ -13049,7 +12254,7 @@
               </a:rPr>
               <a:t>20,000 Dirichlet-sampled weightings, rank-acceptability analysis</a:t>
             </a:r>
-            <a:endParaRPr lang="en-US" sz="1400" dirty="0"/>
+            <a:endParaRPr lang="en-US" sz="1100" dirty="0"/>
           </a:p>
         </p:txBody>
       </p:sp>
@@ -13074,11 +12279,11 @@
           <a:bodyPr wrap="square" lIns="0" tIns="0" rIns="0" bIns="0" rtlCol="0" anchor="ctr"/>
           <a:lstStyle/>
           <a:p>
-            <a:pPr marL="0" indent="0">
-              <a:buNone/>
-            </a:pPr>
-            <a:r>
-              <a:rPr lang="en-US" sz="1400" b="1" dirty="0">
+            <a:pPr indent="0" marL="0">
+              <a:buNone/>
+            </a:pPr>
+            <a:r>
+              <a:rPr lang="en-US" sz="1200" b="1" dirty="0">
                 <a:solidFill>
                   <a:srgbClr val="1E7F82"/>
                 </a:solidFill>
@@ -13088,7 +12293,7 @@
               </a:rPr>
               <a:t>extremes robust</a:t>
             </a:r>
-            <a:endParaRPr lang="en-US" sz="1400" dirty="0"/>
+            <a:endParaRPr lang="en-US" sz="1200" dirty="0"/>
           </a:p>
         </p:txBody>
       </p:sp>
@@ -13111,20 +12316,13 @@
           </a:solidFill>
           <a:ln/>
           <a:effectLst>
-            <a:outerShdw blurRad="63500" dist="25400" dir="5400000" algn="bl" rotWithShape="0">
+            <a:outerShdw sx="100000" sy="100000" kx="0" ky="0" algn="bl" rotWithShape="0" blurRad="63500" dist="25400" dir="5400000">
               <a:srgbClr val="9AA7B2">
                 <a:alpha val="22000"/>
               </a:srgbClr>
             </a:outerShdw>
           </a:effectLst>
         </p:spPr>
-        <p:txBody>
-          <a:bodyPr/>
-          <a:lstStyle/>
-          <a:p>
-            <a:endParaRPr lang="en-CH"/>
-          </a:p>
-        </p:txBody>
       </p:sp>
       <p:sp>
         <p:nvSpPr>
@@ -13147,7 +12345,7 @@
           <a:bodyPr wrap="square" lIns="0" tIns="0" rIns="0" bIns="0" rtlCol="0" anchor="ctr"/>
           <a:lstStyle/>
           <a:p>
-            <a:pPr marL="0" indent="0">
+            <a:pPr indent="0" marL="0">
               <a:buNone/>
             </a:pPr>
             <a:r>
@@ -13186,11 +12384,11 @@
           <a:bodyPr wrap="square" lIns="0" tIns="0" rIns="0" bIns="0" rtlCol="0" anchor="t"/>
           <a:lstStyle/>
           <a:p>
-            <a:pPr marL="0" indent="0">
-              <a:buNone/>
-            </a:pPr>
-            <a:r>
-              <a:rPr lang="en-US" sz="1400" dirty="0">
+            <a:pPr indent="0" marL="0">
+              <a:buNone/>
+            </a:pPr>
+            <a:r>
+              <a:rPr lang="en-US" sz="1100" dirty="0">
                 <a:solidFill>
                   <a:srgbClr val="2A3F55"/>
                 </a:solidFill>
@@ -13200,7 +12398,7 @@
               </a:rPr>
               <a:t>Re-ranked with SAW &amp; VIKOR</a:t>
             </a:r>
-            <a:endParaRPr lang="en-US" sz="1400" dirty="0"/>
+            <a:endParaRPr lang="en-US" sz="1100" dirty="0"/>
           </a:p>
         </p:txBody>
       </p:sp>
@@ -13225,11 +12423,11 @@
           <a:bodyPr wrap="square" lIns="0" tIns="0" rIns="0" bIns="0" rtlCol="0" anchor="ctr"/>
           <a:lstStyle/>
           <a:p>
-            <a:pPr marL="0" indent="0">
-              <a:buNone/>
-            </a:pPr>
-            <a:r>
-              <a:rPr lang="en-US" sz="1400" b="1" dirty="0">
+            <a:pPr indent="0" marL="0">
+              <a:buNone/>
+            </a:pPr>
+            <a:r>
+              <a:rPr lang="en-US" sz="1200" b="1" dirty="0">
                 <a:solidFill>
                   <a:srgbClr val="1E7F82"/>
                 </a:solidFill>
@@ -13237,9 +12435,9 @@
                 <a:ea typeface="Courier New" pitchFamily="34" charset="-122"/>
                 <a:cs typeface="Courier New" pitchFamily="34" charset="-120"/>
               </a:rPr>
-              <a:t>τ = 0.60–1.00</a:t>
-            </a:r>
-            <a:endParaRPr lang="en-US" sz="1400" dirty="0"/>
+              <a:t>τ = 0.73–1.00</a:t>
+            </a:r>
+            <a:endParaRPr lang="en-US" sz="1200" dirty="0"/>
           </a:p>
         </p:txBody>
       </p:sp>
@@ -13262,20 +12460,13 @@
           </a:solidFill>
           <a:ln/>
           <a:effectLst>
-            <a:outerShdw blurRad="63500" dist="25400" dir="5400000" algn="bl" rotWithShape="0">
+            <a:outerShdw sx="100000" sy="100000" kx="0" ky="0" algn="bl" rotWithShape="0" blurRad="63500" dist="25400" dir="5400000">
               <a:srgbClr val="9AA7B2">
                 <a:alpha val="22000"/>
               </a:srgbClr>
             </a:outerShdw>
           </a:effectLst>
         </p:spPr>
-        <p:txBody>
-          <a:bodyPr/>
-          <a:lstStyle/>
-          <a:p>
-            <a:endParaRPr lang="en-CH"/>
-          </a:p>
-        </p:txBody>
       </p:sp>
       <p:sp>
         <p:nvSpPr>
@@ -13298,7 +12489,7 @@
           <a:bodyPr wrap="square" lIns="0" tIns="0" rIns="0" bIns="0" rtlCol="0" anchor="ctr"/>
           <a:lstStyle/>
           <a:p>
-            <a:pPr marL="0" indent="0">
+            <a:pPr indent="0" marL="0">
               <a:buNone/>
             </a:pPr>
             <a:r>
@@ -13337,11 +12528,11 @@
           <a:bodyPr wrap="square" lIns="0" tIns="0" rIns="0" bIns="0" rtlCol="0" anchor="t"/>
           <a:lstStyle/>
           <a:p>
-            <a:pPr marL="0" indent="0">
-              <a:buNone/>
-            </a:pPr>
-            <a:r>
-              <a:rPr lang="en-US" sz="1400" dirty="0">
+            <a:pPr indent="0" marL="0">
+              <a:buNone/>
+            </a:pPr>
+            <a:r>
+              <a:rPr lang="en-US" sz="1100" dirty="0">
                 <a:solidFill>
                   <a:srgbClr val="2A3F55"/>
                 </a:solidFill>
@@ -13351,7 +12542,7 @@
               </a:rPr>
               <a:t>Against an incident-only baseline</a:t>
             </a:r>
-            <a:endParaRPr lang="en-US" sz="1400" dirty="0"/>
+            <a:endParaRPr lang="en-US" sz="1100" dirty="0"/>
           </a:p>
         </p:txBody>
       </p:sp>
@@ -13376,11 +12567,11 @@
           <a:bodyPr wrap="square" lIns="0" tIns="0" rIns="0" bIns="0" rtlCol="0" anchor="ctr"/>
           <a:lstStyle/>
           <a:p>
-            <a:pPr marL="0" indent="0">
-              <a:buNone/>
-            </a:pPr>
-            <a:r>
-              <a:rPr lang="en-US" sz="1400" b="1" dirty="0">
+            <a:pPr indent="0" marL="0">
+              <a:buNone/>
+            </a:pPr>
+            <a:r>
+              <a:rPr lang="en-US" sz="1200" b="1" dirty="0">
                 <a:solidFill>
                   <a:srgbClr val="1E7F82"/>
                 </a:solidFill>
@@ -13390,7 +12581,7 @@
               </a:rPr>
               <a:t>τ = 0.47 / 0.33</a:t>
             </a:r>
-            <a:endParaRPr lang="en-US" sz="1400" dirty="0"/>
+            <a:endParaRPr lang="en-US" sz="1200" dirty="0"/>
           </a:p>
         </p:txBody>
       </p:sp>
@@ -13413,20 +12604,13 @@
           </a:solidFill>
           <a:ln/>
           <a:effectLst>
-            <a:outerShdw blurRad="63500" dist="25400" dir="5400000" algn="bl" rotWithShape="0">
+            <a:outerShdw sx="100000" sy="100000" kx="0" ky="0" algn="bl" rotWithShape="0" blurRad="63500" dist="25400" dir="5400000">
               <a:srgbClr val="9AA7B2">
                 <a:alpha val="22000"/>
               </a:srgbClr>
             </a:outerShdw>
           </a:effectLst>
         </p:spPr>
-        <p:txBody>
-          <a:bodyPr/>
-          <a:lstStyle/>
-          <a:p>
-            <a:endParaRPr lang="en-CH"/>
-          </a:p>
-        </p:txBody>
       </p:sp>
       <p:sp>
         <p:nvSpPr>
@@ -13449,7 +12633,7 @@
           <a:bodyPr wrap="square" lIns="0" tIns="0" rIns="0" bIns="0" rtlCol="0" anchor="ctr"/>
           <a:lstStyle/>
           <a:p>
-            <a:pPr marL="0" indent="0">
+            <a:pPr indent="0" marL="0">
               <a:buNone/>
             </a:pPr>
             <a:r>
@@ -13488,11 +12672,11 @@
           <a:bodyPr wrap="square" lIns="0" tIns="0" rIns="0" bIns="0" rtlCol="0" anchor="t"/>
           <a:lstStyle/>
           <a:p>
-            <a:pPr marL="0" indent="0">
-              <a:buNone/>
-            </a:pPr>
-            <a:r>
-              <a:rPr lang="en-US" sz="1400" dirty="0">
+            <a:pPr indent="0" marL="0">
+              <a:buNone/>
+            </a:pPr>
+            <a:r>
+              <a:rPr lang="en-US" sz="1100" dirty="0">
                 <a:solidFill>
                   <a:srgbClr val="2A3F55"/>
                 </a:solidFill>
@@ -13502,7 +12686,7 @@
               </a:rPr>
               <a:t>Leave-one-out rank reversal; absolute-mode variant</a:t>
             </a:r>
-            <a:endParaRPr lang="en-US" sz="1400" dirty="0"/>
+            <a:endParaRPr lang="en-US" sz="1100" dirty="0"/>
           </a:p>
         </p:txBody>
       </p:sp>
@@ -13527,11 +12711,11 @@
           <a:bodyPr wrap="square" lIns="0" tIns="0" rIns="0" bIns="0" rtlCol="0" anchor="ctr"/>
           <a:lstStyle/>
           <a:p>
-            <a:pPr marL="0" indent="0">
-              <a:buNone/>
-            </a:pPr>
-            <a:r>
-              <a:rPr lang="en-US" sz="1400" b="1" dirty="0">
+            <a:pPr indent="0" marL="0">
+              <a:buNone/>
+            </a:pPr>
+            <a:r>
+              <a:rPr lang="en-US" sz="1200" b="1" dirty="0">
                 <a:solidFill>
                   <a:srgbClr val="D98E1F"/>
                 </a:solidFill>
@@ -13541,7 +12725,7 @@
               </a:rPr>
               <a:t>reversal-free by construction</a:t>
             </a:r>
-            <a:endParaRPr lang="en-US" sz="1400" dirty="0"/>
+            <a:endParaRPr lang="en-US" sz="1200" dirty="0"/>
           </a:p>
         </p:txBody>
       </p:sp>
@@ -13564,13 +12748,6 @@
           </a:solidFill>
           <a:ln/>
         </p:spPr>
-        <p:txBody>
-          <a:bodyPr/>
-          <a:lstStyle/>
-          <a:p>
-            <a:endParaRPr lang="en-CH"/>
-          </a:p>
-        </p:txBody>
       </p:sp>
       <p:sp>
         <p:nvSpPr>
@@ -13593,11 +12770,11 @@
           <a:bodyPr wrap="square" lIns="0" tIns="0" rIns="0" bIns="0" rtlCol="0" anchor="ctr"/>
           <a:lstStyle/>
           <a:p>
-            <a:pPr marL="0" indent="0">
-              <a:buNone/>
-            </a:pPr>
-            <a:r>
-              <a:rPr lang="en-US" sz="950" b="1" kern="0" spc="300" dirty="0">
+            <a:pPr indent="0" marL="0">
+              <a:buNone/>
+            </a:pPr>
+            <a:r>
+              <a:rPr lang="en-US" sz="950" b="1" spc="300" kern="0" dirty="0">
                 <a:solidFill>
                   <a:srgbClr val="1E7F82"/>
                 </a:solidFill>
@@ -13632,7 +12809,7 @@
           <a:bodyPr wrap="square" lIns="0" tIns="0" rIns="0" bIns="0" rtlCol="0" anchor="t"/>
           <a:lstStyle/>
           <a:p>
-            <a:pPr marL="0" indent="0">
+            <a:pPr indent="0" marL="0">
               <a:buNone/>
             </a:pPr>
             <a:r>
@@ -13666,7 +12843,6 @@
         <a:solidFill>
           <a:srgbClr val="FFFFFF"/>
         </a:solidFill>
-        <a:effectLst/>
       </p:bgPr>
     </p:bg>
     <p:spTree>
@@ -13704,11 +12880,11 @@
           <a:bodyPr wrap="square" lIns="0" tIns="0" rIns="0" bIns="0" rtlCol="0" anchor="ctr"/>
           <a:lstStyle/>
           <a:p>
-            <a:pPr marL="0" indent="0" algn="l">
-              <a:buNone/>
-            </a:pPr>
-            <a:r>
-              <a:rPr lang="en-US" sz="1100" b="1" kern="0" spc="300" dirty="0">
+            <a:pPr algn="l" indent="0" marL="0">
+              <a:buNone/>
+            </a:pPr>
+            <a:r>
+              <a:rPr lang="en-US" sz="1100" b="1" spc="300" kern="0" dirty="0">
                 <a:solidFill>
                   <a:srgbClr val="5C7186"/>
                 </a:solidFill>
@@ -13743,7 +12919,7 @@
           <a:bodyPr wrap="square" lIns="0" tIns="0" rIns="0" bIns="0" rtlCol="0" anchor="ctr"/>
           <a:lstStyle/>
           <a:p>
-            <a:pPr marL="0" indent="0" algn="l">
+            <a:pPr algn="l" indent="0" marL="0">
               <a:buNone/>
             </a:pPr>
             <a:r>
@@ -13782,7 +12958,7 @@
           <a:bodyPr wrap="square" lIns="0" tIns="0" rIns="0" bIns="0" rtlCol="0" anchor="ctr"/>
           <a:lstStyle/>
           <a:p>
-            <a:pPr marL="0" indent="0">
+            <a:pPr indent="0" marL="0">
               <a:buNone/>
             </a:pPr>
             <a:r>
@@ -13832,7 +13008,7 @@
               <a:buChar char="•"/>
             </a:pPr>
             <a:r>
-              <a:rPr lang="en-US" sz="1500" dirty="0">
+              <a:rPr lang="en-US" sz="1350" dirty="0">
                 <a:solidFill>
                   <a:srgbClr val="14283C"/>
                 </a:solidFill>
@@ -13842,7 +13018,7 @@
               </a:rPr>
               <a:t>Weight sensitivity 2025: τ = 1.000 (identical order)</a:t>
             </a:r>
-            <a:endParaRPr lang="en-US" sz="1500" dirty="0"/>
+            <a:endParaRPr lang="en-US" sz="1350" dirty="0"/>
           </a:p>
           <a:p>
             <a:pPr marL="177800" indent="-177800">
@@ -13856,7 +13032,7 @@
               <a:buChar char="•"/>
             </a:pPr>
             <a:r>
-              <a:rPr lang="en-US" sz="1500" dirty="0">
+              <a:rPr lang="en-US" sz="1350" dirty="0">
                 <a:solidFill>
                   <a:srgbClr val="14283C"/>
                 </a:solidFill>
@@ -13866,7 +13042,7 @@
               </a:rPr>
               <a:t>Weight sensitivity 2024: τ = 0.867 (one swap at the top)</a:t>
             </a:r>
-            <a:endParaRPr lang="en-US" sz="1500" dirty="0"/>
+            <a:endParaRPr lang="en-US" sz="1350" dirty="0"/>
           </a:p>
           <a:p>
             <a:pPr marL="177800" indent="-177800">
@@ -13880,7 +13056,7 @@
               <a:buChar char="•"/>
             </a:pPr>
             <a:r>
-              <a:rPr lang="en-US" sz="1500" dirty="0">
+              <a:rPr lang="en-US" sz="1350" dirty="0">
                 <a:solidFill>
                   <a:srgbClr val="14283C"/>
                 </a:solidFill>
@@ -13890,7 +13066,7 @@
               </a:rPr>
               <a:t>Temporal 2025 vs 2024: τ = 0.600 / 0.733, tracking real profile change, above all SVC-06's broad deterioration</a:t>
             </a:r>
-            <a:endParaRPr lang="en-US" sz="1500" dirty="0"/>
+            <a:endParaRPr lang="en-US" sz="1350" dirty="0"/>
           </a:p>
           <a:p>
             <a:pPr marL="177800" indent="-177800">
@@ -13904,7 +13080,7 @@
               <a:buChar char="•"/>
             </a:pPr>
             <a:r>
-              <a:rPr lang="en-US" sz="1500" b="1" dirty="0">
+              <a:rPr lang="en-US" sz="1350" b="1" dirty="0">
                 <a:solidFill>
                   <a:srgbClr val="14283C"/>
                 </a:solidFill>
@@ -13914,7 +13090,7 @@
               </a:rPr>
               <a:t>The lowest-priority position is identical in every run</a:t>
             </a:r>
-            <a:endParaRPr lang="en-US" sz="1500" dirty="0"/>
+            <a:endParaRPr lang="en-US" sz="1350" dirty="0"/>
           </a:p>
         </p:txBody>
       </p:sp>
@@ -13937,20 +13113,13 @@
           </a:solidFill>
           <a:ln/>
           <a:effectLst>
-            <a:outerShdw blurRad="76200" dist="25400" dir="5400000" algn="bl" rotWithShape="0">
+            <a:outerShdw sx="100000" sy="100000" kx="0" ky="0" algn="bl" rotWithShape="0" blurRad="76200" dist="25400" dir="5400000">
               <a:srgbClr val="9AA7B2">
                 <a:alpha val="25000"/>
               </a:srgbClr>
             </a:outerShdw>
           </a:effectLst>
         </p:spPr>
-        <p:txBody>
-          <a:bodyPr/>
-          <a:lstStyle/>
-          <a:p>
-            <a:endParaRPr lang="en-CH"/>
-          </a:p>
-        </p:txBody>
       </p:sp>
       <p:sp>
         <p:nvSpPr>
@@ -13973,11 +13142,11 @@
           <a:bodyPr wrap="square" lIns="0" tIns="0" rIns="0" bIns="0" rtlCol="0" anchor="ctr"/>
           <a:lstStyle/>
           <a:p>
-            <a:pPr marL="0" indent="0">
-              <a:buNone/>
-            </a:pPr>
-            <a:r>
-              <a:rPr lang="en-US" sz="1400" b="1" kern="0" spc="200" dirty="0">
+            <a:pPr indent="0" marL="0">
+              <a:buNone/>
+            </a:pPr>
+            <a:r>
+              <a:rPr lang="en-US" sz="1100" b="1" spc="200" kern="0" dirty="0">
                 <a:solidFill>
                   <a:srgbClr val="5C7186"/>
                 </a:solidFill>
@@ -13987,7 +13156,7 @@
               </a:rPr>
               <a:t>FULL WEIGHT SPACE · 20,000 DRAWS</a:t>
             </a:r>
-            <a:endParaRPr lang="en-US" sz="1400" dirty="0"/>
+            <a:endParaRPr lang="en-US" sz="1100" dirty="0"/>
           </a:p>
         </p:txBody>
       </p:sp>
@@ -14012,7 +13181,7 @@
           <a:bodyPr wrap="square" lIns="0" tIns="0" rIns="0" bIns="0" rtlCol="0" anchor="ctr"/>
           <a:lstStyle/>
           <a:p>
-            <a:pPr marL="0" indent="0">
+            <a:pPr indent="0" marL="0">
               <a:buNone/>
             </a:pPr>
             <a:r>
@@ -14024,7 +13193,7 @@
                 <a:ea typeface="Courier New" pitchFamily="34" charset="-122"/>
                 <a:cs typeface="Courier New" pitchFamily="34" charset="-120"/>
               </a:rPr>
-              <a:t>98.3%</a:t>
+              <a:t>98.1%</a:t>
             </a:r>
             <a:endParaRPr lang="en-US" sz="6000" dirty="0"/>
           </a:p>
@@ -14051,14 +13220,14 @@
           <a:bodyPr wrap="square" lIns="0" tIns="0" rIns="0" bIns="0" rtlCol="0" anchor="t"/>
           <a:lstStyle/>
           <a:p>
-            <a:pPr marL="0" indent="0">
+            <a:pPr indent="0" marL="0">
               <a:lnSpc>
                 <a:spcPct val="115000"/>
               </a:lnSpc>
               <a:buNone/>
             </a:pPr>
             <a:r>
-              <a:rPr lang="en-US" sz="1400" dirty="0">
+              <a:rPr lang="en-US" sz="1250" dirty="0">
                 <a:solidFill>
                   <a:srgbClr val="2A3F55"/>
                 </a:solidFill>
@@ -14066,9 +13235,9 @@
                 <a:ea typeface="Arial" pitchFamily="34" charset="-122"/>
                 <a:cs typeface="Arial" pitchFamily="34" charset="-120"/>
               </a:rPr>
-              <a:t>of all admissible weightings place SVC-03 last, and rank 1 falls to SVC-01, SVC-06 or SVC-04 in every single draw (41%, 32%, 27%). The bottom is weight-independent; the single top rank is a property of the cluster.</a:t>
-            </a:r>
-            <a:endParaRPr lang="en-US" sz="1400" dirty="0"/>
+              <a:t>of all admissible weightings place SVC-03 last, and rank 1 falls to SVC-01, SVC-06 or SVC-04 in every single draw (46%, 27%, 27%). The bottom is weight-independent; the single top rank is a property of the cluster.</a:t>
+            </a:r>
+            <a:endParaRPr lang="en-US" sz="1250" dirty="0"/>
           </a:p>
         </p:txBody>
       </p:sp>
@@ -14091,13 +13260,6 @@
           </a:solidFill>
           <a:ln/>
         </p:spPr>
-        <p:txBody>
-          <a:bodyPr/>
-          <a:lstStyle/>
-          <a:p>
-            <a:endParaRPr lang="en-CH"/>
-          </a:p>
-        </p:txBody>
       </p:sp>
       <p:sp>
         <p:nvSpPr>
@@ -14120,11 +13282,11 @@
           <a:bodyPr wrap="square" lIns="0" tIns="0" rIns="0" bIns="0" rtlCol="0" anchor="ctr"/>
           <a:lstStyle/>
           <a:p>
-            <a:pPr marL="0" indent="0">
-              <a:buNone/>
-            </a:pPr>
-            <a:r>
-              <a:rPr lang="en-US" sz="950" b="1" kern="0" spc="300" dirty="0">
+            <a:pPr indent="0" marL="0">
+              <a:buNone/>
+            </a:pPr>
+            <a:r>
+              <a:rPr lang="en-US" sz="950" b="1" spc="300" kern="0" dirty="0">
                 <a:solidFill>
                   <a:srgbClr val="1E7F82"/>
                 </a:solidFill>
@@ -14159,7 +13321,7 @@
           <a:bodyPr wrap="square" lIns="0" tIns="0" rIns="0" bIns="0" rtlCol="0" anchor="t"/>
           <a:lstStyle/>
           <a:p>
-            <a:pPr marL="0" indent="0">
+            <a:pPr indent="0" marL="0">
               <a:buNone/>
             </a:pPr>
             <a:r>
@@ -14478,319 +13640,4 @@
     </a:ext>
   </a:extLst>
 </a:theme>
-</file>
-
-<file path=ppt/theme/theme2.xml><?xml version="1.0" encoding="utf-8"?>
-<a:theme xmlns:a="http://schemas.openxmlformats.org/drawingml/2006/main" name="Office Theme">
-  <a:themeElements>
-    <a:clrScheme name="Office">
-      <a:dk1>
-        <a:sysClr val="windowText" lastClr="000000"/>
-      </a:dk1>
-      <a:lt1>
-        <a:sysClr val="window" lastClr="FFFFFF"/>
-      </a:lt1>
-      <a:dk2>
-        <a:srgbClr val="0E2841"/>
-      </a:dk2>
-      <a:lt2>
-        <a:srgbClr val="E8E8E8"/>
-      </a:lt2>
-      <a:accent1>
-        <a:srgbClr val="156082"/>
-      </a:accent1>
-      <a:accent2>
-        <a:srgbClr val="E97132"/>
-      </a:accent2>
-      <a:accent3>
-        <a:srgbClr val="196B24"/>
-      </a:accent3>
-      <a:accent4>
-        <a:srgbClr val="0F9ED5"/>
-      </a:accent4>
-      <a:accent5>
-        <a:srgbClr val="A02B93"/>
-      </a:accent5>
-      <a:accent6>
-        <a:srgbClr val="4EA72E"/>
-      </a:accent6>
-      <a:hlink>
-        <a:srgbClr val="467886"/>
-      </a:hlink>
-      <a:folHlink>
-        <a:srgbClr val="96607D"/>
-      </a:folHlink>
-    </a:clrScheme>
-    <a:fontScheme name="Office">
-      <a:majorFont>
-        <a:latin typeface="Aptos Display" panose="02110004020202020204"/>
-        <a:ea typeface=""/>
-        <a:cs typeface=""/>
-        <a:font script="Jpan" typeface="游ゴシック Light"/>
-        <a:font script="Hang" typeface="맑은 고딕"/>
-        <a:font script="Hans" typeface="等线 Light"/>
-        <a:font script="Hant" typeface="新細明體"/>
-        <a:font script="Arab" typeface="Times New Roman"/>
-        <a:font script="Hebr" typeface="Times New Roman"/>
-        <a:font script="Thai" typeface="Angsana New"/>
-        <a:font script="Ethi" typeface="Nyala"/>
-        <a:font script="Beng" typeface="Vrinda"/>
-        <a:font script="Gujr" typeface="Shruti"/>
-        <a:font script="Khmr" typeface="MoolBoran"/>
-        <a:font script="Knda" typeface="Tunga"/>
-        <a:font script="Guru" typeface="Raavi"/>
-        <a:font script="Cans" typeface="Euphemia"/>
-        <a:font script="Cher" typeface="Plantagenet Cherokee"/>
-        <a:font script="Yiii" typeface="Microsoft Yi Baiti"/>
-        <a:font script="Tibt" typeface="Microsoft Himalaya"/>
-        <a:font script="Thaa" typeface="MV Boli"/>
-        <a:font script="Deva" typeface="Mangal"/>
-        <a:font script="Telu" typeface="Gautami"/>
-        <a:font script="Taml" typeface="Latha"/>
-        <a:font script="Syrc" typeface="Estrangelo Edessa"/>
-        <a:font script="Orya" typeface="Kalinga"/>
-        <a:font script="Mlym" typeface="Kartika"/>
-        <a:font script="Laoo" typeface="DokChampa"/>
-        <a:font script="Sinh" typeface="Iskoola Pota"/>
-        <a:font script="Mong" typeface="Mongolian Baiti"/>
-        <a:font script="Viet" typeface="Times New Roman"/>
-        <a:font script="Uigh" typeface="Microsoft Uighur"/>
-        <a:font script="Geor" typeface="Sylfaen"/>
-        <a:font script="Armn" typeface="Arial"/>
-        <a:font script="Bugi" typeface="Leelawadee UI"/>
-        <a:font script="Bopo" typeface="Microsoft JhengHei"/>
-        <a:font script="Java" typeface="Javanese Text"/>
-        <a:font script="Lisu" typeface="Segoe UI"/>
-        <a:font script="Mymr" typeface="Myanmar Text"/>
-        <a:font script="Nkoo" typeface="Ebrima"/>
-        <a:font script="Olck" typeface="Nirmala UI"/>
-        <a:font script="Osma" typeface="Ebrima"/>
-        <a:font script="Phag" typeface="Phagspa"/>
-        <a:font script="Syrn" typeface="Estrangelo Edessa"/>
-        <a:font script="Syrj" typeface="Estrangelo Edessa"/>
-        <a:font script="Syre" typeface="Estrangelo Edessa"/>
-        <a:font script="Sora" typeface="Nirmala UI"/>
-        <a:font script="Tale" typeface="Microsoft Tai Le"/>
-        <a:font script="Talu" typeface="Microsoft New Tai Lue"/>
-        <a:font script="Tfng" typeface="Ebrima"/>
-      </a:majorFont>
-      <a:minorFont>
-        <a:latin typeface="Aptos" panose="02110004020202020204"/>
-        <a:ea typeface=""/>
-        <a:cs typeface=""/>
-        <a:font script="Jpan" typeface="游ゴシック"/>
-        <a:font script="Hang" typeface="맑은 고딕"/>
-        <a:font script="Hans" typeface="等线"/>
-        <a:font script="Hant" typeface="新細明體"/>
-        <a:font script="Arab" typeface="Arial"/>
-        <a:font script="Hebr" typeface="Arial"/>
-        <a:font script="Thai" typeface="Cordia New"/>
-        <a:font script="Ethi" typeface="Nyala"/>
-        <a:font script="Beng" typeface="Vrinda"/>
-        <a:font script="Gujr" typeface="Shruti"/>
-        <a:font script="Khmr" typeface="DaunPenh"/>
-        <a:font script="Knda" typeface="Tunga"/>
-        <a:font script="Guru" typeface="Raavi"/>
-        <a:font script="Cans" typeface="Euphemia"/>
-        <a:font script="Cher" typeface="Plantagenet Cherokee"/>
-        <a:font script="Yiii" typeface="Microsoft Yi Baiti"/>
-        <a:font script="Tibt" typeface="Microsoft Himalaya"/>
-        <a:font script="Thaa" typeface="MV Boli"/>
-        <a:font script="Deva" typeface="Mangal"/>
-        <a:font script="Telu" typeface="Gautami"/>
-        <a:font script="Taml" typeface="Latha"/>
-        <a:font script="Syrc" typeface="Estrangelo Edessa"/>
-        <a:font script="Orya" typeface="Kalinga"/>
-        <a:font script="Mlym" typeface="Kartika"/>
-        <a:font script="Laoo" typeface="DokChampa"/>
-        <a:font script="Sinh" typeface="Iskoola Pota"/>
-        <a:font script="Mong" typeface="Mongolian Baiti"/>
-        <a:font script="Viet" typeface="Arial"/>
-        <a:font script="Uigh" typeface="Microsoft Uighur"/>
-        <a:font script="Geor" typeface="Sylfaen"/>
-        <a:font script="Armn" typeface="Arial"/>
-        <a:font script="Bugi" typeface="Leelawadee UI"/>
-        <a:font script="Bopo" typeface="Microsoft JhengHei"/>
-        <a:font script="Java" typeface="Javanese Text"/>
-        <a:font script="Lisu" typeface="Segoe UI"/>
-        <a:font script="Mymr" typeface="Myanmar Text"/>
-        <a:font script="Nkoo" typeface="Ebrima"/>
-        <a:font script="Olck" typeface="Nirmala UI"/>
-        <a:font script="Osma" typeface="Ebrima"/>
-        <a:font script="Phag" typeface="Phagspa"/>
-        <a:font script="Syrn" typeface="Estrangelo Edessa"/>
-        <a:font script="Syrj" typeface="Estrangelo Edessa"/>
-        <a:font script="Syre" typeface="Estrangelo Edessa"/>
-        <a:font script="Sora" typeface="Nirmala UI"/>
-        <a:font script="Tale" typeface="Microsoft Tai Le"/>
-        <a:font script="Talu" typeface="Microsoft New Tai Lue"/>
-        <a:font script="Tfng" typeface="Ebrima"/>
-      </a:minorFont>
-    </a:fontScheme>
-    <a:fmtScheme name="Office">
-      <a:fillStyleLst>
-        <a:solidFill>
-          <a:schemeClr val="phClr"/>
-        </a:solidFill>
-        <a:gradFill rotWithShape="1">
-          <a:gsLst>
-            <a:gs pos="0">
-              <a:schemeClr val="phClr">
-                <a:lumMod val="110000"/>
-                <a:satMod val="105000"/>
-                <a:tint val="67000"/>
-              </a:schemeClr>
-            </a:gs>
-            <a:gs pos="50000">
-              <a:schemeClr val="phClr">
-                <a:lumMod val="105000"/>
-                <a:satMod val="103000"/>
-                <a:tint val="73000"/>
-              </a:schemeClr>
-            </a:gs>
-            <a:gs pos="100000">
-              <a:schemeClr val="phClr">
-                <a:lumMod val="105000"/>
-                <a:satMod val="109000"/>
-                <a:tint val="81000"/>
-              </a:schemeClr>
-            </a:gs>
-          </a:gsLst>
-          <a:lin ang="5400000" scaled="0"/>
-        </a:gradFill>
-        <a:gradFill rotWithShape="1">
-          <a:gsLst>
-            <a:gs pos="0">
-              <a:schemeClr val="phClr">
-                <a:satMod val="103000"/>
-                <a:lumMod val="102000"/>
-                <a:tint val="94000"/>
-              </a:schemeClr>
-            </a:gs>
-            <a:gs pos="50000">
-              <a:schemeClr val="phClr">
-                <a:satMod val="110000"/>
-                <a:lumMod val="100000"/>
-                <a:shade val="100000"/>
-              </a:schemeClr>
-            </a:gs>
-            <a:gs pos="100000">
-              <a:schemeClr val="phClr">
-                <a:lumMod val="99000"/>
-                <a:satMod val="120000"/>
-                <a:shade val="78000"/>
-              </a:schemeClr>
-            </a:gs>
-          </a:gsLst>
-          <a:lin ang="5400000" scaled="0"/>
-        </a:gradFill>
-      </a:fillStyleLst>
-      <a:lnStyleLst>
-        <a:ln w="12700" cap="flat" cmpd="sng" algn="ctr">
-          <a:solidFill>
-            <a:schemeClr val="phClr"/>
-          </a:solidFill>
-          <a:prstDash val="solid"/>
-          <a:miter lim="800000"/>
-        </a:ln>
-        <a:ln w="19050" cap="flat" cmpd="sng" algn="ctr">
-          <a:solidFill>
-            <a:schemeClr val="phClr"/>
-          </a:solidFill>
-          <a:prstDash val="solid"/>
-          <a:miter lim="800000"/>
-        </a:ln>
-        <a:ln w="25400" cap="flat" cmpd="sng" algn="ctr">
-          <a:solidFill>
-            <a:schemeClr val="phClr"/>
-          </a:solidFill>
-          <a:prstDash val="solid"/>
-          <a:miter lim="800000"/>
-        </a:ln>
-      </a:lnStyleLst>
-      <a:effectStyleLst>
-        <a:effectStyle>
-          <a:effectLst/>
-        </a:effectStyle>
-        <a:effectStyle>
-          <a:effectLst/>
-        </a:effectStyle>
-        <a:effectStyle>
-          <a:effectLst>
-            <a:outerShdw blurRad="57150" dist="19050" dir="5400000" algn="ctr" rotWithShape="0">
-              <a:srgbClr val="000000">
-                <a:alpha val="63000"/>
-              </a:srgbClr>
-            </a:outerShdw>
-          </a:effectLst>
-        </a:effectStyle>
-      </a:effectStyleLst>
-      <a:bgFillStyleLst>
-        <a:solidFill>
-          <a:schemeClr val="phClr"/>
-        </a:solidFill>
-        <a:solidFill>
-          <a:schemeClr val="phClr">
-            <a:tint val="95000"/>
-            <a:satMod val="170000"/>
-          </a:schemeClr>
-        </a:solidFill>
-        <a:gradFill rotWithShape="1">
-          <a:gsLst>
-            <a:gs pos="0">
-              <a:schemeClr val="phClr">
-                <a:tint val="93000"/>
-                <a:satMod val="150000"/>
-                <a:shade val="98000"/>
-                <a:lumMod val="102000"/>
-              </a:schemeClr>
-            </a:gs>
-            <a:gs pos="50000">
-              <a:schemeClr val="phClr">
-                <a:tint val="98000"/>
-                <a:satMod val="130000"/>
-                <a:shade val="90000"/>
-                <a:lumMod val="103000"/>
-              </a:schemeClr>
-            </a:gs>
-            <a:gs pos="100000">
-              <a:schemeClr val="phClr">
-                <a:shade val="63000"/>
-                <a:satMod val="120000"/>
-              </a:schemeClr>
-            </a:gs>
-          </a:gsLst>
-          <a:lin ang="5400000" scaled="0"/>
-        </a:gradFill>
-      </a:bgFillStyleLst>
-    </a:fmtScheme>
-  </a:themeElements>
-  <a:objectDefaults>
-    <a:lnDef>
-      <a:spPr/>
-      <a:bodyPr/>
-      <a:lstStyle/>
-      <a:style>
-        <a:lnRef idx="2">
-          <a:schemeClr val="accent1"/>
-        </a:lnRef>
-        <a:fillRef idx="0">
-          <a:schemeClr val="accent1"/>
-        </a:fillRef>
-        <a:effectRef idx="1">
-          <a:schemeClr val="accent1"/>
-        </a:effectRef>
-        <a:fontRef idx="minor">
-          <a:schemeClr val="tx1"/>
-        </a:fontRef>
-      </a:style>
-    </a:lnDef>
-  </a:objectDefaults>
-  <a:extraClrSchemeLst/>
-  <a:extLst>
-    <a:ext uri="{05A4C25C-085E-4340-85A3-A5531E510DB2}">
-      <thm15:themeFamily xmlns:thm15="http://schemas.microsoft.com/office/thememl/2012/main" name="Office Theme" id="{2E142A2C-CD16-42D6-873A-C26D2A0506FA}" vid="{1BDDFF52-6CD6-40A5-AB3C-68EB2F1E4D0A}"/>
-    </a:ext>
-  </a:extLst>
-</a:theme>
 </file>